--- a/Bases de Datos II/Clases/Clase 8 - Tuning y transacciones/Presentacion.pptx
+++ b/Bases de Datos II/Clases/Clase 8 - Tuning y transacciones/Presentacion.pptx
@@ -20,8 +20,6 @@
     <p:sldId id="268" r:id="rId19"/>
     <p:sldId id="269" r:id="rId20"/>
     <p:sldId id="270" r:id="rId21"/>
-    <p:sldId id="271" r:id="rId22"/>
-    <p:sldId id="272" r:id="rId23"/>
   </p:sldIdLst>
   <p:sldSz cx="12191695" cy="6858000" type="screen4x3"/>
   <p:notesSz cx="6858000" cy="9144000"/>
@@ -6112,1017 +6110,6 @@
         <p:spPr>
           <a:xfrm>
             <a:off x="0" y="0"/>
-            <a:ext cx="12191695" cy="1170432"/>
-          </a:xfrm>
-          <a:prstGeom prst="rect">
-            <a:avLst/>
-          </a:prstGeom>
-          <a:solidFill>
-            <a:srgbClr val="095292"/>
-          </a:solidFill>
-          <a:ln>
-            <a:noFill/>
-          </a:ln>
-        </p:spPr>
-        <p:style>
-          <a:lnRef idx="1">
-            <a:schemeClr val="accent1"/>
-          </a:lnRef>
-          <a:fillRef idx="3">
-            <a:schemeClr val="accent1"/>
-          </a:fillRef>
-          <a:effectRef idx="2">
-            <a:schemeClr val="accent1"/>
-          </a:effectRef>
-          <a:fontRef idx="minor">
-            <a:schemeClr val="lt1"/>
-          </a:fontRef>
-        </p:style>
-        <p:txBody>
-          <a:bodyPr rtlCol="0" anchor="ctr"/>
-          <a:lstStyle/>
-          <a:p>
-            <a:pPr algn="ctr"/>
-          </a:p>
-        </p:txBody>
-      </p:sp>
-      <p:sp>
-        <p:nvSpPr>
-          <p:cNvPr id="3" name="Rectangle 2"/>
-          <p:cNvSpPr/>
-          <p:nvPr/>
-        </p:nvSpPr>
-        <p:spPr>
-          <a:xfrm>
-            <a:off x="0" y="1170432"/>
-            <a:ext cx="12191695" cy="41148"/>
-          </a:xfrm>
-          <a:prstGeom prst="rect">
-            <a:avLst/>
-          </a:prstGeom>
-          <a:solidFill>
-            <a:srgbClr val="FFD000"/>
-          </a:solidFill>
-          <a:ln>
-            <a:noFill/>
-          </a:ln>
-        </p:spPr>
-        <p:style>
-          <a:lnRef idx="1">
-            <a:schemeClr val="accent1"/>
-          </a:lnRef>
-          <a:fillRef idx="3">
-            <a:schemeClr val="accent1"/>
-          </a:fillRef>
-          <a:effectRef idx="2">
-            <a:schemeClr val="accent1"/>
-          </a:effectRef>
-          <a:fontRef idx="minor">
-            <a:schemeClr val="lt1"/>
-          </a:fontRef>
-        </p:style>
-        <p:txBody>
-          <a:bodyPr rtlCol="0" anchor="ctr"/>
-          <a:lstStyle/>
-          <a:p>
-            <a:pPr algn="ctr"/>
-          </a:p>
-        </p:txBody>
-      </p:sp>
-      <p:sp>
-        <p:nvSpPr>
-          <p:cNvPr id="4" name="TextBox 3"/>
-          <p:cNvSpPr txBox="1"/>
-          <p:nvPr/>
-        </p:nvSpPr>
-        <p:spPr>
-          <a:xfrm>
-            <a:off x="457200" y="164592"/>
-            <a:ext cx="11277295" cy="384048"/>
-          </a:xfrm>
-          <a:prstGeom prst="rect">
-            <a:avLst/>
-          </a:prstGeom>
-          <a:noFill/>
-        </p:spPr>
-        <p:txBody>
-          <a:bodyPr wrap="square">
-            <a:spAutoFit/>
-          </a:bodyPr>
-          <a:lstStyle/>
-          <a:p>
-            <a:r>
-              <a:rPr sz="2600" b="1" i="0">
-                <a:solidFill>
-                  <a:srgbClr val="FFFFFF"/>
-                </a:solidFill>
-                <a:latin typeface="Calibri"/>
-              </a:rPr>
-              <a:t>Quiz rapido (cierre)</a:t>
-            </a:r>
-          </a:p>
-        </p:txBody>
-      </p:sp>
-      <p:sp>
-        <p:nvSpPr>
-          <p:cNvPr id="5" name="TextBox 4"/>
-          <p:cNvSpPr txBox="1"/>
-          <p:nvPr/>
-        </p:nvSpPr>
-        <p:spPr>
-          <a:xfrm>
-            <a:off x="457200" y="566928"/>
-            <a:ext cx="11277295" cy="411480"/>
-          </a:xfrm>
-          <a:prstGeom prst="rect">
-            <a:avLst/>
-          </a:prstGeom>
-          <a:noFill/>
-        </p:spPr>
-        <p:txBody>
-          <a:bodyPr wrap="square">
-            <a:spAutoFit/>
-          </a:bodyPr>
-          <a:lstStyle/>
-          <a:p>
-            <a:r>
-              <a:rPr sz="1400" b="0" i="0">
-                <a:solidFill>
-                  <a:srgbClr val="B8D8EE"/>
-                </a:solidFill>
-                <a:latin typeface="Calibri"/>
-              </a:rPr>
-              <a:t>Individual · 8–10 min</a:t>
-            </a:r>
-          </a:p>
-        </p:txBody>
-      </p:sp>
-      <p:sp>
-        <p:nvSpPr>
-          <p:cNvPr id="6" name="TextBox 5"/>
-          <p:cNvSpPr txBox="1"/>
-          <p:nvPr/>
-        </p:nvSpPr>
-        <p:spPr>
-          <a:xfrm>
-            <a:off x="457200" y="1380744"/>
-            <a:ext cx="11277295" cy="5020056"/>
-          </a:xfrm>
-          <a:prstGeom prst="rect">
-            <a:avLst/>
-          </a:prstGeom>
-          <a:noFill/>
-        </p:spPr>
-        <p:txBody>
-          <a:bodyPr wrap="square">
-            <a:spAutoFit/>
-          </a:bodyPr>
-          <a:lstStyle/>
-          <a:p>
-            <a:pPr>
-              <a:spcAft>
-                <a:spcPts val="800"/>
-              </a:spcAft>
-            </a:pPr>
-            <a:r>
-              <a:rPr sz="1200" b="1" i="0">
-                <a:solidFill>
-                  <a:srgbClr val="333333"/>
-                </a:solidFill>
-                <a:latin typeface="Calibri"/>
-              </a:rPr>
-              <a:t>1.</a:t>
-            </a:r>
-            <a:r>
-              <a:rPr sz="1200" b="0" i="0">
-                <a:solidFill>
-                  <a:srgbClr val="333333"/>
-                </a:solidFill>
-                <a:latin typeface="Calibri"/>
-              </a:rPr>
-              <a:t> COMMIT en la factura VetCare garantiza:</a:t>
-            </a:r>
-          </a:p>
-          <a:p>
-            <a:pPr>
-              <a:spcAft>
-                <a:spcPts val="800"/>
-              </a:spcAft>
-            </a:pPr>
-            <a:r>
-              <a:rPr sz="1200" b="0" i="0">
-                <a:solidFill>
-                  <a:srgbClr val="333333"/>
-                </a:solidFill>
-                <a:latin typeface="Calibri"/>
-              </a:rPr>
-              <a:t>–   ('A) Solo un SELECT', 1)</a:t>
-            </a:r>
-          </a:p>
-          <a:p>
-            <a:pPr>
-              <a:spcAft>
-                <a:spcPts val="800"/>
-              </a:spcAft>
-            </a:pPr>
-            <a:r>
-              <a:rPr sz="1200" b="0" i="0">
-                <a:solidFill>
-                  <a:srgbClr val="333333"/>
-                </a:solidFill>
-                <a:latin typeface="Calibri"/>
-              </a:rPr>
-              <a:t>–   ('B) Atomicidad: factura + detalle + stock juntos', 1)</a:t>
-            </a:r>
-          </a:p>
-          <a:p>
-            <a:pPr>
-              <a:spcAft>
-                <a:spcPts val="800"/>
-              </a:spcAft>
-            </a:pPr>
-            <a:r>
-              <a:rPr sz="1200" b="0" i="0">
-                <a:solidFill>
-                  <a:srgbClr val="333333"/>
-                </a:solidFill>
-                <a:latin typeface="Calibri"/>
-              </a:rPr>
-              <a:t>–   ('C) Borrar auditorías', 1)</a:t>
-            </a:r>
-          </a:p>
-          <a:p>
-            <a:pPr>
-              <a:spcAft>
-                <a:spcPts val="800"/>
-              </a:spcAft>
-            </a:pPr>
-            <a:r>
-              <a:rPr sz="1200" b="0" i="0">
-                <a:solidFill>
-                  <a:srgbClr val="333333"/>
-                </a:solidFill>
-                <a:latin typeface="Calibri"/>
-              </a:rPr>
-              <a:t>–   ('D) Ignorar stock', 1)</a:t>
-            </a:r>
-          </a:p>
-          <a:p>
-            <a:pPr>
-              <a:spcAft>
-                <a:spcPts val="800"/>
-              </a:spcAft>
-            </a:pPr>
-            <a:r>
-              <a:rPr sz="1200" b="0" i="0">
-                <a:solidFill>
-                  <a:srgbClr val="333333"/>
-                </a:solidFill>
-                <a:latin typeface="Calibri"/>
-              </a:rPr>
-              <a:t>–   </a:t>
-            </a:r>
-            <a:r>
-              <a:rPr sz="1200" b="1" i="0">
-                <a:solidFill>
-                  <a:srgbClr val="333333"/>
-                </a:solidFill>
-                <a:latin typeface="Calibri"/>
-              </a:rPr>
-              <a:t>2.</a:t>
-            </a:r>
-            <a:r>
-              <a:rPr sz="1200" b="0" i="0">
-                <a:solidFill>
-                  <a:srgbClr val="333333"/>
-                </a:solidFill>
-                <a:latin typeface="Calibri"/>
-              </a:rPr>
-              <a:t> Si falta stock, ROLLBACK debe:</a:t>
-            </a:r>
-          </a:p>
-          <a:p>
-            <a:pPr>
-              <a:spcAft>
-                <a:spcPts val="800"/>
-              </a:spcAft>
-            </a:pPr>
-            <a:r>
-              <a:rPr sz="1200" b="0" i="0">
-                <a:solidFill>
-                  <a:srgbClr val="333333"/>
-                </a:solidFill>
-                <a:latin typeface="Calibri"/>
-              </a:rPr>
-              <a:t>–   ('A) Dejar la factura a medias', 1)</a:t>
-            </a:r>
-          </a:p>
-          <a:p>
-            <a:pPr>
-              <a:spcAft>
-                <a:spcPts val="800"/>
-              </a:spcAft>
-            </a:pPr>
-            <a:r>
-              <a:rPr sz="1200" b="0" i="0">
-                <a:solidFill>
-                  <a:srgbClr val="333333"/>
-                </a:solidFill>
-                <a:latin typeface="Calibri"/>
-              </a:rPr>
-              <a:t>–   ('B) Deshacer cambios parciales y conservar consistencia', 1)</a:t>
-            </a:r>
-          </a:p>
-          <a:p>
-            <a:pPr>
-              <a:spcAft>
-                <a:spcPts val="800"/>
-              </a:spcAft>
-            </a:pPr>
-            <a:r>
-              <a:rPr sz="1200" b="0" i="0">
-                <a:solidFill>
-                  <a:srgbClr val="333333"/>
-                </a:solidFill>
-                <a:latin typeface="Calibri"/>
-              </a:rPr>
-              <a:t>–   ('C) Negar el stock a -100', 1)</a:t>
-            </a:r>
-          </a:p>
-          <a:p>
-            <a:pPr>
-              <a:spcAft>
-                <a:spcPts val="800"/>
-              </a:spcAft>
-            </a:pPr>
-            <a:r>
-              <a:rPr sz="1200" b="0" i="0">
-                <a:solidFill>
-                  <a:srgbClr val="333333"/>
-                </a:solidFill>
-                <a:latin typeface="Calibri"/>
-              </a:rPr>
-              <a:t>–   ('D) Borrar dueños', 1)</a:t>
-            </a:r>
-          </a:p>
-          <a:p>
-            <a:pPr>
-              <a:spcAft>
-                <a:spcPts val="800"/>
-              </a:spcAft>
-            </a:pPr>
-            <a:r>
-              <a:rPr sz="1200" b="0" i="0">
-                <a:solidFill>
-                  <a:srgbClr val="333333"/>
-                </a:solidFill>
-                <a:latin typeface="Calibri"/>
-              </a:rPr>
-              <a:t>–   </a:t>
-            </a:r>
-            <a:r>
-              <a:rPr sz="1200" b="1" i="0">
-                <a:solidFill>
-                  <a:srgbClr val="333333"/>
-                </a:solidFill>
-                <a:latin typeface="Calibri"/>
-              </a:rPr>
-              <a:t>3.</a:t>
-            </a:r>
-            <a:r>
-              <a:rPr sz="1200" b="0" i="0">
-                <a:solidFill>
-                  <a:srgbClr val="333333"/>
-                </a:solidFill>
-                <a:latin typeface="Calibri"/>
-              </a:rPr>
-              <a:t> Transacciones cortas reducen bloqueos y problemas de concurrencia.</a:t>
-            </a:r>
-          </a:p>
-          <a:p>
-            <a:pPr>
-              <a:spcAft>
-                <a:spcPts val="800"/>
-              </a:spcAft>
-            </a:pPr>
-            <a:r>
-              <a:rPr sz="1200" b="0" i="0">
-                <a:solidFill>
-                  <a:srgbClr val="333333"/>
-                </a:solidFill>
-                <a:latin typeface="Calibri"/>
-              </a:rPr>
-              <a:t>–   ('( ) Verdadero    ( ) Falso', 1)</a:t>
-            </a:r>
-          </a:p>
-          <a:p>
-            <a:pPr>
-              <a:spcAft>
-                <a:spcPts val="800"/>
-              </a:spcAft>
-            </a:pPr>
-            <a:r>
-              <a:rPr sz="1200" b="0" i="0">
-                <a:solidFill>
-                  <a:srgbClr val="333333"/>
-                </a:solidFill>
-                <a:latin typeface="Calibri"/>
-              </a:rPr>
-              <a:t>–   </a:t>
-            </a:r>
-            <a:r>
-              <a:rPr sz="1200" b="1" i="0">
-                <a:solidFill>
-                  <a:srgbClr val="333333"/>
-                </a:solidFill>
-                <a:latin typeface="Calibri"/>
-              </a:rPr>
-              <a:t>4.</a:t>
-            </a:r>
-            <a:r>
-              <a:rPr sz="1200" b="0" i="0">
-                <a:solidFill>
-                  <a:srgbClr val="333333"/>
-                </a:solidFill>
-                <a:latin typeface="Calibri"/>
-              </a:rPr>
-              <a:t> Es aceptable hacer la factura en la app con tres commits independientes sin control.</a:t>
-            </a:r>
-          </a:p>
-          <a:p>
-            <a:pPr>
-              <a:spcAft>
-                <a:spcPts val="800"/>
-              </a:spcAft>
-            </a:pPr>
-            <a:r>
-              <a:rPr sz="1200" b="0" i="0">
-                <a:solidFill>
-                  <a:srgbClr val="333333"/>
-                </a:solidFill>
-                <a:latin typeface="Calibri"/>
-              </a:rPr>
-              <a:t>–   ('( ) Verdadero    ( ) Falso', 1)</a:t>
-            </a:r>
-          </a:p>
-        </p:txBody>
-      </p:sp>
-      <p:sp>
-        <p:nvSpPr>
-          <p:cNvPr id="7" name="TextBox 6"/>
-          <p:cNvSpPr txBox="1"/>
-          <p:nvPr/>
-        </p:nvSpPr>
-        <p:spPr>
-          <a:xfrm>
-            <a:off x="11185855" y="6473952"/>
-            <a:ext cx="640080" cy="274320"/>
-          </a:xfrm>
-          <a:prstGeom prst="rect">
-            <a:avLst/>
-          </a:prstGeom>
-          <a:noFill/>
-        </p:spPr>
-        <p:txBody>
-          <a:bodyPr wrap="square">
-            <a:spAutoFit/>
-          </a:bodyPr>
-          <a:lstStyle/>
-          <a:p>
-            <a:pPr algn="r"/>
-            <a:r>
-              <a:rPr sz="1100" b="0" i="0">
-                <a:solidFill>
-                  <a:srgbClr val="666666"/>
-                </a:solidFill>
-                <a:latin typeface="Calibri"/>
-              </a:rPr>
-              <a:t>15</a:t>
-            </a:r>
-          </a:p>
-        </p:txBody>
-      </p:sp>
-    </p:spTree>
-  </p:cSld>
-  <p:clrMapOvr>
-    <a:masterClrMapping/>
-  </p:clrMapOvr>
-</p:sld>
-</file>
-
-<file path=ppt/slides/slide16.xml><?xml version="1.0" encoding="utf-8"?>
-<p:sld xmlns:a="http://schemas.openxmlformats.org/drawingml/2006/main" xmlns:p="http://schemas.openxmlformats.org/presentationml/2006/main" xmlns:r="http://schemas.openxmlformats.org/officeDocument/2006/relationships">
-  <p:cSld>
-    <p:bg>
-      <p:bgPr>
-        <a:solidFill>
-          <a:srgbClr val="FFFFFF"/>
-        </a:solidFill>
-        <a:effectLst/>
-      </p:bgPr>
-    </p:bg>
-    <p:spTree>
-      <p:nvGrpSpPr>
-        <p:cNvPr id="1" name=""/>
-        <p:cNvGrpSpPr/>
-        <p:nvPr/>
-      </p:nvGrpSpPr>
-      <p:grpSpPr/>
-      <p:sp>
-        <p:nvSpPr>
-          <p:cNvPr id="2" name="Rectangle 1"/>
-          <p:cNvSpPr/>
-          <p:nvPr/>
-        </p:nvSpPr>
-        <p:spPr>
-          <a:xfrm>
-            <a:off x="0" y="0"/>
-            <a:ext cx="12191695" cy="1170432"/>
-          </a:xfrm>
-          <a:prstGeom prst="rect">
-            <a:avLst/>
-          </a:prstGeom>
-          <a:solidFill>
-            <a:srgbClr val="095292"/>
-          </a:solidFill>
-          <a:ln>
-            <a:noFill/>
-          </a:ln>
-        </p:spPr>
-        <p:style>
-          <a:lnRef idx="1">
-            <a:schemeClr val="accent1"/>
-          </a:lnRef>
-          <a:fillRef idx="3">
-            <a:schemeClr val="accent1"/>
-          </a:fillRef>
-          <a:effectRef idx="2">
-            <a:schemeClr val="accent1"/>
-          </a:effectRef>
-          <a:fontRef idx="minor">
-            <a:schemeClr val="lt1"/>
-          </a:fontRef>
-        </p:style>
-        <p:txBody>
-          <a:bodyPr rtlCol="0" anchor="ctr"/>
-          <a:lstStyle/>
-          <a:p>
-            <a:pPr algn="ctr"/>
-          </a:p>
-        </p:txBody>
-      </p:sp>
-      <p:sp>
-        <p:nvSpPr>
-          <p:cNvPr id="3" name="Rectangle 2"/>
-          <p:cNvSpPr/>
-          <p:nvPr/>
-        </p:nvSpPr>
-        <p:spPr>
-          <a:xfrm>
-            <a:off x="0" y="1170432"/>
-            <a:ext cx="12191695" cy="41148"/>
-          </a:xfrm>
-          <a:prstGeom prst="rect">
-            <a:avLst/>
-          </a:prstGeom>
-          <a:solidFill>
-            <a:srgbClr val="FFD000"/>
-          </a:solidFill>
-          <a:ln>
-            <a:noFill/>
-          </a:ln>
-        </p:spPr>
-        <p:style>
-          <a:lnRef idx="1">
-            <a:schemeClr val="accent1"/>
-          </a:lnRef>
-          <a:fillRef idx="3">
-            <a:schemeClr val="accent1"/>
-          </a:fillRef>
-          <a:effectRef idx="2">
-            <a:schemeClr val="accent1"/>
-          </a:effectRef>
-          <a:fontRef idx="minor">
-            <a:schemeClr val="lt1"/>
-          </a:fontRef>
-        </p:style>
-        <p:txBody>
-          <a:bodyPr rtlCol="0" anchor="ctr"/>
-          <a:lstStyle/>
-          <a:p>
-            <a:pPr algn="ctr"/>
-          </a:p>
-        </p:txBody>
-      </p:sp>
-      <p:sp>
-        <p:nvSpPr>
-          <p:cNvPr id="4" name="TextBox 3"/>
-          <p:cNvSpPr txBox="1"/>
-          <p:nvPr/>
-        </p:nvSpPr>
-        <p:spPr>
-          <a:xfrm>
-            <a:off x="457200" y="164592"/>
-            <a:ext cx="11277295" cy="384048"/>
-          </a:xfrm>
-          <a:prstGeom prst="rect">
-            <a:avLst/>
-          </a:prstGeom>
-          <a:noFill/>
-        </p:spPr>
-        <p:txBody>
-          <a:bodyPr wrap="square">
-            <a:spAutoFit/>
-          </a:bodyPr>
-          <a:lstStyle/>
-          <a:p>
-            <a:r>
-              <a:rPr sz="2600" b="1" i="0">
-                <a:solidFill>
-                  <a:srgbClr val="FFFFFF"/>
-                </a:solidFill>
-                <a:latin typeface="Calibri"/>
-              </a:rPr>
-              <a:t>Quiz rapido (cierre) · cont. 2</a:t>
-            </a:r>
-          </a:p>
-        </p:txBody>
-      </p:sp>
-      <p:sp>
-        <p:nvSpPr>
-          <p:cNvPr id="5" name="TextBox 4"/>
-          <p:cNvSpPr txBox="1"/>
-          <p:nvPr/>
-        </p:nvSpPr>
-        <p:spPr>
-          <a:xfrm>
-            <a:off x="457200" y="566928"/>
-            <a:ext cx="11277295" cy="411480"/>
-          </a:xfrm>
-          <a:prstGeom prst="rect">
-            <a:avLst/>
-          </a:prstGeom>
-          <a:noFill/>
-        </p:spPr>
-        <p:txBody>
-          <a:bodyPr wrap="square">
-            <a:spAutoFit/>
-          </a:bodyPr>
-          <a:lstStyle/>
-          <a:p>
-            <a:r>
-              <a:rPr sz="1400" b="0" i="0">
-                <a:solidFill>
-                  <a:srgbClr val="B8D8EE"/>
-                </a:solidFill>
-                <a:latin typeface="Calibri"/>
-              </a:rPr>
-              <a:t>Individual · 8–10 min</a:t>
-            </a:r>
-          </a:p>
-        </p:txBody>
-      </p:sp>
-      <p:sp>
-        <p:nvSpPr>
-          <p:cNvPr id="6" name="TextBox 5"/>
-          <p:cNvSpPr txBox="1"/>
-          <p:nvPr/>
-        </p:nvSpPr>
-        <p:spPr>
-          <a:xfrm>
-            <a:off x="457200" y="1380744"/>
-            <a:ext cx="11277295" cy="5020056"/>
-          </a:xfrm>
-          <a:prstGeom prst="rect">
-            <a:avLst/>
-          </a:prstGeom>
-          <a:noFill/>
-        </p:spPr>
-        <p:txBody>
-          <a:bodyPr wrap="square">
-            <a:spAutoFit/>
-          </a:bodyPr>
-          <a:lstStyle/>
-          <a:p>
-            <a:pPr>
-              <a:spcAft>
-                <a:spcPts val="800"/>
-              </a:spcAft>
-            </a:pPr>
-            <a:r>
-              <a:rPr sz="1200" b="0" i="0">
-                <a:solidFill>
-                  <a:srgbClr val="333333"/>
-                </a:solidFill>
-                <a:latin typeface="Calibri"/>
-              </a:rPr>
-              <a:t>–   </a:t>
-            </a:r>
-            <a:r>
-              <a:rPr sz="1200" b="1" i="0">
-                <a:solidFill>
-                  <a:srgbClr val="333333"/>
-                </a:solidFill>
-                <a:latin typeface="Calibri"/>
-              </a:rPr>
-              <a:t>5.</a:t>
-            </a:r>
-            <a:r>
-              <a:rPr sz="1200" b="0" i="0">
-                <a:solidFill>
-                  <a:srgbClr val="333333"/>
-                </a:solidFill>
-                <a:latin typeface="Calibri"/>
-              </a:rPr>
-              <a:t> Propiedad ACID más visible al facturar + descontar insumo:</a:t>
-            </a:r>
-          </a:p>
-          <a:p>
-            <a:pPr>
-              <a:spcAft>
-                <a:spcPts val="800"/>
-              </a:spcAft>
-            </a:pPr>
-            <a:r>
-              <a:rPr sz="1200" b="0" i="0">
-                <a:solidFill>
-                  <a:srgbClr val="333333"/>
-                </a:solidFill>
-                <a:latin typeface="Calibri"/>
-              </a:rPr>
-              <a:t>–   ('A) Atomicidad', 1)</a:t>
-            </a:r>
-          </a:p>
-          <a:p>
-            <a:pPr>
-              <a:spcAft>
-                <a:spcPts val="800"/>
-              </a:spcAft>
-            </a:pPr>
-            <a:r>
-              <a:rPr sz="1200" b="0" i="0">
-                <a:solidFill>
-                  <a:srgbClr val="333333"/>
-                </a:solidFill>
-                <a:latin typeface="Calibri"/>
-              </a:rPr>
-              <a:t>–   ('B) Tipografía', 1)</a:t>
-            </a:r>
-          </a:p>
-          <a:p>
-            <a:pPr>
-              <a:spcAft>
-                <a:spcPts val="800"/>
-              </a:spcAft>
-            </a:pPr>
-            <a:r>
-              <a:rPr sz="1200" b="0" i="0">
-                <a:solidFill>
-                  <a:srgbClr val="333333"/>
-                </a:solidFill>
-                <a:latin typeface="Calibri"/>
-              </a:rPr>
-              <a:t>–   ('C) Color del ER', 1)</a:t>
-            </a:r>
-          </a:p>
-          <a:p>
-            <a:pPr>
-              <a:spcAft>
-                <a:spcPts val="800"/>
-              </a:spcAft>
-            </a:pPr>
-            <a:r>
-              <a:rPr sz="1200" b="0" i="0">
-                <a:solidFill>
-                  <a:srgbClr val="333333"/>
-                </a:solidFill>
-                <a:latin typeface="Calibri"/>
-              </a:rPr>
-              <a:t>–   ('D) Nombre del repo', 1)</a:t>
-            </a:r>
-          </a:p>
-          <a:p>
-            <a:pPr>
-              <a:spcAft>
-                <a:spcPts val="800"/>
-              </a:spcAft>
-            </a:pPr>
-            <a:r>
-              <a:rPr sz="1200" b="0" i="0">
-                <a:solidFill>
-                  <a:srgbClr val="333333"/>
-                </a:solidFill>
-                <a:latin typeface="Calibri"/>
-              </a:rPr>
-              <a:t>–   </a:t>
-            </a:r>
-            <a:r>
-              <a:rPr sz="1200" b="1" i="0">
-                <a:solidFill>
-                  <a:srgbClr val="333333"/>
-                </a:solidFill>
-                <a:latin typeface="Calibri"/>
-              </a:rPr>
-              <a:t>6.</a:t>
-            </a:r>
-            <a:r>
-              <a:rPr sz="1200" b="0" i="0">
-                <a:solidFill>
-                  <a:srgbClr val="333333"/>
-                </a:solidFill>
-                <a:latin typeface="Calibri"/>
-              </a:rPr>
-              <a:t> Un script demo con BEGIN/COMMIT/ROLLBACK es evidencia válida del hito de transacciones.</a:t>
-            </a:r>
-          </a:p>
-          <a:p>
-            <a:pPr>
-              <a:spcAft>
-                <a:spcPts val="800"/>
-              </a:spcAft>
-            </a:pPr>
-            <a:r>
-              <a:rPr sz="1200" b="0" i="0">
-                <a:solidFill>
-                  <a:srgbClr val="333333"/>
-                </a:solidFill>
-                <a:latin typeface="Calibri"/>
-              </a:rPr>
-              <a:t>–   ('( ) Verdadero    ( ) Falso', 1)</a:t>
-            </a:r>
-          </a:p>
-          <a:p>
-            <a:pPr>
-              <a:spcAft>
-                <a:spcPts val="800"/>
-              </a:spcAft>
-            </a:pPr>
-            <a:r>
-              <a:rPr sz="1200" b="0" i="0">
-                <a:solidFill>
-                  <a:srgbClr val="333333"/>
-                </a:solidFill>
-                <a:latin typeface="Calibri"/>
-              </a:rPr>
-              <a:t>–   </a:t>
-            </a:r>
-            <a:r>
-              <a:rPr sz="1200" b="1" i="0">
-                <a:solidFill>
-                  <a:srgbClr val="333333"/>
-                </a:solidFill>
-                <a:latin typeface="Calibri"/>
-              </a:rPr>
-              <a:t>7.</a:t>
-            </a:r>
-            <a:r>
-              <a:rPr sz="1200" b="0" i="0">
-                <a:solidFill>
-                  <a:srgbClr val="333333"/>
-                </a:solidFill>
-                <a:latin typeface="Calibri"/>
-              </a:rPr>
-              <a:t> Liste los 3 pasos atómicos de su caso de facturación VetCare.</a:t>
-            </a:r>
-          </a:p>
-          <a:p>
-            <a:pPr>
-              <a:spcAft>
-                <a:spcPts val="800"/>
-              </a:spcAft>
-            </a:pPr>
-            <a:r>
-              <a:rPr sz="1200" b="0" i="0">
-                <a:solidFill>
-                  <a:srgbClr val="333333"/>
-                </a:solidFill>
-                <a:latin typeface="Calibri"/>
-              </a:rPr>
-              <a:t>–   ('Respuesta corta: ____________________________', 1)</a:t>
-            </a:r>
-          </a:p>
-          <a:p>
-            <a:pPr>
-              <a:spcAft>
-                <a:spcPts val="800"/>
-              </a:spcAft>
-            </a:pPr>
-            <a:r>
-              <a:rPr sz="1200" b="0" i="0">
-                <a:solidFill>
-                  <a:srgbClr val="333333"/>
-                </a:solidFill>
-                <a:latin typeface="Calibri"/>
-              </a:rPr>
-              <a:t>–   </a:t>
-            </a:r>
-            <a:r>
-              <a:rPr sz="1200" b="1" i="0">
-                <a:solidFill>
-                  <a:srgbClr val="333333"/>
-                </a:solidFill>
-                <a:latin typeface="Calibri"/>
-              </a:rPr>
-              <a:t>8.</a:t>
-            </a:r>
-            <a:r>
-              <a:rPr sz="1200" b="0" i="0">
-                <a:solidFill>
-                  <a:srgbClr val="333333"/>
-                </a:solidFill>
-                <a:latin typeface="Calibri"/>
-              </a:rPr>
-              <a:t> Describa la prueba de fallo (falta stock) y el estado final esperado.</a:t>
-            </a:r>
-          </a:p>
-          <a:p>
-            <a:pPr>
-              <a:spcAft>
-                <a:spcPts val="800"/>
-              </a:spcAft>
-            </a:pPr>
-            <a:r>
-              <a:rPr sz="1200" b="0" i="0">
-                <a:solidFill>
-                  <a:srgbClr val="333333"/>
-                </a:solidFill>
-                <a:latin typeface="Calibri"/>
-              </a:rPr>
-              <a:t>–   ('Respuesta corta: ____________________________', 1)</a:t>
-            </a:r>
-          </a:p>
-        </p:txBody>
-      </p:sp>
-      <p:sp>
-        <p:nvSpPr>
-          <p:cNvPr id="7" name="TextBox 6"/>
-          <p:cNvSpPr txBox="1"/>
-          <p:nvPr/>
-        </p:nvSpPr>
-        <p:spPr>
-          <a:xfrm>
-            <a:off x="11185855" y="6473952"/>
-            <a:ext cx="640080" cy="274320"/>
-          </a:xfrm>
-          <a:prstGeom prst="rect">
-            <a:avLst/>
-          </a:prstGeom>
-          <a:noFill/>
-        </p:spPr>
-        <p:txBody>
-          <a:bodyPr wrap="square">
-            <a:spAutoFit/>
-          </a:bodyPr>
-          <a:lstStyle/>
-          <a:p>
-            <a:pPr algn="r"/>
-            <a:r>
-              <a:rPr sz="1100" b="0" i="0">
-                <a:solidFill>
-                  <a:srgbClr val="666666"/>
-                </a:solidFill>
-                <a:latin typeface="Calibri"/>
-              </a:rPr>
-              <a:t>16</a:t>
-            </a:r>
-          </a:p>
-        </p:txBody>
-      </p:sp>
-    </p:spTree>
-  </p:cSld>
-  <p:clrMapOvr>
-    <a:masterClrMapping/>
-  </p:clrMapOvr>
-</p:sld>
-</file>
-
-<file path=ppt/slides/slide17.xml><?xml version="1.0" encoding="utf-8"?>
-<p:sld xmlns:a="http://schemas.openxmlformats.org/drawingml/2006/main" xmlns:p="http://schemas.openxmlformats.org/presentationml/2006/main" xmlns:r="http://schemas.openxmlformats.org/officeDocument/2006/relationships">
-  <p:cSld>
-    <p:bg>
-      <p:bgPr>
-        <a:solidFill>
-          <a:srgbClr val="FFFFFF"/>
-        </a:solidFill>
-        <a:effectLst/>
-      </p:bgPr>
-    </p:bg>
-    <p:spTree>
-      <p:nvGrpSpPr>
-        <p:cNvPr id="1" name=""/>
-        <p:cNvGrpSpPr/>
-        <p:nvPr/>
-      </p:nvGrpSpPr>
-      <p:grpSpPr/>
-      <p:sp>
-        <p:nvSpPr>
-          <p:cNvPr id="2" name="Rectangle 1"/>
-          <p:cNvSpPr/>
-          <p:nvPr/>
-        </p:nvSpPr>
-        <p:spPr>
-          <a:xfrm>
-            <a:off x="0" y="0"/>
             <a:ext cx="12191695" cy="164592"/>
           </a:xfrm>
           <a:prstGeom prst="rect">
@@ -8451,7 +7438,7 @@
                 </a:solidFill>
                 <a:latin typeface="Calibri"/>
               </a:rPr>
-              <a:t>Criterios · quiz/cierre · duda PI</a:t>
+              <a:t>Criterios de exito · cierre · dudas del PI</a:t>
             </a:r>
           </a:p>
         </p:txBody>

--- a/Bases de Datos II/Clases/Clase 8 - Tuning y transacciones/Presentacion.pptx
+++ b/Bases de Datos II/Clases/Clase 8 - Tuning y transacciones/Presentacion.pptx
@@ -5440,7 +5440,7 @@
                 </a:solidFill>
                 <a:latin typeface="Calibri"/>
               </a:rPr>
-              <a:t> (Talleres) — domingo 23:59 cuando aplique taller.</a:t>
+              <a:t> (https://examlab.lovable.app/) — domingo 23:59 cuando aplique taller.</a:t>
             </a:r>
           </a:p>
         </p:txBody>
@@ -6035,7 +6035,7 @@
                 </a:solidFill>
                 <a:latin typeface="Calibri"/>
               </a:rPr>
-              <a:t>Taller de la semana en ExamLab: domingo 23:59 (regla del Acuerdo) cuando aplique.</a:t>
+              <a:t>Taller de la semana en ExamLab (https://examlab.lovable.app/): domingo 23:59 (regla del Acuerdo) cuando aplique.</a:t>
             </a:r>
           </a:p>
         </p:txBody>

--- a/Bases de Datos II/Clases/Clase 8 - Tuning y transacciones/Presentacion.pptx
+++ b/Bases de Datos II/Clases/Clase 8 - Tuning y transacciones/Presentacion.pptx
@@ -7776,22 +7776,6 @@
                 <a:latin typeface="Calibri"/>
               </a:rPr>
               <a:t>–   Tuning en este contexto no es magia, son habitos concretos: mantener estadisticas del optimizador…</a:t>
-            </a:r>
-          </a:p>
-          <a:p>
-            <a:pPr>
-              <a:spcAft>
-                <a:spcPts val="800"/>
-              </a:spcAft>
-            </a:pPr>
-            <a:r>
-              <a:rPr sz="1500" b="0" i="0">
-                <a:solidFill>
-                  <a:srgbClr val="333333"/>
-                </a:solidFill>
-                <a:latin typeface="Calibri"/>
-              </a:rPr>
-              <a:t>–   Error de docente que no domina el tema: envolver TODA la sesion de trabajo en una sola transaccion gigante…</a:t>
             </a:r>
           </a:p>
         </p:txBody>

--- a/Bases de Datos II/Clases/Clase 8 - Tuning y transacciones/Presentacion.pptx
+++ b/Bases de Datos II/Clases/Clase 8 - Tuning y transacciones/Presentacion.pptx
@@ -5390,7 +5390,7 @@
                 </a:solidFill>
                 <a:latin typeface="Calibri"/>
               </a:rPr>
-              <a:t>–   Evidencia en playground (enlace) o archivo SQL/PNG del equipo.</a:t>
+              <a:t>–   Evidencia en playground (enlace) o archivo SQL/PNG propio.</a:t>
             </a:r>
           </a:p>
           <a:p>
@@ -6639,7 +6639,7 @@
                 </a:solidFill>
                 <a:latin typeface="Calibri"/>
               </a:rPr>
-              <a:t>–   Al salir: avance concreto en el paquete VetCare del equipo.</a:t>
+              <a:t>–   Al salir: avance concreto en su paquete VetCare.</a:t>
             </a:r>
           </a:p>
         </p:txBody>
@@ -8566,7 +8566,7 @@
                 </a:solidFill>
                 <a:latin typeface="Calibri"/>
               </a:rPr>
-              <a:t>–   Al final de la demo: dejar enlace/script compartible al equipo.</a:t>
+              <a:t>–   Al final de la demo: dejar enlace/script compartible al grupo.</a:t>
             </a:r>
           </a:p>
         </p:txBody>

--- a/Bases de Datos II/Clases/Clase 8 - Tuning y transacciones/Presentacion.pptx
+++ b/Bases de Datos II/Clases/Clase 8 - Tuning y transacciones/Presentacion.pptx
@@ -5440,7 +5440,7 @@
                 </a:solidFill>
                 <a:latin typeface="Calibri"/>
               </a:rPr>
-              <a:t> (https://examlab.lovable.app/) — domingo 23:59 cuando aplique taller.</a:t>
+              <a:t> (https://uniaj.examlab.workers.dev/) — domingo 23:59 cuando aplique taller.</a:t>
             </a:r>
           </a:p>
         </p:txBody>
@@ -6035,7 +6035,7 @@
                 </a:solidFill>
                 <a:latin typeface="Calibri"/>
               </a:rPr>
-              <a:t>Taller de la semana en ExamLab (https://examlab.lovable.app/): domingo 23:59 (regla del Acuerdo) cuando aplique.</a:t>
+              <a:t>Taller de la semana en ExamLab (https://uniaj.examlab.workers.dev/): domingo 23:59 (regla del Acuerdo) cuando aplique.</a:t>
             </a:r>
           </a:p>
         </p:txBody>

--- a/Bases de Datos II/Clases/Clase 8 - Tuning y transacciones/Presentacion.pptx
+++ b/Bases de Datos II/Clases/Clase 8 - Tuning y transacciones/Presentacion.pptx
@@ -3853,8 +3853,8 @@
         </p:nvSpPr>
         <p:spPr>
           <a:xfrm>
-            <a:off x="457200" y="1234440"/>
-            <a:ext cx="11277295" cy="777240"/>
+            <a:off x="457200" y="1554480"/>
+            <a:ext cx="11277295" cy="1051560"/>
           </a:xfrm>
           <a:prstGeom prst="roundRect">
             <a:avLst>
@@ -3898,7 +3898,7 @@
         </p:nvSpPr>
         <p:spPr>
           <a:xfrm>
-            <a:off x="594360" y="1403604"/>
+            <a:off x="594360" y="1860804"/>
             <a:ext cx="438912" cy="438912"/>
           </a:xfrm>
           <a:prstGeom prst="roundRect">
@@ -3943,7 +3943,7 @@
         </p:nvSpPr>
         <p:spPr>
           <a:xfrm>
-            <a:off x="594360" y="1403604"/>
+            <a:off x="594360" y="1860804"/>
             <a:ext cx="438912" cy="438912"/>
           </a:xfrm>
           <a:prstGeom prst="rect">
@@ -3976,8 +3976,8 @@
         </p:nvSpPr>
         <p:spPr>
           <a:xfrm>
-            <a:off x="1188720" y="1325880"/>
-            <a:ext cx="10271455" cy="612647"/>
+            <a:off x="1188720" y="1645920"/>
+            <a:ext cx="10271455" cy="886968"/>
           </a:xfrm>
           <a:prstGeom prst="rect">
             <a:avLst/>
@@ -4008,8 +4008,8 @@
         </p:nvSpPr>
         <p:spPr>
           <a:xfrm>
-            <a:off x="457200" y="2103120"/>
-            <a:ext cx="11277295" cy="777240"/>
+            <a:off x="457200" y="2697480"/>
+            <a:ext cx="11277295" cy="1051560"/>
           </a:xfrm>
           <a:prstGeom prst="roundRect">
             <a:avLst>
@@ -4053,7 +4053,7 @@
         </p:nvSpPr>
         <p:spPr>
           <a:xfrm>
-            <a:off x="594360" y="2272284"/>
+            <a:off x="594360" y="3003804"/>
             <a:ext cx="438912" cy="438912"/>
           </a:xfrm>
           <a:prstGeom prst="roundRect">
@@ -4098,7 +4098,7 @@
         </p:nvSpPr>
         <p:spPr>
           <a:xfrm>
-            <a:off x="594360" y="2272284"/>
+            <a:off x="594360" y="3003804"/>
             <a:ext cx="438912" cy="438912"/>
           </a:xfrm>
           <a:prstGeom prst="rect">
@@ -4131,8 +4131,8 @@
         </p:nvSpPr>
         <p:spPr>
           <a:xfrm>
-            <a:off x="1188720" y="2194560"/>
-            <a:ext cx="10271455" cy="612647"/>
+            <a:off x="1188720" y="2788920"/>
+            <a:ext cx="10271455" cy="886968"/>
           </a:xfrm>
           <a:prstGeom prst="rect">
             <a:avLst/>
@@ -4163,8 +4163,8 @@
         </p:nvSpPr>
         <p:spPr>
           <a:xfrm>
-            <a:off x="457200" y="2971800"/>
-            <a:ext cx="11277295" cy="777240"/>
+            <a:off x="457200" y="3840480"/>
+            <a:ext cx="11277295" cy="1051560"/>
           </a:xfrm>
           <a:prstGeom prst="roundRect">
             <a:avLst>
@@ -4208,7 +4208,7 @@
         </p:nvSpPr>
         <p:spPr>
           <a:xfrm>
-            <a:off x="594360" y="3140964"/>
+            <a:off x="594360" y="4146804"/>
             <a:ext cx="438912" cy="438912"/>
           </a:xfrm>
           <a:prstGeom prst="roundRect">
@@ -4253,7 +4253,7 @@
         </p:nvSpPr>
         <p:spPr>
           <a:xfrm>
-            <a:off x="594360" y="3140964"/>
+            <a:off x="594360" y="4146804"/>
             <a:ext cx="438912" cy="438912"/>
           </a:xfrm>
           <a:prstGeom prst="rect">
@@ -4286,8 +4286,8 @@
         </p:nvSpPr>
         <p:spPr>
           <a:xfrm>
-            <a:off x="1188720" y="3063240"/>
-            <a:ext cx="10271455" cy="612647"/>
+            <a:off x="1188720" y="3931920"/>
+            <a:ext cx="10271455" cy="886968"/>
           </a:xfrm>
           <a:prstGeom prst="rect">
             <a:avLst/>
@@ -4318,8 +4318,8 @@
         </p:nvSpPr>
         <p:spPr>
           <a:xfrm>
-            <a:off x="457200" y="3840479"/>
-            <a:ext cx="11277295" cy="777240"/>
+            <a:off x="457200" y="4983480"/>
+            <a:ext cx="11277295" cy="1051560"/>
           </a:xfrm>
           <a:prstGeom prst="roundRect">
             <a:avLst>
@@ -4363,7 +4363,7 @@
         </p:nvSpPr>
         <p:spPr>
           <a:xfrm>
-            <a:off x="594360" y="4009643"/>
+            <a:off x="594360" y="5289804"/>
             <a:ext cx="438912" cy="438912"/>
           </a:xfrm>
           <a:prstGeom prst="roundRect">
@@ -4408,7 +4408,7 @@
         </p:nvSpPr>
         <p:spPr>
           <a:xfrm>
-            <a:off x="594360" y="4009643"/>
+            <a:off x="594360" y="5289804"/>
             <a:ext cx="438912" cy="438912"/>
           </a:xfrm>
           <a:prstGeom prst="rect">
@@ -4441,8 +4441,8 @@
         </p:nvSpPr>
         <p:spPr>
           <a:xfrm>
-            <a:off x="1188720" y="3931919"/>
-            <a:ext cx="10271455" cy="612647"/>
+            <a:off x="1188720" y="5074920"/>
+            <a:ext cx="10271455" cy="886968"/>
           </a:xfrm>
           <a:prstGeom prst="rect">
             <a:avLst/>
@@ -8933,8 +8933,8 @@
         </p:blipFill>
         <p:spPr>
           <a:xfrm>
-            <a:off x="1743913" y="1792224"/>
-            <a:ext cx="1051560" cy="1051560"/>
+            <a:off x="1643329" y="1847087"/>
+            <a:ext cx="1252728" cy="1252728"/>
           </a:xfrm>
           <a:prstGeom prst="rect">
             <a:avLst/>
@@ -8949,8 +8949,8 @@
         </p:nvSpPr>
         <p:spPr>
           <a:xfrm>
-            <a:off x="530352" y="2916936"/>
-            <a:ext cx="3478682" cy="502920"/>
+            <a:off x="530352" y="3191256"/>
+            <a:ext cx="3478682" cy="621792"/>
           </a:xfrm>
           <a:prstGeom prst="rect">
             <a:avLst/>
@@ -9137,8 +9137,8 @@
         </p:blipFill>
         <p:spPr>
           <a:xfrm>
-            <a:off x="5570067" y="1792224"/>
-            <a:ext cx="1051560" cy="1051560"/>
+            <a:off x="5469483" y="1847087"/>
+            <a:ext cx="1252728" cy="1252728"/>
           </a:xfrm>
           <a:prstGeom prst="rect">
             <a:avLst/>
@@ -9153,8 +9153,8 @@
         </p:nvSpPr>
         <p:spPr>
           <a:xfrm>
-            <a:off x="4356506" y="2916936"/>
-            <a:ext cx="3478682" cy="502920"/>
+            <a:off x="4356506" y="3191256"/>
+            <a:ext cx="3478682" cy="621792"/>
           </a:xfrm>
           <a:prstGeom prst="rect">
             <a:avLst/>
@@ -9341,8 +9341,8 @@
         </p:blipFill>
         <p:spPr>
           <a:xfrm>
-            <a:off x="9396222" y="1792224"/>
-            <a:ext cx="1051560" cy="1051560"/>
+            <a:off x="9295638" y="1847087"/>
+            <a:ext cx="1252728" cy="1252728"/>
           </a:xfrm>
           <a:prstGeom prst="rect">
             <a:avLst/>
@@ -9357,8 +9357,8 @@
         </p:nvSpPr>
         <p:spPr>
           <a:xfrm>
-            <a:off x="8182660" y="2916936"/>
-            <a:ext cx="3478682" cy="502920"/>
+            <a:off x="8182660" y="3191256"/>
+            <a:ext cx="3478682" cy="621792"/>
           </a:xfrm>
           <a:prstGeom prst="rect">
             <a:avLst/>

--- a/Bases de Datos II/Clases/Clase 8 - Tuning y transacciones/Presentacion.pptx
+++ b/Bases de Datos II/Clases/Clase 8 - Tuning y transacciones/Presentacion.pptx
@@ -20,6 +20,9 @@
     <p:sldId id="268" r:id="rId19"/>
     <p:sldId id="269" r:id="rId20"/>
     <p:sldId id="270" r:id="rId21"/>
+    <p:sldId id="271" r:id="rId22"/>
+    <p:sldId id="272" r:id="rId23"/>
+    <p:sldId id="273" r:id="rId24"/>
   </p:sldIdLst>
   <p:sldSz cx="12191695" cy="6858000" type="screen4x3"/>
   <p:notesSz cx="6858000" cy="9144000"/>
@@ -3514,7 +3517,7 @@
         <p:spPr>
           <a:xfrm>
             <a:off x="0" y="0"/>
-            <a:ext cx="12191695" cy="960120"/>
+            <a:ext cx="12191695" cy="1170432"/>
           </a:xfrm>
           <a:prstGeom prst="rect">
             <a:avLst/>
@@ -3556,7 +3559,7 @@
         </p:nvSpPr>
         <p:spPr>
           <a:xfrm>
-            <a:off x="0" y="960120"/>
+            <a:off x="0" y="1170432"/>
             <a:ext cx="12191695" cy="41148"/>
           </a:xfrm>
           <a:prstGeom prst="rect">
@@ -3600,7 +3603,7 @@
         <p:spPr>
           <a:xfrm>
             <a:off x="457200" y="164592"/>
-            <a:ext cx="11277295" cy="502920"/>
+            <a:ext cx="11277295" cy="384048"/>
           </a:xfrm>
           <a:prstGeom prst="rect">
             <a:avLst/>
@@ -3620,7 +3623,7 @@
                 </a:solidFill>
                 <a:latin typeface="Calibri"/>
               </a:rPr>
-              <a:t>Taller PI VetCare — escenario / datos de partida</a:t>
+              <a:t>Herramientas de hoy</a:t>
             </a:r>
           </a:p>
         </p:txBody>
@@ -3633,8 +3636,8 @@
         </p:nvSpPr>
         <p:spPr>
           <a:xfrm>
-            <a:off x="457200" y="1170432"/>
-            <a:ext cx="11277295" cy="5230368"/>
+            <a:off x="457200" y="566928"/>
+            <a:ext cx="11277295" cy="411480"/>
           </a:xfrm>
           <a:prstGeom prst="rect">
             <a:avLst/>
@@ -3647,26 +3650,633 @@
           </a:bodyPr>
           <a:lstStyle/>
           <a:p>
-            <a:pPr>
-              <a:spcAft>
-                <a:spcPts val="800"/>
-              </a:spcAft>
+            <a:r>
+              <a:rPr sz="1400" b="0" i="0">
+                <a:solidFill>
+                  <a:srgbClr val="B8D8EE"/>
+                </a:solidFill>
+                <a:latin typeface="Calibri"/>
+              </a:rPr>
+              <a:t>Gratis · navegador o free tier</a:t>
+            </a:r>
+          </a:p>
+        </p:txBody>
+      </p:sp>
+      <p:sp>
+        <p:nvSpPr>
+          <p:cNvPr id="6" name="Rounded Rectangle 5"/>
+          <p:cNvSpPr/>
+          <p:nvPr/>
+        </p:nvSpPr>
+        <p:spPr>
+          <a:xfrm>
+            <a:off x="457200" y="1591056"/>
+            <a:ext cx="3624986" cy="2331720"/>
+          </a:xfrm>
+          <a:prstGeom prst="roundRect">
+            <a:avLst>
+              <a:gd name="adj" fmla="val 12000"/>
+            </a:avLst>
+          </a:prstGeom>
+          <a:solidFill>
+            <a:srgbClr val="F2F2F2"/>
+          </a:solidFill>
+          <a:ln>
+            <a:noFill/>
+          </a:ln>
+        </p:spPr>
+        <p:style>
+          <a:lnRef idx="1">
+            <a:schemeClr val="accent1"/>
+          </a:lnRef>
+          <a:fillRef idx="3">
+            <a:schemeClr val="accent1"/>
+          </a:fillRef>
+          <a:effectRef idx="2">
+            <a:schemeClr val="accent1"/>
+          </a:effectRef>
+          <a:fontRef idx="minor">
+            <a:schemeClr val="lt1"/>
+          </a:fontRef>
+        </p:style>
+        <p:txBody>
+          <a:bodyPr rtlCol="0" anchor="ctr"/>
+          <a:lstStyle/>
+          <a:p>
+            <a:pPr algn="ctr"/>
+          </a:p>
+        </p:txBody>
+      </p:sp>
+      <p:sp>
+        <p:nvSpPr>
+          <p:cNvPr id="7" name="Rectangle 6"/>
+          <p:cNvSpPr/>
+          <p:nvPr/>
+        </p:nvSpPr>
+        <p:spPr>
+          <a:xfrm>
+            <a:off x="457200" y="1591056"/>
+            <a:ext cx="3624986" cy="64008"/>
+          </a:xfrm>
+          <a:prstGeom prst="rect">
+            <a:avLst/>
+          </a:prstGeom>
+          <a:solidFill>
+            <a:srgbClr val="095292"/>
+          </a:solidFill>
+          <a:ln>
+            <a:noFill/>
+          </a:ln>
+        </p:spPr>
+        <p:style>
+          <a:lnRef idx="1">
+            <a:schemeClr val="accent1"/>
+          </a:lnRef>
+          <a:fillRef idx="3">
+            <a:schemeClr val="accent1"/>
+          </a:fillRef>
+          <a:effectRef idx="2">
+            <a:schemeClr val="accent1"/>
+          </a:effectRef>
+          <a:fontRef idx="minor">
+            <a:schemeClr val="lt1"/>
+          </a:fontRef>
+        </p:style>
+        <p:txBody>
+          <a:bodyPr rtlCol="0" anchor="ctr"/>
+          <a:lstStyle/>
+          <a:p>
+            <a:pPr algn="ctr"/>
+          </a:p>
+        </p:txBody>
+      </p:sp>
+      <p:sp>
+        <p:nvSpPr>
+          <p:cNvPr id="8" name="Rectangle 7"/>
+          <p:cNvSpPr/>
+          <p:nvPr/>
+        </p:nvSpPr>
+        <p:spPr>
+          <a:xfrm>
+            <a:off x="457200" y="1655064"/>
+            <a:ext cx="3624986" cy="27432"/>
+          </a:xfrm>
+          <a:prstGeom prst="rect">
+            <a:avLst/>
+          </a:prstGeom>
+          <a:solidFill>
+            <a:srgbClr val="FFD000"/>
+          </a:solidFill>
+          <a:ln>
+            <a:noFill/>
+          </a:ln>
+        </p:spPr>
+        <p:style>
+          <a:lnRef idx="1">
+            <a:schemeClr val="accent1"/>
+          </a:lnRef>
+          <a:fillRef idx="3">
+            <a:schemeClr val="accent1"/>
+          </a:fillRef>
+          <a:effectRef idx="2">
+            <a:schemeClr val="accent1"/>
+          </a:effectRef>
+          <a:fontRef idx="minor">
+            <a:schemeClr val="lt1"/>
+          </a:fontRef>
+        </p:style>
+        <p:txBody>
+          <a:bodyPr rtlCol="0" anchor="ctr"/>
+          <a:lstStyle/>
+          <a:p>
+            <a:pPr algn="ctr"/>
+          </a:p>
+        </p:txBody>
+      </p:sp>
+      <p:pic>
+        <p:nvPicPr>
+          <p:cNvPr id="9" name="Picture 8" descr="examlab.png"/>
+          <p:cNvPicPr>
+            <a:picLocks noChangeAspect="1"/>
+          </p:cNvPicPr>
+          <p:nvPr/>
+        </p:nvPicPr>
+        <p:blipFill>
+          <a:blip r:embed="rId2"/>
+          <a:stretch>
+            <a:fillRect/>
+          </a:stretch>
+        </p:blipFill>
+        <p:spPr>
+          <a:xfrm>
+            <a:off x="1643329" y="1847087"/>
+            <a:ext cx="1252728" cy="1252728"/>
+          </a:xfrm>
+          <a:prstGeom prst="rect">
+            <a:avLst/>
+          </a:prstGeom>
+        </p:spPr>
+      </p:pic>
+      <p:sp>
+        <p:nvSpPr>
+          <p:cNvPr id="10" name="TextBox 9"/>
+          <p:cNvSpPr txBox="1"/>
+          <p:nvPr/>
+        </p:nvSpPr>
+        <p:spPr>
+          <a:xfrm>
+            <a:off x="530352" y="3191256"/>
+            <a:ext cx="3478682" cy="621792"/>
+          </a:xfrm>
+          <a:prstGeom prst="rect">
+            <a:avLst/>
+          </a:prstGeom>
+          <a:noFill/>
+        </p:spPr>
+        <p:txBody>
+          <a:bodyPr wrap="square" anchor="t"/>
+          <a:lstStyle/>
+          <a:p>
+            <a:pPr algn="ctr"/>
+            <a:r>
+              <a:rPr sz="1300" b="1" i="0">
+                <a:solidFill>
+                  <a:srgbClr val="095292"/>
+                </a:solidFill>
+                <a:latin typeface="Calibri"/>
+              </a:rPr>
+              <a:t>ExamLab</a:t>
+            </a:r>
+          </a:p>
+          <a:p>
+            <a:pPr algn="ctr">
+              <a:spcBef>
+                <a:spcPts val="200"/>
+              </a:spcBef>
             </a:pPr>
             <a:r>
-              <a:rPr sz="1600" b="0" i="0">
-                <a:solidFill>
-                  <a:srgbClr val="333333"/>
-                </a:solidFill>
-                <a:latin typeface="Calibri"/>
-              </a:rPr>
-              <a:t>–   BEGIN/COMMIT/ROLLBACK del playground.</a:t>
-            </a:r>
-          </a:p>
-        </p:txBody>
-      </p:sp>
-      <p:sp>
-        <p:nvSpPr>
-          <p:cNvPr id="6" name="TextBox 5"/>
+              <a:rPr sz="1000" b="0" i="0">
+                <a:solidFill>
+                  <a:srgbClr val="666666"/>
+                </a:solidFill>
+                <a:latin typeface="Calibri"/>
+              </a:rPr>
+              <a:t>PL/pgSQL: aqui corre</a:t>
+            </a:r>
+          </a:p>
+        </p:txBody>
+      </p:sp>
+      <p:sp>
+        <p:nvSpPr>
+          <p:cNvPr id="11" name="Rounded Rectangle 10"/>
+          <p:cNvSpPr/>
+          <p:nvPr/>
+        </p:nvSpPr>
+        <p:spPr>
+          <a:xfrm>
+            <a:off x="4283354" y="1591056"/>
+            <a:ext cx="3624986" cy="2331720"/>
+          </a:xfrm>
+          <a:prstGeom prst="roundRect">
+            <a:avLst>
+              <a:gd name="adj" fmla="val 12000"/>
+            </a:avLst>
+          </a:prstGeom>
+          <a:solidFill>
+            <a:srgbClr val="F2F2F2"/>
+          </a:solidFill>
+          <a:ln>
+            <a:noFill/>
+          </a:ln>
+        </p:spPr>
+        <p:style>
+          <a:lnRef idx="1">
+            <a:schemeClr val="accent1"/>
+          </a:lnRef>
+          <a:fillRef idx="3">
+            <a:schemeClr val="accent1"/>
+          </a:fillRef>
+          <a:effectRef idx="2">
+            <a:schemeClr val="accent1"/>
+          </a:effectRef>
+          <a:fontRef idx="minor">
+            <a:schemeClr val="lt1"/>
+          </a:fontRef>
+        </p:style>
+        <p:txBody>
+          <a:bodyPr rtlCol="0" anchor="ctr"/>
+          <a:lstStyle/>
+          <a:p>
+            <a:pPr algn="ctr"/>
+          </a:p>
+        </p:txBody>
+      </p:sp>
+      <p:sp>
+        <p:nvSpPr>
+          <p:cNvPr id="12" name="Rectangle 11"/>
+          <p:cNvSpPr/>
+          <p:nvPr/>
+        </p:nvSpPr>
+        <p:spPr>
+          <a:xfrm>
+            <a:off x="4283354" y="1591056"/>
+            <a:ext cx="3624986" cy="64008"/>
+          </a:xfrm>
+          <a:prstGeom prst="rect">
+            <a:avLst/>
+          </a:prstGeom>
+          <a:solidFill>
+            <a:srgbClr val="095292"/>
+          </a:solidFill>
+          <a:ln>
+            <a:noFill/>
+          </a:ln>
+        </p:spPr>
+        <p:style>
+          <a:lnRef idx="1">
+            <a:schemeClr val="accent1"/>
+          </a:lnRef>
+          <a:fillRef idx="3">
+            <a:schemeClr val="accent1"/>
+          </a:fillRef>
+          <a:effectRef idx="2">
+            <a:schemeClr val="accent1"/>
+          </a:effectRef>
+          <a:fontRef idx="minor">
+            <a:schemeClr val="lt1"/>
+          </a:fontRef>
+        </p:style>
+        <p:txBody>
+          <a:bodyPr rtlCol="0" anchor="ctr"/>
+          <a:lstStyle/>
+          <a:p>
+            <a:pPr algn="ctr"/>
+          </a:p>
+        </p:txBody>
+      </p:sp>
+      <p:sp>
+        <p:nvSpPr>
+          <p:cNvPr id="13" name="Rectangle 12"/>
+          <p:cNvSpPr/>
+          <p:nvPr/>
+        </p:nvSpPr>
+        <p:spPr>
+          <a:xfrm>
+            <a:off x="4283354" y="1655064"/>
+            <a:ext cx="3624986" cy="27432"/>
+          </a:xfrm>
+          <a:prstGeom prst="rect">
+            <a:avLst/>
+          </a:prstGeom>
+          <a:solidFill>
+            <a:srgbClr val="FFD000"/>
+          </a:solidFill>
+          <a:ln>
+            <a:noFill/>
+          </a:ln>
+        </p:spPr>
+        <p:style>
+          <a:lnRef idx="1">
+            <a:schemeClr val="accent1"/>
+          </a:lnRef>
+          <a:fillRef idx="3">
+            <a:schemeClr val="accent1"/>
+          </a:fillRef>
+          <a:effectRef idx="2">
+            <a:schemeClr val="accent1"/>
+          </a:effectRef>
+          <a:fontRef idx="minor">
+            <a:schemeClr val="lt1"/>
+          </a:fontRef>
+        </p:style>
+        <p:txBody>
+          <a:bodyPr rtlCol="0" anchor="ctr"/>
+          <a:lstStyle/>
+          <a:p>
+            <a:pPr algn="ctr"/>
+          </a:p>
+        </p:txBody>
+      </p:sp>
+      <p:pic>
+        <p:nvPicPr>
+          <p:cNvPr id="14" name="Picture 13" descr="google_docs.png"/>
+          <p:cNvPicPr>
+            <a:picLocks noChangeAspect="1"/>
+          </p:cNvPicPr>
+          <p:nvPr/>
+        </p:nvPicPr>
+        <p:blipFill>
+          <a:blip r:embed="rId3"/>
+          <a:stretch>
+            <a:fillRect/>
+          </a:stretch>
+        </p:blipFill>
+        <p:spPr>
+          <a:xfrm>
+            <a:off x="5469483" y="1847087"/>
+            <a:ext cx="1252728" cy="1252728"/>
+          </a:xfrm>
+          <a:prstGeom prst="rect">
+            <a:avLst/>
+          </a:prstGeom>
+        </p:spPr>
+      </p:pic>
+      <p:sp>
+        <p:nvSpPr>
+          <p:cNvPr id="15" name="TextBox 14"/>
+          <p:cNvSpPr txBox="1"/>
+          <p:nvPr/>
+        </p:nvSpPr>
+        <p:spPr>
+          <a:xfrm>
+            <a:off x="4356506" y="3191256"/>
+            <a:ext cx="3478682" cy="621792"/>
+          </a:xfrm>
+          <a:prstGeom prst="rect">
+            <a:avLst/>
+          </a:prstGeom>
+          <a:noFill/>
+        </p:spPr>
+        <p:txBody>
+          <a:bodyPr wrap="square" anchor="t"/>
+          <a:lstStyle/>
+          <a:p>
+            <a:pPr algn="ctr"/>
+            <a:r>
+              <a:rPr sz="1300" b="1" i="0">
+                <a:solidFill>
+                  <a:srgbClr val="095292"/>
+                </a:solidFill>
+                <a:latin typeface="Calibri"/>
+              </a:rPr>
+              <a:t>Google Docs</a:t>
+            </a:r>
+          </a:p>
+          <a:p>
+            <a:pPr algn="ctr">
+              <a:spcBef>
+                <a:spcPts val="200"/>
+              </a:spcBef>
+            </a:pPr>
+            <a:r>
+              <a:rPr sz="1000" b="0" i="0">
+                <a:solidFill>
+                  <a:srgbClr val="666666"/>
+                </a:solidFill>
+                <a:latin typeface="Calibri"/>
+              </a:rPr>
+              <a:t>Checklist de tuning</a:t>
+            </a:r>
+          </a:p>
+        </p:txBody>
+      </p:sp>
+      <p:sp>
+        <p:nvSpPr>
+          <p:cNvPr id="16" name="Rounded Rectangle 15"/>
+          <p:cNvSpPr/>
+          <p:nvPr/>
+        </p:nvSpPr>
+        <p:spPr>
+          <a:xfrm>
+            <a:off x="8109508" y="1591056"/>
+            <a:ext cx="3624986" cy="2331720"/>
+          </a:xfrm>
+          <a:prstGeom prst="roundRect">
+            <a:avLst>
+              <a:gd name="adj" fmla="val 12000"/>
+            </a:avLst>
+          </a:prstGeom>
+          <a:solidFill>
+            <a:srgbClr val="F2F2F2"/>
+          </a:solidFill>
+          <a:ln>
+            <a:noFill/>
+          </a:ln>
+        </p:spPr>
+        <p:style>
+          <a:lnRef idx="1">
+            <a:schemeClr val="accent1"/>
+          </a:lnRef>
+          <a:fillRef idx="3">
+            <a:schemeClr val="accent1"/>
+          </a:fillRef>
+          <a:effectRef idx="2">
+            <a:schemeClr val="accent1"/>
+          </a:effectRef>
+          <a:fontRef idx="minor">
+            <a:schemeClr val="lt1"/>
+          </a:fontRef>
+        </p:style>
+        <p:txBody>
+          <a:bodyPr rtlCol="0" anchor="ctr"/>
+          <a:lstStyle/>
+          <a:p>
+            <a:pPr algn="ctr"/>
+          </a:p>
+        </p:txBody>
+      </p:sp>
+      <p:sp>
+        <p:nvSpPr>
+          <p:cNvPr id="17" name="Rectangle 16"/>
+          <p:cNvSpPr/>
+          <p:nvPr/>
+        </p:nvSpPr>
+        <p:spPr>
+          <a:xfrm>
+            <a:off x="8109508" y="1591056"/>
+            <a:ext cx="3624986" cy="64008"/>
+          </a:xfrm>
+          <a:prstGeom prst="rect">
+            <a:avLst/>
+          </a:prstGeom>
+          <a:solidFill>
+            <a:srgbClr val="095292"/>
+          </a:solidFill>
+          <a:ln>
+            <a:noFill/>
+          </a:ln>
+        </p:spPr>
+        <p:style>
+          <a:lnRef idx="1">
+            <a:schemeClr val="accent1"/>
+          </a:lnRef>
+          <a:fillRef idx="3">
+            <a:schemeClr val="accent1"/>
+          </a:fillRef>
+          <a:effectRef idx="2">
+            <a:schemeClr val="accent1"/>
+          </a:effectRef>
+          <a:fontRef idx="minor">
+            <a:schemeClr val="lt1"/>
+          </a:fontRef>
+        </p:style>
+        <p:txBody>
+          <a:bodyPr rtlCol="0" anchor="ctr"/>
+          <a:lstStyle/>
+          <a:p>
+            <a:pPr algn="ctr"/>
+          </a:p>
+        </p:txBody>
+      </p:sp>
+      <p:sp>
+        <p:nvSpPr>
+          <p:cNvPr id="18" name="Rectangle 17"/>
+          <p:cNvSpPr/>
+          <p:nvPr/>
+        </p:nvSpPr>
+        <p:spPr>
+          <a:xfrm>
+            <a:off x="8109508" y="1655064"/>
+            <a:ext cx="3624986" cy="27432"/>
+          </a:xfrm>
+          <a:prstGeom prst="rect">
+            <a:avLst/>
+          </a:prstGeom>
+          <a:solidFill>
+            <a:srgbClr val="FFD000"/>
+          </a:solidFill>
+          <a:ln>
+            <a:noFill/>
+          </a:ln>
+        </p:spPr>
+        <p:style>
+          <a:lnRef idx="1">
+            <a:schemeClr val="accent1"/>
+          </a:lnRef>
+          <a:fillRef idx="3">
+            <a:schemeClr val="accent1"/>
+          </a:fillRef>
+          <a:effectRef idx="2">
+            <a:schemeClr val="accent1"/>
+          </a:effectRef>
+          <a:fontRef idx="minor">
+            <a:schemeClr val="lt1"/>
+          </a:fontRef>
+        </p:style>
+        <p:txBody>
+          <a:bodyPr rtlCol="0" anchor="ctr"/>
+          <a:lstStyle/>
+          <a:p>
+            <a:pPr algn="ctr"/>
+          </a:p>
+        </p:txBody>
+      </p:sp>
+      <p:pic>
+        <p:nvPicPr>
+          <p:cNvPr id="19" name="Picture 18" descr="oracle_livesql.png"/>
+          <p:cNvPicPr>
+            <a:picLocks noChangeAspect="1"/>
+          </p:cNvPicPr>
+          <p:nvPr/>
+        </p:nvPicPr>
+        <p:blipFill>
+          <a:blip r:embed="rId4"/>
+          <a:stretch>
+            <a:fillRect/>
+          </a:stretch>
+        </p:blipFill>
+        <p:spPr>
+          <a:xfrm>
+            <a:off x="9295638" y="1847087"/>
+            <a:ext cx="1252728" cy="1252728"/>
+          </a:xfrm>
+          <a:prstGeom prst="rect">
+            <a:avLst/>
+          </a:prstGeom>
+        </p:spPr>
+      </p:pic>
+      <p:sp>
+        <p:nvSpPr>
+          <p:cNvPr id="20" name="TextBox 19"/>
+          <p:cNvSpPr txBox="1"/>
+          <p:nvPr/>
+        </p:nvSpPr>
+        <p:spPr>
+          <a:xfrm>
+            <a:off x="8182660" y="3191256"/>
+            <a:ext cx="3478682" cy="621792"/>
+          </a:xfrm>
+          <a:prstGeom prst="rect">
+            <a:avLst/>
+          </a:prstGeom>
+          <a:noFill/>
+        </p:spPr>
+        <p:txBody>
+          <a:bodyPr wrap="square" anchor="t"/>
+          <a:lstStyle/>
+          <a:p>
+            <a:pPr algn="ctr"/>
+            <a:r>
+              <a:rPr sz="1300" b="1" i="0">
+                <a:solidFill>
+                  <a:srgbClr val="095292"/>
+                </a:solidFill>
+                <a:latin typeface="Calibri"/>
+              </a:rPr>
+              <a:t>Oracle Live SQL</a:t>
+            </a:r>
+          </a:p>
+          <a:p>
+            <a:pPr algn="ctr">
+              <a:spcBef>
+                <a:spcPts val="200"/>
+              </a:spcBef>
+            </a:pPr>
+            <a:r>
+              <a:rPr sz="1000" b="0" i="0">
+                <a:solidFill>
+                  <a:srgbClr val="666666"/>
+                </a:solidFill>
+                <a:latin typeface="Calibri"/>
+              </a:rPr>
+              <a:t>Solo contraste (pregunta 4)</a:t>
+            </a:r>
+          </a:p>
+        </p:txBody>
+      </p:sp>
+      <p:sp>
+        <p:nvSpPr>
+          <p:cNvPr id="21" name="TextBox 20"/>
           <p:cNvSpPr txBox="1"/>
           <p:nvPr/>
         </p:nvSpPr>
@@ -3840,111 +4450,21 @@
                 </a:solidFill>
                 <a:latin typeface="Calibri"/>
               </a:rPr>
-              <a:t>Taller PI VetCare — pasos guiados</a:t>
-            </a:r>
-          </a:p>
-        </p:txBody>
-      </p:sp>
-      <p:sp>
-        <p:nvSpPr>
-          <p:cNvPr id="5" name="Rounded Rectangle 4"/>
-          <p:cNvSpPr/>
-          <p:nvPr/>
-        </p:nvSpPr>
-        <p:spPr>
-          <a:xfrm>
-            <a:off x="457200" y="1554480"/>
-            <a:ext cx="11277295" cy="1051560"/>
-          </a:xfrm>
-          <a:prstGeom prst="roundRect">
-            <a:avLst>
-              <a:gd name="adj" fmla="val 12000"/>
-            </a:avLst>
-          </a:prstGeom>
-          <a:solidFill>
-            <a:srgbClr val="F2F2F2"/>
-          </a:solidFill>
-          <a:ln>
-            <a:noFill/>
-          </a:ln>
-        </p:spPr>
-        <p:style>
-          <a:lnRef idx="1">
-            <a:schemeClr val="accent1"/>
-          </a:lnRef>
-          <a:fillRef idx="3">
-            <a:schemeClr val="accent1"/>
-          </a:fillRef>
-          <a:effectRef idx="2">
-            <a:schemeClr val="accent1"/>
-          </a:effectRef>
-          <a:fontRef idx="minor">
-            <a:schemeClr val="lt1"/>
-          </a:fontRef>
-        </p:style>
-        <p:txBody>
-          <a:bodyPr rtlCol="0" anchor="ctr"/>
-          <a:lstStyle/>
-          <a:p>
-            <a:pPr algn="ctr"/>
-          </a:p>
-        </p:txBody>
-      </p:sp>
-      <p:sp>
-        <p:nvSpPr>
-          <p:cNvPr id="6" name="Rounded Rectangle 5"/>
-          <p:cNvSpPr/>
-          <p:nvPr/>
-        </p:nvSpPr>
-        <p:spPr>
-          <a:xfrm>
-            <a:off x="594360" y="1860804"/>
-            <a:ext cx="438912" cy="438912"/>
-          </a:xfrm>
-          <a:prstGeom prst="roundRect">
-            <a:avLst>
-              <a:gd name="adj" fmla="val 12000"/>
-            </a:avLst>
-          </a:prstGeom>
-          <a:solidFill>
-            <a:srgbClr val="095292"/>
-          </a:solidFill>
-          <a:ln>
-            <a:noFill/>
-          </a:ln>
-        </p:spPr>
-        <p:style>
-          <a:lnRef idx="1">
-            <a:schemeClr val="accent1"/>
-          </a:lnRef>
-          <a:fillRef idx="3">
-            <a:schemeClr val="accent1"/>
-          </a:fillRef>
-          <a:effectRef idx="2">
-            <a:schemeClr val="accent1"/>
-          </a:effectRef>
-          <a:fontRef idx="minor">
-            <a:schemeClr val="lt1"/>
-          </a:fontRef>
-        </p:style>
-        <p:txBody>
-          <a:bodyPr rtlCol="0" anchor="ctr"/>
-          <a:lstStyle/>
-          <a:p>
-            <a:pPr algn="ctr"/>
-          </a:p>
-        </p:txBody>
-      </p:sp>
-      <p:sp>
-        <p:nvSpPr>
-          <p:cNvPr id="7" name="TextBox 6"/>
+              <a:t>Taller PI VetCare — contexto / por que importa</a:t>
+            </a:r>
+          </a:p>
+        </p:txBody>
+      </p:sp>
+      <p:sp>
+        <p:nvSpPr>
+          <p:cNvPr id="5" name="TextBox 4"/>
           <p:cNvSpPr txBox="1"/>
           <p:nvPr/>
         </p:nvSpPr>
         <p:spPr>
           <a:xfrm>
-            <a:off x="594360" y="1860804"/>
-            <a:ext cx="438912" cy="438912"/>
+            <a:off x="457200" y="1170432"/>
+            <a:ext cx="11277295" cy="5230368"/>
           </a:xfrm>
           <a:prstGeom prst="rect">
             <a:avLst/>
@@ -3952,522 +4472,171 @@
           <a:noFill/>
         </p:spPr>
         <p:txBody>
-          <a:bodyPr wrap="square" anchor="ctr"/>
-          <a:lstStyle/>
-          <a:p>
-            <a:pPr algn="ctr"/>
+          <a:bodyPr wrap="square">
+            <a:spAutoFit/>
+          </a:bodyPr>
+          <a:lstStyle/>
+          <a:p>
+            <a:pPr>
+              <a:spcAft>
+                <a:spcPts val="800"/>
+              </a:spcAft>
+            </a:pPr>
+            <a:r>
+              <a:rPr sz="1600" b="0" i="0">
+                <a:solidFill>
+                  <a:srgbClr val="333333"/>
+                </a:solidFill>
+                <a:latin typeface="Calibri"/>
+              </a:rPr>
+              <a:t>–   </a:t>
+            </a:r>
             <a:r>
               <a:rPr sz="1600" b="1" i="0">
                 <a:solidFill>
-                  <a:srgbClr val="FFFFFF"/>
-                </a:solidFill>
-                <a:latin typeface="Calibri"/>
-              </a:rPr>
-              <a:t>1</a:t>
-            </a:r>
-          </a:p>
-        </p:txBody>
-      </p:sp>
-      <p:sp>
-        <p:nvSpPr>
-          <p:cNvPr id="8" name="TextBox 7"/>
-          <p:cNvSpPr txBox="1"/>
-          <p:nvPr/>
-        </p:nvSpPr>
-        <p:spPr>
-          <a:xfrm>
-            <a:off x="1188720" y="1645920"/>
-            <a:ext cx="10271455" cy="886968"/>
-          </a:xfrm>
-          <a:prstGeom prst="rect">
-            <a:avLst/>
-          </a:prstGeom>
-          <a:noFill/>
-        </p:spPr>
-        <p:txBody>
-          <a:bodyPr wrap="square" anchor="ctr"/>
-          <a:lstStyle/>
-          <a:p>
-            <a:r>
-              <a:rPr sz="1500" b="1" i="0">
-                <a:solidFill>
-                  <a:srgbClr val="095292"/>
-                </a:solidFill>
-                <a:latin typeface="Calibri"/>
-              </a:rPr>
-              <a:t>Implementar bloque/proc que facture y descuente stock atomicamente.</a:t>
-            </a:r>
-          </a:p>
-        </p:txBody>
-      </p:sp>
-      <p:sp>
-        <p:nvSpPr>
-          <p:cNvPr id="9" name="Rounded Rectangle 8"/>
-          <p:cNvSpPr/>
-          <p:nvPr/>
-        </p:nvSpPr>
-        <p:spPr>
-          <a:xfrm>
-            <a:off x="457200" y="2697480"/>
-            <a:ext cx="11277295" cy="1051560"/>
-          </a:xfrm>
-          <a:prstGeom prst="roundRect">
-            <a:avLst>
-              <a:gd name="adj" fmla="val 12000"/>
-            </a:avLst>
-          </a:prstGeom>
-          <a:solidFill>
-            <a:srgbClr val="E8F4FA"/>
-          </a:solidFill>
-          <a:ln>
-            <a:noFill/>
-          </a:ln>
-        </p:spPr>
-        <p:style>
-          <a:lnRef idx="1">
-            <a:schemeClr val="accent1"/>
-          </a:lnRef>
-          <a:fillRef idx="3">
-            <a:schemeClr val="accent1"/>
-          </a:fillRef>
-          <a:effectRef idx="2">
-            <a:schemeClr val="accent1"/>
-          </a:effectRef>
-          <a:fontRef idx="minor">
-            <a:schemeClr val="lt1"/>
-          </a:fontRef>
-        </p:style>
-        <p:txBody>
-          <a:bodyPr rtlCol="0" anchor="ctr"/>
-          <a:lstStyle/>
-          <a:p>
-            <a:pPr algn="ctr"/>
-          </a:p>
-        </p:txBody>
-      </p:sp>
-      <p:sp>
-        <p:nvSpPr>
-          <p:cNvPr id="10" name="Rounded Rectangle 9"/>
-          <p:cNvSpPr/>
-          <p:nvPr/>
-        </p:nvSpPr>
-        <p:spPr>
-          <a:xfrm>
-            <a:off x="594360" y="3003804"/>
-            <a:ext cx="438912" cy="438912"/>
-          </a:xfrm>
-          <a:prstGeom prst="roundRect">
-            <a:avLst>
-              <a:gd name="adj" fmla="val 12000"/>
-            </a:avLst>
-          </a:prstGeom>
-          <a:solidFill>
-            <a:srgbClr val="095292"/>
-          </a:solidFill>
-          <a:ln>
-            <a:noFill/>
-          </a:ln>
-        </p:spPr>
-        <p:style>
-          <a:lnRef idx="1">
-            <a:schemeClr val="accent1"/>
-          </a:lnRef>
-          <a:fillRef idx="3">
-            <a:schemeClr val="accent1"/>
-          </a:fillRef>
-          <a:effectRef idx="2">
-            <a:schemeClr val="accent1"/>
-          </a:effectRef>
-          <a:fontRef idx="minor">
-            <a:schemeClr val="lt1"/>
-          </a:fontRef>
-        </p:style>
-        <p:txBody>
-          <a:bodyPr rtlCol="0" anchor="ctr"/>
-          <a:lstStyle/>
-          <a:p>
-            <a:pPr algn="ctr"/>
-          </a:p>
-        </p:txBody>
-      </p:sp>
-      <p:sp>
-        <p:nvSpPr>
-          <p:cNvPr id="11" name="TextBox 10"/>
-          <p:cNvSpPr txBox="1"/>
-          <p:nvPr/>
-        </p:nvSpPr>
-        <p:spPr>
-          <a:xfrm>
-            <a:off x="594360" y="3003804"/>
-            <a:ext cx="438912" cy="438912"/>
-          </a:xfrm>
-          <a:prstGeom prst="rect">
-            <a:avLst/>
-          </a:prstGeom>
-          <a:noFill/>
-        </p:spPr>
-        <p:txBody>
-          <a:bodyPr wrap="square" anchor="ctr"/>
-          <a:lstStyle/>
-          <a:p>
-            <a:pPr algn="ctr"/>
+                  <a:srgbClr val="333333"/>
+                </a:solidFill>
+                <a:latin typeface="Calibri"/>
+              </a:rPr>
+              <a:t>Por qué importa al PI:</a:t>
+            </a:r>
+            <a:r>
+              <a:rPr sz="1600" b="0" i="0">
+                <a:solidFill>
+                  <a:srgbClr val="333333"/>
+                </a:solidFill>
+                <a:latin typeface="Calibri"/>
+              </a:rPr>
+              <a:t> facturar es la operación donde Huellitas </a:t>
+            </a:r>
             <a:r>
               <a:rPr sz="1600" b="1" i="0">
                 <a:solidFill>
-                  <a:srgbClr val="FFFFFF"/>
-                </a:solidFill>
-                <a:latin typeface="Calibri"/>
-              </a:rPr>
-              <a:t>2</a:t>
-            </a:r>
-          </a:p>
-        </p:txBody>
-      </p:sp>
-      <p:sp>
-        <p:nvSpPr>
-          <p:cNvPr id="12" name="TextBox 11"/>
-          <p:cNvSpPr txBox="1"/>
-          <p:nvPr/>
-        </p:nvSpPr>
-        <p:spPr>
-          <a:xfrm>
-            <a:off x="1188720" y="2788920"/>
-            <a:ext cx="10271455" cy="886968"/>
-          </a:xfrm>
-          <a:prstGeom prst="rect">
-            <a:avLst/>
-          </a:prstGeom>
-          <a:noFill/>
-        </p:spPr>
-        <p:txBody>
-          <a:bodyPr wrap="square" anchor="ctr"/>
-          <a:lstStyle/>
-          <a:p>
-            <a:r>
-              <a:rPr sz="1500" b="1" i="0">
-                <a:solidFill>
-                  <a:srgbClr val="095292"/>
-                </a:solidFill>
-                <a:latin typeface="Calibri"/>
-              </a:rPr>
-              <a:t>Probar fallo a mitad (stock insuficiente) -&gt; ROLLBACK.</a:t>
-            </a:r>
-          </a:p>
-        </p:txBody>
-      </p:sp>
-      <p:sp>
-        <p:nvSpPr>
-          <p:cNvPr id="13" name="Rounded Rectangle 12"/>
-          <p:cNvSpPr/>
-          <p:nvPr/>
-        </p:nvSpPr>
-        <p:spPr>
-          <a:xfrm>
-            <a:off x="457200" y="3840480"/>
-            <a:ext cx="11277295" cy="1051560"/>
-          </a:xfrm>
-          <a:prstGeom prst="roundRect">
-            <a:avLst>
-              <a:gd name="adj" fmla="val 12000"/>
-            </a:avLst>
-          </a:prstGeom>
-          <a:solidFill>
-            <a:srgbClr val="F2F2F2"/>
-          </a:solidFill>
-          <a:ln>
-            <a:noFill/>
-          </a:ln>
-        </p:spPr>
-        <p:style>
-          <a:lnRef idx="1">
-            <a:schemeClr val="accent1"/>
-          </a:lnRef>
-          <a:fillRef idx="3">
-            <a:schemeClr val="accent1"/>
-          </a:fillRef>
-          <a:effectRef idx="2">
-            <a:schemeClr val="accent1"/>
-          </a:effectRef>
-          <a:fontRef idx="minor">
-            <a:schemeClr val="lt1"/>
-          </a:fontRef>
-        </p:style>
-        <p:txBody>
-          <a:bodyPr rtlCol="0" anchor="ctr"/>
-          <a:lstStyle/>
-          <a:p>
-            <a:pPr algn="ctr"/>
-          </a:p>
-        </p:txBody>
-      </p:sp>
-      <p:sp>
-        <p:nvSpPr>
-          <p:cNvPr id="14" name="Rounded Rectangle 13"/>
-          <p:cNvSpPr/>
-          <p:nvPr/>
-        </p:nvSpPr>
-        <p:spPr>
-          <a:xfrm>
-            <a:off x="594360" y="4146804"/>
-            <a:ext cx="438912" cy="438912"/>
-          </a:xfrm>
-          <a:prstGeom prst="roundRect">
-            <a:avLst>
-              <a:gd name="adj" fmla="val 12000"/>
-            </a:avLst>
-          </a:prstGeom>
-          <a:solidFill>
-            <a:srgbClr val="095292"/>
-          </a:solidFill>
-          <a:ln>
-            <a:noFill/>
-          </a:ln>
-        </p:spPr>
-        <p:style>
-          <a:lnRef idx="1">
-            <a:schemeClr val="accent1"/>
-          </a:lnRef>
-          <a:fillRef idx="3">
-            <a:schemeClr val="accent1"/>
-          </a:fillRef>
-          <a:effectRef idx="2">
-            <a:schemeClr val="accent1"/>
-          </a:effectRef>
-          <a:fontRef idx="minor">
-            <a:schemeClr val="lt1"/>
-          </a:fontRef>
-        </p:style>
-        <p:txBody>
-          <a:bodyPr rtlCol="0" anchor="ctr"/>
-          <a:lstStyle/>
-          <a:p>
-            <a:pPr algn="ctr"/>
-          </a:p>
-        </p:txBody>
-      </p:sp>
-      <p:sp>
-        <p:nvSpPr>
-          <p:cNvPr id="15" name="TextBox 14"/>
-          <p:cNvSpPr txBox="1"/>
-          <p:nvPr/>
-        </p:nvSpPr>
-        <p:spPr>
-          <a:xfrm>
-            <a:off x="594360" y="4146804"/>
-            <a:ext cx="438912" cy="438912"/>
-          </a:xfrm>
-          <a:prstGeom prst="rect">
-            <a:avLst/>
-          </a:prstGeom>
-          <a:noFill/>
-        </p:spPr>
-        <p:txBody>
-          <a:bodyPr wrap="square" anchor="ctr"/>
-          <a:lstStyle/>
-          <a:p>
-            <a:pPr algn="ctr"/>
+                  <a:srgbClr val="333333"/>
+                </a:solidFill>
+                <a:latin typeface="Calibri"/>
+              </a:rPr>
+              <a:t>pierde plata</a:t>
+            </a:r>
+            <a:r>
+              <a:rPr sz="1600" b="0" i="0">
+                <a:solidFill>
+                  <a:srgbClr val="333333"/>
+                </a:solidFill>
+                <a:latin typeface="Calibri"/>
+              </a:rPr>
+              <a:t> si algo queda a medias: una factura sin líneas, o un stock descontado de una factura que nunca existió.</a:t>
+            </a:r>
+          </a:p>
+          <a:p>
+            <a:pPr>
+              <a:spcAft>
+                <a:spcPts val="800"/>
+              </a:spcAft>
+            </a:pPr>
+            <a:r>
+              <a:rPr sz="1600" b="0" i="0">
+                <a:solidFill>
+                  <a:srgbClr val="333333"/>
+                </a:solidFill>
+                <a:latin typeface="Calibri"/>
+              </a:rPr>
+              <a:t>–   Hoy no se evalúa que el procedimiento </a:t>
+            </a:r>
             <a:r>
               <a:rPr sz="1600" b="1" i="0">
                 <a:solidFill>
-                  <a:srgbClr val="FFFFFF"/>
-                </a:solidFill>
-                <a:latin typeface="Calibri"/>
-              </a:rPr>
-              <a:t>3</a:t>
-            </a:r>
-          </a:p>
-        </p:txBody>
-      </p:sp>
-      <p:sp>
-        <p:nvSpPr>
-          <p:cNvPr id="16" name="TextBox 15"/>
-          <p:cNvSpPr txBox="1"/>
-          <p:nvPr/>
-        </p:nvSpPr>
-        <p:spPr>
-          <a:xfrm>
-            <a:off x="1188720" y="3931920"/>
-            <a:ext cx="10271455" cy="886968"/>
-          </a:xfrm>
-          <a:prstGeom prst="rect">
-            <a:avLst/>
-          </a:prstGeom>
-          <a:noFill/>
-        </p:spPr>
-        <p:txBody>
-          <a:bodyPr wrap="square" anchor="ctr"/>
-          <a:lstStyle/>
-          <a:p>
-            <a:r>
-              <a:rPr sz="1500" b="1" i="0">
-                <a:solidFill>
-                  <a:srgbClr val="095292"/>
-                </a:solidFill>
-                <a:latin typeface="Calibri"/>
-              </a:rPr>
-              <a:t>Completar checklist tuning del PI.</a:t>
-            </a:r>
-          </a:p>
-        </p:txBody>
-      </p:sp>
-      <p:sp>
-        <p:nvSpPr>
-          <p:cNvPr id="17" name="Rounded Rectangle 16"/>
-          <p:cNvSpPr/>
-          <p:nvPr/>
-        </p:nvSpPr>
-        <p:spPr>
-          <a:xfrm>
-            <a:off x="457200" y="4983480"/>
-            <a:ext cx="11277295" cy="1051560"/>
-          </a:xfrm>
-          <a:prstGeom prst="roundRect">
-            <a:avLst>
-              <a:gd name="adj" fmla="val 12000"/>
-            </a:avLst>
-          </a:prstGeom>
-          <a:solidFill>
-            <a:srgbClr val="E8F4FA"/>
-          </a:solidFill>
-          <a:ln>
-            <a:noFill/>
-          </a:ln>
-        </p:spPr>
-        <p:style>
-          <a:lnRef idx="1">
-            <a:schemeClr val="accent1"/>
-          </a:lnRef>
-          <a:fillRef idx="3">
-            <a:schemeClr val="accent1"/>
-          </a:fillRef>
-          <a:effectRef idx="2">
-            <a:schemeClr val="accent1"/>
-          </a:effectRef>
-          <a:fontRef idx="minor">
-            <a:schemeClr val="lt1"/>
-          </a:fontRef>
-        </p:style>
-        <p:txBody>
-          <a:bodyPr rtlCol="0" anchor="ctr"/>
-          <a:lstStyle/>
-          <a:p>
-            <a:pPr algn="ctr"/>
-          </a:p>
-        </p:txBody>
-      </p:sp>
-      <p:sp>
-        <p:nvSpPr>
-          <p:cNvPr id="18" name="Rounded Rectangle 17"/>
-          <p:cNvSpPr/>
-          <p:nvPr/>
-        </p:nvSpPr>
-        <p:spPr>
-          <a:xfrm>
-            <a:off x="594360" y="5289804"/>
-            <a:ext cx="438912" cy="438912"/>
-          </a:xfrm>
-          <a:prstGeom prst="roundRect">
-            <a:avLst>
-              <a:gd name="adj" fmla="val 12000"/>
-            </a:avLst>
-          </a:prstGeom>
-          <a:solidFill>
-            <a:srgbClr val="095292"/>
-          </a:solidFill>
-          <a:ln>
-            <a:noFill/>
-          </a:ln>
-        </p:spPr>
-        <p:style>
-          <a:lnRef idx="1">
-            <a:schemeClr val="accent1"/>
-          </a:lnRef>
-          <a:fillRef idx="3">
-            <a:schemeClr val="accent1"/>
-          </a:fillRef>
-          <a:effectRef idx="2">
-            <a:schemeClr val="accent1"/>
-          </a:effectRef>
-          <a:fontRef idx="minor">
-            <a:schemeClr val="lt1"/>
-          </a:fontRef>
-        </p:style>
-        <p:txBody>
-          <a:bodyPr rtlCol="0" anchor="ctr"/>
-          <a:lstStyle/>
-          <a:p>
-            <a:pPr algn="ctr"/>
-          </a:p>
-        </p:txBody>
-      </p:sp>
-      <p:sp>
-        <p:nvSpPr>
-          <p:cNvPr id="19" name="TextBox 18"/>
-          <p:cNvSpPr txBox="1"/>
-          <p:nvPr/>
-        </p:nvSpPr>
-        <p:spPr>
-          <a:xfrm>
-            <a:off x="594360" y="5289804"/>
-            <a:ext cx="438912" cy="438912"/>
-          </a:xfrm>
-          <a:prstGeom prst="rect">
-            <a:avLst/>
-          </a:prstGeom>
-          <a:noFill/>
-        </p:spPr>
-        <p:txBody>
-          <a:bodyPr wrap="square" anchor="ctr"/>
-          <a:lstStyle/>
-          <a:p>
-            <a:pPr algn="ctr"/>
+                  <a:srgbClr val="333333"/>
+                </a:solidFill>
+                <a:latin typeface="Calibri"/>
+              </a:rPr>
+              <a:t>funcione</a:t>
+            </a:r>
+            <a:r>
+              <a:rPr sz="1600" b="0" i="0">
+                <a:solidFill>
+                  <a:srgbClr val="333333"/>
+                </a:solidFill>
+                <a:latin typeface="Calibri"/>
+              </a:rPr>
+              <a:t>, sino que </a:t>
+            </a:r>
             <a:r>
               <a:rPr sz="1600" b="1" i="0">
                 <a:solidFill>
-                  <a:srgbClr val="FFFFFF"/>
-                </a:solidFill>
-                <a:latin typeface="Calibri"/>
-              </a:rPr>
-              <a:t>4</a:t>
-            </a:r>
-          </a:p>
-        </p:txBody>
-      </p:sp>
-      <p:sp>
-        <p:nvSpPr>
-          <p:cNvPr id="20" name="TextBox 19"/>
-          <p:cNvSpPr txBox="1"/>
-          <p:nvPr/>
-        </p:nvSpPr>
-        <p:spPr>
-          <a:xfrm>
-            <a:off x="1188720" y="5074920"/>
-            <a:ext cx="10271455" cy="886968"/>
-          </a:xfrm>
-          <a:prstGeom prst="rect">
-            <a:avLst/>
-          </a:prstGeom>
-          <a:noFill/>
-        </p:spPr>
-        <p:txBody>
-          <a:bodyPr wrap="square" anchor="ctr"/>
-          <a:lstStyle/>
-          <a:p>
-            <a:r>
-              <a:rPr sz="1500" b="1" i="0">
-                <a:solidFill>
-                  <a:srgbClr val="095292"/>
-                </a:solidFill>
-                <a:latin typeface="Calibri"/>
-              </a:rPr>
-              <a:t>Actualizar informe PI: seccion transacciones.</a:t>
-            </a:r>
-          </a:p>
-        </p:txBody>
-      </p:sp>
-      <p:sp>
-        <p:nvSpPr>
-          <p:cNvPr id="21" name="TextBox 20"/>
+                  <a:srgbClr val="333333"/>
+                </a:solidFill>
+                <a:latin typeface="Calibri"/>
+              </a:rPr>
+              <a:t>falle bien</a:t>
+            </a:r>
+            <a:r>
+              <a:rPr sz="1600" b="0" i="0">
+                <a:solidFill>
+                  <a:srgbClr val="333333"/>
+                </a:solidFill>
+                <a:latin typeface="Calibri"/>
+              </a:rPr>
+              <a:t>: la pregunta 2 vale 25 puntos y consiste en romperlo a propósito y demostrar con datos que la base quedó intacta.</a:t>
+            </a:r>
+          </a:p>
+          <a:p>
+            <a:pPr>
+              <a:spcAft>
+                <a:spcPts val="800"/>
+              </a:spcAft>
+            </a:pPr>
+            <a:r>
+              <a:rPr sz="1600" b="0" i="0">
+                <a:solidFill>
+                  <a:srgbClr val="333333"/>
+                </a:solidFill>
+                <a:latin typeface="Calibri"/>
+              </a:rPr>
+              <a:t>–   El patrón que aprendes hoy — comprobar y escribir en </a:t>
+            </a:r>
+            <a:r>
+              <a:rPr sz="1600" b="1" i="0">
+                <a:solidFill>
+                  <a:srgbClr val="333333"/>
+                </a:solidFill>
+                <a:latin typeface="Calibri"/>
+              </a:rPr>
+              <a:t>una sola sentencia</a:t>
+            </a:r>
+            <a:r>
+              <a:rPr sz="1600" b="0" i="0">
+                <a:solidFill>
+                  <a:srgbClr val="333333"/>
+                </a:solidFill>
+                <a:latin typeface="Calibri"/>
+              </a:rPr>
+              <a:t> — es el que evita el stock negativo cuando hay dos recepcionistas facturando. Que aquí no puedas montar las dos sesiones es la </a:t>
+            </a:r>
+            <a:r>
+              <a:rPr sz="1600" b="1" i="0">
+                <a:solidFill>
+                  <a:srgbClr val="333333"/>
+                </a:solidFill>
+                <a:latin typeface="Calibri"/>
+              </a:rPr>
+              <a:t>Clase 10</a:t>
+            </a:r>
+            <a:r>
+              <a:rPr sz="1600" b="0" i="0">
+                <a:solidFill>
+                  <a:srgbClr val="333333"/>
+                </a:solidFill>
+                <a:latin typeface="Calibri"/>
+              </a:rPr>
+              <a:t>, y declararlo suma puntos.</a:t>
+            </a:r>
+          </a:p>
+        </p:txBody>
+      </p:sp>
+      <p:sp>
+        <p:nvSpPr>
+          <p:cNvPr id="6" name="TextBox 5"/>
           <p:cNvSpPr txBox="1"/>
           <p:nvPr/>
         </p:nvSpPr>
@@ -4641,154 +4810,21 @@
                 </a:solidFill>
                 <a:latin typeface="Calibri"/>
               </a:rPr>
-              <a:t>Taller PI VetCare — pistas (checklist vacio)</a:t>
-            </a:r>
-          </a:p>
-        </p:txBody>
-      </p:sp>
-      <p:sp>
-        <p:nvSpPr>
-          <p:cNvPr id="5" name="Rounded Rectangle 4"/>
-          <p:cNvSpPr/>
-          <p:nvPr/>
-        </p:nvSpPr>
-        <p:spPr>
-          <a:xfrm>
-            <a:off x="457200" y="1261872"/>
-            <a:ext cx="11277295" cy="566928"/>
-          </a:xfrm>
-          <a:prstGeom prst="roundRect">
-            <a:avLst>
-              <a:gd name="adj" fmla="val 12000"/>
-            </a:avLst>
-          </a:prstGeom>
-          <a:solidFill>
-            <a:srgbClr val="F2F2F2"/>
-          </a:solidFill>
-          <a:ln>
-            <a:noFill/>
-          </a:ln>
-        </p:spPr>
-        <p:style>
-          <a:lnRef idx="1">
-            <a:schemeClr val="accent1"/>
-          </a:lnRef>
-          <a:fillRef idx="3">
-            <a:schemeClr val="accent1"/>
-          </a:fillRef>
-          <a:effectRef idx="2">
-            <a:schemeClr val="accent1"/>
-          </a:effectRef>
-          <a:fontRef idx="minor">
-            <a:schemeClr val="lt1"/>
-          </a:fontRef>
-        </p:style>
-        <p:txBody>
-          <a:bodyPr rtlCol="0" anchor="ctr"/>
-          <a:lstStyle/>
-          <a:p>
-            <a:pPr algn="ctr"/>
-          </a:p>
-        </p:txBody>
-      </p:sp>
-      <p:sp>
-        <p:nvSpPr>
-          <p:cNvPr id="6" name="Rectangle 5"/>
-          <p:cNvSpPr/>
-          <p:nvPr/>
-        </p:nvSpPr>
-        <p:spPr>
-          <a:xfrm>
-            <a:off x="640080" y="1408175"/>
-            <a:ext cx="274320" cy="274320"/>
-          </a:xfrm>
-          <a:prstGeom prst="rect">
-            <a:avLst/>
-          </a:prstGeom>
-          <a:solidFill>
-            <a:srgbClr val="FFFFFF"/>
-          </a:solidFill>
-          <a:ln>
-            <a:solidFill>
-              <a:srgbClr val="333333"/>
-            </a:solidFill>
-          </a:ln>
-        </p:spPr>
-        <p:style>
-          <a:lnRef idx="1">
-            <a:schemeClr val="accent1"/>
-          </a:lnRef>
-          <a:fillRef idx="3">
-            <a:schemeClr val="accent1"/>
-          </a:fillRef>
-          <a:effectRef idx="2">
-            <a:schemeClr val="accent1"/>
-          </a:effectRef>
-          <a:fontRef idx="minor">
-            <a:schemeClr val="lt1"/>
-          </a:fontRef>
-        </p:style>
-        <p:txBody>
-          <a:bodyPr rtlCol="0" anchor="ctr"/>
-          <a:lstStyle/>
-          <a:p>
-            <a:pPr algn="ctr"/>
-          </a:p>
-        </p:txBody>
-      </p:sp>
-      <p:sp>
-        <p:nvSpPr>
-          <p:cNvPr id="7" name="Rectangle 6"/>
-          <p:cNvSpPr/>
-          <p:nvPr/>
-        </p:nvSpPr>
-        <p:spPr>
-          <a:xfrm>
-            <a:off x="640080" y="1408175"/>
-            <a:ext cx="73152" cy="274320"/>
-          </a:xfrm>
-          <a:prstGeom prst="rect">
-            <a:avLst/>
-          </a:prstGeom>
-          <a:solidFill>
-            <a:srgbClr val="269CCB"/>
-          </a:solidFill>
-          <a:ln>
-            <a:noFill/>
-          </a:ln>
-        </p:spPr>
-        <p:style>
-          <a:lnRef idx="1">
-            <a:schemeClr val="accent1"/>
-          </a:lnRef>
-          <a:fillRef idx="3">
-            <a:schemeClr val="accent1"/>
-          </a:fillRef>
-          <a:effectRef idx="2">
-            <a:schemeClr val="accent1"/>
-          </a:effectRef>
-          <a:fontRef idx="minor">
-            <a:schemeClr val="lt1"/>
-          </a:fontRef>
-        </p:style>
-        <p:txBody>
-          <a:bodyPr rtlCol="0" anchor="ctr"/>
-          <a:lstStyle/>
-          <a:p>
-            <a:pPr algn="ctr"/>
-          </a:p>
-        </p:txBody>
-      </p:sp>
-      <p:sp>
-        <p:nvSpPr>
-          <p:cNvPr id="8" name="TextBox 7"/>
+              <a:t>Taller PI VetCare — objetivo y criterios</a:t>
+            </a:r>
+          </a:p>
+        </p:txBody>
+      </p:sp>
+      <p:sp>
+        <p:nvSpPr>
+          <p:cNvPr id="5" name="TextBox 4"/>
           <p:cNvSpPr txBox="1"/>
           <p:nvPr/>
         </p:nvSpPr>
         <p:spPr>
           <a:xfrm>
-            <a:off x="1097280" y="1353312"/>
-            <a:ext cx="10362895" cy="402336"/>
+            <a:off x="457200" y="1170432"/>
+            <a:ext cx="11277295" cy="5230368"/>
           </a:xfrm>
           <a:prstGeom prst="rect">
             <a:avLst/>
@@ -4796,9 +4832,16 @@
           <a:noFill/>
         </p:spPr>
         <p:txBody>
-          <a:bodyPr wrap="square" anchor="ctr"/>
-          <a:lstStyle/>
-          <a:p>
+          <a:bodyPr wrap="square">
+            <a:spAutoFit/>
+          </a:bodyPr>
+          <a:lstStyle/>
+          <a:p>
+            <a:pPr>
+              <a:spcAft>
+                <a:spcPts val="800"/>
+              </a:spcAft>
+            </a:pPr>
             <a:r>
               <a:rPr sz="1500" b="0" i="0">
                 <a:solidFill>
@@ -4806,164 +4849,17 @@
                 </a:solidFill>
                 <a:latin typeface="Calibri"/>
               </a:rPr>
-              <a:t>□ Prueba de fallo?</a:t>
-            </a:r>
-          </a:p>
-        </p:txBody>
-      </p:sp>
-      <p:sp>
-        <p:nvSpPr>
-          <p:cNvPr id="9" name="Rounded Rectangle 8"/>
-          <p:cNvSpPr/>
-          <p:nvPr/>
-        </p:nvSpPr>
-        <p:spPr>
-          <a:xfrm>
-            <a:off x="457200" y="1938528"/>
-            <a:ext cx="11277295" cy="566928"/>
-          </a:xfrm>
-          <a:prstGeom prst="roundRect">
-            <a:avLst>
-              <a:gd name="adj" fmla="val 12000"/>
-            </a:avLst>
-          </a:prstGeom>
-          <a:solidFill>
-            <a:srgbClr val="F2F2F2"/>
-          </a:solidFill>
-          <a:ln>
-            <a:noFill/>
-          </a:ln>
-        </p:spPr>
-        <p:style>
-          <a:lnRef idx="1">
-            <a:schemeClr val="accent1"/>
-          </a:lnRef>
-          <a:fillRef idx="3">
-            <a:schemeClr val="accent1"/>
-          </a:fillRef>
-          <a:effectRef idx="2">
-            <a:schemeClr val="accent1"/>
-          </a:effectRef>
-          <a:fontRef idx="minor">
-            <a:schemeClr val="lt1"/>
-          </a:fontRef>
-        </p:style>
-        <p:txBody>
-          <a:bodyPr rtlCol="0" anchor="ctr"/>
-          <a:lstStyle/>
-          <a:p>
-            <a:pPr algn="ctr"/>
-          </a:p>
-        </p:txBody>
-      </p:sp>
-      <p:sp>
-        <p:nvSpPr>
-          <p:cNvPr id="10" name="Rectangle 9"/>
-          <p:cNvSpPr/>
-          <p:nvPr/>
-        </p:nvSpPr>
-        <p:spPr>
-          <a:xfrm>
-            <a:off x="640080" y="2084832"/>
-            <a:ext cx="274320" cy="274320"/>
-          </a:xfrm>
-          <a:prstGeom prst="rect">
-            <a:avLst/>
-          </a:prstGeom>
-          <a:solidFill>
-            <a:srgbClr val="FFFFFF"/>
-          </a:solidFill>
-          <a:ln>
-            <a:solidFill>
-              <a:srgbClr val="333333"/>
-            </a:solidFill>
-          </a:ln>
-        </p:spPr>
-        <p:style>
-          <a:lnRef idx="1">
-            <a:schemeClr val="accent1"/>
-          </a:lnRef>
-          <a:fillRef idx="3">
-            <a:schemeClr val="accent1"/>
-          </a:fillRef>
-          <a:effectRef idx="2">
-            <a:schemeClr val="accent1"/>
-          </a:effectRef>
-          <a:fontRef idx="minor">
-            <a:schemeClr val="lt1"/>
-          </a:fontRef>
-        </p:style>
-        <p:txBody>
-          <a:bodyPr rtlCol="0" anchor="ctr"/>
-          <a:lstStyle/>
-          <a:p>
-            <a:pPr algn="ctr"/>
-          </a:p>
-        </p:txBody>
-      </p:sp>
-      <p:sp>
-        <p:nvSpPr>
-          <p:cNvPr id="11" name="Rectangle 10"/>
-          <p:cNvSpPr/>
-          <p:nvPr/>
-        </p:nvSpPr>
-        <p:spPr>
-          <a:xfrm>
-            <a:off x="640080" y="2084832"/>
-            <a:ext cx="73152" cy="274320"/>
-          </a:xfrm>
-          <a:prstGeom prst="rect">
-            <a:avLst/>
-          </a:prstGeom>
-          <a:solidFill>
-            <a:srgbClr val="269CCB"/>
-          </a:solidFill>
-          <a:ln>
-            <a:noFill/>
-          </a:ln>
-        </p:spPr>
-        <p:style>
-          <a:lnRef idx="1">
-            <a:schemeClr val="accent1"/>
-          </a:lnRef>
-          <a:fillRef idx="3">
-            <a:schemeClr val="accent1"/>
-          </a:fillRef>
-          <a:effectRef idx="2">
-            <a:schemeClr val="accent1"/>
-          </a:effectRef>
-          <a:fontRef idx="minor">
-            <a:schemeClr val="lt1"/>
-          </a:fontRef>
-        </p:style>
-        <p:txBody>
-          <a:bodyPr rtlCol="0" anchor="ctr"/>
-          <a:lstStyle/>
-          <a:p>
-            <a:pPr algn="ctr"/>
-          </a:p>
-        </p:txBody>
-      </p:sp>
-      <p:sp>
-        <p:nvSpPr>
-          <p:cNvPr id="12" name="TextBox 11"/>
-          <p:cNvSpPr txBox="1"/>
-          <p:nvPr/>
-        </p:nvSpPr>
-        <p:spPr>
-          <a:xfrm>
-            <a:off x="1097280" y="2029968"/>
-            <a:ext cx="10362895" cy="402336"/>
-          </a:xfrm>
-          <a:prstGeom prst="rect">
-            <a:avLst/>
-          </a:prstGeom>
-          <a:noFill/>
-        </p:spPr>
-        <p:txBody>
-          <a:bodyPr wrap="square" anchor="ctr"/>
-          <a:lstStyle/>
-          <a:p>
+              <a:t>–   </a:t>
+            </a:r>
+            <a:r>
+              <a:rPr sz="1500" b="1" i="0">
+                <a:solidFill>
+                  <a:srgbClr val="333333"/>
+                </a:solidFill>
+                <a:latin typeface="Calibri"/>
+              </a:rPr>
+              <a:t>Objetivo:</a:t>
+            </a:r>
             <a:r>
               <a:rPr sz="1500" b="0" i="0">
                 <a:solidFill>
@@ -4971,164 +4867,15 @@
                 </a:solidFill>
                 <a:latin typeface="Calibri"/>
               </a:rPr>
-              <a:t>□ Locks/indices en checklist?</a:t>
-            </a:r>
-          </a:p>
-        </p:txBody>
-      </p:sp>
-      <p:sp>
-        <p:nvSpPr>
-          <p:cNvPr id="13" name="Rounded Rectangle 12"/>
-          <p:cNvSpPr/>
-          <p:nvPr/>
-        </p:nvSpPr>
-        <p:spPr>
-          <a:xfrm>
-            <a:off x="457200" y="2615184"/>
-            <a:ext cx="11277295" cy="566928"/>
-          </a:xfrm>
-          <a:prstGeom prst="roundRect">
-            <a:avLst>
-              <a:gd name="adj" fmla="val 12000"/>
-            </a:avLst>
-          </a:prstGeom>
-          <a:solidFill>
-            <a:srgbClr val="F2F2F2"/>
-          </a:solidFill>
-          <a:ln>
-            <a:noFill/>
-          </a:ln>
-        </p:spPr>
-        <p:style>
-          <a:lnRef idx="1">
-            <a:schemeClr val="accent1"/>
-          </a:lnRef>
-          <a:fillRef idx="3">
-            <a:schemeClr val="accent1"/>
-          </a:fillRef>
-          <a:effectRef idx="2">
-            <a:schemeClr val="accent1"/>
-          </a:effectRef>
-          <a:fontRef idx="minor">
-            <a:schemeClr val="lt1"/>
-          </a:fontRef>
-        </p:style>
-        <p:txBody>
-          <a:bodyPr rtlCol="0" anchor="ctr"/>
-          <a:lstStyle/>
-          <a:p>
-            <a:pPr algn="ctr"/>
-          </a:p>
-        </p:txBody>
-      </p:sp>
-      <p:sp>
-        <p:nvSpPr>
-          <p:cNvPr id="14" name="Rectangle 13"/>
-          <p:cNvSpPr/>
-          <p:nvPr/>
-        </p:nvSpPr>
-        <p:spPr>
-          <a:xfrm>
-            <a:off x="640080" y="2761488"/>
-            <a:ext cx="274320" cy="274320"/>
-          </a:xfrm>
-          <a:prstGeom prst="rect">
-            <a:avLst/>
-          </a:prstGeom>
-          <a:solidFill>
-            <a:srgbClr val="FFFFFF"/>
-          </a:solidFill>
-          <a:ln>
-            <a:solidFill>
-              <a:srgbClr val="333333"/>
-            </a:solidFill>
-          </a:ln>
-        </p:spPr>
-        <p:style>
-          <a:lnRef idx="1">
-            <a:schemeClr val="accent1"/>
-          </a:lnRef>
-          <a:fillRef idx="3">
-            <a:schemeClr val="accent1"/>
-          </a:fillRef>
-          <a:effectRef idx="2">
-            <a:schemeClr val="accent1"/>
-          </a:effectRef>
-          <a:fontRef idx="minor">
-            <a:schemeClr val="lt1"/>
-          </a:fontRef>
-        </p:style>
-        <p:txBody>
-          <a:bodyPr rtlCol="0" anchor="ctr"/>
-          <a:lstStyle/>
-          <a:p>
-            <a:pPr algn="ctr"/>
-          </a:p>
-        </p:txBody>
-      </p:sp>
-      <p:sp>
-        <p:nvSpPr>
-          <p:cNvPr id="15" name="Rectangle 14"/>
-          <p:cNvSpPr/>
-          <p:nvPr/>
-        </p:nvSpPr>
-        <p:spPr>
-          <a:xfrm>
-            <a:off x="640080" y="2761488"/>
-            <a:ext cx="73152" cy="274320"/>
-          </a:xfrm>
-          <a:prstGeom prst="rect">
-            <a:avLst/>
-          </a:prstGeom>
-          <a:solidFill>
-            <a:srgbClr val="269CCB"/>
-          </a:solidFill>
-          <a:ln>
-            <a:noFill/>
-          </a:ln>
-        </p:spPr>
-        <p:style>
-          <a:lnRef idx="1">
-            <a:schemeClr val="accent1"/>
-          </a:lnRef>
-          <a:fillRef idx="3">
-            <a:schemeClr val="accent1"/>
-          </a:fillRef>
-          <a:effectRef idx="2">
-            <a:schemeClr val="accent1"/>
-          </a:effectRef>
-          <a:fontRef idx="minor">
-            <a:schemeClr val="lt1"/>
-          </a:fontRef>
-        </p:style>
-        <p:txBody>
-          <a:bodyPr rtlCol="0" anchor="ctr"/>
-          <a:lstStyle/>
-          <a:p>
-            <a:pPr algn="ctr"/>
-          </a:p>
-        </p:txBody>
-      </p:sp>
-      <p:sp>
-        <p:nvSpPr>
-          <p:cNvPr id="16" name="TextBox 15"/>
-          <p:cNvSpPr txBox="1"/>
-          <p:nvPr/>
-        </p:nvSpPr>
-        <p:spPr>
-          <a:xfrm>
-            <a:off x="1097280" y="2706624"/>
-            <a:ext cx="10362895" cy="402336"/>
-          </a:xfrm>
-          <a:prstGeom prst="rect">
-            <a:avLst/>
-          </a:prstGeom>
-          <a:noFill/>
-        </p:spPr>
-        <p:txBody>
-          <a:bodyPr wrap="square" anchor="ctr"/>
-          <a:lstStyle/>
-          <a:p>
+              <a:t> La transacción de facturación implementada como procedimiento atómico, su atomicidad demostrada con foto antes y después de un fallo a mitad de camino, el patrón de descuento seguro encapsulado en una función, y la sección «Transacciones y tuning» del informe del PI.</a:t>
+            </a:r>
+          </a:p>
+          <a:p>
+            <a:pPr>
+              <a:spcAft>
+                <a:spcPts val="800"/>
+              </a:spcAft>
+            </a:pPr>
             <a:r>
               <a:rPr sz="1500" b="0" i="0">
                 <a:solidFill>
@@ -5136,14 +4883,328 @@
                 </a:solidFill>
                 <a:latin typeface="Calibri"/>
               </a:rPr>
-              <a:t>□ En informe?</a:t>
-            </a:r>
-          </a:p>
-        </p:txBody>
-      </p:sp>
-      <p:sp>
-        <p:nvSpPr>
-          <p:cNvPr id="17" name="TextBox 16"/>
+              <a:t>–   </a:t>
+            </a:r>
+            <a:r>
+              <a:rPr sz="1500" b="1" i="0">
+                <a:solidFill>
+                  <a:srgbClr val="333333"/>
+                </a:solidFill>
+                <a:latin typeface="Calibri"/>
+              </a:rPr>
+              <a:t>Exito:</a:t>
+            </a:r>
+            <a:r>
+              <a:rPr sz="1500" b="0" i="0">
+                <a:solidFill>
+                  <a:srgbClr val="333333"/>
+                </a:solidFill>
+                <a:latin typeface="Calibri"/>
+              </a:rPr>
+              <a:t> «sp_facturar(p_id_consulta INT, p_insumos INT[], p_cantidades INT[])» con la firma exacta: cabecera en total 0 con «RETURNING … INTO», bucle por línea, «UPDATE» condicional con «GET DIAGNOSTICS … ROW_COUNT» y «RAISE EXCEPTION» si no alcanza.</a:t>
+            </a:r>
+          </a:p>
+          <a:p>
+            <a:pPr>
+              <a:spcAft>
+                <a:spcPts val="800"/>
+              </a:spcAft>
+            </a:pPr>
+            <a:r>
+              <a:rPr sz="1500" b="0" i="0">
+                <a:solidFill>
+                  <a:srgbClr val="333333"/>
+                </a:solidFill>
+                <a:latin typeface="Calibri"/>
+              </a:rPr>
+              <a:t>–   </a:t>
+            </a:r>
+            <a:r>
+              <a:rPr sz="1500" b="1" i="0">
+                <a:solidFill>
+                  <a:srgbClr val="333333"/>
+                </a:solidFill>
+                <a:latin typeface="Calibri"/>
+              </a:rPr>
+              <a:t>Exito:</a:t>
+            </a:r>
+            <a:r>
+              <a:rPr sz="1500" b="0" i="0">
+                <a:solidFill>
+                  <a:srgbClr val="333333"/>
+                </a:solidFill>
+                <a:latin typeface="Calibri"/>
+              </a:rPr>
+              <a:t> El caso exitoso ejecutado y evidenciado: factura por </a:t>
+            </a:r>
+            <a:r>
+              <a:rPr sz="1500" b="1" i="0">
+                <a:solidFill>
+                  <a:srgbClr val="333333"/>
+                </a:solidFill>
+                <a:latin typeface="Calibri"/>
+              </a:rPr>
+              <a:t>27.400</a:t>
+            </a:r>
+            <a:r>
+              <a:rPr sz="1500" b="0" i="0">
+                <a:solidFill>
+                  <a:srgbClr val="333333"/>
+                </a:solidFill>
+                <a:latin typeface="Calibri"/>
+              </a:rPr>
+              <a:t> y los insumos 1, 6 y 5 en </a:t>
+            </a:r>
+            <a:r>
+              <a:rPr sz="1500" b="1" i="0">
+                <a:solidFill>
+                  <a:srgbClr val="333333"/>
+                </a:solidFill>
+                <a:latin typeface="Calibri"/>
+              </a:rPr>
+              <a:t>11, 58 y 5</a:t>
+            </a:r>
+            <a:r>
+              <a:rPr sz="1500" b="0" i="0">
+                <a:solidFill>
+                  <a:srgbClr val="333333"/>
+                </a:solidFill>
+                <a:latin typeface="Calibri"/>
+              </a:rPr>
+              <a:t>.</a:t>
+            </a:r>
+          </a:p>
+          <a:p>
+            <a:pPr>
+              <a:spcAft>
+                <a:spcPts val="800"/>
+              </a:spcAft>
+            </a:pPr>
+            <a:r>
+              <a:rPr sz="1500" b="0" i="0">
+                <a:solidFill>
+                  <a:srgbClr val="333333"/>
+                </a:solidFill>
+                <a:latin typeface="Calibri"/>
+              </a:rPr>
+              <a:t>–   </a:t>
+            </a:r>
+            <a:r>
+              <a:rPr sz="1500" b="1" i="0">
+                <a:solidFill>
+                  <a:srgbClr val="333333"/>
+                </a:solidFill>
+                <a:latin typeface="Calibri"/>
+              </a:rPr>
+              <a:t>Exito:</a:t>
+            </a:r>
+            <a:r>
+              <a:rPr sz="1500" b="0" i="0">
+                <a:solidFill>
+                  <a:srgbClr val="333333"/>
+                </a:solidFill>
+                <a:latin typeface="Calibri"/>
+              </a:rPr>
+              <a:t> La atomicidad probada con </a:t>
+            </a:r>
+            <a:r>
+              <a:rPr sz="1500" b="1" i="0">
+                <a:solidFill>
+                  <a:srgbClr val="333333"/>
+                </a:solidFill>
+                <a:latin typeface="Calibri"/>
+              </a:rPr>
+              <a:t>la misma consulta</a:t>
+            </a:r>
+            <a:r>
+              <a:rPr sz="1500" b="0" i="0">
+                <a:solidFill>
+                  <a:srgbClr val="333333"/>
+                </a:solidFill>
+                <a:latin typeface="Calibri"/>
+              </a:rPr>
+              <a:t> de foto inicial y final, y dicho con datos que el stock del insumo 3 </a:t>
+            </a:r>
+            <a:r>
+              <a:rPr sz="1500" b="1" i="0">
+                <a:solidFill>
+                  <a:srgbClr val="333333"/>
+                </a:solidFill>
+                <a:latin typeface="Calibri"/>
+              </a:rPr>
+              <a:t>volvió a 40</a:t>
+            </a:r>
+            <a:r>
+              <a:rPr sz="1500" b="0" i="0">
+                <a:solidFill>
+                  <a:srgbClr val="333333"/>
+                </a:solidFill>
+                <a:latin typeface="Calibri"/>
+              </a:rPr>
+              <a:t> y que no quedó factura ni línea huérfana.</a:t>
+            </a:r>
+          </a:p>
+          <a:p>
+            <a:pPr>
+              <a:spcAft>
+                <a:spcPts val="800"/>
+              </a:spcAft>
+            </a:pPr>
+            <a:r>
+              <a:rPr sz="1500" b="0" i="0">
+                <a:solidFill>
+                  <a:srgbClr val="333333"/>
+                </a:solidFill>
+                <a:latin typeface="Calibri"/>
+              </a:rPr>
+              <a:t>–   </a:t>
+            </a:r>
+            <a:r>
+              <a:rPr sz="1500" b="1" i="0">
+                <a:solidFill>
+                  <a:srgbClr val="333333"/>
+                </a:solidFill>
+                <a:latin typeface="Calibri"/>
+              </a:rPr>
+              <a:t>Exito:</a:t>
+            </a:r>
+            <a:r>
+              <a:rPr sz="1500" b="0" i="0">
+                <a:solidFill>
+                  <a:srgbClr val="333333"/>
+                </a:solidFill>
+                <a:latin typeface="Calibri"/>
+              </a:rPr>
+              <a:t> «fn_descontar_stock» devolviendo «BOOLEAN» — </a:t>
+            </a:r>
+            <a:r>
+              <a:rPr sz="1500" b="1" i="0">
+                <a:solidFill>
+                  <a:srgbClr val="333333"/>
+                </a:solidFill>
+                <a:latin typeface="Calibri"/>
+              </a:rPr>
+              <a:t>«FALSE», no excepción</a:t>
+            </a:r>
+            <a:r>
+              <a:rPr sz="1500" b="0" i="0">
+                <a:solidFill>
+                  <a:srgbClr val="333333"/>
+                </a:solidFill>
+                <a:latin typeface="Calibri"/>
+              </a:rPr>
+              <a:t>, cuando no hay stock — con la prueba que arroja «true / false / true» y ningún stock negativo.</a:t>
+            </a:r>
+          </a:p>
+          <a:p>
+            <a:pPr>
+              <a:spcAft>
+                <a:spcPts val="800"/>
+              </a:spcAft>
+            </a:pPr>
+            <a:r>
+              <a:rPr sz="1500" b="0" i="0">
+                <a:solidFill>
+                  <a:srgbClr val="333333"/>
+                </a:solidFill>
+                <a:latin typeface="Calibri"/>
+              </a:rPr>
+              <a:t>–   </a:t>
+            </a:r>
+            <a:r>
+              <a:rPr sz="1500" b="1" i="0">
+                <a:solidFill>
+                  <a:srgbClr val="333333"/>
+                </a:solidFill>
+                <a:latin typeface="Calibri"/>
+              </a:rPr>
+              <a:t>Exito:</a:t>
+            </a:r>
+            <a:r>
+              <a:rPr sz="1500" b="0" i="0">
+                <a:solidFill>
+                  <a:srgbClr val="333333"/>
+                </a:solidFill>
+                <a:latin typeface="Calibri"/>
+              </a:rPr>
+              <a:t> La sección del informe con sus 4 bloques: </a:t>
+            </a:r>
+            <a:r>
+              <a:rPr sz="1500" b="1" i="0">
+                <a:solidFill>
+                  <a:srgbClr val="333333"/>
+                </a:solidFill>
+                <a:latin typeface="Calibri"/>
+              </a:rPr>
+              <a:t>3 transacciones</a:t>
+            </a:r>
+            <a:r>
+              <a:rPr sz="1500" b="0" i="0">
+                <a:solidFill>
+                  <a:srgbClr val="333333"/>
+                </a:solidFill>
+                <a:latin typeface="Calibri"/>
+              </a:rPr>
+              <a:t> con su punto de fallo, el checklist de </a:t>
+            </a:r>
+            <a:r>
+              <a:rPr sz="1500" b="1" i="0">
+                <a:solidFill>
+                  <a:srgbClr val="333333"/>
+                </a:solidFill>
+                <a:latin typeface="Calibri"/>
+              </a:rPr>
+              <a:t>7 ítems</a:t>
+            </a:r>
+            <a:r>
+              <a:rPr sz="1500" b="0" i="0">
+                <a:solidFill>
+                  <a:srgbClr val="333333"/>
+                </a:solidFill>
+                <a:latin typeface="Calibri"/>
+              </a:rPr>
+              <a:t> con estado y evidencia, la decisión documentada y el gap de concurrencia.</a:t>
+            </a:r>
+          </a:p>
+          <a:p>
+            <a:pPr>
+              <a:spcAft>
+                <a:spcPts val="800"/>
+              </a:spcAft>
+            </a:pPr>
+            <a:r>
+              <a:rPr sz="1500" b="0" i="0">
+                <a:solidFill>
+                  <a:srgbClr val="333333"/>
+                </a:solidFill>
+                <a:latin typeface="Calibri"/>
+              </a:rPr>
+              <a:t>–   </a:t>
+            </a:r>
+            <a:r>
+              <a:rPr sz="1500" b="1" i="0">
+                <a:solidFill>
+                  <a:srgbClr val="333333"/>
+                </a:solidFill>
+                <a:latin typeface="Calibri"/>
+              </a:rPr>
+              <a:t>Exito:</a:t>
+            </a:r>
+            <a:r>
+              <a:rPr sz="1500" b="0" i="0">
+                <a:solidFill>
+                  <a:srgbClr val="333333"/>
+                </a:solidFill>
+                <a:latin typeface="Calibri"/>
+              </a:rPr>
+              <a:t> Entrega domingo 23:59.</a:t>
+            </a:r>
+          </a:p>
+        </p:txBody>
+      </p:sp>
+      <p:sp>
+        <p:nvSpPr>
+          <p:cNvPr id="6" name="TextBox 5"/>
           <p:cNvSpPr txBox="1"/>
           <p:nvPr/>
         </p:nvSpPr>
@@ -5317,7 +5378,7 @@
                 </a:solidFill>
                 <a:latin typeface="Calibri"/>
               </a:rPr>
-              <a:t>Criterios de exito / entregable</a:t>
+              <a:t>Taller PI VetCare — escenario / datos de partida</a:t>
             </a:r>
           </a:p>
         </p:txBody>
@@ -5356,7 +5417,7 @@
                 </a:solidFill>
                 <a:latin typeface="Calibri"/>
               </a:rPr>
-              <a:t>–   </a:t>
+              <a:t>–   El esquema de VetCare ya está creado y poblado: consultas </a:t>
             </a:r>
             <a:r>
               <a:rPr sz="1600" b="1" i="0">
@@ -5365,7 +5426,7 @@
                 </a:solidFill>
                 <a:latin typeface="Calibri"/>
               </a:rPr>
-              <a:t>Entregable:</a:t>
+              <a:t>1 a 4</a:t>
             </a:r>
             <a:r>
               <a:rPr sz="1600" b="0" i="0">
@@ -5374,7 +5435,61 @@
                 </a:solidFill>
                 <a:latin typeface="Calibri"/>
               </a:rPr>
-              <a:t> Script transaccional + checklist tuning del PI (1 pag.)</a:t>
+              <a:t>, facturas 1 a 3 con sus 8 líneas de detalle, y </a:t>
+            </a:r>
+            <a:r>
+              <a:rPr sz="1600" b="1" i="0">
+                <a:solidFill>
+                  <a:srgbClr val="333333"/>
+                </a:solidFill>
+                <a:latin typeface="Calibri"/>
+              </a:rPr>
+              <a:t>6 insumos</a:t>
+            </a:r>
+            <a:r>
+              <a:rPr sz="1600" b="0" i="0">
+                <a:solidFill>
+                  <a:srgbClr val="333333"/>
+                </a:solidFill>
+                <a:latin typeface="Calibri"/>
+              </a:rPr>
+              <a:t> con stock 12, </a:t>
+            </a:r>
+            <a:r>
+              <a:rPr sz="1600" b="1" i="0">
+                <a:solidFill>
+                  <a:srgbClr val="333333"/>
+                </a:solidFill>
+                <a:latin typeface="Calibri"/>
+              </a:rPr>
+              <a:t>3</a:t>
+            </a:r>
+            <a:r>
+              <a:rPr sz="1600" b="0" i="0">
+                <a:solidFill>
+                  <a:srgbClr val="333333"/>
+                </a:solidFill>
+                <a:latin typeface="Calibri"/>
+              </a:rPr>
+              <a:t>, 40, 25, </a:t>
+            </a:r>
+            <a:r>
+              <a:rPr sz="1600" b="1" i="0">
+                <a:solidFill>
+                  <a:srgbClr val="333333"/>
+                </a:solidFill>
+                <a:latin typeface="Calibri"/>
+              </a:rPr>
+              <a:t>8</a:t>
+            </a:r>
+            <a:r>
+              <a:rPr sz="1600" b="0" i="0">
+                <a:solidFill>
+                  <a:srgbClr val="333333"/>
+                </a:solidFill>
+                <a:latin typeface="Calibri"/>
+              </a:rPr>
+              <a:t> y 60.</a:t>
             </a:r>
           </a:p>
           <a:p>
@@ -5390,7 +5505,43 @@
                 </a:solidFill>
                 <a:latin typeface="Calibri"/>
               </a:rPr>
-              <a:t>–   Evidencia en playground (enlace) o archivo SQL/PNG propio.</a:t>
+              <a:t>–   Los stocks bajos son </a:t>
+            </a:r>
+            <a:r>
+              <a:rPr sz="1600" b="1" i="0">
+                <a:solidFill>
+                  <a:srgbClr val="333333"/>
+                </a:solidFill>
+                <a:latin typeface="Calibri"/>
+              </a:rPr>
+              <a:t>deliberados</a:t>
+            </a:r>
+            <a:r>
+              <a:rPr sz="1600" b="0" i="0">
+                <a:solidFill>
+                  <a:srgbClr val="333333"/>
+                </a:solidFill>
+                <a:latin typeface="Calibri"/>
+              </a:rPr>
+              <a:t>: el insumo 2 con 3 unidades es el que va a hacer fallar la factura de la pregunta 2, y el insumo 3 con 40 es el que tiene que </a:t>
+            </a:r>
+            <a:r>
+              <a:rPr sz="1600" b="1" i="0">
+                <a:solidFill>
+                  <a:srgbClr val="333333"/>
+                </a:solidFill>
+                <a:latin typeface="Calibri"/>
+              </a:rPr>
+              <a:t>volver</a:t>
+            </a:r>
+            <a:r>
+              <a:rPr sz="1600" b="0" i="0">
+                <a:solidFill>
+                  <a:srgbClr val="333333"/>
+                </a:solidFill>
+                <a:latin typeface="Calibri"/>
+              </a:rPr>
+              <a:t> a 40.</a:t>
             </a:r>
           </a:p>
           <a:p>
@@ -5406,7 +5557,25 @@
                 </a:solidFill>
                 <a:latin typeface="Calibri"/>
               </a:rPr>
-              <a:t>–   Actualizar checklist PI (que criterio de rubrica avanzo).</a:t>
+              <a:t>–   La consulta 4 es la única </a:t>
+            </a:r>
+            <a:r>
+              <a:rPr sz="1600" b="1" i="0">
+                <a:solidFill>
+                  <a:srgbClr val="333333"/>
+                </a:solidFill>
+                <a:latin typeface="Calibri"/>
+              </a:rPr>
+              <a:t>sin facturar</a:t>
+            </a:r>
+            <a:r>
+              <a:rPr sz="1600" b="0" i="0">
+                <a:solidFill>
+                  <a:srgbClr val="333333"/>
+                </a:solidFill>
+                <a:latin typeface="Calibri"/>
+              </a:rPr>
+              <a:t>: es la que vas a facturar tú.</a:t>
             </a:r>
           </a:p>
           <a:p>
@@ -5422,6 +5591,40 @@
                 </a:solidFill>
                 <a:latin typeface="Calibri"/>
               </a:rPr>
+              <a:t>–   En la pregunta 2 el «sp_facturar» </a:t>
+            </a:r>
+            <a:r>
+              <a:rPr sz="1600" b="1" i="0">
+                <a:solidFill>
+                  <a:srgbClr val="333333"/>
+                </a:solidFill>
+                <a:latin typeface="Calibri"/>
+              </a:rPr>
+              <a:t>ya viene creado</a:t>
+            </a:r>
+            <a:r>
+              <a:rPr sz="1600" b="0" i="0">
+                <a:solidFill>
+                  <a:srgbClr val="333333"/>
+                </a:solidFill>
+                <a:latin typeface="Calibri"/>
+              </a:rPr>
+              <a:t> (versión de referencia), así que puedes demostrar la atomicidad aunque tu propio procedimiento de la pregunta 1 te haya quedado a medias.</a:t>
+            </a:r>
+          </a:p>
+          <a:p>
+            <a:pPr>
+              <a:spcAft>
+                <a:spcPts val="800"/>
+              </a:spcAft>
+            </a:pPr>
+            <a:r>
+              <a:rPr sz="1600" b="0" i="0">
+                <a:solidFill>
+                  <a:srgbClr val="333333"/>
+                </a:solidFill>
+                <a:latin typeface="Calibri"/>
+              </a:rPr>
               <a:t>–   </a:t>
             </a:r>
             <a:r>
@@ -5431,7 +5634,7 @@
                 </a:solidFill>
                 <a:latin typeface="Calibri"/>
               </a:rPr>
-              <a:t>Entrega en ExamLab</a:t>
+              <a:t>Motor:</a:t>
             </a:r>
             <a:r>
               <a:rPr sz="1600" b="0" i="0">
@@ -5440,7 +5643,25 @@
                 </a:solidFill>
                 <a:latin typeface="Calibri"/>
               </a:rPr>
-              <a:t> (https://uniaj.examlab.workers.dev/) — domingo 23:59 cuando aplique taller.</a:t>
+              <a:t> PostgreSQL dentro de ExamLab, en el navegador. PL/pgSQL, «CALL», «GET DIAGNOSTICS» y los bloques «DO $$ … EXCEPTION» corren de verdad. Corre con </a:t>
+            </a:r>
+            <a:r>
+              <a:rPr sz="1600" b="1" i="0">
+                <a:solidFill>
+                  <a:srgbClr val="333333"/>
+                </a:solidFill>
+                <a:latin typeface="Calibri"/>
+              </a:rPr>
+              <a:t>una sola sesión</a:t>
+            </a:r>
+            <a:r>
+              <a:rPr sz="1600" b="0" i="0">
+                <a:solidFill>
+                  <a:srgbClr val="333333"/>
+                </a:solidFill>
+                <a:latin typeface="Calibri"/>
+              </a:rPr>
+              <a:t>: la concurrencia real no se puede montar aquí, y eso es la Clase 10.</a:t>
             </a:r>
           </a:p>
         </p:txBody>
@@ -5621,7 +5842,7 @@
                 </a:solidFill>
                 <a:latin typeface="Calibri"/>
               </a:rPr>
-              <a:t>Para el PI esta semana</a:t>
+              <a:t>Taller PI VetCare — pasos guiados</a:t>
             </a:r>
           </a:p>
         </p:txBody>
@@ -5634,8 +5855,163 @@
         </p:nvSpPr>
         <p:spPr>
           <a:xfrm>
-            <a:off x="457200" y="1261872"/>
-            <a:ext cx="11277295" cy="1051560"/>
+            <a:off x="457200" y="1234440"/>
+            <a:ext cx="11277295" cy="950976"/>
+          </a:xfrm>
+          <a:prstGeom prst="roundRect">
+            <a:avLst>
+              <a:gd name="adj" fmla="val 12000"/>
+            </a:avLst>
+          </a:prstGeom>
+          <a:solidFill>
+            <a:srgbClr val="F2F2F2"/>
+          </a:solidFill>
+          <a:ln>
+            <a:noFill/>
+          </a:ln>
+        </p:spPr>
+        <p:style>
+          <a:lnRef idx="1">
+            <a:schemeClr val="accent1"/>
+          </a:lnRef>
+          <a:fillRef idx="3">
+            <a:schemeClr val="accent1"/>
+          </a:fillRef>
+          <a:effectRef idx="2">
+            <a:schemeClr val="accent1"/>
+          </a:effectRef>
+          <a:fontRef idx="minor">
+            <a:schemeClr val="lt1"/>
+          </a:fontRef>
+        </p:style>
+        <p:txBody>
+          <a:bodyPr rtlCol="0" anchor="ctr"/>
+          <a:lstStyle/>
+          <a:p>
+            <a:pPr algn="ctr"/>
+          </a:p>
+        </p:txBody>
+      </p:sp>
+      <p:sp>
+        <p:nvSpPr>
+          <p:cNvPr id="6" name="Rounded Rectangle 5"/>
+          <p:cNvSpPr/>
+          <p:nvPr/>
+        </p:nvSpPr>
+        <p:spPr>
+          <a:xfrm>
+            <a:off x="594360" y="1490472"/>
+            <a:ext cx="438912" cy="438912"/>
+          </a:xfrm>
+          <a:prstGeom prst="roundRect">
+            <a:avLst>
+              <a:gd name="adj" fmla="val 12000"/>
+            </a:avLst>
+          </a:prstGeom>
+          <a:solidFill>
+            <a:srgbClr val="095292"/>
+          </a:solidFill>
+          <a:ln>
+            <a:noFill/>
+          </a:ln>
+        </p:spPr>
+        <p:style>
+          <a:lnRef idx="1">
+            <a:schemeClr val="accent1"/>
+          </a:lnRef>
+          <a:fillRef idx="3">
+            <a:schemeClr val="accent1"/>
+          </a:fillRef>
+          <a:effectRef idx="2">
+            <a:schemeClr val="accent1"/>
+          </a:effectRef>
+          <a:fontRef idx="minor">
+            <a:schemeClr val="lt1"/>
+          </a:fontRef>
+        </p:style>
+        <p:txBody>
+          <a:bodyPr rtlCol="0" anchor="ctr"/>
+          <a:lstStyle/>
+          <a:p>
+            <a:pPr algn="ctr"/>
+          </a:p>
+        </p:txBody>
+      </p:sp>
+      <p:sp>
+        <p:nvSpPr>
+          <p:cNvPr id="7" name="TextBox 6"/>
+          <p:cNvSpPr txBox="1"/>
+          <p:nvPr/>
+        </p:nvSpPr>
+        <p:spPr>
+          <a:xfrm>
+            <a:off x="594360" y="1490472"/>
+            <a:ext cx="438912" cy="438912"/>
+          </a:xfrm>
+          <a:prstGeom prst="rect">
+            <a:avLst/>
+          </a:prstGeom>
+          <a:noFill/>
+        </p:spPr>
+        <p:txBody>
+          <a:bodyPr wrap="square" anchor="ctr"/>
+          <a:lstStyle/>
+          <a:p>
+            <a:pPr algn="ctr"/>
+            <a:r>
+              <a:rPr sz="1600" b="1" i="0">
+                <a:solidFill>
+                  <a:srgbClr val="FFFFFF"/>
+                </a:solidFill>
+                <a:latin typeface="Calibri"/>
+              </a:rPr>
+              <a:t>1</a:t>
+            </a:r>
+          </a:p>
+        </p:txBody>
+      </p:sp>
+      <p:sp>
+        <p:nvSpPr>
+          <p:cNvPr id="8" name="TextBox 7"/>
+          <p:cNvSpPr txBox="1"/>
+          <p:nvPr/>
+        </p:nvSpPr>
+        <p:spPr>
+          <a:xfrm>
+            <a:off x="1188720" y="1325880"/>
+            <a:ext cx="10271455" cy="786384"/>
+          </a:xfrm>
+          <a:prstGeom prst="rect">
+            <a:avLst/>
+          </a:prstGeom>
+          <a:noFill/>
+        </p:spPr>
+        <p:txBody>
+          <a:bodyPr wrap="square" anchor="ctr"/>
+          <a:lstStyle/>
+          <a:p>
+            <a:r>
+              <a:rPr sz="1500" b="1" i="0">
+                <a:solidFill>
+                  <a:srgbClr val="095292"/>
+                </a:solidFill>
+                <a:latin typeface="Calibri"/>
+              </a:rPr>
+              <a:t>Escribir sp_facturar(p_id_consulta, p_insumos INT[], p_cantidades INT[]) en PL/pgSQL: cabecera con total 0, bucle por linea con el guardia stock &gt;= cantidad, y UPDATE del total al final.</a:t>
+            </a:r>
+          </a:p>
+        </p:txBody>
+      </p:sp>
+      <p:sp>
+        <p:nvSpPr>
+          <p:cNvPr id="9" name="Rounded Rectangle 8"/>
+          <p:cNvSpPr/>
+          <p:nvPr/>
+        </p:nvSpPr>
+        <p:spPr>
+          <a:xfrm>
+            <a:off x="457200" y="2276856"/>
+            <a:ext cx="11277295" cy="950976"/>
           </a:xfrm>
           <a:prstGeom prst="roundRect">
             <a:avLst>
@@ -5673,20 +6049,22 @@
       </p:sp>
       <p:sp>
         <p:nvSpPr>
-          <p:cNvPr id="6" name="Rectangle 5"/>
+          <p:cNvPr id="10" name="Rounded Rectangle 9"/>
           <p:cNvSpPr/>
           <p:nvPr/>
         </p:nvSpPr>
         <p:spPr>
           <a:xfrm>
-            <a:off x="457200" y="1261872"/>
-            <a:ext cx="128016" cy="1051560"/>
-          </a:xfrm>
-          <a:prstGeom prst="rect">
-            <a:avLst/>
+            <a:off x="594360" y="2532888"/>
+            <a:ext cx="438912" cy="438912"/>
+          </a:xfrm>
+          <a:prstGeom prst="roundRect">
+            <a:avLst>
+              <a:gd name="adj" fmla="val 12000"/>
+            </a:avLst>
           </a:prstGeom>
           <a:solidFill>
-            <a:srgbClr val="269CCB"/>
+            <a:srgbClr val="095292"/>
           </a:solidFill>
           <a:ln>
             <a:noFill/>
@@ -5716,14 +6094,14 @@
       </p:sp>
       <p:sp>
         <p:nvSpPr>
-          <p:cNvPr id="7" name="TextBox 6"/>
+          <p:cNvPr id="11" name="TextBox 10"/>
           <p:cNvSpPr txBox="1"/>
           <p:nvPr/>
         </p:nvSpPr>
         <p:spPr>
           <a:xfrm>
-            <a:off x="777240" y="1399031"/>
-            <a:ext cx="10774375" cy="822959"/>
+            <a:off x="594360" y="2532888"/>
+            <a:ext cx="438912" cy="438912"/>
           </a:xfrm>
           <a:prstGeom prst="rect">
             <a:avLst/>
@@ -5731,49 +6109,64 @@
           <a:noFill/>
         </p:spPr>
         <p:txBody>
-          <a:bodyPr wrap="square">
-            <a:spAutoFit/>
-          </a:bodyPr>
-          <a:lstStyle/>
-          <a:p>
-            <a:r>
-              <a:rPr sz="1200" b="1" i="0">
-                <a:solidFill>
-                  <a:srgbClr val="269CCB"/>
-                </a:solidFill>
-                <a:latin typeface="Calibri"/>
-              </a:rPr>
-              <a:t>Info</a:t>
-            </a:r>
-          </a:p>
-          <a:p>
-            <a:pPr>
-              <a:spcBef>
-                <a:spcPts val="400"/>
-              </a:spcBef>
-            </a:pPr>
-            <a:r>
-              <a:rPr sz="1400" b="0" i="0">
-                <a:solidFill>
-                  <a:srgbClr val="333333"/>
-                </a:solidFill>
-                <a:latin typeface="Calibri"/>
-              </a:rPr>
-              <a:t>Hito: Transaccion de negocio (factura + stock) + notas de tuning</a:t>
-            </a:r>
-          </a:p>
-        </p:txBody>
-      </p:sp>
-      <p:sp>
-        <p:nvSpPr>
-          <p:cNvPr id="8" name="Rounded Rectangle 7"/>
+          <a:bodyPr wrap="square" anchor="ctr"/>
+          <a:lstStyle/>
+          <a:p>
+            <a:pPr algn="ctr"/>
+            <a:r>
+              <a:rPr sz="1600" b="1" i="0">
+                <a:solidFill>
+                  <a:srgbClr val="FFFFFF"/>
+                </a:solidFill>
+                <a:latin typeface="Calibri"/>
+              </a:rPr>
+              <a:t>2</a:t>
+            </a:r>
+          </a:p>
+        </p:txBody>
+      </p:sp>
+      <p:sp>
+        <p:nvSpPr>
+          <p:cNvPr id="12" name="TextBox 11"/>
+          <p:cNvSpPr txBox="1"/>
+          <p:nvPr/>
+        </p:nvSpPr>
+        <p:spPr>
+          <a:xfrm>
+            <a:off x="1188720" y="2368296"/>
+            <a:ext cx="10271455" cy="786384"/>
+          </a:xfrm>
+          <a:prstGeom prst="rect">
+            <a:avLst/>
+          </a:prstGeom>
+          <a:noFill/>
+        </p:spPr>
+        <p:txBody>
+          <a:bodyPr wrap="square" anchor="ctr"/>
+          <a:lstStyle/>
+          <a:p>
+            <a:r>
+              <a:rPr sz="1500" b="1" i="0">
+                <a:solidFill>
+                  <a:srgbClr val="095292"/>
+                </a:solidFill>
+                <a:latin typeface="Calibri"/>
+              </a:rPr>
+              <a:t>Probar el fallo a mitad con ARRAY[3,2] / ARRAY[2,10] y demostrar con foto inicial y final que el stock del insumo 3 volvio a 40.</a:t>
+            </a:r>
+          </a:p>
+        </p:txBody>
+      </p:sp>
+      <p:sp>
+        <p:nvSpPr>
+          <p:cNvPr id="13" name="Rounded Rectangle 12"/>
           <p:cNvSpPr/>
           <p:nvPr/>
         </p:nvSpPr>
         <p:spPr>
           <a:xfrm>
-            <a:off x="457200" y="2478024"/>
-            <a:ext cx="11277295" cy="1051560"/>
+            <a:off x="457200" y="3319272"/>
+            <a:ext cx="11277295" cy="950976"/>
           </a:xfrm>
           <a:prstGeom prst="roundRect">
             <a:avLst>
@@ -5781,7 +6174,7 @@
             </a:avLst>
           </a:prstGeom>
           <a:solidFill>
-            <a:srgbClr val="FFF8E1"/>
+            <a:srgbClr val="F2F2F2"/>
           </a:solidFill>
           <a:ln>
             <a:noFill/>
@@ -5811,20 +6204,22 @@
       </p:sp>
       <p:sp>
         <p:nvSpPr>
-          <p:cNvPr id="9" name="Rectangle 8"/>
+          <p:cNvPr id="14" name="Rounded Rectangle 13"/>
           <p:cNvSpPr/>
           <p:nvPr/>
         </p:nvSpPr>
         <p:spPr>
           <a:xfrm>
-            <a:off x="457200" y="2478024"/>
-            <a:ext cx="128016" cy="1051560"/>
-          </a:xfrm>
-          <a:prstGeom prst="rect">
-            <a:avLst/>
+            <a:off x="594360" y="3575304"/>
+            <a:ext cx="438912" cy="438912"/>
+          </a:xfrm>
+          <a:prstGeom prst="roundRect">
+            <a:avLst>
+              <a:gd name="adj" fmla="val 12000"/>
+            </a:avLst>
           </a:prstGeom>
           <a:solidFill>
-            <a:srgbClr val="FFD000"/>
+            <a:srgbClr val="095292"/>
           </a:solidFill>
           <a:ln>
             <a:noFill/>
@@ -5854,14 +6249,14 @@
       </p:sp>
       <p:sp>
         <p:nvSpPr>
-          <p:cNvPr id="10" name="TextBox 9"/>
+          <p:cNvPr id="15" name="TextBox 14"/>
           <p:cNvSpPr txBox="1"/>
           <p:nvPr/>
         </p:nvSpPr>
         <p:spPr>
           <a:xfrm>
-            <a:off x="777240" y="2615184"/>
-            <a:ext cx="10774375" cy="822959"/>
+            <a:off x="594360" y="3575304"/>
+            <a:ext cx="438912" cy="438912"/>
           </a:xfrm>
           <a:prstGeom prst="rect">
             <a:avLst/>
@@ -5869,49 +6264,64 @@
           <a:noFill/>
         </p:spPr>
         <p:txBody>
-          <a:bodyPr wrap="square">
-            <a:spAutoFit/>
-          </a:bodyPr>
-          <a:lstStyle/>
-          <a:p>
-            <a:r>
-              <a:rPr sz="1200" b="1" i="0">
-                <a:solidFill>
-                  <a:srgbClr val="FFD000"/>
-                </a:solidFill>
-                <a:latin typeface="Calibri"/>
-              </a:rPr>
-              <a:t>Aclaración</a:t>
-            </a:r>
-          </a:p>
-          <a:p>
-            <a:pPr>
-              <a:spcBef>
-                <a:spcPts val="400"/>
-              </a:spcBef>
-            </a:pPr>
-            <a:r>
-              <a:rPr sz="1400" b="0" i="0">
-                <a:solidFill>
-                  <a:srgbClr val="333333"/>
-                </a:solidFill>
-                <a:latin typeface="Calibri"/>
-              </a:rPr>
-              <a:t>Enunciado completo: Clases/Proyecto Integrador/ (VetCare DB).</a:t>
-            </a:r>
-          </a:p>
-        </p:txBody>
-      </p:sp>
-      <p:sp>
-        <p:nvSpPr>
-          <p:cNvPr id="11" name="Rounded Rectangle 10"/>
+          <a:bodyPr wrap="square" anchor="ctr"/>
+          <a:lstStyle/>
+          <a:p>
+            <a:pPr algn="ctr"/>
+            <a:r>
+              <a:rPr sz="1600" b="1" i="0">
+                <a:solidFill>
+                  <a:srgbClr val="FFFFFF"/>
+                </a:solidFill>
+                <a:latin typeface="Calibri"/>
+              </a:rPr>
+              <a:t>3</a:t>
+            </a:r>
+          </a:p>
+        </p:txBody>
+      </p:sp>
+      <p:sp>
+        <p:nvSpPr>
+          <p:cNvPr id="16" name="TextBox 15"/>
+          <p:cNvSpPr txBox="1"/>
+          <p:nvPr/>
+        </p:nvSpPr>
+        <p:spPr>
+          <a:xfrm>
+            <a:off x="1188720" y="3410712"/>
+            <a:ext cx="10271455" cy="786384"/>
+          </a:xfrm>
+          <a:prstGeom prst="rect">
+            <a:avLst/>
+          </a:prstGeom>
+          <a:noFill/>
+        </p:spPr>
+        <p:txBody>
+          <a:bodyPr wrap="square" anchor="ctr"/>
+          <a:lstStyle/>
+          <a:p>
+            <a:r>
+              <a:rPr sz="1500" b="1" i="0">
+                <a:solidFill>
+                  <a:srgbClr val="095292"/>
+                </a:solidFill>
+                <a:latin typeface="Calibri"/>
+              </a:rPr>
+              <a:t>Encapsular el descuento en fn_descontar_stock, que devuelve BOOLEAN y no lanza excepcion.</a:t>
+            </a:r>
+          </a:p>
+        </p:txBody>
+      </p:sp>
+      <p:sp>
+        <p:nvSpPr>
+          <p:cNvPr id="17" name="Rounded Rectangle 16"/>
           <p:cNvSpPr/>
           <p:nvPr/>
         </p:nvSpPr>
         <p:spPr>
           <a:xfrm>
-            <a:off x="457200" y="3694176"/>
-            <a:ext cx="11277295" cy="1051560"/>
+            <a:off x="457200" y="4361688"/>
+            <a:ext cx="11277295" cy="950976"/>
           </a:xfrm>
           <a:prstGeom prst="roundRect">
             <a:avLst>
@@ -5919,7 +6329,7 @@
             </a:avLst>
           </a:prstGeom>
           <a:solidFill>
-            <a:srgbClr val="FBE4E4"/>
+            <a:srgbClr val="E8F4FA"/>
           </a:solidFill>
           <a:ln>
             <a:noFill/>
@@ -5949,20 +6359,22 @@
       </p:sp>
       <p:sp>
         <p:nvSpPr>
-          <p:cNvPr id="12" name="Rectangle 11"/>
+          <p:cNvPr id="18" name="Rounded Rectangle 17"/>
           <p:cNvSpPr/>
           <p:nvPr/>
         </p:nvSpPr>
         <p:spPr>
           <a:xfrm>
-            <a:off x="457200" y="3694176"/>
-            <a:ext cx="128016" cy="1051560"/>
-          </a:xfrm>
-          <a:prstGeom prst="rect">
-            <a:avLst/>
+            <a:off x="594360" y="4617720"/>
+            <a:ext cx="438912" cy="438912"/>
+          </a:xfrm>
+          <a:prstGeom prst="roundRect">
+            <a:avLst>
+              <a:gd name="adj" fmla="val 12000"/>
+            </a:avLst>
           </a:prstGeom>
           <a:solidFill>
-            <a:srgbClr val="A02030"/>
+            <a:srgbClr val="095292"/>
           </a:solidFill>
           <a:ln>
             <a:noFill/>
@@ -5992,14 +6404,14 @@
       </p:sp>
       <p:sp>
         <p:nvSpPr>
-          <p:cNvPr id="13" name="TextBox 12"/>
+          <p:cNvPr id="19" name="TextBox 18"/>
           <p:cNvSpPr txBox="1"/>
           <p:nvPr/>
         </p:nvSpPr>
         <p:spPr>
           <a:xfrm>
-            <a:off x="777240" y="3831336"/>
-            <a:ext cx="10774375" cy="822959"/>
+            <a:off x="594360" y="4617720"/>
+            <a:ext cx="438912" cy="438912"/>
           </a:xfrm>
           <a:prstGeom prst="rect">
             <a:avLst/>
@@ -6007,42 +6419,212 @@
           <a:noFill/>
         </p:spPr>
         <p:txBody>
-          <a:bodyPr wrap="square">
-            <a:spAutoFit/>
-          </a:bodyPr>
-          <a:lstStyle/>
-          <a:p>
-            <a:r>
-              <a:rPr sz="1200" b="1" i="0">
-                <a:solidFill>
-                  <a:srgbClr val="A02030"/>
-                </a:solidFill>
-                <a:latin typeface="Calibri"/>
-              </a:rPr>
-              <a:t>Atención</a:t>
-            </a:r>
-          </a:p>
-          <a:p>
-            <a:pPr>
-              <a:spcBef>
-                <a:spcPts val="400"/>
-              </a:spcBef>
-            </a:pPr>
-            <a:r>
-              <a:rPr sz="1400" b="0" i="0">
-                <a:solidFill>
-                  <a:srgbClr val="333333"/>
-                </a:solidFill>
-                <a:latin typeface="Calibri"/>
-              </a:rPr>
-              <a:t>Taller de la semana en ExamLab (https://uniaj.examlab.workers.dev/): domingo 23:59 (regla del Acuerdo) cuando aplique.</a:t>
-            </a:r>
-          </a:p>
-        </p:txBody>
-      </p:sp>
-      <p:sp>
-        <p:nvSpPr>
-          <p:cNvPr id="14" name="TextBox 13"/>
+          <a:bodyPr wrap="square" anchor="ctr"/>
+          <a:lstStyle/>
+          <a:p>
+            <a:pPr algn="ctr"/>
+            <a:r>
+              <a:rPr sz="1600" b="1" i="0">
+                <a:solidFill>
+                  <a:srgbClr val="FFFFFF"/>
+                </a:solidFill>
+                <a:latin typeface="Calibri"/>
+              </a:rPr>
+              <a:t>4</a:t>
+            </a:r>
+          </a:p>
+        </p:txBody>
+      </p:sp>
+      <p:sp>
+        <p:nvSpPr>
+          <p:cNvPr id="20" name="TextBox 19"/>
+          <p:cNvSpPr txBox="1"/>
+          <p:nvPr/>
+        </p:nvSpPr>
+        <p:spPr>
+          <a:xfrm>
+            <a:off x="1188720" y="4453128"/>
+            <a:ext cx="10271455" cy="786384"/>
+          </a:xfrm>
+          <a:prstGeom prst="rect">
+            <a:avLst/>
+          </a:prstGeom>
+          <a:noFill/>
+        </p:spPr>
+        <p:txBody>
+          <a:bodyPr wrap="square" anchor="ctr"/>
+          <a:lstStyle/>
+          <a:p>
+            <a:r>
+              <a:rPr sz="1500" b="1" i="0">
+                <a:solidFill>
+                  <a:srgbClr val="095292"/>
+                </a:solidFill>
+                <a:latin typeface="Calibri"/>
+              </a:rPr>
+              <a:t>Llenar la seccion Transacciones y tuning del informe: inventario de 3 transacciones y checklist de 7 items.</a:t>
+            </a:r>
+          </a:p>
+        </p:txBody>
+      </p:sp>
+      <p:sp>
+        <p:nvSpPr>
+          <p:cNvPr id="21" name="Rounded Rectangle 20"/>
+          <p:cNvSpPr/>
+          <p:nvPr/>
+        </p:nvSpPr>
+        <p:spPr>
+          <a:xfrm>
+            <a:off x="457200" y="5404104"/>
+            <a:ext cx="11277295" cy="950976"/>
+          </a:xfrm>
+          <a:prstGeom prst="roundRect">
+            <a:avLst>
+              <a:gd name="adj" fmla="val 12000"/>
+            </a:avLst>
+          </a:prstGeom>
+          <a:solidFill>
+            <a:srgbClr val="F2F2F2"/>
+          </a:solidFill>
+          <a:ln>
+            <a:noFill/>
+          </a:ln>
+        </p:spPr>
+        <p:style>
+          <a:lnRef idx="1">
+            <a:schemeClr val="accent1"/>
+          </a:lnRef>
+          <a:fillRef idx="3">
+            <a:schemeClr val="accent1"/>
+          </a:fillRef>
+          <a:effectRef idx="2">
+            <a:schemeClr val="accent1"/>
+          </a:effectRef>
+          <a:fontRef idx="minor">
+            <a:schemeClr val="lt1"/>
+          </a:fontRef>
+        </p:style>
+        <p:txBody>
+          <a:bodyPr rtlCol="0" anchor="ctr"/>
+          <a:lstStyle/>
+          <a:p>
+            <a:pPr algn="ctr"/>
+          </a:p>
+        </p:txBody>
+      </p:sp>
+      <p:sp>
+        <p:nvSpPr>
+          <p:cNvPr id="22" name="Rounded Rectangle 21"/>
+          <p:cNvSpPr/>
+          <p:nvPr/>
+        </p:nvSpPr>
+        <p:spPr>
+          <a:xfrm>
+            <a:off x="594360" y="5660136"/>
+            <a:ext cx="438912" cy="438912"/>
+          </a:xfrm>
+          <a:prstGeom prst="roundRect">
+            <a:avLst>
+              <a:gd name="adj" fmla="val 12000"/>
+            </a:avLst>
+          </a:prstGeom>
+          <a:solidFill>
+            <a:srgbClr val="095292"/>
+          </a:solidFill>
+          <a:ln>
+            <a:noFill/>
+          </a:ln>
+        </p:spPr>
+        <p:style>
+          <a:lnRef idx="1">
+            <a:schemeClr val="accent1"/>
+          </a:lnRef>
+          <a:fillRef idx="3">
+            <a:schemeClr val="accent1"/>
+          </a:fillRef>
+          <a:effectRef idx="2">
+            <a:schemeClr val="accent1"/>
+          </a:effectRef>
+          <a:fontRef idx="minor">
+            <a:schemeClr val="lt1"/>
+          </a:fontRef>
+        </p:style>
+        <p:txBody>
+          <a:bodyPr rtlCol="0" anchor="ctr"/>
+          <a:lstStyle/>
+          <a:p>
+            <a:pPr algn="ctr"/>
+          </a:p>
+        </p:txBody>
+      </p:sp>
+      <p:sp>
+        <p:nvSpPr>
+          <p:cNvPr id="23" name="TextBox 22"/>
+          <p:cNvSpPr txBox="1"/>
+          <p:nvPr/>
+        </p:nvSpPr>
+        <p:spPr>
+          <a:xfrm>
+            <a:off x="594360" y="5660136"/>
+            <a:ext cx="438912" cy="438912"/>
+          </a:xfrm>
+          <a:prstGeom prst="rect">
+            <a:avLst/>
+          </a:prstGeom>
+          <a:noFill/>
+        </p:spPr>
+        <p:txBody>
+          <a:bodyPr wrap="square" anchor="ctr"/>
+          <a:lstStyle/>
+          <a:p>
+            <a:pPr algn="ctr"/>
+            <a:r>
+              <a:rPr sz="1600" b="1" i="0">
+                <a:solidFill>
+                  <a:srgbClr val="FFFFFF"/>
+                </a:solidFill>
+                <a:latin typeface="Calibri"/>
+              </a:rPr>
+              <a:t>5</a:t>
+            </a:r>
+          </a:p>
+        </p:txBody>
+      </p:sp>
+      <p:sp>
+        <p:nvSpPr>
+          <p:cNvPr id="24" name="TextBox 23"/>
+          <p:cNvSpPr txBox="1"/>
+          <p:nvPr/>
+        </p:nvSpPr>
+        <p:spPr>
+          <a:xfrm>
+            <a:off x="1188720" y="5495544"/>
+            <a:ext cx="10271455" cy="786384"/>
+          </a:xfrm>
+          <a:prstGeom prst="rect">
+            <a:avLst/>
+          </a:prstGeom>
+          <a:noFill/>
+        </p:spPr>
+        <p:txBody>
+          <a:bodyPr wrap="square" anchor="ctr"/>
+          <a:lstStyle/>
+          <a:p>
+            <a:r>
+              <a:rPr sz="1500" b="1" i="0">
+                <a:solidFill>
+                  <a:srgbClr val="095292"/>
+                </a:solidFill>
+                <a:latin typeface="Calibri"/>
+              </a:rPr>
+              <a:t>Declarar el gap de concurrencia: PGlite corre una sola sesion, y eso es la Clase 10.</a:t>
+            </a:r>
+          </a:p>
+        </p:txBody>
+      </p:sp>
+      <p:sp>
+        <p:nvSpPr>
+          <p:cNvPr id="25" name="TextBox 24"/>
           <p:cNvSpPr txBox="1"/>
           <p:nvPr/>
         </p:nvSpPr>
@@ -6110,6 +6692,2566 @@
         <p:spPr>
           <a:xfrm>
             <a:off x="0" y="0"/>
+            <a:ext cx="12191695" cy="960120"/>
+          </a:xfrm>
+          <a:prstGeom prst="rect">
+            <a:avLst/>
+          </a:prstGeom>
+          <a:solidFill>
+            <a:srgbClr val="095292"/>
+          </a:solidFill>
+          <a:ln>
+            <a:noFill/>
+          </a:ln>
+        </p:spPr>
+        <p:style>
+          <a:lnRef idx="1">
+            <a:schemeClr val="accent1"/>
+          </a:lnRef>
+          <a:fillRef idx="3">
+            <a:schemeClr val="accent1"/>
+          </a:fillRef>
+          <a:effectRef idx="2">
+            <a:schemeClr val="accent1"/>
+          </a:effectRef>
+          <a:fontRef idx="minor">
+            <a:schemeClr val="lt1"/>
+          </a:fontRef>
+        </p:style>
+        <p:txBody>
+          <a:bodyPr rtlCol="0" anchor="ctr"/>
+          <a:lstStyle/>
+          <a:p>
+            <a:pPr algn="ctr"/>
+          </a:p>
+        </p:txBody>
+      </p:sp>
+      <p:sp>
+        <p:nvSpPr>
+          <p:cNvPr id="3" name="Rectangle 2"/>
+          <p:cNvSpPr/>
+          <p:nvPr/>
+        </p:nvSpPr>
+        <p:spPr>
+          <a:xfrm>
+            <a:off x="0" y="960120"/>
+            <a:ext cx="12191695" cy="41148"/>
+          </a:xfrm>
+          <a:prstGeom prst="rect">
+            <a:avLst/>
+          </a:prstGeom>
+          <a:solidFill>
+            <a:srgbClr val="FFD000"/>
+          </a:solidFill>
+          <a:ln>
+            <a:noFill/>
+          </a:ln>
+        </p:spPr>
+        <p:style>
+          <a:lnRef idx="1">
+            <a:schemeClr val="accent1"/>
+          </a:lnRef>
+          <a:fillRef idx="3">
+            <a:schemeClr val="accent1"/>
+          </a:fillRef>
+          <a:effectRef idx="2">
+            <a:schemeClr val="accent1"/>
+          </a:effectRef>
+          <a:fontRef idx="minor">
+            <a:schemeClr val="lt1"/>
+          </a:fontRef>
+        </p:style>
+        <p:txBody>
+          <a:bodyPr rtlCol="0" anchor="ctr"/>
+          <a:lstStyle/>
+          <a:p>
+            <a:pPr algn="ctr"/>
+          </a:p>
+        </p:txBody>
+      </p:sp>
+      <p:sp>
+        <p:nvSpPr>
+          <p:cNvPr id="4" name="TextBox 3"/>
+          <p:cNvSpPr txBox="1"/>
+          <p:nvPr/>
+        </p:nvSpPr>
+        <p:spPr>
+          <a:xfrm>
+            <a:off x="457200" y="164592"/>
+            <a:ext cx="11277295" cy="502920"/>
+          </a:xfrm>
+          <a:prstGeom prst="rect">
+            <a:avLst/>
+          </a:prstGeom>
+          <a:noFill/>
+        </p:spPr>
+        <p:txBody>
+          <a:bodyPr wrap="square">
+            <a:spAutoFit/>
+          </a:bodyPr>
+          <a:lstStyle/>
+          <a:p>
+            <a:r>
+              <a:rPr sz="2600" b="1" i="0">
+                <a:solidFill>
+                  <a:srgbClr val="FFFFFF"/>
+                </a:solidFill>
+                <a:latin typeface="Calibri"/>
+              </a:rPr>
+              <a:t>Taller PI VetCare — pistas (checklist vacio)</a:t>
+            </a:r>
+          </a:p>
+        </p:txBody>
+      </p:sp>
+      <p:sp>
+        <p:nvSpPr>
+          <p:cNvPr id="5" name="Rounded Rectangle 4"/>
+          <p:cNvSpPr/>
+          <p:nvPr/>
+        </p:nvSpPr>
+        <p:spPr>
+          <a:xfrm>
+            <a:off x="457200" y="1261872"/>
+            <a:ext cx="11277295" cy="566928"/>
+          </a:xfrm>
+          <a:prstGeom prst="roundRect">
+            <a:avLst>
+              <a:gd name="adj" fmla="val 12000"/>
+            </a:avLst>
+          </a:prstGeom>
+          <a:solidFill>
+            <a:srgbClr val="F2F2F2"/>
+          </a:solidFill>
+          <a:ln>
+            <a:noFill/>
+          </a:ln>
+        </p:spPr>
+        <p:style>
+          <a:lnRef idx="1">
+            <a:schemeClr val="accent1"/>
+          </a:lnRef>
+          <a:fillRef idx="3">
+            <a:schemeClr val="accent1"/>
+          </a:fillRef>
+          <a:effectRef idx="2">
+            <a:schemeClr val="accent1"/>
+          </a:effectRef>
+          <a:fontRef idx="minor">
+            <a:schemeClr val="lt1"/>
+          </a:fontRef>
+        </p:style>
+        <p:txBody>
+          <a:bodyPr rtlCol="0" anchor="ctr"/>
+          <a:lstStyle/>
+          <a:p>
+            <a:pPr algn="ctr"/>
+          </a:p>
+        </p:txBody>
+      </p:sp>
+      <p:sp>
+        <p:nvSpPr>
+          <p:cNvPr id="6" name="Rectangle 5"/>
+          <p:cNvSpPr/>
+          <p:nvPr/>
+        </p:nvSpPr>
+        <p:spPr>
+          <a:xfrm>
+            <a:off x="640080" y="1408175"/>
+            <a:ext cx="274320" cy="274320"/>
+          </a:xfrm>
+          <a:prstGeom prst="rect">
+            <a:avLst/>
+          </a:prstGeom>
+          <a:solidFill>
+            <a:srgbClr val="FFFFFF"/>
+          </a:solidFill>
+          <a:ln>
+            <a:solidFill>
+              <a:srgbClr val="333333"/>
+            </a:solidFill>
+          </a:ln>
+        </p:spPr>
+        <p:style>
+          <a:lnRef idx="1">
+            <a:schemeClr val="accent1"/>
+          </a:lnRef>
+          <a:fillRef idx="3">
+            <a:schemeClr val="accent1"/>
+          </a:fillRef>
+          <a:effectRef idx="2">
+            <a:schemeClr val="accent1"/>
+          </a:effectRef>
+          <a:fontRef idx="minor">
+            <a:schemeClr val="lt1"/>
+          </a:fontRef>
+        </p:style>
+        <p:txBody>
+          <a:bodyPr rtlCol="0" anchor="ctr"/>
+          <a:lstStyle/>
+          <a:p>
+            <a:pPr algn="ctr"/>
+          </a:p>
+        </p:txBody>
+      </p:sp>
+      <p:sp>
+        <p:nvSpPr>
+          <p:cNvPr id="7" name="Rectangle 6"/>
+          <p:cNvSpPr/>
+          <p:nvPr/>
+        </p:nvSpPr>
+        <p:spPr>
+          <a:xfrm>
+            <a:off x="640080" y="1408175"/>
+            <a:ext cx="73152" cy="274320"/>
+          </a:xfrm>
+          <a:prstGeom prst="rect">
+            <a:avLst/>
+          </a:prstGeom>
+          <a:solidFill>
+            <a:srgbClr val="269CCB"/>
+          </a:solidFill>
+          <a:ln>
+            <a:noFill/>
+          </a:ln>
+        </p:spPr>
+        <p:style>
+          <a:lnRef idx="1">
+            <a:schemeClr val="accent1"/>
+          </a:lnRef>
+          <a:fillRef idx="3">
+            <a:schemeClr val="accent1"/>
+          </a:fillRef>
+          <a:effectRef idx="2">
+            <a:schemeClr val="accent1"/>
+          </a:effectRef>
+          <a:fontRef idx="minor">
+            <a:schemeClr val="lt1"/>
+          </a:fontRef>
+        </p:style>
+        <p:txBody>
+          <a:bodyPr rtlCol="0" anchor="ctr"/>
+          <a:lstStyle/>
+          <a:p>
+            <a:pPr algn="ctr"/>
+          </a:p>
+        </p:txBody>
+      </p:sp>
+      <p:sp>
+        <p:nvSpPr>
+          <p:cNvPr id="8" name="TextBox 7"/>
+          <p:cNvSpPr txBox="1"/>
+          <p:nvPr/>
+        </p:nvSpPr>
+        <p:spPr>
+          <a:xfrm>
+            <a:off x="1097280" y="1353312"/>
+            <a:ext cx="10362895" cy="402336"/>
+          </a:xfrm>
+          <a:prstGeom prst="rect">
+            <a:avLst/>
+          </a:prstGeom>
+          <a:noFill/>
+        </p:spPr>
+        <p:txBody>
+          <a:bodyPr wrap="square" anchor="ctr"/>
+          <a:lstStyle/>
+          <a:p>
+            <a:r>
+              <a:rPr sz="1500" b="0" i="0">
+                <a:solidFill>
+                  <a:srgbClr val="333333"/>
+                </a:solidFill>
+                <a:latin typeface="Calibri"/>
+              </a:rPr>
+              <a:t>□ ¿Usaste «GET DIAGNOSTICS v_filas = ROW_COUNT;»? En PostgreSQL </a:t>
+            </a:r>
+            <a:r>
+              <a:rPr sz="1500" b="1" i="0">
+                <a:solidFill>
+                  <a:srgbClr val="333333"/>
+                </a:solidFill>
+                <a:latin typeface="Calibri"/>
+              </a:rPr>
+              <a:t>no existe</a:t>
+            </a:r>
+            <a:r>
+              <a:rPr sz="1500" b="0" i="0">
+                <a:solidFill>
+                  <a:srgbClr val="333333"/>
+                </a:solidFill>
+                <a:latin typeface="Calibri"/>
+              </a:rPr>
+              <a:t> «SQL%ROWCOUNT».</a:t>
+            </a:r>
+          </a:p>
+        </p:txBody>
+      </p:sp>
+      <p:sp>
+        <p:nvSpPr>
+          <p:cNvPr id="9" name="Rounded Rectangle 8"/>
+          <p:cNvSpPr/>
+          <p:nvPr/>
+        </p:nvSpPr>
+        <p:spPr>
+          <a:xfrm>
+            <a:off x="457200" y="1938528"/>
+            <a:ext cx="11277295" cy="566928"/>
+          </a:xfrm>
+          <a:prstGeom prst="roundRect">
+            <a:avLst>
+              <a:gd name="adj" fmla="val 12000"/>
+            </a:avLst>
+          </a:prstGeom>
+          <a:solidFill>
+            <a:srgbClr val="F2F2F2"/>
+          </a:solidFill>
+          <a:ln>
+            <a:noFill/>
+          </a:ln>
+        </p:spPr>
+        <p:style>
+          <a:lnRef idx="1">
+            <a:schemeClr val="accent1"/>
+          </a:lnRef>
+          <a:fillRef idx="3">
+            <a:schemeClr val="accent1"/>
+          </a:fillRef>
+          <a:effectRef idx="2">
+            <a:schemeClr val="accent1"/>
+          </a:effectRef>
+          <a:fontRef idx="minor">
+            <a:schemeClr val="lt1"/>
+          </a:fontRef>
+        </p:style>
+        <p:txBody>
+          <a:bodyPr rtlCol="0" anchor="ctr"/>
+          <a:lstStyle/>
+          <a:p>
+            <a:pPr algn="ctr"/>
+          </a:p>
+        </p:txBody>
+      </p:sp>
+      <p:sp>
+        <p:nvSpPr>
+          <p:cNvPr id="10" name="Rectangle 9"/>
+          <p:cNvSpPr/>
+          <p:nvPr/>
+        </p:nvSpPr>
+        <p:spPr>
+          <a:xfrm>
+            <a:off x="640080" y="2084832"/>
+            <a:ext cx="274320" cy="274320"/>
+          </a:xfrm>
+          <a:prstGeom prst="rect">
+            <a:avLst/>
+          </a:prstGeom>
+          <a:solidFill>
+            <a:srgbClr val="FFFFFF"/>
+          </a:solidFill>
+          <a:ln>
+            <a:solidFill>
+              <a:srgbClr val="333333"/>
+            </a:solidFill>
+          </a:ln>
+        </p:spPr>
+        <p:style>
+          <a:lnRef idx="1">
+            <a:schemeClr val="accent1"/>
+          </a:lnRef>
+          <a:fillRef idx="3">
+            <a:schemeClr val="accent1"/>
+          </a:fillRef>
+          <a:effectRef idx="2">
+            <a:schemeClr val="accent1"/>
+          </a:effectRef>
+          <a:fontRef idx="minor">
+            <a:schemeClr val="lt1"/>
+          </a:fontRef>
+        </p:style>
+        <p:txBody>
+          <a:bodyPr rtlCol="0" anchor="ctr"/>
+          <a:lstStyle/>
+          <a:p>
+            <a:pPr algn="ctr"/>
+          </a:p>
+        </p:txBody>
+      </p:sp>
+      <p:sp>
+        <p:nvSpPr>
+          <p:cNvPr id="11" name="Rectangle 10"/>
+          <p:cNvSpPr/>
+          <p:nvPr/>
+        </p:nvSpPr>
+        <p:spPr>
+          <a:xfrm>
+            <a:off x="640080" y="2084832"/>
+            <a:ext cx="73152" cy="274320"/>
+          </a:xfrm>
+          <a:prstGeom prst="rect">
+            <a:avLst/>
+          </a:prstGeom>
+          <a:solidFill>
+            <a:srgbClr val="269CCB"/>
+          </a:solidFill>
+          <a:ln>
+            <a:noFill/>
+          </a:ln>
+        </p:spPr>
+        <p:style>
+          <a:lnRef idx="1">
+            <a:schemeClr val="accent1"/>
+          </a:lnRef>
+          <a:fillRef idx="3">
+            <a:schemeClr val="accent1"/>
+          </a:fillRef>
+          <a:effectRef idx="2">
+            <a:schemeClr val="accent1"/>
+          </a:effectRef>
+          <a:fontRef idx="minor">
+            <a:schemeClr val="lt1"/>
+          </a:fontRef>
+        </p:style>
+        <p:txBody>
+          <a:bodyPr rtlCol="0" anchor="ctr"/>
+          <a:lstStyle/>
+          <a:p>
+            <a:pPr algn="ctr"/>
+          </a:p>
+        </p:txBody>
+      </p:sp>
+      <p:sp>
+        <p:nvSpPr>
+          <p:cNvPr id="12" name="TextBox 11"/>
+          <p:cNvSpPr txBox="1"/>
+          <p:nvPr/>
+        </p:nvSpPr>
+        <p:spPr>
+          <a:xfrm>
+            <a:off x="1097280" y="2029968"/>
+            <a:ext cx="10362895" cy="402336"/>
+          </a:xfrm>
+          <a:prstGeom prst="rect">
+            <a:avLst/>
+          </a:prstGeom>
+          <a:noFill/>
+        </p:spPr>
+        <p:txBody>
+          <a:bodyPr wrap="square" anchor="ctr"/>
+          <a:lstStyle/>
+          <a:p>
+            <a:r>
+              <a:rPr sz="1500" b="0" i="0">
+                <a:solidFill>
+                  <a:srgbClr val="333333"/>
+                </a:solidFill>
+                <a:latin typeface="Calibri"/>
+              </a:rPr>
+              <a:t>□ ¿Dejaste algún «COMMIT» dentro del procedimiento? No va: el «CALL» de nivel superior </a:t>
+            </a:r>
+            <a:r>
+              <a:rPr sz="1500" b="1" i="0">
+                <a:solidFill>
+                  <a:srgbClr val="333333"/>
+                </a:solidFill>
+                <a:latin typeface="Calibri"/>
+              </a:rPr>
+              <a:t>ya es</a:t>
+            </a:r>
+            <a:r>
+              <a:rPr sz="1500" b="0" i="0">
+                <a:solidFill>
+                  <a:srgbClr val="333333"/>
+                </a:solidFill>
+                <a:latin typeface="Calibri"/>
+              </a:rPr>
+              <a:t> su propia transacción.</a:t>
+            </a:r>
+          </a:p>
+        </p:txBody>
+      </p:sp>
+      <p:sp>
+        <p:nvSpPr>
+          <p:cNvPr id="13" name="Rounded Rectangle 12"/>
+          <p:cNvSpPr/>
+          <p:nvPr/>
+        </p:nvSpPr>
+        <p:spPr>
+          <a:xfrm>
+            <a:off x="457200" y="2615184"/>
+            <a:ext cx="11277295" cy="566928"/>
+          </a:xfrm>
+          <a:prstGeom prst="roundRect">
+            <a:avLst>
+              <a:gd name="adj" fmla="val 12000"/>
+            </a:avLst>
+          </a:prstGeom>
+          <a:solidFill>
+            <a:srgbClr val="F2F2F2"/>
+          </a:solidFill>
+          <a:ln>
+            <a:noFill/>
+          </a:ln>
+        </p:spPr>
+        <p:style>
+          <a:lnRef idx="1">
+            <a:schemeClr val="accent1"/>
+          </a:lnRef>
+          <a:fillRef idx="3">
+            <a:schemeClr val="accent1"/>
+          </a:fillRef>
+          <a:effectRef idx="2">
+            <a:schemeClr val="accent1"/>
+          </a:effectRef>
+          <a:fontRef idx="minor">
+            <a:schemeClr val="lt1"/>
+          </a:fontRef>
+        </p:style>
+        <p:txBody>
+          <a:bodyPr rtlCol="0" anchor="ctr"/>
+          <a:lstStyle/>
+          <a:p>
+            <a:pPr algn="ctr"/>
+          </a:p>
+        </p:txBody>
+      </p:sp>
+      <p:sp>
+        <p:nvSpPr>
+          <p:cNvPr id="14" name="Rectangle 13"/>
+          <p:cNvSpPr/>
+          <p:nvPr/>
+        </p:nvSpPr>
+        <p:spPr>
+          <a:xfrm>
+            <a:off x="640080" y="2761488"/>
+            <a:ext cx="274320" cy="274320"/>
+          </a:xfrm>
+          <a:prstGeom prst="rect">
+            <a:avLst/>
+          </a:prstGeom>
+          <a:solidFill>
+            <a:srgbClr val="FFFFFF"/>
+          </a:solidFill>
+          <a:ln>
+            <a:solidFill>
+              <a:srgbClr val="333333"/>
+            </a:solidFill>
+          </a:ln>
+        </p:spPr>
+        <p:style>
+          <a:lnRef idx="1">
+            <a:schemeClr val="accent1"/>
+          </a:lnRef>
+          <a:fillRef idx="3">
+            <a:schemeClr val="accent1"/>
+          </a:fillRef>
+          <a:effectRef idx="2">
+            <a:schemeClr val="accent1"/>
+          </a:effectRef>
+          <a:fontRef idx="minor">
+            <a:schemeClr val="lt1"/>
+          </a:fontRef>
+        </p:style>
+        <p:txBody>
+          <a:bodyPr rtlCol="0" anchor="ctr"/>
+          <a:lstStyle/>
+          <a:p>
+            <a:pPr algn="ctr"/>
+          </a:p>
+        </p:txBody>
+      </p:sp>
+      <p:sp>
+        <p:nvSpPr>
+          <p:cNvPr id="15" name="Rectangle 14"/>
+          <p:cNvSpPr/>
+          <p:nvPr/>
+        </p:nvSpPr>
+        <p:spPr>
+          <a:xfrm>
+            <a:off x="640080" y="2761488"/>
+            <a:ext cx="73152" cy="274320"/>
+          </a:xfrm>
+          <a:prstGeom prst="rect">
+            <a:avLst/>
+          </a:prstGeom>
+          <a:solidFill>
+            <a:srgbClr val="269CCB"/>
+          </a:solidFill>
+          <a:ln>
+            <a:noFill/>
+          </a:ln>
+        </p:spPr>
+        <p:style>
+          <a:lnRef idx="1">
+            <a:schemeClr val="accent1"/>
+          </a:lnRef>
+          <a:fillRef idx="3">
+            <a:schemeClr val="accent1"/>
+          </a:fillRef>
+          <a:effectRef idx="2">
+            <a:schemeClr val="accent1"/>
+          </a:effectRef>
+          <a:fontRef idx="minor">
+            <a:schemeClr val="lt1"/>
+          </a:fontRef>
+        </p:style>
+        <p:txBody>
+          <a:bodyPr rtlCol="0" anchor="ctr"/>
+          <a:lstStyle/>
+          <a:p>
+            <a:pPr algn="ctr"/>
+          </a:p>
+        </p:txBody>
+      </p:sp>
+      <p:sp>
+        <p:nvSpPr>
+          <p:cNvPr id="16" name="TextBox 15"/>
+          <p:cNvSpPr txBox="1"/>
+          <p:nvPr/>
+        </p:nvSpPr>
+        <p:spPr>
+          <a:xfrm>
+            <a:off x="1097280" y="2706624"/>
+            <a:ext cx="10362895" cy="402336"/>
+          </a:xfrm>
+          <a:prstGeom prst="rect">
+            <a:avLst/>
+          </a:prstGeom>
+          <a:noFill/>
+        </p:spPr>
+        <p:txBody>
+          <a:bodyPr wrap="square" anchor="ctr"/>
+          <a:lstStyle/>
+          <a:p>
+            <a:r>
+              <a:rPr sz="1500" b="0" i="0">
+                <a:solidFill>
+                  <a:srgbClr val="333333"/>
+                </a:solidFill>
+                <a:latin typeface="Calibri"/>
+              </a:rPr>
+              <a:t>□ ¿El descuento va con la condición «AND stock &gt;= p_cantidades[i]» </a:t>
+            </a:r>
+            <a:r>
+              <a:rPr sz="1500" b="1" i="0">
+                <a:solidFill>
+                  <a:srgbClr val="333333"/>
+                </a:solidFill>
+                <a:latin typeface="Calibri"/>
+              </a:rPr>
+              <a:t>dentro del</a:t>
+            </a:r>
+            <a:r>
+              <a:rPr sz="1500" b="0" i="0">
+                <a:solidFill>
+                  <a:srgbClr val="333333"/>
+                </a:solidFill>
+                <a:latin typeface="Calibri"/>
+              </a:rPr>
+              <a:t> «WHERE», o leíste el stock primero y decidiste después?</a:t>
+            </a:r>
+          </a:p>
+        </p:txBody>
+      </p:sp>
+      <p:sp>
+        <p:nvSpPr>
+          <p:cNvPr id="17" name="Rounded Rectangle 16"/>
+          <p:cNvSpPr/>
+          <p:nvPr/>
+        </p:nvSpPr>
+        <p:spPr>
+          <a:xfrm>
+            <a:off x="457200" y="3291840"/>
+            <a:ext cx="11277295" cy="566928"/>
+          </a:xfrm>
+          <a:prstGeom prst="roundRect">
+            <a:avLst>
+              <a:gd name="adj" fmla="val 12000"/>
+            </a:avLst>
+          </a:prstGeom>
+          <a:solidFill>
+            <a:srgbClr val="F2F2F2"/>
+          </a:solidFill>
+          <a:ln>
+            <a:noFill/>
+          </a:ln>
+        </p:spPr>
+        <p:style>
+          <a:lnRef idx="1">
+            <a:schemeClr val="accent1"/>
+          </a:lnRef>
+          <a:fillRef idx="3">
+            <a:schemeClr val="accent1"/>
+          </a:fillRef>
+          <a:effectRef idx="2">
+            <a:schemeClr val="accent1"/>
+          </a:effectRef>
+          <a:fontRef idx="minor">
+            <a:schemeClr val="lt1"/>
+          </a:fontRef>
+        </p:style>
+        <p:txBody>
+          <a:bodyPr rtlCol="0" anchor="ctr"/>
+          <a:lstStyle/>
+          <a:p>
+            <a:pPr algn="ctr"/>
+          </a:p>
+        </p:txBody>
+      </p:sp>
+      <p:sp>
+        <p:nvSpPr>
+          <p:cNvPr id="18" name="Rectangle 17"/>
+          <p:cNvSpPr/>
+          <p:nvPr/>
+        </p:nvSpPr>
+        <p:spPr>
+          <a:xfrm>
+            <a:off x="640080" y="3438144"/>
+            <a:ext cx="274320" cy="274320"/>
+          </a:xfrm>
+          <a:prstGeom prst="rect">
+            <a:avLst/>
+          </a:prstGeom>
+          <a:solidFill>
+            <a:srgbClr val="FFFFFF"/>
+          </a:solidFill>
+          <a:ln>
+            <a:solidFill>
+              <a:srgbClr val="333333"/>
+            </a:solidFill>
+          </a:ln>
+        </p:spPr>
+        <p:style>
+          <a:lnRef idx="1">
+            <a:schemeClr val="accent1"/>
+          </a:lnRef>
+          <a:fillRef idx="3">
+            <a:schemeClr val="accent1"/>
+          </a:fillRef>
+          <a:effectRef idx="2">
+            <a:schemeClr val="accent1"/>
+          </a:effectRef>
+          <a:fontRef idx="minor">
+            <a:schemeClr val="lt1"/>
+          </a:fontRef>
+        </p:style>
+        <p:txBody>
+          <a:bodyPr rtlCol="0" anchor="ctr"/>
+          <a:lstStyle/>
+          <a:p>
+            <a:pPr algn="ctr"/>
+          </a:p>
+        </p:txBody>
+      </p:sp>
+      <p:sp>
+        <p:nvSpPr>
+          <p:cNvPr id="19" name="Rectangle 18"/>
+          <p:cNvSpPr/>
+          <p:nvPr/>
+        </p:nvSpPr>
+        <p:spPr>
+          <a:xfrm>
+            <a:off x="640080" y="3438144"/>
+            <a:ext cx="73152" cy="274320"/>
+          </a:xfrm>
+          <a:prstGeom prst="rect">
+            <a:avLst/>
+          </a:prstGeom>
+          <a:solidFill>
+            <a:srgbClr val="269CCB"/>
+          </a:solidFill>
+          <a:ln>
+            <a:noFill/>
+          </a:ln>
+        </p:spPr>
+        <p:style>
+          <a:lnRef idx="1">
+            <a:schemeClr val="accent1"/>
+          </a:lnRef>
+          <a:fillRef idx="3">
+            <a:schemeClr val="accent1"/>
+          </a:fillRef>
+          <a:effectRef idx="2">
+            <a:schemeClr val="accent1"/>
+          </a:effectRef>
+          <a:fontRef idx="minor">
+            <a:schemeClr val="lt1"/>
+          </a:fontRef>
+        </p:style>
+        <p:txBody>
+          <a:bodyPr rtlCol="0" anchor="ctr"/>
+          <a:lstStyle/>
+          <a:p>
+            <a:pPr algn="ctr"/>
+          </a:p>
+        </p:txBody>
+      </p:sp>
+      <p:sp>
+        <p:nvSpPr>
+          <p:cNvPr id="20" name="TextBox 19"/>
+          <p:cNvSpPr txBox="1"/>
+          <p:nvPr/>
+        </p:nvSpPr>
+        <p:spPr>
+          <a:xfrm>
+            <a:off x="1097280" y="3383280"/>
+            <a:ext cx="10362895" cy="402336"/>
+          </a:xfrm>
+          <a:prstGeom prst="rect">
+            <a:avLst/>
+          </a:prstGeom>
+          <a:noFill/>
+        </p:spPr>
+        <p:txBody>
+          <a:bodyPr wrap="square" anchor="ctr"/>
+          <a:lstStyle/>
+          <a:p>
+            <a:r>
+              <a:rPr sz="1500" b="0" i="0">
+                <a:solidFill>
+                  <a:srgbClr val="333333"/>
+                </a:solidFill>
+                <a:latin typeface="Calibri"/>
+              </a:rPr>
+              <a:t>□ ¿La factura del caso exitoso quedó en </a:t>
+            </a:r>
+            <a:r>
+              <a:rPr sz="1500" b="1" i="0">
+                <a:solidFill>
+                  <a:srgbClr val="333333"/>
+                </a:solidFill>
+                <a:latin typeface="Calibri"/>
+              </a:rPr>
+              <a:t>27.400</a:t>
+            </a:r>
+            <a:r>
+              <a:rPr sz="1500" b="0" i="0">
+                <a:solidFill>
+                  <a:srgbClr val="333333"/>
+                </a:solidFill>
+                <a:latin typeface="Calibri"/>
+              </a:rPr>
+              <a:t> y los stocks en 11, 58 y 5? Si no cuadra, revisa que uses el «precio_unit» </a:t>
+            </a:r>
+            <a:r>
+              <a:rPr sz="1500" b="1" i="0">
+                <a:solidFill>
+                  <a:srgbClr val="333333"/>
+                </a:solidFill>
+                <a:latin typeface="Calibri"/>
+              </a:rPr>
+              <a:t>del insumo</a:t>
+            </a:r>
+            <a:r>
+              <a:rPr sz="1500" b="0" i="0">
+                <a:solidFill>
+                  <a:srgbClr val="333333"/>
+                </a:solidFill>
+                <a:latin typeface="Calibri"/>
+              </a:rPr>
+              <a:t> y no el de la consulta.</a:t>
+            </a:r>
+          </a:p>
+        </p:txBody>
+      </p:sp>
+      <p:sp>
+        <p:nvSpPr>
+          <p:cNvPr id="21" name="Rounded Rectangle 20"/>
+          <p:cNvSpPr/>
+          <p:nvPr/>
+        </p:nvSpPr>
+        <p:spPr>
+          <a:xfrm>
+            <a:off x="457200" y="3968496"/>
+            <a:ext cx="11277295" cy="566928"/>
+          </a:xfrm>
+          <a:prstGeom prst="roundRect">
+            <a:avLst>
+              <a:gd name="adj" fmla="val 12000"/>
+            </a:avLst>
+          </a:prstGeom>
+          <a:solidFill>
+            <a:srgbClr val="F2F2F2"/>
+          </a:solidFill>
+          <a:ln>
+            <a:noFill/>
+          </a:ln>
+        </p:spPr>
+        <p:style>
+          <a:lnRef idx="1">
+            <a:schemeClr val="accent1"/>
+          </a:lnRef>
+          <a:fillRef idx="3">
+            <a:schemeClr val="accent1"/>
+          </a:fillRef>
+          <a:effectRef idx="2">
+            <a:schemeClr val="accent1"/>
+          </a:effectRef>
+          <a:fontRef idx="minor">
+            <a:schemeClr val="lt1"/>
+          </a:fontRef>
+        </p:style>
+        <p:txBody>
+          <a:bodyPr rtlCol="0" anchor="ctr"/>
+          <a:lstStyle/>
+          <a:p>
+            <a:pPr algn="ctr"/>
+          </a:p>
+        </p:txBody>
+      </p:sp>
+      <p:sp>
+        <p:nvSpPr>
+          <p:cNvPr id="22" name="Rectangle 21"/>
+          <p:cNvSpPr/>
+          <p:nvPr/>
+        </p:nvSpPr>
+        <p:spPr>
+          <a:xfrm>
+            <a:off x="640080" y="4114800"/>
+            <a:ext cx="274320" cy="274320"/>
+          </a:xfrm>
+          <a:prstGeom prst="rect">
+            <a:avLst/>
+          </a:prstGeom>
+          <a:solidFill>
+            <a:srgbClr val="FFFFFF"/>
+          </a:solidFill>
+          <a:ln>
+            <a:solidFill>
+              <a:srgbClr val="333333"/>
+            </a:solidFill>
+          </a:ln>
+        </p:spPr>
+        <p:style>
+          <a:lnRef idx="1">
+            <a:schemeClr val="accent1"/>
+          </a:lnRef>
+          <a:fillRef idx="3">
+            <a:schemeClr val="accent1"/>
+          </a:fillRef>
+          <a:effectRef idx="2">
+            <a:schemeClr val="accent1"/>
+          </a:effectRef>
+          <a:fontRef idx="minor">
+            <a:schemeClr val="lt1"/>
+          </a:fontRef>
+        </p:style>
+        <p:txBody>
+          <a:bodyPr rtlCol="0" anchor="ctr"/>
+          <a:lstStyle/>
+          <a:p>
+            <a:pPr algn="ctr"/>
+          </a:p>
+        </p:txBody>
+      </p:sp>
+      <p:sp>
+        <p:nvSpPr>
+          <p:cNvPr id="23" name="Rectangle 22"/>
+          <p:cNvSpPr/>
+          <p:nvPr/>
+        </p:nvSpPr>
+        <p:spPr>
+          <a:xfrm>
+            <a:off x="640080" y="4114800"/>
+            <a:ext cx="73152" cy="274320"/>
+          </a:xfrm>
+          <a:prstGeom prst="rect">
+            <a:avLst/>
+          </a:prstGeom>
+          <a:solidFill>
+            <a:srgbClr val="269CCB"/>
+          </a:solidFill>
+          <a:ln>
+            <a:noFill/>
+          </a:ln>
+        </p:spPr>
+        <p:style>
+          <a:lnRef idx="1">
+            <a:schemeClr val="accent1"/>
+          </a:lnRef>
+          <a:fillRef idx="3">
+            <a:schemeClr val="accent1"/>
+          </a:fillRef>
+          <a:effectRef idx="2">
+            <a:schemeClr val="accent1"/>
+          </a:effectRef>
+          <a:fontRef idx="minor">
+            <a:schemeClr val="lt1"/>
+          </a:fontRef>
+        </p:style>
+        <p:txBody>
+          <a:bodyPr rtlCol="0" anchor="ctr"/>
+          <a:lstStyle/>
+          <a:p>
+            <a:pPr algn="ctr"/>
+          </a:p>
+        </p:txBody>
+      </p:sp>
+      <p:sp>
+        <p:nvSpPr>
+          <p:cNvPr id="24" name="TextBox 23"/>
+          <p:cNvSpPr txBox="1"/>
+          <p:nvPr/>
+        </p:nvSpPr>
+        <p:spPr>
+          <a:xfrm>
+            <a:off x="1097280" y="4059936"/>
+            <a:ext cx="10362895" cy="402336"/>
+          </a:xfrm>
+          <a:prstGeom prst="rect">
+            <a:avLst/>
+          </a:prstGeom>
+          <a:noFill/>
+        </p:spPr>
+        <p:txBody>
+          <a:bodyPr wrap="square" anchor="ctr"/>
+          <a:lstStyle/>
+          <a:p>
+            <a:r>
+              <a:rPr sz="1500" b="0" i="0">
+                <a:solidFill>
+                  <a:srgbClr val="333333"/>
+                </a:solidFill>
+                <a:latin typeface="Calibri"/>
+              </a:rPr>
+              <a:t>□ ¿La foto inicial y la foto final son </a:t>
+            </a:r>
+            <a:r>
+              <a:rPr sz="1500" b="1" i="0">
+                <a:solidFill>
+                  <a:srgbClr val="333333"/>
+                </a:solidFill>
+                <a:latin typeface="Calibri"/>
+              </a:rPr>
+              <a:t>exactamente la misma</a:t>
+            </a:r>
+            <a:r>
+              <a:rPr sz="1500" b="0" i="0">
+                <a:solidFill>
+                  <a:srgbClr val="333333"/>
+                </a:solidFill>
+                <a:latin typeface="Calibri"/>
+              </a:rPr>
+              <a:t> consulta? Si cambias la consulta, la comparación no prueba nada.</a:t>
+            </a:r>
+          </a:p>
+        </p:txBody>
+      </p:sp>
+      <p:sp>
+        <p:nvSpPr>
+          <p:cNvPr id="25" name="Rounded Rectangle 24"/>
+          <p:cNvSpPr/>
+          <p:nvPr/>
+        </p:nvSpPr>
+        <p:spPr>
+          <a:xfrm>
+            <a:off x="457200" y="4645152"/>
+            <a:ext cx="11277295" cy="566928"/>
+          </a:xfrm>
+          <a:prstGeom prst="roundRect">
+            <a:avLst>
+              <a:gd name="adj" fmla="val 12000"/>
+            </a:avLst>
+          </a:prstGeom>
+          <a:solidFill>
+            <a:srgbClr val="F2F2F2"/>
+          </a:solidFill>
+          <a:ln>
+            <a:noFill/>
+          </a:ln>
+        </p:spPr>
+        <p:style>
+          <a:lnRef idx="1">
+            <a:schemeClr val="accent1"/>
+          </a:lnRef>
+          <a:fillRef idx="3">
+            <a:schemeClr val="accent1"/>
+          </a:fillRef>
+          <a:effectRef idx="2">
+            <a:schemeClr val="accent1"/>
+          </a:effectRef>
+          <a:fontRef idx="minor">
+            <a:schemeClr val="lt1"/>
+          </a:fontRef>
+        </p:style>
+        <p:txBody>
+          <a:bodyPr rtlCol="0" anchor="ctr"/>
+          <a:lstStyle/>
+          <a:p>
+            <a:pPr algn="ctr"/>
+          </a:p>
+        </p:txBody>
+      </p:sp>
+      <p:sp>
+        <p:nvSpPr>
+          <p:cNvPr id="26" name="Rectangle 25"/>
+          <p:cNvSpPr/>
+          <p:nvPr/>
+        </p:nvSpPr>
+        <p:spPr>
+          <a:xfrm>
+            <a:off x="640080" y="4791456"/>
+            <a:ext cx="274320" cy="274320"/>
+          </a:xfrm>
+          <a:prstGeom prst="rect">
+            <a:avLst/>
+          </a:prstGeom>
+          <a:solidFill>
+            <a:srgbClr val="FFFFFF"/>
+          </a:solidFill>
+          <a:ln>
+            <a:solidFill>
+              <a:srgbClr val="333333"/>
+            </a:solidFill>
+          </a:ln>
+        </p:spPr>
+        <p:style>
+          <a:lnRef idx="1">
+            <a:schemeClr val="accent1"/>
+          </a:lnRef>
+          <a:fillRef idx="3">
+            <a:schemeClr val="accent1"/>
+          </a:fillRef>
+          <a:effectRef idx="2">
+            <a:schemeClr val="accent1"/>
+          </a:effectRef>
+          <a:fontRef idx="minor">
+            <a:schemeClr val="lt1"/>
+          </a:fontRef>
+        </p:style>
+        <p:txBody>
+          <a:bodyPr rtlCol="0" anchor="ctr"/>
+          <a:lstStyle/>
+          <a:p>
+            <a:pPr algn="ctr"/>
+          </a:p>
+        </p:txBody>
+      </p:sp>
+      <p:sp>
+        <p:nvSpPr>
+          <p:cNvPr id="27" name="Rectangle 26"/>
+          <p:cNvSpPr/>
+          <p:nvPr/>
+        </p:nvSpPr>
+        <p:spPr>
+          <a:xfrm>
+            <a:off x="640080" y="4791456"/>
+            <a:ext cx="73152" cy="274320"/>
+          </a:xfrm>
+          <a:prstGeom prst="rect">
+            <a:avLst/>
+          </a:prstGeom>
+          <a:solidFill>
+            <a:srgbClr val="269CCB"/>
+          </a:solidFill>
+          <a:ln>
+            <a:noFill/>
+          </a:ln>
+        </p:spPr>
+        <p:style>
+          <a:lnRef idx="1">
+            <a:schemeClr val="accent1"/>
+          </a:lnRef>
+          <a:fillRef idx="3">
+            <a:schemeClr val="accent1"/>
+          </a:fillRef>
+          <a:effectRef idx="2">
+            <a:schemeClr val="accent1"/>
+          </a:effectRef>
+          <a:fontRef idx="minor">
+            <a:schemeClr val="lt1"/>
+          </a:fontRef>
+        </p:style>
+        <p:txBody>
+          <a:bodyPr rtlCol="0" anchor="ctr"/>
+          <a:lstStyle/>
+          <a:p>
+            <a:pPr algn="ctr"/>
+          </a:p>
+        </p:txBody>
+      </p:sp>
+      <p:sp>
+        <p:nvSpPr>
+          <p:cNvPr id="28" name="TextBox 27"/>
+          <p:cNvSpPr txBox="1"/>
+          <p:nvPr/>
+        </p:nvSpPr>
+        <p:spPr>
+          <a:xfrm>
+            <a:off x="1097280" y="4736592"/>
+            <a:ext cx="10362895" cy="402336"/>
+          </a:xfrm>
+          <a:prstGeom prst="rect">
+            <a:avLst/>
+          </a:prstGeom>
+          <a:noFill/>
+        </p:spPr>
+        <p:txBody>
+          <a:bodyPr wrap="square" anchor="ctr"/>
+          <a:lstStyle/>
+          <a:p>
+            <a:r>
+              <a:rPr sz="1500" b="0" i="0">
+                <a:solidFill>
+                  <a:srgbClr val="333333"/>
+                </a:solidFill>
+                <a:latin typeface="Calibri"/>
+              </a:rPr>
+              <a:t>□ ¿Envolviste el intento que debe fallar en «DO $$ … EXCEPTION WHEN OTHERS»? Sin eso el script se detiene y no alcanzas a tomar la foto final.</a:t>
+            </a:r>
+          </a:p>
+        </p:txBody>
+      </p:sp>
+      <p:sp>
+        <p:nvSpPr>
+          <p:cNvPr id="29" name="Rounded Rectangle 28"/>
+          <p:cNvSpPr/>
+          <p:nvPr/>
+        </p:nvSpPr>
+        <p:spPr>
+          <a:xfrm>
+            <a:off x="457200" y="5321808"/>
+            <a:ext cx="11277295" cy="566928"/>
+          </a:xfrm>
+          <a:prstGeom prst="roundRect">
+            <a:avLst>
+              <a:gd name="adj" fmla="val 12000"/>
+            </a:avLst>
+          </a:prstGeom>
+          <a:solidFill>
+            <a:srgbClr val="F2F2F2"/>
+          </a:solidFill>
+          <a:ln>
+            <a:noFill/>
+          </a:ln>
+        </p:spPr>
+        <p:style>
+          <a:lnRef idx="1">
+            <a:schemeClr val="accent1"/>
+          </a:lnRef>
+          <a:fillRef idx="3">
+            <a:schemeClr val="accent1"/>
+          </a:fillRef>
+          <a:effectRef idx="2">
+            <a:schemeClr val="accent1"/>
+          </a:effectRef>
+          <a:fontRef idx="minor">
+            <a:schemeClr val="lt1"/>
+          </a:fontRef>
+        </p:style>
+        <p:txBody>
+          <a:bodyPr rtlCol="0" anchor="ctr"/>
+          <a:lstStyle/>
+          <a:p>
+            <a:pPr algn="ctr"/>
+          </a:p>
+        </p:txBody>
+      </p:sp>
+      <p:sp>
+        <p:nvSpPr>
+          <p:cNvPr id="30" name="Rectangle 29"/>
+          <p:cNvSpPr/>
+          <p:nvPr/>
+        </p:nvSpPr>
+        <p:spPr>
+          <a:xfrm>
+            <a:off x="640080" y="5468112"/>
+            <a:ext cx="274320" cy="274320"/>
+          </a:xfrm>
+          <a:prstGeom prst="rect">
+            <a:avLst/>
+          </a:prstGeom>
+          <a:solidFill>
+            <a:srgbClr val="FFFFFF"/>
+          </a:solidFill>
+          <a:ln>
+            <a:solidFill>
+              <a:srgbClr val="333333"/>
+            </a:solidFill>
+          </a:ln>
+        </p:spPr>
+        <p:style>
+          <a:lnRef idx="1">
+            <a:schemeClr val="accent1"/>
+          </a:lnRef>
+          <a:fillRef idx="3">
+            <a:schemeClr val="accent1"/>
+          </a:fillRef>
+          <a:effectRef idx="2">
+            <a:schemeClr val="accent1"/>
+          </a:effectRef>
+          <a:fontRef idx="minor">
+            <a:schemeClr val="lt1"/>
+          </a:fontRef>
+        </p:style>
+        <p:txBody>
+          <a:bodyPr rtlCol="0" anchor="ctr"/>
+          <a:lstStyle/>
+          <a:p>
+            <a:pPr algn="ctr"/>
+          </a:p>
+        </p:txBody>
+      </p:sp>
+      <p:sp>
+        <p:nvSpPr>
+          <p:cNvPr id="31" name="Rectangle 30"/>
+          <p:cNvSpPr/>
+          <p:nvPr/>
+        </p:nvSpPr>
+        <p:spPr>
+          <a:xfrm>
+            <a:off x="640080" y="5468112"/>
+            <a:ext cx="73152" cy="274320"/>
+          </a:xfrm>
+          <a:prstGeom prst="rect">
+            <a:avLst/>
+          </a:prstGeom>
+          <a:solidFill>
+            <a:srgbClr val="269CCB"/>
+          </a:solidFill>
+          <a:ln>
+            <a:noFill/>
+          </a:ln>
+        </p:spPr>
+        <p:style>
+          <a:lnRef idx="1">
+            <a:schemeClr val="accent1"/>
+          </a:lnRef>
+          <a:fillRef idx="3">
+            <a:schemeClr val="accent1"/>
+          </a:fillRef>
+          <a:effectRef idx="2">
+            <a:schemeClr val="accent1"/>
+          </a:effectRef>
+          <a:fontRef idx="minor">
+            <a:schemeClr val="lt1"/>
+          </a:fontRef>
+        </p:style>
+        <p:txBody>
+          <a:bodyPr rtlCol="0" anchor="ctr"/>
+          <a:lstStyle/>
+          <a:p>
+            <a:pPr algn="ctr"/>
+          </a:p>
+        </p:txBody>
+      </p:sp>
+      <p:sp>
+        <p:nvSpPr>
+          <p:cNvPr id="32" name="TextBox 31"/>
+          <p:cNvSpPr txBox="1"/>
+          <p:nvPr/>
+        </p:nvSpPr>
+        <p:spPr>
+          <a:xfrm>
+            <a:off x="1097280" y="5413248"/>
+            <a:ext cx="10362895" cy="402336"/>
+          </a:xfrm>
+          <a:prstGeom prst="rect">
+            <a:avLst/>
+          </a:prstGeom>
+          <a:noFill/>
+        </p:spPr>
+        <p:txBody>
+          <a:bodyPr wrap="square" anchor="ctr"/>
+          <a:lstStyle/>
+          <a:p>
+            <a:r>
+              <a:rPr sz="1500" b="0" i="0">
+                <a:solidFill>
+                  <a:srgbClr val="333333"/>
+                </a:solidFill>
+                <a:latin typeface="Calibri"/>
+              </a:rPr>
+              <a:t>□ ¿Escribiste la comparación en comentarios «--», incluida la línea del </a:t>
+            </a:r>
+            <a:r>
+              <a:rPr sz="1500" b="1" i="0">
+                <a:solidFill>
+                  <a:srgbClr val="333333"/>
+                </a:solidFill>
+                <a:latin typeface="Calibri"/>
+              </a:rPr>
+              <a:t>stock del insumo 3</a:t>
+            </a:r>
+            <a:r>
+              <a:rPr sz="1500" b="0" i="0">
+                <a:solidFill>
+                  <a:srgbClr val="333333"/>
+                </a:solidFill>
+                <a:latin typeface="Calibri"/>
+              </a:rPr>
+              <a:t>? Es la evidencia central de los 25 puntos: sin ella la pregunta queda sin argumento.</a:t>
+            </a:r>
+          </a:p>
+        </p:txBody>
+      </p:sp>
+      <p:sp>
+        <p:nvSpPr>
+          <p:cNvPr id="33" name="Rounded Rectangle 32"/>
+          <p:cNvSpPr/>
+          <p:nvPr/>
+        </p:nvSpPr>
+        <p:spPr>
+          <a:xfrm>
+            <a:off x="457200" y="5998464"/>
+            <a:ext cx="11277295" cy="566928"/>
+          </a:xfrm>
+          <a:prstGeom prst="roundRect">
+            <a:avLst>
+              <a:gd name="adj" fmla="val 12000"/>
+            </a:avLst>
+          </a:prstGeom>
+          <a:solidFill>
+            <a:srgbClr val="F2F2F2"/>
+          </a:solidFill>
+          <a:ln>
+            <a:noFill/>
+          </a:ln>
+        </p:spPr>
+        <p:style>
+          <a:lnRef idx="1">
+            <a:schemeClr val="accent1"/>
+          </a:lnRef>
+          <a:fillRef idx="3">
+            <a:schemeClr val="accent1"/>
+          </a:fillRef>
+          <a:effectRef idx="2">
+            <a:schemeClr val="accent1"/>
+          </a:effectRef>
+          <a:fontRef idx="minor">
+            <a:schemeClr val="lt1"/>
+          </a:fontRef>
+        </p:style>
+        <p:txBody>
+          <a:bodyPr rtlCol="0" anchor="ctr"/>
+          <a:lstStyle/>
+          <a:p>
+            <a:pPr algn="ctr"/>
+          </a:p>
+        </p:txBody>
+      </p:sp>
+      <p:sp>
+        <p:nvSpPr>
+          <p:cNvPr id="34" name="Rectangle 33"/>
+          <p:cNvSpPr/>
+          <p:nvPr/>
+        </p:nvSpPr>
+        <p:spPr>
+          <a:xfrm>
+            <a:off x="640080" y="6144768"/>
+            <a:ext cx="274320" cy="274320"/>
+          </a:xfrm>
+          <a:prstGeom prst="rect">
+            <a:avLst/>
+          </a:prstGeom>
+          <a:solidFill>
+            <a:srgbClr val="FFFFFF"/>
+          </a:solidFill>
+          <a:ln>
+            <a:solidFill>
+              <a:srgbClr val="333333"/>
+            </a:solidFill>
+          </a:ln>
+        </p:spPr>
+        <p:style>
+          <a:lnRef idx="1">
+            <a:schemeClr val="accent1"/>
+          </a:lnRef>
+          <a:fillRef idx="3">
+            <a:schemeClr val="accent1"/>
+          </a:fillRef>
+          <a:effectRef idx="2">
+            <a:schemeClr val="accent1"/>
+          </a:effectRef>
+          <a:fontRef idx="minor">
+            <a:schemeClr val="lt1"/>
+          </a:fontRef>
+        </p:style>
+        <p:txBody>
+          <a:bodyPr rtlCol="0" anchor="ctr"/>
+          <a:lstStyle/>
+          <a:p>
+            <a:pPr algn="ctr"/>
+          </a:p>
+        </p:txBody>
+      </p:sp>
+      <p:sp>
+        <p:nvSpPr>
+          <p:cNvPr id="35" name="Rectangle 34"/>
+          <p:cNvSpPr/>
+          <p:nvPr/>
+        </p:nvSpPr>
+        <p:spPr>
+          <a:xfrm>
+            <a:off x="640080" y="6144768"/>
+            <a:ext cx="73152" cy="274320"/>
+          </a:xfrm>
+          <a:prstGeom prst="rect">
+            <a:avLst/>
+          </a:prstGeom>
+          <a:solidFill>
+            <a:srgbClr val="269CCB"/>
+          </a:solidFill>
+          <a:ln>
+            <a:noFill/>
+          </a:ln>
+        </p:spPr>
+        <p:style>
+          <a:lnRef idx="1">
+            <a:schemeClr val="accent1"/>
+          </a:lnRef>
+          <a:fillRef idx="3">
+            <a:schemeClr val="accent1"/>
+          </a:fillRef>
+          <a:effectRef idx="2">
+            <a:schemeClr val="accent1"/>
+          </a:effectRef>
+          <a:fontRef idx="minor">
+            <a:schemeClr val="lt1"/>
+          </a:fontRef>
+        </p:style>
+        <p:txBody>
+          <a:bodyPr rtlCol="0" anchor="ctr"/>
+          <a:lstStyle/>
+          <a:p>
+            <a:pPr algn="ctr"/>
+          </a:p>
+        </p:txBody>
+      </p:sp>
+      <p:sp>
+        <p:nvSpPr>
+          <p:cNvPr id="36" name="TextBox 35"/>
+          <p:cNvSpPr txBox="1"/>
+          <p:nvPr/>
+        </p:nvSpPr>
+        <p:spPr>
+          <a:xfrm>
+            <a:off x="1097280" y="6089904"/>
+            <a:ext cx="10362895" cy="402336"/>
+          </a:xfrm>
+          <a:prstGeom prst="rect">
+            <a:avLst/>
+          </a:prstGeom>
+          <a:noFill/>
+        </p:spPr>
+        <p:txBody>
+          <a:bodyPr wrap="square" anchor="ctr"/>
+          <a:lstStyle/>
+          <a:p>
+            <a:r>
+              <a:rPr sz="1500" b="0" i="0">
+                <a:solidFill>
+                  <a:srgbClr val="333333"/>
+                </a:solidFill>
+                <a:latin typeface="Calibri"/>
+              </a:rPr>
+              <a:t>□ ¿Corriste también la llamada </a:t>
+            </a:r>
+            <a:r>
+              <a:rPr sz="1500" b="1" i="0">
+                <a:solidFill>
+                  <a:srgbClr val="333333"/>
+                </a:solidFill>
+                <a:latin typeface="Calibri"/>
+              </a:rPr>
+              <a:t>viable</a:t>
+            </a:r>
+            <a:r>
+              <a:rPr sz="1500" b="0" i="0">
+                <a:solidFill>
+                  <a:srgbClr val="333333"/>
+                </a:solidFill>
+                <a:latin typeface="Calibri"/>
+              </a:rPr>
+              <a:t> al final? El contraste entre la abortada y la exitosa es parte de la respuesta.</a:t>
+            </a:r>
+          </a:p>
+        </p:txBody>
+      </p:sp>
+      <p:sp>
+        <p:nvSpPr>
+          <p:cNvPr id="37" name="TextBox 36"/>
+          <p:cNvSpPr txBox="1"/>
+          <p:nvPr/>
+        </p:nvSpPr>
+        <p:spPr>
+          <a:xfrm>
+            <a:off x="11185855" y="6473952"/>
+            <a:ext cx="640080" cy="274320"/>
+          </a:xfrm>
+          <a:prstGeom prst="rect">
+            <a:avLst/>
+          </a:prstGeom>
+          <a:noFill/>
+        </p:spPr>
+        <p:txBody>
+          <a:bodyPr wrap="square">
+            <a:spAutoFit/>
+          </a:bodyPr>
+          <a:lstStyle/>
+          <a:p>
+            <a:pPr algn="r"/>
+            <a:r>
+              <a:rPr sz="1100" b="0" i="0">
+                <a:solidFill>
+                  <a:srgbClr val="666666"/>
+                </a:solidFill>
+                <a:latin typeface="Calibri"/>
+              </a:rPr>
+              <a:t>15</a:t>
+            </a:r>
+          </a:p>
+        </p:txBody>
+      </p:sp>
+    </p:spTree>
+  </p:cSld>
+  <p:clrMapOvr>
+    <a:masterClrMapping/>
+  </p:clrMapOvr>
+</p:sld>
+</file>
+
+<file path=ppt/slides/slide16.xml><?xml version="1.0" encoding="utf-8"?>
+<p:sld xmlns:a="http://schemas.openxmlformats.org/drawingml/2006/main" xmlns:p="http://schemas.openxmlformats.org/presentationml/2006/main" xmlns:r="http://schemas.openxmlformats.org/officeDocument/2006/relationships">
+  <p:cSld>
+    <p:bg>
+      <p:bgPr>
+        <a:solidFill>
+          <a:srgbClr val="FFFFFF"/>
+        </a:solidFill>
+        <a:effectLst/>
+      </p:bgPr>
+    </p:bg>
+    <p:spTree>
+      <p:nvGrpSpPr>
+        <p:cNvPr id="1" name=""/>
+        <p:cNvGrpSpPr/>
+        <p:nvPr/>
+      </p:nvGrpSpPr>
+      <p:grpSpPr/>
+      <p:sp>
+        <p:nvSpPr>
+          <p:cNvPr id="2" name="Rectangle 1"/>
+          <p:cNvSpPr/>
+          <p:nvPr/>
+        </p:nvSpPr>
+        <p:spPr>
+          <a:xfrm>
+            <a:off x="0" y="0"/>
+            <a:ext cx="12191695" cy="960120"/>
+          </a:xfrm>
+          <a:prstGeom prst="rect">
+            <a:avLst/>
+          </a:prstGeom>
+          <a:solidFill>
+            <a:srgbClr val="095292"/>
+          </a:solidFill>
+          <a:ln>
+            <a:noFill/>
+          </a:ln>
+        </p:spPr>
+        <p:style>
+          <a:lnRef idx="1">
+            <a:schemeClr val="accent1"/>
+          </a:lnRef>
+          <a:fillRef idx="3">
+            <a:schemeClr val="accent1"/>
+          </a:fillRef>
+          <a:effectRef idx="2">
+            <a:schemeClr val="accent1"/>
+          </a:effectRef>
+          <a:fontRef idx="minor">
+            <a:schemeClr val="lt1"/>
+          </a:fontRef>
+        </p:style>
+        <p:txBody>
+          <a:bodyPr rtlCol="0" anchor="ctr"/>
+          <a:lstStyle/>
+          <a:p>
+            <a:pPr algn="ctr"/>
+          </a:p>
+        </p:txBody>
+      </p:sp>
+      <p:sp>
+        <p:nvSpPr>
+          <p:cNvPr id="3" name="Rectangle 2"/>
+          <p:cNvSpPr/>
+          <p:nvPr/>
+        </p:nvSpPr>
+        <p:spPr>
+          <a:xfrm>
+            <a:off x="0" y="960120"/>
+            <a:ext cx="12191695" cy="41148"/>
+          </a:xfrm>
+          <a:prstGeom prst="rect">
+            <a:avLst/>
+          </a:prstGeom>
+          <a:solidFill>
+            <a:srgbClr val="FFD000"/>
+          </a:solidFill>
+          <a:ln>
+            <a:noFill/>
+          </a:ln>
+        </p:spPr>
+        <p:style>
+          <a:lnRef idx="1">
+            <a:schemeClr val="accent1"/>
+          </a:lnRef>
+          <a:fillRef idx="3">
+            <a:schemeClr val="accent1"/>
+          </a:fillRef>
+          <a:effectRef idx="2">
+            <a:schemeClr val="accent1"/>
+          </a:effectRef>
+          <a:fontRef idx="minor">
+            <a:schemeClr val="lt1"/>
+          </a:fontRef>
+        </p:style>
+        <p:txBody>
+          <a:bodyPr rtlCol="0" anchor="ctr"/>
+          <a:lstStyle/>
+          <a:p>
+            <a:pPr algn="ctr"/>
+          </a:p>
+        </p:txBody>
+      </p:sp>
+      <p:sp>
+        <p:nvSpPr>
+          <p:cNvPr id="4" name="TextBox 3"/>
+          <p:cNvSpPr txBox="1"/>
+          <p:nvPr/>
+        </p:nvSpPr>
+        <p:spPr>
+          <a:xfrm>
+            <a:off x="457200" y="164592"/>
+            <a:ext cx="11277295" cy="502920"/>
+          </a:xfrm>
+          <a:prstGeom prst="rect">
+            <a:avLst/>
+          </a:prstGeom>
+          <a:noFill/>
+        </p:spPr>
+        <p:txBody>
+          <a:bodyPr wrap="square">
+            <a:spAutoFit/>
+          </a:bodyPr>
+          <a:lstStyle/>
+          <a:p>
+            <a:r>
+              <a:rPr sz="2600" b="1" i="0">
+                <a:solidFill>
+                  <a:srgbClr val="FFFFFF"/>
+                </a:solidFill>
+                <a:latin typeface="Calibri"/>
+              </a:rPr>
+              <a:t>Criterios de exito / entregable</a:t>
+            </a:r>
+          </a:p>
+        </p:txBody>
+      </p:sp>
+      <p:sp>
+        <p:nvSpPr>
+          <p:cNvPr id="5" name="TextBox 4"/>
+          <p:cNvSpPr txBox="1"/>
+          <p:nvPr/>
+        </p:nvSpPr>
+        <p:spPr>
+          <a:xfrm>
+            <a:off x="457200" y="1170432"/>
+            <a:ext cx="11277295" cy="5230368"/>
+          </a:xfrm>
+          <a:prstGeom prst="rect">
+            <a:avLst/>
+          </a:prstGeom>
+          <a:noFill/>
+        </p:spPr>
+        <p:txBody>
+          <a:bodyPr wrap="square">
+            <a:spAutoFit/>
+          </a:bodyPr>
+          <a:lstStyle/>
+          <a:p>
+            <a:pPr>
+              <a:spcAft>
+                <a:spcPts val="800"/>
+              </a:spcAft>
+            </a:pPr>
+            <a:r>
+              <a:rPr sz="1600" b="0" i="0">
+                <a:solidFill>
+                  <a:srgbClr val="333333"/>
+                </a:solidFill>
+                <a:latin typeface="Calibri"/>
+              </a:rPr>
+              <a:t>–   </a:t>
+            </a:r>
+            <a:r>
+              <a:rPr sz="1600" b="1" i="0">
+                <a:solidFill>
+                  <a:srgbClr val="333333"/>
+                </a:solidFill>
+                <a:latin typeface="Calibri"/>
+              </a:rPr>
+              <a:t>Entregable:</a:t>
+            </a:r>
+            <a:r>
+              <a:rPr sz="1600" b="0" i="0">
+                <a:solidFill>
+                  <a:srgbClr val="333333"/>
+                </a:solidFill>
+                <a:latin typeface="Calibri"/>
+              </a:rPr>
+              <a:t> sp_facturar + fn_descontar_stock + seccion Transacciones y tuning del informe (1 pag.)</a:t>
+            </a:r>
+          </a:p>
+          <a:p>
+            <a:pPr>
+              <a:spcAft>
+                <a:spcPts val="800"/>
+              </a:spcAft>
+            </a:pPr>
+            <a:r>
+              <a:rPr sz="1600" b="0" i="0">
+                <a:solidFill>
+                  <a:srgbClr val="333333"/>
+                </a:solidFill>
+                <a:latin typeface="Calibri"/>
+              </a:rPr>
+              <a:t>–   Evidencia: el SQL y su salida quedan guardados en cada pregunta de ExamLab.</a:t>
+            </a:r>
+          </a:p>
+          <a:p>
+            <a:pPr>
+              <a:spcAft>
+                <a:spcPts val="800"/>
+              </a:spcAft>
+            </a:pPr>
+            <a:r>
+              <a:rPr sz="1600" b="0" i="0">
+                <a:solidFill>
+                  <a:srgbClr val="333333"/>
+                </a:solidFill>
+                <a:latin typeface="Calibri"/>
+              </a:rPr>
+              <a:t>–   Conserva copia en tu carpeta del PI (los .sql que pide el entregable).</a:t>
+            </a:r>
+          </a:p>
+          <a:p>
+            <a:pPr>
+              <a:spcAft>
+                <a:spcPts val="800"/>
+              </a:spcAft>
+            </a:pPr>
+            <a:r>
+              <a:rPr sz="1600" b="0" i="0">
+                <a:solidFill>
+                  <a:srgbClr val="333333"/>
+                </a:solidFill>
+                <a:latin typeface="Calibri"/>
+              </a:rPr>
+              <a:t>–   Actualizar checklist PI (que criterio de rubrica avanzo).</a:t>
+            </a:r>
+          </a:p>
+          <a:p>
+            <a:pPr>
+              <a:spcAft>
+                <a:spcPts val="800"/>
+              </a:spcAft>
+            </a:pPr>
+            <a:r>
+              <a:rPr sz="1600" b="0" i="0">
+                <a:solidFill>
+                  <a:srgbClr val="333333"/>
+                </a:solidFill>
+                <a:latin typeface="Calibri"/>
+              </a:rPr>
+              <a:t>–   </a:t>
+            </a:r>
+            <a:r>
+              <a:rPr sz="1600" b="1" i="0">
+                <a:solidFill>
+                  <a:srgbClr val="333333"/>
+                </a:solidFill>
+                <a:latin typeface="Calibri"/>
+              </a:rPr>
+              <a:t>Entrega en ExamLab</a:t>
+            </a:r>
+            <a:r>
+              <a:rPr sz="1600" b="0" i="0">
+                <a:solidFill>
+                  <a:srgbClr val="333333"/>
+                </a:solidFill>
+                <a:latin typeface="Calibri"/>
+              </a:rPr>
+              <a:t> (https://uniaj.examlab.workers.dev/) — domingo 23:59 cuando aplique taller.</a:t>
+            </a:r>
+          </a:p>
+        </p:txBody>
+      </p:sp>
+      <p:sp>
+        <p:nvSpPr>
+          <p:cNvPr id="6" name="TextBox 5"/>
+          <p:cNvSpPr txBox="1"/>
+          <p:nvPr/>
+        </p:nvSpPr>
+        <p:spPr>
+          <a:xfrm>
+            <a:off x="11185855" y="6473952"/>
+            <a:ext cx="640080" cy="274320"/>
+          </a:xfrm>
+          <a:prstGeom prst="rect">
+            <a:avLst/>
+          </a:prstGeom>
+          <a:noFill/>
+        </p:spPr>
+        <p:txBody>
+          <a:bodyPr wrap="square">
+            <a:spAutoFit/>
+          </a:bodyPr>
+          <a:lstStyle/>
+          <a:p>
+            <a:pPr algn="r"/>
+            <a:r>
+              <a:rPr sz="1100" b="0" i="0">
+                <a:solidFill>
+                  <a:srgbClr val="666666"/>
+                </a:solidFill>
+                <a:latin typeface="Calibri"/>
+              </a:rPr>
+              <a:t>16</a:t>
+            </a:r>
+          </a:p>
+        </p:txBody>
+      </p:sp>
+    </p:spTree>
+  </p:cSld>
+  <p:clrMapOvr>
+    <a:masterClrMapping/>
+  </p:clrMapOvr>
+</p:sld>
+</file>
+
+<file path=ppt/slides/slide17.xml><?xml version="1.0" encoding="utf-8"?>
+<p:sld xmlns:a="http://schemas.openxmlformats.org/drawingml/2006/main" xmlns:p="http://schemas.openxmlformats.org/presentationml/2006/main" xmlns:r="http://schemas.openxmlformats.org/officeDocument/2006/relationships">
+  <p:cSld>
+    <p:bg>
+      <p:bgPr>
+        <a:solidFill>
+          <a:srgbClr val="FFFFFF"/>
+        </a:solidFill>
+        <a:effectLst/>
+      </p:bgPr>
+    </p:bg>
+    <p:spTree>
+      <p:nvGrpSpPr>
+        <p:cNvPr id="1" name=""/>
+        <p:cNvGrpSpPr/>
+        <p:nvPr/>
+      </p:nvGrpSpPr>
+      <p:grpSpPr/>
+      <p:sp>
+        <p:nvSpPr>
+          <p:cNvPr id="2" name="Rectangle 1"/>
+          <p:cNvSpPr/>
+          <p:nvPr/>
+        </p:nvSpPr>
+        <p:spPr>
+          <a:xfrm>
+            <a:off x="0" y="0"/>
+            <a:ext cx="12191695" cy="960120"/>
+          </a:xfrm>
+          <a:prstGeom prst="rect">
+            <a:avLst/>
+          </a:prstGeom>
+          <a:solidFill>
+            <a:srgbClr val="095292"/>
+          </a:solidFill>
+          <a:ln>
+            <a:noFill/>
+          </a:ln>
+        </p:spPr>
+        <p:style>
+          <a:lnRef idx="1">
+            <a:schemeClr val="accent1"/>
+          </a:lnRef>
+          <a:fillRef idx="3">
+            <a:schemeClr val="accent1"/>
+          </a:fillRef>
+          <a:effectRef idx="2">
+            <a:schemeClr val="accent1"/>
+          </a:effectRef>
+          <a:fontRef idx="minor">
+            <a:schemeClr val="lt1"/>
+          </a:fontRef>
+        </p:style>
+        <p:txBody>
+          <a:bodyPr rtlCol="0" anchor="ctr"/>
+          <a:lstStyle/>
+          <a:p>
+            <a:pPr algn="ctr"/>
+          </a:p>
+        </p:txBody>
+      </p:sp>
+      <p:sp>
+        <p:nvSpPr>
+          <p:cNvPr id="3" name="Rectangle 2"/>
+          <p:cNvSpPr/>
+          <p:nvPr/>
+        </p:nvSpPr>
+        <p:spPr>
+          <a:xfrm>
+            <a:off x="0" y="960120"/>
+            <a:ext cx="12191695" cy="41148"/>
+          </a:xfrm>
+          <a:prstGeom prst="rect">
+            <a:avLst/>
+          </a:prstGeom>
+          <a:solidFill>
+            <a:srgbClr val="FFD000"/>
+          </a:solidFill>
+          <a:ln>
+            <a:noFill/>
+          </a:ln>
+        </p:spPr>
+        <p:style>
+          <a:lnRef idx="1">
+            <a:schemeClr val="accent1"/>
+          </a:lnRef>
+          <a:fillRef idx="3">
+            <a:schemeClr val="accent1"/>
+          </a:fillRef>
+          <a:effectRef idx="2">
+            <a:schemeClr val="accent1"/>
+          </a:effectRef>
+          <a:fontRef idx="minor">
+            <a:schemeClr val="lt1"/>
+          </a:fontRef>
+        </p:style>
+        <p:txBody>
+          <a:bodyPr rtlCol="0" anchor="ctr"/>
+          <a:lstStyle/>
+          <a:p>
+            <a:pPr algn="ctr"/>
+          </a:p>
+        </p:txBody>
+      </p:sp>
+      <p:sp>
+        <p:nvSpPr>
+          <p:cNvPr id="4" name="TextBox 3"/>
+          <p:cNvSpPr txBox="1"/>
+          <p:nvPr/>
+        </p:nvSpPr>
+        <p:spPr>
+          <a:xfrm>
+            <a:off x="457200" y="164592"/>
+            <a:ext cx="11277295" cy="502920"/>
+          </a:xfrm>
+          <a:prstGeom prst="rect">
+            <a:avLst/>
+          </a:prstGeom>
+          <a:noFill/>
+        </p:spPr>
+        <p:txBody>
+          <a:bodyPr wrap="square">
+            <a:spAutoFit/>
+          </a:bodyPr>
+          <a:lstStyle/>
+          <a:p>
+            <a:r>
+              <a:rPr sz="2600" b="1" i="0">
+                <a:solidFill>
+                  <a:srgbClr val="FFFFFF"/>
+                </a:solidFill>
+                <a:latin typeface="Calibri"/>
+              </a:rPr>
+              <a:t>Para el PI esta semana</a:t>
+            </a:r>
+          </a:p>
+        </p:txBody>
+      </p:sp>
+      <p:sp>
+        <p:nvSpPr>
+          <p:cNvPr id="5" name="Rounded Rectangle 4"/>
+          <p:cNvSpPr/>
+          <p:nvPr/>
+        </p:nvSpPr>
+        <p:spPr>
+          <a:xfrm>
+            <a:off x="457200" y="1261872"/>
+            <a:ext cx="11277295" cy="1051560"/>
+          </a:xfrm>
+          <a:prstGeom prst="roundRect">
+            <a:avLst>
+              <a:gd name="adj" fmla="val 12000"/>
+            </a:avLst>
+          </a:prstGeom>
+          <a:solidFill>
+            <a:srgbClr val="E8F4FA"/>
+          </a:solidFill>
+          <a:ln>
+            <a:noFill/>
+          </a:ln>
+        </p:spPr>
+        <p:style>
+          <a:lnRef idx="1">
+            <a:schemeClr val="accent1"/>
+          </a:lnRef>
+          <a:fillRef idx="3">
+            <a:schemeClr val="accent1"/>
+          </a:fillRef>
+          <a:effectRef idx="2">
+            <a:schemeClr val="accent1"/>
+          </a:effectRef>
+          <a:fontRef idx="minor">
+            <a:schemeClr val="lt1"/>
+          </a:fontRef>
+        </p:style>
+        <p:txBody>
+          <a:bodyPr rtlCol="0" anchor="ctr"/>
+          <a:lstStyle/>
+          <a:p>
+            <a:pPr algn="ctr"/>
+          </a:p>
+        </p:txBody>
+      </p:sp>
+      <p:sp>
+        <p:nvSpPr>
+          <p:cNvPr id="6" name="Rectangle 5"/>
+          <p:cNvSpPr/>
+          <p:nvPr/>
+        </p:nvSpPr>
+        <p:spPr>
+          <a:xfrm>
+            <a:off x="457200" y="1261872"/>
+            <a:ext cx="128016" cy="1051560"/>
+          </a:xfrm>
+          <a:prstGeom prst="rect">
+            <a:avLst/>
+          </a:prstGeom>
+          <a:solidFill>
+            <a:srgbClr val="269CCB"/>
+          </a:solidFill>
+          <a:ln>
+            <a:noFill/>
+          </a:ln>
+        </p:spPr>
+        <p:style>
+          <a:lnRef idx="1">
+            <a:schemeClr val="accent1"/>
+          </a:lnRef>
+          <a:fillRef idx="3">
+            <a:schemeClr val="accent1"/>
+          </a:fillRef>
+          <a:effectRef idx="2">
+            <a:schemeClr val="accent1"/>
+          </a:effectRef>
+          <a:fontRef idx="minor">
+            <a:schemeClr val="lt1"/>
+          </a:fontRef>
+        </p:style>
+        <p:txBody>
+          <a:bodyPr rtlCol="0" anchor="ctr"/>
+          <a:lstStyle/>
+          <a:p>
+            <a:pPr algn="ctr"/>
+          </a:p>
+        </p:txBody>
+      </p:sp>
+      <p:sp>
+        <p:nvSpPr>
+          <p:cNvPr id="7" name="TextBox 6"/>
+          <p:cNvSpPr txBox="1"/>
+          <p:nvPr/>
+        </p:nvSpPr>
+        <p:spPr>
+          <a:xfrm>
+            <a:off x="777240" y="1399031"/>
+            <a:ext cx="10774375" cy="822959"/>
+          </a:xfrm>
+          <a:prstGeom prst="rect">
+            <a:avLst/>
+          </a:prstGeom>
+          <a:noFill/>
+        </p:spPr>
+        <p:txBody>
+          <a:bodyPr wrap="square">
+            <a:spAutoFit/>
+          </a:bodyPr>
+          <a:lstStyle/>
+          <a:p>
+            <a:r>
+              <a:rPr sz="1200" b="1" i="0">
+                <a:solidFill>
+                  <a:srgbClr val="269CCB"/>
+                </a:solidFill>
+                <a:latin typeface="Calibri"/>
+              </a:rPr>
+              <a:t>Info</a:t>
+            </a:r>
+          </a:p>
+          <a:p>
+            <a:pPr>
+              <a:spcBef>
+                <a:spcPts val="400"/>
+              </a:spcBef>
+            </a:pPr>
+            <a:r>
+              <a:rPr sz="1400" b="0" i="0">
+                <a:solidFill>
+                  <a:srgbClr val="333333"/>
+                </a:solidFill>
+                <a:latin typeface="Calibri"/>
+              </a:rPr>
+              <a:t>Hito: Transaccion de negocio (factura + stock) + notas de tuning</a:t>
+            </a:r>
+          </a:p>
+        </p:txBody>
+      </p:sp>
+      <p:sp>
+        <p:nvSpPr>
+          <p:cNvPr id="8" name="Rounded Rectangle 7"/>
+          <p:cNvSpPr/>
+          <p:nvPr/>
+        </p:nvSpPr>
+        <p:spPr>
+          <a:xfrm>
+            <a:off x="457200" y="2478024"/>
+            <a:ext cx="11277295" cy="1051560"/>
+          </a:xfrm>
+          <a:prstGeom prst="roundRect">
+            <a:avLst>
+              <a:gd name="adj" fmla="val 12000"/>
+            </a:avLst>
+          </a:prstGeom>
+          <a:solidFill>
+            <a:srgbClr val="FFF8E1"/>
+          </a:solidFill>
+          <a:ln>
+            <a:noFill/>
+          </a:ln>
+        </p:spPr>
+        <p:style>
+          <a:lnRef idx="1">
+            <a:schemeClr val="accent1"/>
+          </a:lnRef>
+          <a:fillRef idx="3">
+            <a:schemeClr val="accent1"/>
+          </a:fillRef>
+          <a:effectRef idx="2">
+            <a:schemeClr val="accent1"/>
+          </a:effectRef>
+          <a:fontRef idx="minor">
+            <a:schemeClr val="lt1"/>
+          </a:fontRef>
+        </p:style>
+        <p:txBody>
+          <a:bodyPr rtlCol="0" anchor="ctr"/>
+          <a:lstStyle/>
+          <a:p>
+            <a:pPr algn="ctr"/>
+          </a:p>
+        </p:txBody>
+      </p:sp>
+      <p:sp>
+        <p:nvSpPr>
+          <p:cNvPr id="9" name="Rectangle 8"/>
+          <p:cNvSpPr/>
+          <p:nvPr/>
+        </p:nvSpPr>
+        <p:spPr>
+          <a:xfrm>
+            <a:off x="457200" y="2478024"/>
+            <a:ext cx="128016" cy="1051560"/>
+          </a:xfrm>
+          <a:prstGeom prst="rect">
+            <a:avLst/>
+          </a:prstGeom>
+          <a:solidFill>
+            <a:srgbClr val="FFD000"/>
+          </a:solidFill>
+          <a:ln>
+            <a:noFill/>
+          </a:ln>
+        </p:spPr>
+        <p:style>
+          <a:lnRef idx="1">
+            <a:schemeClr val="accent1"/>
+          </a:lnRef>
+          <a:fillRef idx="3">
+            <a:schemeClr val="accent1"/>
+          </a:fillRef>
+          <a:effectRef idx="2">
+            <a:schemeClr val="accent1"/>
+          </a:effectRef>
+          <a:fontRef idx="minor">
+            <a:schemeClr val="lt1"/>
+          </a:fontRef>
+        </p:style>
+        <p:txBody>
+          <a:bodyPr rtlCol="0" anchor="ctr"/>
+          <a:lstStyle/>
+          <a:p>
+            <a:pPr algn="ctr"/>
+          </a:p>
+        </p:txBody>
+      </p:sp>
+      <p:sp>
+        <p:nvSpPr>
+          <p:cNvPr id="10" name="TextBox 9"/>
+          <p:cNvSpPr txBox="1"/>
+          <p:nvPr/>
+        </p:nvSpPr>
+        <p:spPr>
+          <a:xfrm>
+            <a:off x="777240" y="2615184"/>
+            <a:ext cx="10774375" cy="822959"/>
+          </a:xfrm>
+          <a:prstGeom prst="rect">
+            <a:avLst/>
+          </a:prstGeom>
+          <a:noFill/>
+        </p:spPr>
+        <p:txBody>
+          <a:bodyPr wrap="square">
+            <a:spAutoFit/>
+          </a:bodyPr>
+          <a:lstStyle/>
+          <a:p>
+            <a:r>
+              <a:rPr sz="1200" b="1" i="0">
+                <a:solidFill>
+                  <a:srgbClr val="FFD000"/>
+                </a:solidFill>
+                <a:latin typeface="Calibri"/>
+              </a:rPr>
+              <a:t>Aclaración</a:t>
+            </a:r>
+          </a:p>
+          <a:p>
+            <a:pPr>
+              <a:spcBef>
+                <a:spcPts val="400"/>
+              </a:spcBef>
+            </a:pPr>
+            <a:r>
+              <a:rPr sz="1400" b="0" i="0">
+                <a:solidFill>
+                  <a:srgbClr val="333333"/>
+                </a:solidFill>
+                <a:latin typeface="Calibri"/>
+              </a:rPr>
+              <a:t>Enunciado completo: Clases/Proyecto Integrador/ (VetCare DB).</a:t>
+            </a:r>
+          </a:p>
+        </p:txBody>
+      </p:sp>
+      <p:sp>
+        <p:nvSpPr>
+          <p:cNvPr id="11" name="Rounded Rectangle 10"/>
+          <p:cNvSpPr/>
+          <p:nvPr/>
+        </p:nvSpPr>
+        <p:spPr>
+          <a:xfrm>
+            <a:off x="457200" y="3694176"/>
+            <a:ext cx="11277295" cy="1051560"/>
+          </a:xfrm>
+          <a:prstGeom prst="roundRect">
+            <a:avLst>
+              <a:gd name="adj" fmla="val 12000"/>
+            </a:avLst>
+          </a:prstGeom>
+          <a:solidFill>
+            <a:srgbClr val="FBE4E4"/>
+          </a:solidFill>
+          <a:ln>
+            <a:noFill/>
+          </a:ln>
+        </p:spPr>
+        <p:style>
+          <a:lnRef idx="1">
+            <a:schemeClr val="accent1"/>
+          </a:lnRef>
+          <a:fillRef idx="3">
+            <a:schemeClr val="accent1"/>
+          </a:fillRef>
+          <a:effectRef idx="2">
+            <a:schemeClr val="accent1"/>
+          </a:effectRef>
+          <a:fontRef idx="minor">
+            <a:schemeClr val="lt1"/>
+          </a:fontRef>
+        </p:style>
+        <p:txBody>
+          <a:bodyPr rtlCol="0" anchor="ctr"/>
+          <a:lstStyle/>
+          <a:p>
+            <a:pPr algn="ctr"/>
+          </a:p>
+        </p:txBody>
+      </p:sp>
+      <p:sp>
+        <p:nvSpPr>
+          <p:cNvPr id="12" name="Rectangle 11"/>
+          <p:cNvSpPr/>
+          <p:nvPr/>
+        </p:nvSpPr>
+        <p:spPr>
+          <a:xfrm>
+            <a:off x="457200" y="3694176"/>
+            <a:ext cx="128016" cy="1051560"/>
+          </a:xfrm>
+          <a:prstGeom prst="rect">
+            <a:avLst/>
+          </a:prstGeom>
+          <a:solidFill>
+            <a:srgbClr val="A02030"/>
+          </a:solidFill>
+          <a:ln>
+            <a:noFill/>
+          </a:ln>
+        </p:spPr>
+        <p:style>
+          <a:lnRef idx="1">
+            <a:schemeClr val="accent1"/>
+          </a:lnRef>
+          <a:fillRef idx="3">
+            <a:schemeClr val="accent1"/>
+          </a:fillRef>
+          <a:effectRef idx="2">
+            <a:schemeClr val="accent1"/>
+          </a:effectRef>
+          <a:fontRef idx="minor">
+            <a:schemeClr val="lt1"/>
+          </a:fontRef>
+        </p:style>
+        <p:txBody>
+          <a:bodyPr rtlCol="0" anchor="ctr"/>
+          <a:lstStyle/>
+          <a:p>
+            <a:pPr algn="ctr"/>
+          </a:p>
+        </p:txBody>
+      </p:sp>
+      <p:sp>
+        <p:nvSpPr>
+          <p:cNvPr id="13" name="TextBox 12"/>
+          <p:cNvSpPr txBox="1"/>
+          <p:nvPr/>
+        </p:nvSpPr>
+        <p:spPr>
+          <a:xfrm>
+            <a:off x="777240" y="3831336"/>
+            <a:ext cx="10774375" cy="822959"/>
+          </a:xfrm>
+          <a:prstGeom prst="rect">
+            <a:avLst/>
+          </a:prstGeom>
+          <a:noFill/>
+        </p:spPr>
+        <p:txBody>
+          <a:bodyPr wrap="square">
+            <a:spAutoFit/>
+          </a:bodyPr>
+          <a:lstStyle/>
+          <a:p>
+            <a:r>
+              <a:rPr sz="1200" b="1" i="0">
+                <a:solidFill>
+                  <a:srgbClr val="A02030"/>
+                </a:solidFill>
+                <a:latin typeface="Calibri"/>
+              </a:rPr>
+              <a:t>Atención</a:t>
+            </a:r>
+          </a:p>
+          <a:p>
+            <a:pPr>
+              <a:spcBef>
+                <a:spcPts val="400"/>
+              </a:spcBef>
+            </a:pPr>
+            <a:r>
+              <a:rPr sz="1400" b="0" i="0">
+                <a:solidFill>
+                  <a:srgbClr val="333333"/>
+                </a:solidFill>
+                <a:latin typeface="Calibri"/>
+              </a:rPr>
+              <a:t>Taller de la semana en ExamLab (https://uniaj.examlab.workers.dev/): domingo 23:59 (regla del Acuerdo) cuando aplique.</a:t>
+            </a:r>
+          </a:p>
+        </p:txBody>
+      </p:sp>
+      <p:sp>
+        <p:nvSpPr>
+          <p:cNvPr id="14" name="TextBox 13"/>
+          <p:cNvSpPr txBox="1"/>
+          <p:nvPr/>
+        </p:nvSpPr>
+        <p:spPr>
+          <a:xfrm>
+            <a:off x="11185855" y="6473952"/>
+            <a:ext cx="640080" cy="274320"/>
+          </a:xfrm>
+          <a:prstGeom prst="rect">
+            <a:avLst/>
+          </a:prstGeom>
+          <a:noFill/>
+        </p:spPr>
+        <p:txBody>
+          <a:bodyPr wrap="square">
+            <a:spAutoFit/>
+          </a:bodyPr>
+          <a:lstStyle/>
+          <a:p>
+            <a:pPr algn="r"/>
+            <a:r>
+              <a:rPr sz="1100" b="0" i="0">
+                <a:solidFill>
+                  <a:srgbClr val="666666"/>
+                </a:solidFill>
+                <a:latin typeface="Calibri"/>
+              </a:rPr>
+              <a:t>17</a:t>
+            </a:r>
+          </a:p>
+        </p:txBody>
+      </p:sp>
+    </p:spTree>
+  </p:cSld>
+  <p:clrMapOvr>
+    <a:masterClrMapping/>
+  </p:clrMapOvr>
+</p:sld>
+</file>
+
+<file path=ppt/slides/slide18.xml><?xml version="1.0" encoding="utf-8"?>
+<p:sld xmlns:a="http://schemas.openxmlformats.org/drawingml/2006/main" xmlns:p="http://schemas.openxmlformats.org/presentationml/2006/main" xmlns:r="http://schemas.openxmlformats.org/officeDocument/2006/relationships">
+  <p:cSld>
+    <p:bg>
+      <p:bgPr>
+        <a:solidFill>
+          <a:srgbClr val="FFFFFF"/>
+        </a:solidFill>
+        <a:effectLst/>
+      </p:bgPr>
+    </p:bg>
+    <p:spTree>
+      <p:nvGrpSpPr>
+        <p:cNvPr id="1" name=""/>
+        <p:cNvGrpSpPr/>
+        <p:nvPr/>
+      </p:nvGrpSpPr>
+      <p:grpSpPr/>
+      <p:sp>
+        <p:nvSpPr>
+          <p:cNvPr id="2" name="Rectangle 1"/>
+          <p:cNvSpPr/>
+          <p:nvPr/>
+        </p:nvSpPr>
+        <p:spPr>
+          <a:xfrm>
+            <a:off x="0" y="0"/>
             <a:ext cx="12191695" cy="164592"/>
           </a:xfrm>
           <a:prstGeom prst="rect">
@@ -6251,7 +9393,7 @@
                 </a:solidFill>
                 <a:latin typeface="Calibri"/>
               </a:rPr>
-              <a:t>Entregable: Script transaccional + checklist tuning del PI (1 pag.)</a:t>
+              <a:t>Entregable: sp_facturar + fn_descontar_stock + seccion Transacciones y tuning del informe (1 pag.)</a:t>
             </a:r>
           </a:p>
           <a:p>
@@ -6530,7 +9672,7 @@
                 </a:solidFill>
                 <a:latin typeface="Calibri"/>
               </a:rPr>
-              <a:t>Oracle Live SQL / DB Fiddle</a:t>
+              <a:t>ExamLab (PostgreSQL/PGlite)</a:t>
             </a:r>
             <a:r>
               <a:rPr sz="1600" b="0" i="0">
@@ -6591,7 +9733,7 @@
                 </a:solidFill>
                 <a:latin typeface="Calibri"/>
               </a:rPr>
-              <a:t> Script transaccional + checklist tuning del PI (1 pag.)</a:t>
+              <a:t> sp_facturar + fn_descontar_stock + seccion Transacciones y tuning del informe (1 pag.)</a:t>
             </a:r>
           </a:p>
           <a:p>
@@ -7743,7 +10885,7 @@
                 </a:solidFill>
                 <a:latin typeface="Calibri"/>
               </a:rPr>
-              <a:t>–   COMMIT confirma la transaccion de forma permanente; ROLLBACK deshace todo lo hecho desde el ultimo COMMIT si…</a:t>
+              <a:t>–   COMMIT confirma la transaccion de forma permanente; ROLLBACK deshace todo lo hecho desde que se abrio</a:t>
             </a:r>
           </a:p>
           <a:p>
@@ -7759,7 +10901,7 @@
                 </a:solidFill>
                 <a:latin typeface="Calibri"/>
               </a:rPr>
-              <a:t>–   Dirty read (lectura sucia): una transaccion lee un dato que otra transaccion modifico pero AUN NO ha…</a:t>
+              <a:t>–   Lo que si hay que escribir es el guardia: UPDATE insumo SET stock = stock - p_cantidades[i] WHERE id_insumo =…</a:t>
             </a:r>
           </a:p>
           <a:p>
@@ -7775,7 +10917,7 @@
                 </a:solidFill>
                 <a:latin typeface="Calibri"/>
               </a:rPr>
-              <a:t>–   Tuning en este contexto no es magia, son habitos concretos: mantener estadisticas del optimizador…</a:t>
+              <a:t>–   Dirty read (lectura sucia): una transaccion lee un dato que otra transaccion modifico pero AUN NO ha…</a:t>
             </a:r>
           </a:p>
         </p:txBody>
@@ -8115,7 +11257,7 @@
                 </a:solidFill>
                 <a:latin typeface="Calibri"/>
               </a:rPr>
-              <a:t>BEGIN;</a:t>
+              <a:t>CREATE PROCEDURE sp_facturar(p_id_consulta INT,</a:t>
             </a:r>
           </a:p>
           <a:p>
@@ -8131,7 +11273,7 @@
                 </a:solidFill>
                 <a:latin typeface="Calibri"/>
               </a:rPr>
-              <a:t>  INSERT INTO factura(...)         VALUES (...);</a:t>
+              <a:t>        p_insumos INT[], p_cantidades INT[]) ...</a:t>
             </a:r>
           </a:p>
           <a:p>
@@ -8147,7 +11289,7 @@
                 </a:solidFill>
                 <a:latin typeface="Calibri"/>
               </a:rPr>
-              <a:t>  INSERT INTO detalle_factura(...) VALUES (...);</a:t>
+              <a:t>  INSERT INTO factura(...) RETURNING id_factura INTO v_id_factura;</a:t>
             </a:r>
           </a:p>
           <a:p>
@@ -8163,7 +11305,7 @@
                 </a:solidFill>
                 <a:latin typeface="Calibri"/>
               </a:rPr>
-              <a:t>  UPDATE insumo SET stock = stock - :cant</a:t>
+              <a:t>  FOR i IN 1 .. array_length(p_insumos, 1) LOOP</a:t>
             </a:r>
           </a:p>
           <a:p>
@@ -8179,7 +11321,7 @@
                 </a:solidFill>
                 <a:latin typeface="Calibri"/>
               </a:rPr>
-              <a:t>   WHERE id_insumo = :id AND stock &gt;= :cant;   -- 0 filas si no alcanza</a:t>
+              <a:t>    UPDATE insumo SET stock = stock - p_cantidades[i]</a:t>
             </a:r>
           </a:p>
           <a:p>
@@ -8195,7 +11337,7 @@
                 </a:solidFill>
                 <a:latin typeface="Calibri"/>
               </a:rPr>
-              <a:t>  -- si afecto 0 filas -&gt;</a:t>
+              <a:t>     WHERE id_insumo = p_insumos[i]</a:t>
             </a:r>
           </a:p>
           <a:p>
@@ -8211,7 +11353,7 @@
                 </a:solidFill>
                 <a:latin typeface="Calibri"/>
               </a:rPr>
-              <a:t>  ROLLBACK;   -- de lo contrario: COMMIT;</a:t>
+              <a:t>       AND stock &gt;= p_cantidades[i];   -- 0 filas si no alcanza</a:t>
             </a:r>
           </a:p>
           <a:p>
@@ -8227,7 +11369,39 @@
                 </a:solidFill>
                 <a:latin typeface="Calibri"/>
               </a:rPr>
-              <a:t>END;</a:t>
+              <a:t>    GET DIAGNOSTICS v_filas = ROW_COUNT;</a:t>
+            </a:r>
+          </a:p>
+          <a:p>
+            <a:pPr>
+              <a:spcAft>
+                <a:spcPts val="400"/>
+              </a:spcAft>
+            </a:pPr>
+            <a:r>
+              <a:rPr sz="1400" b="0" i="0">
+                <a:solidFill>
+                  <a:srgbClr val="FFFFFF"/>
+                </a:solidFill>
+                <a:latin typeface="Calibri"/>
+              </a:rPr>
+              <a:t>    IF v_filas = 0 THEN RAISE EXCEPTION '...'; END IF;</a:t>
+            </a:r>
+          </a:p>
+          <a:p>
+            <a:pPr>
+              <a:spcAft>
+                <a:spcPts val="400"/>
+              </a:spcAft>
+            </a:pPr>
+            <a:r>
+              <a:rPr sz="1400" b="0" i="0">
+                <a:solidFill>
+                  <a:srgbClr val="FFFFFF"/>
+                </a:solidFill>
+                <a:latin typeface="Calibri"/>
+              </a:rPr>
+              <a:t>  END LOOP;   -- sin COMMIT y sin ROLLBACK: los pone el CALL</a:t>
             </a:r>
           </a:p>
         </p:txBody>
@@ -8262,7 +11436,7 @@
                 </a:solidFill>
                 <a:latin typeface="Calibri"/>
               </a:rPr>
-              <a:t>La condicion stock &gt;= :cant evita el stock negativo; el ROLLBACK evita la factura a medias.</a:t>
+              <a:t>La condicion stock &gt;= cantidad evita el stock negativo; la excepcion que sale del CALL deshace todo sola.</a:t>
             </a:r>
           </a:p>
         </p:txBody>
@@ -8337,7 +11511,7 @@
         <p:spPr>
           <a:xfrm>
             <a:off x="0" y="0"/>
-            <a:ext cx="12191695" cy="960120"/>
+            <a:ext cx="12191695" cy="1170432"/>
           </a:xfrm>
           <a:prstGeom prst="rect">
             <a:avLst/>
@@ -8379,7 +11553,7 @@
         </p:nvSpPr>
         <p:spPr>
           <a:xfrm>
-            <a:off x="0" y="960120"/>
+            <a:off x="0" y="1170432"/>
             <a:ext cx="12191695" cy="41148"/>
           </a:xfrm>
           <a:prstGeom prst="rect">
@@ -8423,7 +11597,7 @@
         <p:spPr>
           <a:xfrm>
             <a:off x="457200" y="164592"/>
-            <a:ext cx="11277295" cy="502920"/>
+            <a:ext cx="11277295" cy="384048"/>
           </a:xfrm>
           <a:prstGeom prst="rect">
             <a:avLst/>
@@ -8443,7 +11617,7 @@
                 </a:solidFill>
                 <a:latin typeface="Calibri"/>
               </a:rPr>
-              <a:t>Demo del dia</a:t>
+              <a:t>sp_facturar en PL/pgSQL: el molde que se califica</a:t>
             </a:r>
           </a:p>
         </p:txBody>
@@ -8456,8 +11630,42 @@
         </p:nvSpPr>
         <p:spPr>
           <a:xfrm>
-            <a:off x="457200" y="1170432"/>
-            <a:ext cx="11277295" cy="5230368"/>
+            <a:off x="457200" y="566928"/>
+            <a:ext cx="11277295" cy="411480"/>
+          </a:xfrm>
+          <a:prstGeom prst="rect">
+            <a:avLst/>
+          </a:prstGeom>
+          <a:noFill/>
+        </p:spPr>
+        <p:txBody>
+          <a:bodyPr wrap="square">
+            <a:spAutoFit/>
+          </a:bodyPr>
+          <a:lstStyle/>
+          <a:p>
+            <a:r>
+              <a:rPr sz="1400" b="0" i="0">
+                <a:solidFill>
+                  <a:srgbClr val="B8D8EE"/>
+                </a:solidFill>
+                <a:latin typeface="Calibri"/>
+              </a:rPr>
+              <a:t>Es la pregunta 1 del taller — 35 de los 100 puntos — y el molde que la pregunta 2 hace fallar a proposito</a:t>
+            </a:r>
+          </a:p>
+        </p:txBody>
+      </p:sp>
+      <p:sp>
+        <p:nvSpPr>
+          <p:cNvPr id="6" name="TextBox 5"/>
+          <p:cNvSpPr txBox="1"/>
+          <p:nvPr/>
+        </p:nvSpPr>
+        <p:spPr>
+          <a:xfrm>
+            <a:off x="457200" y="1380744"/>
+            <a:ext cx="11277295" cy="5020056"/>
           </a:xfrm>
           <a:prstGeom prst="rect">
             <a:avLst/>
@@ -8476,7 +11684,7 @@
               </a:spcAft>
             </a:pPr>
             <a:r>
-              <a:rPr sz="1600" b="0" i="0">
+              <a:rPr sz="1300" b="0" i="0">
                 <a:solidFill>
                   <a:srgbClr val="333333"/>
                 </a:solidFill>
@@ -8485,22 +11693,58 @@
               <a:t>–   </a:t>
             </a:r>
             <a:r>
-              <a:rPr sz="1600" b="1" i="0">
-                <a:solidFill>
-                  <a:srgbClr val="333333"/>
-                </a:solidFill>
-                <a:latin typeface="Calibri"/>
-              </a:rPr>
-              <a:t>Herramienta:</a:t>
-            </a:r>
-            <a:r>
-              <a:rPr sz="1600" b="0" i="0">
-                <a:solidFill>
-                  <a:srgbClr val="333333"/>
-                </a:solidFill>
-                <a:latin typeface="Calibri"/>
-              </a:rPr>
-              <a:t> Oracle Live SQL / DB Fiddle</a:t>
+              <a:rPr sz="1300" b="1" i="0">
+                <a:solidFill>
+                  <a:srgbClr val="333333"/>
+                </a:solidFill>
+                <a:latin typeface="Calibri"/>
+              </a:rPr>
+              <a:t>La firma exacta, que se factura por lineas.</a:t>
+            </a:r>
+            <a:r>
+              <a:rPr sz="1300" b="0" i="0">
+                <a:solidFill>
+                  <a:srgbClr val="333333"/>
+                </a:solidFill>
+                <a:latin typeface="Calibri"/>
+              </a:rPr>
+              <a:t> «CREATE PROCEDURE sp_facturar(p_id_consulta INT, p_insumos INT[], p_cantidades INT[]) LANGUAGE plpgsql AS $proc$ ... $proc$;» — </a:t>
+            </a:r>
+            <a:r>
+              <a:rPr sz="1300" b="1" i="0">
+                <a:solidFill>
+                  <a:srgbClr val="333333"/>
+                </a:solidFill>
+                <a:latin typeface="Calibri"/>
+              </a:rPr>
+              <a:t>dos arreglos paralelos</a:t>
+            </a:r>
+            <a:r>
+              <a:rPr sz="1300" b="0" i="0">
+                <a:solidFill>
+                  <a:srgbClr val="333333"/>
+                </a:solidFill>
+                <a:latin typeface="Calibri"/>
+              </a:rPr>
+              <a:t>, no un insumo suelto: una factura tiene varias lineas. Se llama «CALL sp_facturar(4, ARRAY[1,6,5], ARRAY[1,2,3]);». Los tipos son «INT» y «NUMERIC», no «NUMBER». Primera linea del cuerpo: «IF array_length(p_insumos, 1) IS DISTINCT FROM array_length(p_cantidades, 1) THEN RAISE EXCEPTION ...» — dos arreglos de longitud distinta se rechazan </a:t>
+            </a:r>
+            <a:r>
+              <a:rPr sz="1300" b="1" i="0">
+                <a:solidFill>
+                  <a:srgbClr val="333333"/>
+                </a:solidFill>
+                <a:latin typeface="Calibri"/>
+              </a:rPr>
+              <a:t>antes de tocar la base</a:t>
+            </a:r>
+            <a:r>
+              <a:rPr sz="1300" b="0" i="0">
+                <a:solidFill>
+                  <a:srgbClr val="333333"/>
+                </a:solidFill>
+                <a:latin typeface="Calibri"/>
+              </a:rPr>
+              <a:t>.</a:t>
             </a:r>
           </a:p>
           <a:p>
@@ -8510,7 +11754,7 @@
               </a:spcAft>
             </a:pPr>
             <a:r>
-              <a:rPr sz="1600" b="0" i="0">
+              <a:rPr sz="1300" b="0" i="0">
                 <a:solidFill>
                   <a:srgbClr val="333333"/>
                 </a:solidFill>
@@ -8519,22 +11763,40 @@
               <a:t>–   </a:t>
             </a:r>
             <a:r>
-              <a:rPr sz="1600" b="1" i="0">
-                <a:solidFill>
-                  <a:srgbClr val="333333"/>
-                </a:solidFill>
-                <a:latin typeface="Calibri"/>
-              </a:rPr>
-              <a:t>Demo:</a:t>
-            </a:r>
-            <a:r>
-              <a:rPr sz="1600" b="0" i="0">
-                <a:solidFill>
-                  <a:srgbClr val="333333"/>
-                </a:solidFill>
-                <a:latin typeface="Calibri"/>
-              </a:rPr>
-              <a:t> BEGIN... INSERT factura/detalle... UPDATE stock... COMMIT/ROLLBACK.</a:t>
+              <a:rPr sz="1300" b="1" i="0">
+                <a:solidFill>
+                  <a:srgbClr val="333333"/>
+                </a:solidFill>
+                <a:latin typeface="Calibri"/>
+              </a:rPr>
+              <a:t>La cabecera y el id que se acaba de generar.</a:t>
+            </a:r>
+            <a:r>
+              <a:rPr sz="1300" b="0" i="0">
+                <a:solidFill>
+                  <a:srgbClr val="333333"/>
+                </a:solidFill>
+                <a:latin typeface="Calibri"/>
+              </a:rPr>
+              <a:t> «INSERT INTO factura (id_consulta, total) VALUES (p_id_consulta, 0) RETURNING id_factura INTO v_id_factura;» — el total entra en </a:t>
+            </a:r>
+            <a:r>
+              <a:rPr sz="1300" b="1" i="0">
+                <a:solidFill>
+                  <a:srgbClr val="333333"/>
+                </a:solidFill>
+                <a:latin typeface="Calibri"/>
+              </a:rPr>
+              <a:t>0</a:t>
+            </a:r>
+            <a:r>
+              <a:rPr sz="1300" b="0" i="0">
+                <a:solidFill>
+                  <a:srgbClr val="333333"/>
+                </a:solidFill>
+                <a:latin typeface="Calibri"/>
+              </a:rPr>
+              <a:t> y se corrige al final, porque todavia no se sabe. «RETURNING ... INTO» evita ir a buscarlo con otro «SELECT».</a:t>
             </a:r>
           </a:p>
           <a:p>
@@ -8544,13 +11806,85 @@
               </a:spcAft>
             </a:pPr>
             <a:r>
-              <a:rPr sz="1600" b="0" i="0">
-                <a:solidFill>
-                  <a:srgbClr val="333333"/>
-                </a:solidFill>
-                <a:latin typeface="Calibri"/>
-              </a:rPr>
-              <a:t>–   Sigan el mismo dominio VetCare (no inventen otro caso).</a:t>
+              <a:rPr sz="1300" b="0" i="0">
+                <a:solidFill>
+                  <a:srgbClr val="333333"/>
+                </a:solidFill>
+                <a:latin typeface="Calibri"/>
+              </a:rPr>
+              <a:t>–   </a:t>
+            </a:r>
+            <a:r>
+              <a:rPr sz="1300" b="1" i="0">
+                <a:solidFill>
+                  <a:srgbClr val="333333"/>
+                </a:solidFill>
+                <a:latin typeface="Calibri"/>
+              </a:rPr>
+              <a:t>El bucle, y el guardia que es el corazon del dia.</a:t>
+            </a:r>
+            <a:r>
+              <a:rPr sz="1300" b="0" i="0">
+                <a:solidFill>
+                  <a:srgbClr val="333333"/>
+                </a:solidFill>
+                <a:latin typeface="Calibri"/>
+              </a:rPr>
+              <a:t> «FOR i IN 1 .. array_length(p_insumos, 1) LOOP» y dentro: «UPDATE insumo SET stock = stock - p_cantidades[i] WHERE id_insumo = p_insumos[i] AND </a:t>
+            </a:r>
+            <a:r>
+              <a:rPr sz="1300" b="1" i="0">
+                <a:solidFill>
+                  <a:srgbClr val="333333"/>
+                </a:solidFill>
+                <a:latin typeface="Calibri"/>
+              </a:rPr>
+              <a:t>stock &gt;= p_cantidades[i]</a:t>
+            </a:r>
+            <a:r>
+              <a:rPr sz="1300" b="0" i="0">
+                <a:solidFill>
+                  <a:srgbClr val="333333"/>
+                </a:solidFill>
+                <a:latin typeface="Calibri"/>
+              </a:rPr>
+              <a:t>;» — la comprobacion viaja </a:t>
+            </a:r>
+            <a:r>
+              <a:rPr sz="1300" b="1" i="0">
+                <a:solidFill>
+                  <a:srgbClr val="333333"/>
+                </a:solidFill>
+                <a:latin typeface="Calibri"/>
+              </a:rPr>
+              <a:t>dentro del «WHERE»</a:t>
+            </a:r>
+            <a:r>
+              <a:rPr sz="1300" b="0" i="0">
+                <a:solidFill>
+                  <a:srgbClr val="333333"/>
+                </a:solidFill>
+                <a:latin typeface="Calibri"/>
+              </a:rPr>
+              <a:t>: comprobar y escribir son </a:t>
+            </a:r>
+            <a:r>
+              <a:rPr sz="1300" b="1" i="0">
+                <a:solidFill>
+                  <a:srgbClr val="333333"/>
+                </a:solidFill>
+                <a:latin typeface="Calibri"/>
+              </a:rPr>
+              <a:t>una sola sentencia</a:t>
+            </a:r>
+            <a:r>
+              <a:rPr sz="1300" b="0" i="0">
+                <a:solidFill>
+                  <a:srgbClr val="333333"/>
+                </a:solidFill>
+                <a:latin typeface="Calibri"/>
+              </a:rPr>
+              <a:t> y nadie puede colarse entre las dos.</a:t>
             </a:r>
           </a:p>
           <a:p>
@@ -8560,20 +11894,126 @@
               </a:spcAft>
             </a:pPr>
             <a:r>
-              <a:rPr sz="1600" b="0" i="0">
-                <a:solidFill>
-                  <a:srgbClr val="333333"/>
-                </a:solidFill>
-                <a:latin typeface="Calibri"/>
-              </a:rPr>
-              <a:t>–   Al final de la demo: dejar enlace/script compartible al grupo.</a:t>
-            </a:r>
-          </a:p>
-        </p:txBody>
-      </p:sp>
-      <p:sp>
-        <p:nvSpPr>
-          <p:cNvPr id="6" name="TextBox 5"/>
+              <a:rPr sz="1300" b="0" i="0">
+                <a:solidFill>
+                  <a:srgbClr val="333333"/>
+                </a:solidFill>
+                <a:latin typeface="Calibri"/>
+              </a:rPr>
+              <a:t>–   </a:t>
+            </a:r>
+            <a:r>
+              <a:rPr sz="1300" b="1" i="0">
+                <a:solidFill>
+                  <a:srgbClr val="333333"/>
+                </a:solidFill>
+                <a:latin typeface="Calibri"/>
+              </a:rPr>
+              <a:t>Como se sabe si alcanzo, y como se aborta.</a:t>
+            </a:r>
+            <a:r>
+              <a:rPr sz="1300" b="0" i="0">
+                <a:solidFill>
+                  <a:srgbClr val="333333"/>
+                </a:solidFill>
+                <a:latin typeface="Calibri"/>
+              </a:rPr>
+              <a:t> «GET DIAGNOSTICS v_filas = ROW_COUNT;» guarda cuantas filas toco el «UPDATE»: «1» alcanzo, «0» no habia stock. Entonces «IF v_filas = 0 THEN RAISE EXCEPTION 'ERROR: stock insuficiente del insumo %', p_insumos[i]; END IF;». </a:t>
+            </a:r>
+            <a:r>
+              <a:rPr sz="1300" b="1" i="0">
+                <a:solidFill>
+                  <a:srgbClr val="333333"/>
+                </a:solidFill>
+                <a:latin typeface="Calibri"/>
+              </a:rPr>
+              <a:t>No es «SQL%ROWCOUNT» ni «RAISE_APPLICATION_ERROR»</a:t>
+            </a:r>
+            <a:r>
+              <a:rPr sz="1300" b="0" i="0">
+                <a:solidFill>
+                  <a:srgbClr val="333333"/>
+                </a:solidFill>
+                <a:latin typeface="Calibri"/>
+              </a:rPr>
+              <a:t>: eso es Oracle y aqui no existe.</a:t>
+            </a:r>
+          </a:p>
+          <a:p>
+            <a:pPr>
+              <a:spcAft>
+                <a:spcPts val="800"/>
+              </a:spcAft>
+            </a:pPr>
+            <a:r>
+              <a:rPr sz="1300" b="0" i="0">
+                <a:solidFill>
+                  <a:srgbClr val="333333"/>
+                </a:solidFill>
+                <a:latin typeface="Calibri"/>
+              </a:rPr>
+              <a:t>–   </a:t>
+            </a:r>
+            <a:r>
+              <a:rPr sz="1300" b="1" i="0">
+                <a:solidFill>
+                  <a:srgbClr val="333333"/>
+                </a:solidFill>
+                <a:latin typeface="Calibri"/>
+              </a:rPr>
+              <a:t>Y el cierre.</a:t>
+            </a:r>
+            <a:r>
+              <a:rPr sz="1300" b="0" i="0">
+                <a:solidFill>
+                  <a:srgbClr val="333333"/>
+                </a:solidFill>
+                <a:latin typeface="Calibri"/>
+              </a:rPr>
+              <a:t> Cada iteracion inserta su linea en «detalle_factura» con el «precio_unit» </a:t>
+            </a:r>
+            <a:r>
+              <a:rPr sz="1300" b="1" i="0">
+                <a:solidFill>
+                  <a:srgbClr val="333333"/>
+                </a:solidFill>
+                <a:latin typeface="Calibri"/>
+              </a:rPr>
+              <a:t>vigente</a:t>
+            </a:r>
+            <a:r>
+              <a:rPr sz="1300" b="0" i="0">
+                <a:solidFill>
+                  <a:srgbClr val="333333"/>
+                </a:solidFill>
+                <a:latin typeface="Calibri"/>
+              </a:rPr>
+              <a:t> y acumula «v_total := v_total + v_precio * p_cantidades[i];». Al salir del bucle, «UPDATE factura SET total = v_total WHERE id_factura = v_id_factura;». El caso de prueba da </a:t>
+            </a:r>
+            <a:r>
+              <a:rPr sz="1300" b="1" i="0">
+                <a:solidFill>
+                  <a:srgbClr val="333333"/>
+                </a:solidFill>
+                <a:latin typeface="Calibri"/>
+              </a:rPr>
+              <a:t>27.400</a:t>
+            </a:r>
+            <a:r>
+              <a:rPr sz="1300" b="0" i="0">
+                <a:solidFill>
+                  <a:srgbClr val="333333"/>
+                </a:solidFill>
+                <a:latin typeface="Calibri"/>
+              </a:rPr>
+              <a:t> y deja los stocks en 11, 58 y 5.</a:t>
+            </a:r>
+          </a:p>
+        </p:txBody>
+      </p:sp>
+      <p:sp>
+        <p:nvSpPr>
+          <p:cNvPr id="7" name="TextBox 6"/>
           <p:cNvSpPr txBox="1"/>
           <p:nvPr/>
         </p:nvSpPr>
@@ -8747,7 +12187,7 @@
                 </a:solidFill>
                 <a:latin typeface="Calibri"/>
               </a:rPr>
-              <a:t>Herramientas de hoy</a:t>
+              <a:t>Por que el procedimiento no lleva COMMIT ni ROLLBACK</a:t>
             </a:r>
           </a:p>
         </p:txBody>
@@ -8781,176 +12221,21 @@
                 </a:solidFill>
                 <a:latin typeface="Calibri"/>
               </a:rPr>
-              <a:t>Gratis · navegador o free tier</a:t>
-            </a:r>
-          </a:p>
-        </p:txBody>
-      </p:sp>
-      <p:sp>
-        <p:nvSpPr>
-          <p:cNvPr id="6" name="Rounded Rectangle 5"/>
-          <p:cNvSpPr/>
-          <p:nvPr/>
-        </p:nvSpPr>
-        <p:spPr>
-          <a:xfrm>
-            <a:off x="457200" y="1591056"/>
-            <a:ext cx="3624986" cy="2331720"/>
-          </a:xfrm>
-          <a:prstGeom prst="roundRect">
-            <a:avLst>
-              <a:gd name="adj" fmla="val 12000"/>
-            </a:avLst>
-          </a:prstGeom>
-          <a:solidFill>
-            <a:srgbClr val="F2F2F2"/>
-          </a:solidFill>
-          <a:ln>
-            <a:noFill/>
-          </a:ln>
-        </p:spPr>
-        <p:style>
-          <a:lnRef idx="1">
-            <a:schemeClr val="accent1"/>
-          </a:lnRef>
-          <a:fillRef idx="3">
-            <a:schemeClr val="accent1"/>
-          </a:fillRef>
-          <a:effectRef idx="2">
-            <a:schemeClr val="accent1"/>
-          </a:effectRef>
-          <a:fontRef idx="minor">
-            <a:schemeClr val="lt1"/>
-          </a:fontRef>
-        </p:style>
-        <p:txBody>
-          <a:bodyPr rtlCol="0" anchor="ctr"/>
-          <a:lstStyle/>
-          <a:p>
-            <a:pPr algn="ctr"/>
-          </a:p>
-        </p:txBody>
-      </p:sp>
-      <p:sp>
-        <p:nvSpPr>
-          <p:cNvPr id="7" name="Rectangle 6"/>
-          <p:cNvSpPr/>
-          <p:nvPr/>
-        </p:nvSpPr>
-        <p:spPr>
-          <a:xfrm>
-            <a:off x="457200" y="1591056"/>
-            <a:ext cx="3624986" cy="64008"/>
-          </a:xfrm>
-          <a:prstGeom prst="rect">
-            <a:avLst/>
-          </a:prstGeom>
-          <a:solidFill>
-            <a:srgbClr val="095292"/>
-          </a:solidFill>
-          <a:ln>
-            <a:noFill/>
-          </a:ln>
-        </p:spPr>
-        <p:style>
-          <a:lnRef idx="1">
-            <a:schemeClr val="accent1"/>
-          </a:lnRef>
-          <a:fillRef idx="3">
-            <a:schemeClr val="accent1"/>
-          </a:fillRef>
-          <a:effectRef idx="2">
-            <a:schemeClr val="accent1"/>
-          </a:effectRef>
-          <a:fontRef idx="minor">
-            <a:schemeClr val="lt1"/>
-          </a:fontRef>
-        </p:style>
-        <p:txBody>
-          <a:bodyPr rtlCol="0" anchor="ctr"/>
-          <a:lstStyle/>
-          <a:p>
-            <a:pPr algn="ctr"/>
-          </a:p>
-        </p:txBody>
-      </p:sp>
-      <p:sp>
-        <p:nvSpPr>
-          <p:cNvPr id="8" name="Rectangle 7"/>
-          <p:cNvSpPr/>
-          <p:nvPr/>
-        </p:nvSpPr>
-        <p:spPr>
-          <a:xfrm>
-            <a:off x="457200" y="1655064"/>
-            <a:ext cx="3624986" cy="27432"/>
-          </a:xfrm>
-          <a:prstGeom prst="rect">
-            <a:avLst/>
-          </a:prstGeom>
-          <a:solidFill>
-            <a:srgbClr val="FFD000"/>
-          </a:solidFill>
-          <a:ln>
-            <a:noFill/>
-          </a:ln>
-        </p:spPr>
-        <p:style>
-          <a:lnRef idx="1">
-            <a:schemeClr val="accent1"/>
-          </a:lnRef>
-          <a:fillRef idx="3">
-            <a:schemeClr val="accent1"/>
-          </a:fillRef>
-          <a:effectRef idx="2">
-            <a:schemeClr val="accent1"/>
-          </a:effectRef>
-          <a:fontRef idx="minor">
-            <a:schemeClr val="lt1"/>
-          </a:fontRef>
-        </p:style>
-        <p:txBody>
-          <a:bodyPr rtlCol="0" anchor="ctr"/>
-          <a:lstStyle/>
-          <a:p>
-            <a:pPr algn="ctr"/>
-          </a:p>
-        </p:txBody>
-      </p:sp>
-      <p:pic>
-        <p:nvPicPr>
-          <p:cNvPr id="9" name="Picture 8" descr="oracle_livesql.png"/>
-          <p:cNvPicPr>
-            <a:picLocks noChangeAspect="1"/>
-          </p:cNvPicPr>
-          <p:nvPr/>
-        </p:nvPicPr>
-        <p:blipFill>
-          <a:blip r:embed="rId2"/>
-          <a:stretch>
-            <a:fillRect/>
-          </a:stretch>
-        </p:blipFill>
-        <p:spPr>
-          <a:xfrm>
-            <a:off x="1643329" y="1847087"/>
-            <a:ext cx="1252728" cy="1252728"/>
-          </a:xfrm>
-          <a:prstGeom prst="rect">
-            <a:avLst/>
-          </a:prstGeom>
-        </p:spPr>
-      </p:pic>
-      <p:sp>
-        <p:nvSpPr>
-          <p:cNvPr id="10" name="TextBox 9"/>
+              <a:t>Es la pregunta 4 del taller —10 puntos, seleccion unica— y la explicacion de por que la pregunta 2 sale bien sin escribir un ROLLBACK</a:t>
+            </a:r>
+          </a:p>
+        </p:txBody>
+      </p:sp>
+      <p:sp>
+        <p:nvSpPr>
+          <p:cNvPr id="6" name="TextBox 5"/>
           <p:cNvSpPr txBox="1"/>
           <p:nvPr/>
         </p:nvSpPr>
         <p:spPr>
           <a:xfrm>
-            <a:off x="530352" y="3191256"/>
-            <a:ext cx="3478682" cy="621792"/>
+            <a:off x="457200" y="1380744"/>
+            <a:ext cx="11277295" cy="5020056"/>
           </a:xfrm>
           <a:prstGeom prst="rect">
             <a:avLst/>
@@ -8958,449 +12243,329 @@
           <a:noFill/>
         </p:spPr>
         <p:txBody>
-          <a:bodyPr wrap="square" anchor="t"/>
-          <a:lstStyle/>
-          <a:p>
-            <a:pPr algn="ctr"/>
+          <a:bodyPr wrap="square">
+            <a:spAutoFit/>
+          </a:bodyPr>
+          <a:lstStyle/>
+          <a:p>
+            <a:pPr>
+              <a:spcAft>
+                <a:spcPts val="800"/>
+              </a:spcAft>
+            </a:pPr>
+            <a:r>
+              <a:rPr sz="1300" b="0" i="0">
+                <a:solidFill>
+                  <a:srgbClr val="333333"/>
+                </a:solidFill>
+                <a:latin typeface="Calibri"/>
+              </a:rPr>
+              <a:t>–   </a:t>
+            </a:r>
             <a:r>
               <a:rPr sz="1300" b="1" i="0">
                 <a:solidFill>
-                  <a:srgbClr val="095292"/>
-                </a:solidFill>
-                <a:latin typeface="Calibri"/>
-              </a:rPr>
-              <a:t>Oracle Live SQL</a:t>
-            </a:r>
-          </a:p>
-          <a:p>
-            <a:pPr algn="ctr">
-              <a:spcBef>
-                <a:spcPts val="200"/>
-              </a:spcBef>
+                  <a:srgbClr val="333333"/>
+                </a:solidFill>
+                <a:latin typeface="Calibri"/>
+              </a:rPr>
+              <a:t>La regla de PostgreSQL.</a:t>
+            </a:r>
+            <a:r>
+              <a:rPr sz="1300" b="0" i="0">
+                <a:solidFill>
+                  <a:srgbClr val="333333"/>
+                </a:solidFill>
+                <a:latin typeface="Calibri"/>
+              </a:rPr>
+              <a:t> Un «CALL» escrito por fuera de cualquier «BEGIN» es </a:t>
+            </a:r>
+            <a:r>
+              <a:rPr sz="1300" b="1" i="0">
+                <a:solidFill>
+                  <a:srgbClr val="333333"/>
+                </a:solidFill>
+                <a:latin typeface="Calibri"/>
+              </a:rPr>
+              <a:t>su propia transaccion</a:t>
+            </a:r>
+            <a:r>
+              <a:rPr sz="1300" b="0" i="0">
+                <a:solidFill>
+                  <a:srgbClr val="333333"/>
+                </a:solidFill>
+                <a:latin typeface="Calibri"/>
+              </a:rPr>
+              <a:t>. Si la excepcion se propaga hasta afuera del procedimiento, el motor deshace </a:t>
+            </a:r>
+            <a:r>
+              <a:rPr sz="1300" b="1" i="0">
+                <a:solidFill>
+                  <a:srgbClr val="333333"/>
+                </a:solidFill>
+                <a:latin typeface="Calibri"/>
+              </a:rPr>
+              <a:t>todo</a:t>
+            </a:r>
+            <a:r>
+              <a:rPr sz="1300" b="0" i="0">
+                <a:solidFill>
+                  <a:srgbClr val="333333"/>
+                </a:solidFill>
+                <a:latin typeface="Calibri"/>
+              </a:rPr>
+              <a:t> lo que ese «CALL» habia hecho: la cabecera de la factura, el detalle y el descuento del primer insumo. </a:t>
+            </a:r>
+            <a:r>
+              <a:rPr sz="1300" b="1" i="0">
+                <a:solidFill>
+                  <a:srgbClr val="333333"/>
+                </a:solidFill>
+                <a:latin typeface="Calibri"/>
+              </a:rPr>
+              <a:t>Nadie escribio ROLLBACK</a:t>
+            </a:r>
+            <a:r>
+              <a:rPr sz="1300" b="0" i="0">
+                <a:solidFill>
+                  <a:srgbClr val="333333"/>
+                </a:solidFill>
+                <a:latin typeface="Calibri"/>
+              </a:rPr>
+              <a:t> y la base queda intacta.</a:t>
+            </a:r>
+          </a:p>
+          <a:p>
+            <a:pPr>
+              <a:spcAft>
+                <a:spcPts val="800"/>
+              </a:spcAft>
             </a:pPr>
             <a:r>
-              <a:rPr sz="1000" b="0" i="0">
-                <a:solidFill>
-                  <a:srgbClr val="666666"/>
-                </a:solidFill>
-                <a:latin typeface="Calibri"/>
-              </a:rPr>
-              <a:t>Transacciones</a:t>
-            </a:r>
-          </a:p>
-        </p:txBody>
-      </p:sp>
-      <p:sp>
-        <p:nvSpPr>
-          <p:cNvPr id="11" name="Rounded Rectangle 10"/>
-          <p:cNvSpPr/>
-          <p:nvPr/>
-        </p:nvSpPr>
-        <p:spPr>
-          <a:xfrm>
-            <a:off x="4283354" y="1591056"/>
-            <a:ext cx="3624986" cy="2331720"/>
-          </a:xfrm>
-          <a:prstGeom prst="roundRect">
-            <a:avLst>
-              <a:gd name="adj" fmla="val 12000"/>
-            </a:avLst>
-          </a:prstGeom>
-          <a:solidFill>
-            <a:srgbClr val="F2F2F2"/>
-          </a:solidFill>
-          <a:ln>
-            <a:noFill/>
-          </a:ln>
-        </p:spPr>
-        <p:style>
-          <a:lnRef idx="1">
-            <a:schemeClr val="accent1"/>
-          </a:lnRef>
-          <a:fillRef idx="3">
-            <a:schemeClr val="accent1"/>
-          </a:fillRef>
-          <a:effectRef idx="2">
-            <a:schemeClr val="accent1"/>
-          </a:effectRef>
-          <a:fontRef idx="minor">
-            <a:schemeClr val="lt1"/>
-          </a:fontRef>
-        </p:style>
-        <p:txBody>
-          <a:bodyPr rtlCol="0" anchor="ctr"/>
-          <a:lstStyle/>
-          <a:p>
-            <a:pPr algn="ctr"/>
-          </a:p>
-        </p:txBody>
-      </p:sp>
-      <p:sp>
-        <p:nvSpPr>
-          <p:cNvPr id="12" name="Rectangle 11"/>
-          <p:cNvSpPr/>
-          <p:nvPr/>
-        </p:nvSpPr>
-        <p:spPr>
-          <a:xfrm>
-            <a:off x="4283354" y="1591056"/>
-            <a:ext cx="3624986" cy="64008"/>
-          </a:xfrm>
-          <a:prstGeom prst="rect">
-            <a:avLst/>
-          </a:prstGeom>
-          <a:solidFill>
-            <a:srgbClr val="095292"/>
-          </a:solidFill>
-          <a:ln>
-            <a:noFill/>
-          </a:ln>
-        </p:spPr>
-        <p:style>
-          <a:lnRef idx="1">
-            <a:schemeClr val="accent1"/>
-          </a:lnRef>
-          <a:fillRef idx="3">
-            <a:schemeClr val="accent1"/>
-          </a:fillRef>
-          <a:effectRef idx="2">
-            <a:schemeClr val="accent1"/>
-          </a:effectRef>
-          <a:fontRef idx="minor">
-            <a:schemeClr val="lt1"/>
-          </a:fontRef>
-        </p:style>
-        <p:txBody>
-          <a:bodyPr rtlCol="0" anchor="ctr"/>
-          <a:lstStyle/>
-          <a:p>
-            <a:pPr algn="ctr"/>
-          </a:p>
-        </p:txBody>
-      </p:sp>
-      <p:sp>
-        <p:nvSpPr>
-          <p:cNvPr id="13" name="Rectangle 12"/>
-          <p:cNvSpPr/>
-          <p:nvPr/>
-        </p:nvSpPr>
-        <p:spPr>
-          <a:xfrm>
-            <a:off x="4283354" y="1655064"/>
-            <a:ext cx="3624986" cy="27432"/>
-          </a:xfrm>
-          <a:prstGeom prst="rect">
-            <a:avLst/>
-          </a:prstGeom>
-          <a:solidFill>
-            <a:srgbClr val="FFD000"/>
-          </a:solidFill>
-          <a:ln>
-            <a:noFill/>
-          </a:ln>
-        </p:spPr>
-        <p:style>
-          <a:lnRef idx="1">
-            <a:schemeClr val="accent1"/>
-          </a:lnRef>
-          <a:fillRef idx="3">
-            <a:schemeClr val="accent1"/>
-          </a:fillRef>
-          <a:effectRef idx="2">
-            <a:schemeClr val="accent1"/>
-          </a:effectRef>
-          <a:fontRef idx="minor">
-            <a:schemeClr val="lt1"/>
-          </a:fontRef>
-        </p:style>
-        <p:txBody>
-          <a:bodyPr rtlCol="0" anchor="ctr"/>
-          <a:lstStyle/>
-          <a:p>
-            <a:pPr algn="ctr"/>
-          </a:p>
-        </p:txBody>
-      </p:sp>
-      <p:pic>
-        <p:nvPicPr>
-          <p:cNvPr id="14" name="Picture 13" descr="dbfiddle.png"/>
-          <p:cNvPicPr>
-            <a:picLocks noChangeAspect="1"/>
-          </p:cNvPicPr>
-          <p:nvPr/>
-        </p:nvPicPr>
-        <p:blipFill>
-          <a:blip r:embed="rId3"/>
-          <a:stretch>
-            <a:fillRect/>
-          </a:stretch>
-        </p:blipFill>
-        <p:spPr>
-          <a:xfrm>
-            <a:off x="5469483" y="1847087"/>
-            <a:ext cx="1252728" cy="1252728"/>
-          </a:xfrm>
-          <a:prstGeom prst="rect">
-            <a:avLst/>
-          </a:prstGeom>
-        </p:spPr>
-      </p:pic>
-      <p:sp>
-        <p:nvSpPr>
-          <p:cNvPr id="15" name="TextBox 14"/>
-          <p:cNvSpPr txBox="1"/>
-          <p:nvPr/>
-        </p:nvSpPr>
-        <p:spPr>
-          <a:xfrm>
-            <a:off x="4356506" y="3191256"/>
-            <a:ext cx="3478682" cy="621792"/>
-          </a:xfrm>
-          <a:prstGeom prst="rect">
-            <a:avLst/>
-          </a:prstGeom>
-          <a:noFill/>
-        </p:spPr>
-        <p:txBody>
-          <a:bodyPr wrap="square" anchor="t"/>
-          <a:lstStyle/>
-          <a:p>
-            <a:pPr algn="ctr"/>
+              <a:rPr sz="1300" b="0" i="0">
+                <a:solidFill>
+                  <a:srgbClr val="333333"/>
+                </a:solidFill>
+                <a:latin typeface="Calibri"/>
+              </a:rPr>
+              <a:t>–   </a:t>
+            </a:r>
             <a:r>
               <a:rPr sz="1300" b="1" i="0">
                 <a:solidFill>
-                  <a:srgbClr val="095292"/>
-                </a:solidFill>
-                <a:latin typeface="Calibri"/>
-              </a:rPr>
-              <a:t>DB Fiddle</a:t>
-            </a:r>
-          </a:p>
-          <a:p>
-            <a:pPr algn="ctr">
-              <a:spcBef>
-                <a:spcPts val="200"/>
-              </a:spcBef>
+                  <a:srgbClr val="333333"/>
+                </a:solidFill>
+                <a:latin typeface="Calibri"/>
+              </a:rPr>
+              <a:t>Y el savepoint que nadie declara.</a:t>
+            </a:r>
+            <a:r>
+              <a:rPr sz="1300" b="0" i="0">
+                <a:solidFill>
+                  <a:srgbClr val="333333"/>
+                </a:solidFill>
+                <a:latin typeface="Calibri"/>
+              </a:rPr>
+              <a:t> Un bloque «BEGIN ... EXCEPTION WHEN ... END» en PL/pgSQL crea un </a:t>
+            </a:r>
+            <a:r>
+              <a:rPr sz="1300" b="1" i="0">
+                <a:solidFill>
+                  <a:srgbClr val="333333"/>
+                </a:solidFill>
+                <a:latin typeface="Calibri"/>
+              </a:rPr>
+              <a:t>savepoint implicito</a:t>
+            </a:r>
+            <a:r>
+              <a:rPr sz="1300" b="0" i="0">
+                <a:solidFill>
+                  <a:srgbClr val="333333"/>
+                </a:solidFill>
+                <a:latin typeface="Calibri"/>
+              </a:rPr>
+              <a:t> al entrar. Por eso, si tu capturas el error, se revierte solo lo hecho </a:t>
+            </a:r>
+            <a:r>
+              <a:rPr sz="1300" b="1" i="0">
+                <a:solidFill>
+                  <a:srgbClr val="333333"/>
+                </a:solidFill>
+                <a:latin typeface="Calibri"/>
+              </a:rPr>
+              <a:t>dentro de ese bloque</a:t>
+            </a:r>
+            <a:r>
+              <a:rPr sz="1300" b="0" i="0">
+                <a:solidFill>
+                  <a:srgbClr val="333333"/>
+                </a:solidFill>
+                <a:latin typeface="Calibri"/>
+              </a:rPr>
+              <a:t> y el resto sigue vivo. Capturar no es lo mismo que dejar propagar.</a:t>
+            </a:r>
+          </a:p>
+          <a:p>
+            <a:pPr>
+              <a:spcAft>
+                <a:spcPts val="800"/>
+              </a:spcAft>
             </a:pPr>
             <a:r>
-              <a:rPr sz="1000" b="0" i="0">
-                <a:solidFill>
-                  <a:srgbClr val="666666"/>
-                </a:solidFill>
-                <a:latin typeface="Calibri"/>
-              </a:rPr>
-              <a:t>ROLLBACK</a:t>
-            </a:r>
-          </a:p>
-        </p:txBody>
-      </p:sp>
-      <p:sp>
-        <p:nvSpPr>
-          <p:cNvPr id="16" name="Rounded Rectangle 15"/>
-          <p:cNvSpPr/>
-          <p:nvPr/>
-        </p:nvSpPr>
-        <p:spPr>
-          <a:xfrm>
-            <a:off x="8109508" y="1591056"/>
-            <a:ext cx="3624986" cy="2331720"/>
-          </a:xfrm>
-          <a:prstGeom prst="roundRect">
-            <a:avLst>
-              <a:gd name="adj" fmla="val 12000"/>
-            </a:avLst>
-          </a:prstGeom>
-          <a:solidFill>
-            <a:srgbClr val="F2F2F2"/>
-          </a:solidFill>
-          <a:ln>
-            <a:noFill/>
-          </a:ln>
-        </p:spPr>
-        <p:style>
-          <a:lnRef idx="1">
-            <a:schemeClr val="accent1"/>
-          </a:lnRef>
-          <a:fillRef idx="3">
-            <a:schemeClr val="accent1"/>
-          </a:fillRef>
-          <a:effectRef idx="2">
-            <a:schemeClr val="accent1"/>
-          </a:effectRef>
-          <a:fontRef idx="minor">
-            <a:schemeClr val="lt1"/>
-          </a:fontRef>
-        </p:style>
-        <p:txBody>
-          <a:bodyPr rtlCol="0" anchor="ctr"/>
-          <a:lstStyle/>
-          <a:p>
-            <a:pPr algn="ctr"/>
-          </a:p>
-        </p:txBody>
-      </p:sp>
-      <p:sp>
-        <p:nvSpPr>
-          <p:cNvPr id="17" name="Rectangle 16"/>
-          <p:cNvSpPr/>
-          <p:nvPr/>
-        </p:nvSpPr>
-        <p:spPr>
-          <a:xfrm>
-            <a:off x="8109508" y="1591056"/>
-            <a:ext cx="3624986" cy="64008"/>
-          </a:xfrm>
-          <a:prstGeom prst="rect">
-            <a:avLst/>
-          </a:prstGeom>
-          <a:solidFill>
-            <a:srgbClr val="095292"/>
-          </a:solidFill>
-          <a:ln>
-            <a:noFill/>
-          </a:ln>
-        </p:spPr>
-        <p:style>
-          <a:lnRef idx="1">
-            <a:schemeClr val="accent1"/>
-          </a:lnRef>
-          <a:fillRef idx="3">
-            <a:schemeClr val="accent1"/>
-          </a:fillRef>
-          <a:effectRef idx="2">
-            <a:schemeClr val="accent1"/>
-          </a:effectRef>
-          <a:fontRef idx="minor">
-            <a:schemeClr val="lt1"/>
-          </a:fontRef>
-        </p:style>
-        <p:txBody>
-          <a:bodyPr rtlCol="0" anchor="ctr"/>
-          <a:lstStyle/>
-          <a:p>
-            <a:pPr algn="ctr"/>
-          </a:p>
-        </p:txBody>
-      </p:sp>
-      <p:sp>
-        <p:nvSpPr>
-          <p:cNvPr id="18" name="Rectangle 17"/>
-          <p:cNvSpPr/>
-          <p:nvPr/>
-        </p:nvSpPr>
-        <p:spPr>
-          <a:xfrm>
-            <a:off x="8109508" y="1655064"/>
-            <a:ext cx="3624986" cy="27432"/>
-          </a:xfrm>
-          <a:prstGeom prst="rect">
-            <a:avLst/>
-          </a:prstGeom>
-          <a:solidFill>
-            <a:srgbClr val="FFD000"/>
-          </a:solidFill>
-          <a:ln>
-            <a:noFill/>
-          </a:ln>
-        </p:spPr>
-        <p:style>
-          <a:lnRef idx="1">
-            <a:schemeClr val="accent1"/>
-          </a:lnRef>
-          <a:fillRef idx="3">
-            <a:schemeClr val="accent1"/>
-          </a:fillRef>
-          <a:effectRef idx="2">
-            <a:schemeClr val="accent1"/>
-          </a:effectRef>
-          <a:fontRef idx="minor">
-            <a:schemeClr val="lt1"/>
-          </a:fontRef>
-        </p:style>
-        <p:txBody>
-          <a:bodyPr rtlCol="0" anchor="ctr"/>
-          <a:lstStyle/>
-          <a:p>
-            <a:pPr algn="ctr"/>
-          </a:p>
-        </p:txBody>
-      </p:sp>
-      <p:pic>
-        <p:nvPicPr>
-          <p:cNvPr id="19" name="Picture 18" descr="google_docs.png"/>
-          <p:cNvPicPr>
-            <a:picLocks noChangeAspect="1"/>
-          </p:cNvPicPr>
-          <p:nvPr/>
-        </p:nvPicPr>
-        <p:blipFill>
-          <a:blip r:embed="rId4"/>
-          <a:stretch>
-            <a:fillRect/>
-          </a:stretch>
-        </p:blipFill>
-        <p:spPr>
-          <a:xfrm>
-            <a:off x="9295638" y="1847087"/>
-            <a:ext cx="1252728" cy="1252728"/>
-          </a:xfrm>
-          <a:prstGeom prst="rect">
-            <a:avLst/>
-          </a:prstGeom>
-        </p:spPr>
-      </p:pic>
-      <p:sp>
-        <p:nvSpPr>
-          <p:cNvPr id="20" name="TextBox 19"/>
-          <p:cNvSpPr txBox="1"/>
-          <p:nvPr/>
-        </p:nvSpPr>
-        <p:spPr>
-          <a:xfrm>
-            <a:off x="8182660" y="3191256"/>
-            <a:ext cx="3478682" cy="621792"/>
-          </a:xfrm>
-          <a:prstGeom prst="rect">
-            <a:avLst/>
-          </a:prstGeom>
-          <a:noFill/>
-        </p:spPr>
-        <p:txBody>
-          <a:bodyPr wrap="square" anchor="t"/>
-          <a:lstStyle/>
-          <a:p>
-            <a:pPr algn="ctr"/>
+              <a:rPr sz="1300" b="0" i="0">
+                <a:solidFill>
+                  <a:srgbClr val="333333"/>
+                </a:solidFill>
+                <a:latin typeface="Calibri"/>
+              </a:rPr>
+              <a:t>–   </a:t>
+            </a:r>
             <a:r>
               <a:rPr sz="1300" b="1" i="0">
                 <a:solidFill>
-                  <a:srgbClr val="095292"/>
-                </a:solidFill>
-                <a:latin typeface="Calibri"/>
-              </a:rPr>
-              <a:t>Google Docs</a:t>
-            </a:r>
-          </a:p>
-          <a:p>
-            <a:pPr algn="ctr">
-              <a:spcBef>
-                <a:spcPts val="200"/>
-              </a:spcBef>
+                  <a:srgbClr val="333333"/>
+                </a:solidFill>
+                <a:latin typeface="Calibri"/>
+              </a:rPr>
+              <a:t>El contraste con Oracle, que es lo que se pregunta.</a:t>
+            </a:r>
+            <a:r>
+              <a:rPr sz="1300" b="0" i="0">
+                <a:solidFill>
+                  <a:srgbClr val="333333"/>
+                </a:solidFill>
+                <a:latin typeface="Calibri"/>
+              </a:rPr>
+              <a:t> En Oracle el procedimiento es parte de la transaccion del llamador y ahi si se escribe «EXCEPTION WHEN OTHERS THEN ROLLBACK; RAISE;». En PostgreSQL ese «ROLLBACK» dentro de un procedimiento invocado por un «CALL» de nivel superior </a:t>
+            </a:r>
+            <a:r>
+              <a:rPr sz="1300" b="1" i="0">
+                <a:solidFill>
+                  <a:srgbClr val="333333"/>
+                </a:solidFill>
+                <a:latin typeface="Calibri"/>
+              </a:rPr>
+              <a:t>ni siquiera esta permitido</a:t>
+            </a:r>
+            <a:r>
+              <a:rPr sz="1300" b="0" i="0">
+                <a:solidFill>
+                  <a:srgbClr val="333333"/>
+                </a:solidFill>
+                <a:latin typeface="Calibri"/>
+              </a:rPr>
+              <a:t>.</a:t>
+            </a:r>
+          </a:p>
+          <a:p>
+            <a:pPr>
+              <a:spcAft>
+                <a:spcPts val="800"/>
+              </a:spcAft>
             </a:pPr>
             <a:r>
-              <a:rPr sz="1000" b="0" i="0">
-                <a:solidFill>
-                  <a:srgbClr val="666666"/>
-                </a:solidFill>
-                <a:latin typeface="Calibri"/>
-              </a:rPr>
-              <a:t>Checklist tuning</a:t>
-            </a:r>
-          </a:p>
-        </p:txBody>
-      </p:sp>
-      <p:sp>
-        <p:nvSpPr>
-          <p:cNvPr id="21" name="TextBox 20"/>
+              <a:rPr sz="1300" b="0" i="0">
+                <a:solidFill>
+                  <a:srgbClr val="333333"/>
+                </a:solidFill>
+                <a:latin typeface="Calibri"/>
+              </a:rPr>
+              <a:t>–   </a:t>
+            </a:r>
+            <a:r>
+              <a:rPr sz="1300" b="1" i="0">
+                <a:solidFill>
+                  <a:srgbClr val="333333"/>
+                </a:solidFill>
+                <a:latin typeface="Calibri"/>
+              </a:rPr>
+              <a:t>La consecuencia practica.</a:t>
+            </a:r>
+            <a:r>
+              <a:rPr sz="1300" b="0" i="0">
+                <a:solidFill>
+                  <a:srgbClr val="333333"/>
+                </a:solidFill>
+                <a:latin typeface="Calibri"/>
+              </a:rPr>
+              <a:t> Quien decide el «COMMIT» es </a:t>
+            </a:r>
+            <a:r>
+              <a:rPr sz="1300" b="1" i="0">
+                <a:solidFill>
+                  <a:srgbClr val="333333"/>
+                </a:solidFill>
+                <a:latin typeface="Calibri"/>
+              </a:rPr>
+              <a:t>uno solo</a:t>
+            </a:r>
+            <a:r>
+              <a:rPr sz="1300" b="0" i="0">
+                <a:solidFill>
+                  <a:srgbClr val="333333"/>
+                </a:solidFill>
+                <a:latin typeface="Calibri"/>
+              </a:rPr>
+              <a:t>: el llamador. Un procedimiento que confirma por su cuenta le quita al llamador la posibilidad de deshacer, y es la fuente numero uno de facturas a medias cuando la Clase 12 conecte la aplicacion.</a:t>
+            </a:r>
+          </a:p>
+          <a:p>
+            <a:pPr>
+              <a:spcAft>
+                <a:spcPts val="800"/>
+              </a:spcAft>
+            </a:pPr>
+            <a:r>
+              <a:rPr sz="1300" b="0" i="0">
+                <a:solidFill>
+                  <a:srgbClr val="333333"/>
+                </a:solidFill>
+                <a:latin typeface="Calibri"/>
+              </a:rPr>
+              <a:t>–   </a:t>
+            </a:r>
+            <a:r>
+              <a:rPr sz="1300" b="1" i="0">
+                <a:solidFill>
+                  <a:srgbClr val="333333"/>
+                </a:solidFill>
+                <a:latin typeface="Calibri"/>
+              </a:rPr>
+              <a:t>El error que no se perdona.</a:t>
+            </a:r>
+            <a:r>
+              <a:rPr sz="1300" b="0" i="0">
+                <a:solidFill>
+                  <a:srgbClr val="333333"/>
+                </a:solidFill>
+                <a:latin typeface="Calibri"/>
+              </a:rPr>
+              <a:t> Capturar la excepcion y no volver a lanzarla. «EXCEPTION WHEN OTHERS THEN NULL;» </a:t>
+            </a:r>
+            <a:r>
+              <a:rPr sz="1300" b="1" i="0">
+                <a:solidFill>
+                  <a:srgbClr val="333333"/>
+                </a:solidFill>
+                <a:latin typeface="Calibri"/>
+              </a:rPr>
+              <a:t>convierte el fallo en silencio</a:t>
+            </a:r>
+            <a:r>
+              <a:rPr sz="1300" b="0" i="0">
+                <a:solidFill>
+                  <a:srgbClr val="333333"/>
+                </a:solidFill>
+                <a:latin typeface="Calibri"/>
+              </a:rPr>
+              <a:t>: la factura queda registrada, el stock no se descuenta y nadie se entera hasta el inventario.</a:t>
+            </a:r>
+          </a:p>
+        </p:txBody>
+      </p:sp>
+      <p:sp>
+        <p:nvSpPr>
+          <p:cNvPr id="7" name="TextBox 6"/>
           <p:cNvSpPr txBox="1"/>
           <p:nvPr/>
         </p:nvSpPr>
@@ -9468,7 +12633,7 @@
         <p:spPr>
           <a:xfrm>
             <a:off x="0" y="0"/>
-            <a:ext cx="12191695" cy="960120"/>
+            <a:ext cx="12191695" cy="1170432"/>
           </a:xfrm>
           <a:prstGeom prst="rect">
             <a:avLst/>
@@ -9510,7 +12675,7 @@
         </p:nvSpPr>
         <p:spPr>
           <a:xfrm>
-            <a:off x="0" y="960120"/>
+            <a:off x="0" y="1170432"/>
             <a:ext cx="12191695" cy="41148"/>
           </a:xfrm>
           <a:prstGeom prst="rect">
@@ -9554,7 +12719,7 @@
         <p:spPr>
           <a:xfrm>
             <a:off x="457200" y="164592"/>
-            <a:ext cx="11277295" cy="502920"/>
+            <a:ext cx="11277295" cy="384048"/>
           </a:xfrm>
           <a:prstGeom prst="rect">
             <a:avLst/>
@@ -9574,7 +12739,7 @@
                 </a:solidFill>
                 <a:latin typeface="Calibri"/>
               </a:rPr>
-              <a:t>Taller PI VetCare — contexto / por que importa</a:t>
+              <a:t>fn_descontar_stock: cuando «no hay stock» es una respuesta, no un error</a:t>
             </a:r>
           </a:p>
         </p:txBody>
@@ -9587,8 +12752,42 @@
         </p:nvSpPr>
         <p:spPr>
           <a:xfrm>
-            <a:off x="457200" y="1170432"/>
-            <a:ext cx="11277295" cy="5230368"/>
+            <a:off x="457200" y="566928"/>
+            <a:ext cx="11277295" cy="411480"/>
+          </a:xfrm>
+          <a:prstGeom prst="rect">
+            <a:avLst/>
+          </a:prstGeom>
+          <a:noFill/>
+        </p:spPr>
+        <p:txBody>
+          <a:bodyPr wrap="square">
+            <a:spAutoFit/>
+          </a:bodyPr>
+          <a:lstStyle/>
+          <a:p>
+            <a:r>
+              <a:rPr sz="1400" b="0" i="0">
+                <a:solidFill>
+                  <a:srgbClr val="B8D8EE"/>
+                </a:solidFill>
+                <a:latin typeface="Calibri"/>
+              </a:rPr>
+              <a:t>Es la pregunta 3 del taller —15 puntos— y la decision documentada que pide la pregunta 5</a:t>
+            </a:r>
+          </a:p>
+        </p:txBody>
+      </p:sp>
+      <p:sp>
+        <p:nvSpPr>
+          <p:cNvPr id="6" name="TextBox 5"/>
+          <p:cNvSpPr txBox="1"/>
+          <p:nvPr/>
+        </p:nvSpPr>
+        <p:spPr>
+          <a:xfrm>
+            <a:off x="457200" y="1380744"/>
+            <a:ext cx="11277295" cy="5020056"/>
           </a:xfrm>
           <a:prstGeom prst="rect">
             <a:avLst/>
@@ -9607,7 +12806,7 @@
               </a:spcAft>
             </a:pPr>
             <a:r>
-              <a:rPr sz="1600" b="0" i="0">
+              <a:rPr sz="1300" b="0" i="0">
                 <a:solidFill>
                   <a:srgbClr val="333333"/>
                 </a:solidFill>
@@ -9616,22 +12815,58 @@
               <a:t>–   </a:t>
             </a:r>
             <a:r>
-              <a:rPr sz="1600" b="1" i="0">
-                <a:solidFill>
-                  <a:srgbClr val="333333"/>
-                </a:solidFill>
-                <a:latin typeface="Calibri"/>
-              </a:rPr>
-              <a:t>Por qué importa al PI:</a:t>
-            </a:r>
-            <a:r>
-              <a:rPr sz="1600" b="0" i="0">
-                <a:solidFill>
-                  <a:srgbClr val="333333"/>
-                </a:solidFill>
-                <a:latin typeface="Calibri"/>
-              </a:rPr>
-              <a:t> factura+stock atomicos.</a:t>
+              <a:rPr sz="1300" b="1" i="0">
+                <a:solidFill>
+                  <a:srgbClr val="333333"/>
+                </a:solidFill>
+                <a:latin typeface="Calibri"/>
+              </a:rPr>
+              <a:t>La diferencia.</a:t>
+            </a:r>
+            <a:r>
+              <a:rPr sz="1300" b="0" i="0">
+                <a:solidFill>
+                  <a:srgbClr val="333333"/>
+                </a:solidFill>
+                <a:latin typeface="Calibri"/>
+              </a:rPr>
+              <a:t> El procedimiento </a:t>
+            </a:r>
+            <a:r>
+              <a:rPr sz="1300" b="1" i="0">
+                <a:solidFill>
+                  <a:srgbClr val="333333"/>
+                </a:solidFill>
+                <a:latin typeface="Calibri"/>
+              </a:rPr>
+              <a:t>aborta</a:t>
+            </a:r>
+            <a:r>
+              <a:rPr sz="1300" b="0" i="0">
+                <a:solidFill>
+                  <a:srgbClr val="333333"/>
+                </a:solidFill>
+                <a:latin typeface="Calibri"/>
+              </a:rPr>
+              <a:t> la factura completa; la funcion </a:t>
+            </a:r>
+            <a:r>
+              <a:rPr sz="1300" b="1" i="0">
+                <a:solidFill>
+                  <a:srgbClr val="333333"/>
+                </a:solidFill>
+                <a:latin typeface="Calibri"/>
+              </a:rPr>
+              <a:t>informa</a:t>
+            </a:r>
+            <a:r>
+              <a:rPr sz="1300" b="0" i="0">
+                <a:solidFill>
+                  <a:srgbClr val="333333"/>
+                </a:solidFill>
+                <a:latin typeface="Calibri"/>
+              </a:rPr>
+              <a:t> y deja que el llamador decida. La misma regla de negocio, dos contratos distintos, y hay que saber cual se pide.</a:t>
             </a:r>
           </a:p>
           <a:p>
@@ -9641,20 +12876,284 @@
               </a:spcAft>
             </a:pPr>
             <a:r>
-              <a:rPr sz="1600" b="0" i="0">
-                <a:solidFill>
-                  <a:srgbClr val="333333"/>
-                </a:solidFill>
-                <a:latin typeface="Calibri"/>
-              </a:rPr>
-              <a:t>–   ROLLBACK ante stock insuficiente.</a:t>
-            </a:r>
-          </a:p>
-        </p:txBody>
-      </p:sp>
-      <p:sp>
-        <p:nvSpPr>
-          <p:cNvPr id="6" name="TextBox 5"/>
+              <a:rPr sz="1300" b="0" i="0">
+                <a:solidFill>
+                  <a:srgbClr val="333333"/>
+                </a:solidFill>
+                <a:latin typeface="Calibri"/>
+              </a:rPr>
+              <a:t>–   </a:t>
+            </a:r>
+            <a:r>
+              <a:rPr sz="1300" b="1" i="0">
+                <a:solidFill>
+                  <a:srgbClr val="333333"/>
+                </a:solidFill>
+                <a:latin typeface="Calibri"/>
+              </a:rPr>
+              <a:t>La firma, y su palabra clave.</a:t>
+            </a:r>
+            <a:r>
+              <a:rPr sz="1300" b="0" i="0">
+                <a:solidFill>
+                  <a:srgbClr val="333333"/>
+                </a:solidFill>
+                <a:latin typeface="Calibri"/>
+              </a:rPr>
+              <a:t> «CREATE OR REPLACE FUNCTION fn_descontar_stock(p_id_insumo INT, p_cantidad INT) RETURNS BOOLEAN LANGUAGE plpgsql AS $$ ...» — </a:t>
+            </a:r>
+            <a:r>
+              <a:rPr sz="1300" b="1" i="0">
+                <a:solidFill>
+                  <a:srgbClr val="333333"/>
+                </a:solidFill>
+                <a:latin typeface="Calibri"/>
+              </a:rPr>
+              <a:t>«RETURNS BOOLEAN»</a:t>
+            </a:r>
+            <a:r>
+              <a:rPr sz="1300" b="0" i="0">
+                <a:solidFill>
+                  <a:srgbClr val="333333"/>
+                </a:solidFill>
+                <a:latin typeface="Calibri"/>
+              </a:rPr>
+              <a:t>, no «PROCEDURE». Devuelve «TRUE» si desconto y «FALSE» si no habia suficiente, </a:t>
+            </a:r>
+            <a:r>
+              <a:rPr sz="1300" b="1" i="0">
+                <a:solidFill>
+                  <a:srgbClr val="333333"/>
+                </a:solidFill>
+                <a:latin typeface="Calibri"/>
+              </a:rPr>
+              <a:t>sin lanzar excepcion</a:t>
+            </a:r>
+            <a:r>
+              <a:rPr sz="1300" b="0" i="0">
+                <a:solidFill>
+                  <a:srgbClr val="333333"/>
+                </a:solidFill>
+                <a:latin typeface="Calibri"/>
+              </a:rPr>
+              <a:t> en ese segundo caso.</a:t>
+            </a:r>
+          </a:p>
+          <a:p>
+            <a:pPr>
+              <a:spcAft>
+                <a:spcPts val="800"/>
+              </a:spcAft>
+            </a:pPr>
+            <a:r>
+              <a:rPr sz="1300" b="0" i="0">
+                <a:solidFill>
+                  <a:srgbClr val="333333"/>
+                </a:solidFill>
+                <a:latin typeface="Calibri"/>
+              </a:rPr>
+              <a:t>–   </a:t>
+            </a:r>
+            <a:r>
+              <a:rPr sz="1300" b="1" i="0">
+                <a:solidFill>
+                  <a:srgbClr val="333333"/>
+                </a:solidFill>
+                <a:latin typeface="Calibri"/>
+              </a:rPr>
+              <a:t>Lo que si es un error.</a:t>
+            </a:r>
+            <a:r>
+              <a:rPr sz="1300" b="0" i="0">
+                <a:solidFill>
+                  <a:srgbClr val="333333"/>
+                </a:solidFill>
+                <a:latin typeface="Calibri"/>
+              </a:rPr>
+              <a:t> Una cantidad negativa o cero no es «no hay stock», es una llamada mal hecha: eso </a:t>
+            </a:r>
+            <a:r>
+              <a:rPr sz="1300" b="1" i="0">
+                <a:solidFill>
+                  <a:srgbClr val="333333"/>
+                </a:solidFill>
+                <a:latin typeface="Calibri"/>
+              </a:rPr>
+              <a:t>si</a:t>
+            </a:r>
+            <a:r>
+              <a:rPr sz="1300" b="0" i="0">
+                <a:solidFill>
+                  <a:srgbClr val="333333"/>
+                </a:solidFill>
+                <a:latin typeface="Calibri"/>
+              </a:rPr>
+              <a:t> va con «RAISE EXCEPTION». Distinguir el dato invalido del resultado negativo es la mitad de la pregunta.</a:t>
+            </a:r>
+          </a:p>
+          <a:p>
+            <a:pPr>
+              <a:spcAft>
+                <a:spcPts val="800"/>
+              </a:spcAft>
+            </a:pPr>
+            <a:r>
+              <a:rPr sz="1300" b="0" i="0">
+                <a:solidFill>
+                  <a:srgbClr val="333333"/>
+                </a:solidFill>
+                <a:latin typeface="Calibri"/>
+              </a:rPr>
+              <a:t>–   </a:t>
+            </a:r>
+            <a:r>
+              <a:rPr sz="1300" b="1" i="0">
+                <a:solidFill>
+                  <a:srgbClr val="333333"/>
+                </a:solidFill>
+                <a:latin typeface="Calibri"/>
+              </a:rPr>
+              <a:t>Se prueba en una sola consulta.</a:t>
+            </a:r>
+            <a:r>
+              <a:rPr sz="1300" b="0" i="0">
+                <a:solidFill>
+                  <a:srgbClr val="333333"/>
+                </a:solidFill>
+                <a:latin typeface="Calibri"/>
+              </a:rPr>
+              <a:t> «SELECT fn_descontar_stock(5,3) AS caso_ok, fn_descontar_stock(2,10) AS caso_sin_stock, fn_descontar_stock(2,3) AS caso_limite;» -&gt; </a:t>
+            </a:r>
+            <a:r>
+              <a:rPr sz="1300" b="1" i="0">
+                <a:solidFill>
+                  <a:srgbClr val="333333"/>
+                </a:solidFill>
+                <a:latin typeface="Calibri"/>
+              </a:rPr>
+              <a:t>«true», «false», «true»</a:t>
+            </a:r>
+            <a:r>
+              <a:rPr sz="1300" b="0" i="0">
+                <a:solidFill>
+                  <a:srgbClr val="333333"/>
+                </a:solidFill>
+                <a:latin typeface="Calibri"/>
+              </a:rPr>
+              <a:t>. El tercer caso es el interesante: pide </a:t>
+            </a:r>
+            <a:r>
+              <a:rPr sz="1300" b="1" i="0">
+                <a:solidFill>
+                  <a:srgbClr val="333333"/>
+                </a:solidFill>
+                <a:latin typeface="Calibri"/>
+              </a:rPr>
+              <a:t>exactamente</a:t>
+            </a:r>
+            <a:r>
+              <a:rPr sz="1300" b="0" i="0">
+                <a:solidFill>
+                  <a:srgbClr val="333333"/>
+                </a:solidFill>
+                <a:latin typeface="Calibri"/>
+              </a:rPr>
+              <a:t> el stock que queda, y con «&gt;=» en el guardia tiene que pasar.</a:t>
+            </a:r>
+          </a:p>
+          <a:p>
+            <a:pPr>
+              <a:spcAft>
+                <a:spcPts val="800"/>
+              </a:spcAft>
+            </a:pPr>
+            <a:r>
+              <a:rPr sz="1300" b="0" i="0">
+                <a:solidFill>
+                  <a:srgbClr val="333333"/>
+                </a:solidFill>
+                <a:latin typeface="Calibri"/>
+              </a:rPr>
+              <a:t>–   </a:t>
+            </a:r>
+            <a:r>
+              <a:rPr sz="1300" b="1" i="0">
+                <a:solidFill>
+                  <a:srgbClr val="333333"/>
+                </a:solidFill>
+                <a:latin typeface="Calibri"/>
+              </a:rPr>
+              <a:t>Por que no leer primero.</a:t>
+            </a:r>
+            <a:r>
+              <a:rPr sz="1300" b="0" i="0">
+                <a:solidFill>
+                  <a:srgbClr val="333333"/>
+                </a:solidFill>
+                <a:latin typeface="Calibri"/>
+              </a:rPr>
+              <a:t> «SELECT stock ...; IF stock &gt;= cantidad THEN UPDATE ...» deja una </a:t>
+            </a:r>
+            <a:r>
+              <a:rPr sz="1300" b="1" i="0">
+                <a:solidFill>
+                  <a:srgbClr val="333333"/>
+                </a:solidFill>
+                <a:latin typeface="Calibri"/>
+              </a:rPr>
+              <a:t>ventana</a:t>
+            </a:r>
+            <a:r>
+              <a:rPr sz="1300" b="0" i="0">
+                <a:solidFill>
+                  <a:srgbClr val="333333"/>
+                </a:solidFill>
+                <a:latin typeface="Calibri"/>
+              </a:rPr>
+              <a:t> entre la lectura y la escritura, y con dos recepcionistas facturando el mismo insumo las dos leen 3, las dos deciden que alcanza y el stock termina en </a:t>
+            </a:r>
+            <a:r>
+              <a:rPr sz="1300" b="1" i="0">
+                <a:solidFill>
+                  <a:srgbClr val="333333"/>
+                </a:solidFill>
+                <a:latin typeface="Calibri"/>
+              </a:rPr>
+              <a:t>-2</a:t>
+            </a:r>
+            <a:r>
+              <a:rPr sz="1300" b="0" i="0">
+                <a:solidFill>
+                  <a:srgbClr val="333333"/>
+                </a:solidFill>
+                <a:latin typeface="Calibri"/>
+              </a:rPr>
+              <a:t>. El «UPDATE» con la condicion en el «WHERE» no tiene ventana. Aqui no se puede demostrar —PGlite corre </a:t>
+            </a:r>
+            <a:r>
+              <a:rPr sz="1300" b="1" i="0">
+                <a:solidFill>
+                  <a:srgbClr val="333333"/>
+                </a:solidFill>
+                <a:latin typeface="Calibri"/>
+              </a:rPr>
+              <a:t>una sola sesion</a:t>
+            </a:r>
+            <a:r>
+              <a:rPr sz="1300" b="0" i="0">
+                <a:solidFill>
+                  <a:srgbClr val="333333"/>
+                </a:solidFill>
+                <a:latin typeface="Calibri"/>
+              </a:rPr>
+              <a:t>— y ese es el gap que se declara y que abre la Clase 10.</a:t>
+            </a:r>
+          </a:p>
+        </p:txBody>
+      </p:sp>
+      <p:sp>
+        <p:nvSpPr>
+          <p:cNvPr id="7" name="TextBox 6"/>
           <p:cNvSpPr txBox="1"/>
           <p:nvPr/>
         </p:nvSpPr>
@@ -9828,7 +13327,7 @@
                 </a:solidFill>
                 <a:latin typeface="Calibri"/>
               </a:rPr>
-              <a:t>Taller PI VetCare — objetivo y criterios</a:t>
+              <a:t>Demo del dia</a:t>
             </a:r>
           </a:p>
         </p:txBody>
@@ -9861,7 +13360,7 @@
               </a:spcAft>
             </a:pPr>
             <a:r>
-              <a:rPr sz="1500" b="0" i="0">
+              <a:rPr sz="1600" b="0" i="0">
                 <a:solidFill>
                   <a:srgbClr val="333333"/>
                 </a:solidFill>
@@ -9870,22 +13369,22 @@
               <a:t>–   </a:t>
             </a:r>
             <a:r>
-              <a:rPr sz="1500" b="1" i="0">
-                <a:solidFill>
-                  <a:srgbClr val="333333"/>
-                </a:solidFill>
-                <a:latin typeface="Calibri"/>
-              </a:rPr>
-              <a:t>Objetivo:</a:t>
-            </a:r>
-            <a:r>
-              <a:rPr sz="1500" b="0" i="0">
-                <a:solidFill>
-                  <a:srgbClr val="333333"/>
-                </a:solidFill>
-                <a:latin typeface="Calibri"/>
-              </a:rPr>
-              <a:t> Transaccion factura+stock + checklist tuning.</a:t>
+              <a:rPr sz="1600" b="1" i="0">
+                <a:solidFill>
+                  <a:srgbClr val="333333"/>
+                </a:solidFill>
+                <a:latin typeface="Calibri"/>
+              </a:rPr>
+              <a:t>Herramienta:</a:t>
+            </a:r>
+            <a:r>
+              <a:rPr sz="1600" b="0" i="0">
+                <a:solidFill>
+                  <a:srgbClr val="333333"/>
+                </a:solidFill>
+                <a:latin typeface="Calibri"/>
+              </a:rPr>
+              <a:t> ExamLab (PostgreSQL/PGlite)</a:t>
             </a:r>
           </a:p>
           <a:p>
@@ -9895,7 +13394,7 @@
               </a:spcAft>
             </a:pPr>
             <a:r>
-              <a:rPr sz="1500" b="0" i="0">
+              <a:rPr sz="1600" b="0" i="0">
                 <a:solidFill>
                   <a:srgbClr val="333333"/>
                 </a:solidFill>
@@ -9904,22 +13403,22 @@
               <a:t>–   </a:t>
             </a:r>
             <a:r>
-              <a:rPr sz="1500" b="1" i="0">
-                <a:solidFill>
-                  <a:srgbClr val="333333"/>
-                </a:solidFill>
-                <a:latin typeface="Calibri"/>
-              </a:rPr>
-              <a:t>Exito:</a:t>
-            </a:r>
-            <a:r>
-              <a:rPr sz="1500" b="0" i="0">
-                <a:solidFill>
-                  <a:srgbClr val="333333"/>
-                </a:solidFill>
-                <a:latin typeface="Calibri"/>
-              </a:rPr>
-              <a:t> Transaccion completa.</a:t>
+              <a:rPr sz="1600" b="1" i="0">
+                <a:solidFill>
+                  <a:srgbClr val="333333"/>
+                </a:solidFill>
+                <a:latin typeface="Calibri"/>
+              </a:rPr>
+              <a:t>Demo:</a:t>
+            </a:r>
+            <a:r>
+              <a:rPr sz="1600" b="0" i="0">
+                <a:solidFill>
+                  <a:srgbClr val="333333"/>
+                </a:solidFill>
+                <a:latin typeface="Calibri"/>
+              </a:rPr>
+              <a:t> CALL sp_facturar(4, ARRAY[1,6,5], ARRAY[1,2,3]) que factura 27.400, y CALL sp_facturar(4, ARRAY[3,2], ARRAY[2,10]) que falla en la segunda linea: el stock del insumo 3 vuelve a 40 sin ROLLBACK escrito.</a:t>
             </a:r>
           </a:p>
           <a:p>
@@ -9929,31 +13428,13 @@
               </a:spcAft>
             </a:pPr>
             <a:r>
-              <a:rPr sz="1500" b="0" i="0">
-                <a:solidFill>
-                  <a:srgbClr val="333333"/>
-                </a:solidFill>
-                <a:latin typeface="Calibri"/>
-              </a:rPr>
-              <a:t>–   </a:t>
-            </a:r>
-            <a:r>
-              <a:rPr sz="1500" b="1" i="0">
-                <a:solidFill>
-                  <a:srgbClr val="333333"/>
-                </a:solidFill>
-                <a:latin typeface="Calibri"/>
-              </a:rPr>
-              <a:t>Exito:</a:t>
-            </a:r>
-            <a:r>
-              <a:rPr sz="1500" b="0" i="0">
-                <a:solidFill>
-                  <a:srgbClr val="333333"/>
-                </a:solidFill>
-                <a:latin typeface="Calibri"/>
-              </a:rPr>
-              <a:t> Prueba ROLLBACK.</a:t>
+              <a:rPr sz="1600" b="0" i="0">
+                <a:solidFill>
+                  <a:srgbClr val="333333"/>
+                </a:solidFill>
+                <a:latin typeface="Calibri"/>
+              </a:rPr>
+              <a:t>–   Sigan el mismo dominio VetCare (no inventen otro caso).</a:t>
             </a:r>
           </a:p>
           <a:p>
@@ -9963,65 +13444,13 @@
               </a:spcAft>
             </a:pPr>
             <a:r>
-              <a:rPr sz="1500" b="0" i="0">
-                <a:solidFill>
-                  <a:srgbClr val="333333"/>
-                </a:solidFill>
-                <a:latin typeface="Calibri"/>
-              </a:rPr>
-              <a:t>–   </a:t>
-            </a:r>
-            <a:r>
-              <a:rPr sz="1500" b="1" i="0">
-                <a:solidFill>
-                  <a:srgbClr val="333333"/>
-                </a:solidFill>
-                <a:latin typeface="Calibri"/>
-              </a:rPr>
-              <a:t>Exito:</a:t>
-            </a:r>
-            <a:r>
-              <a:rPr sz="1500" b="0" i="0">
-                <a:solidFill>
-                  <a:srgbClr val="333333"/>
-                </a:solidFill>
-                <a:latin typeface="Calibri"/>
-              </a:rPr>
-              <a:t> Checklist tuning.</a:t>
-            </a:r>
-          </a:p>
-          <a:p>
-            <a:pPr>
-              <a:spcAft>
-                <a:spcPts val="800"/>
-              </a:spcAft>
-            </a:pPr>
-            <a:r>
-              <a:rPr sz="1500" b="0" i="0">
-                <a:solidFill>
-                  <a:srgbClr val="333333"/>
-                </a:solidFill>
-                <a:latin typeface="Calibri"/>
-              </a:rPr>
-              <a:t>–   </a:t>
-            </a:r>
-            <a:r>
-              <a:rPr sz="1500" b="1" i="0">
-                <a:solidFill>
-                  <a:srgbClr val="333333"/>
-                </a:solidFill>
-                <a:latin typeface="Calibri"/>
-              </a:rPr>
-              <a:t>Exito:</a:t>
-            </a:r>
-            <a:r>
-              <a:rPr sz="1500" b="0" i="0">
-                <a:solidFill>
-                  <a:srgbClr val="333333"/>
-                </a:solidFill>
-                <a:latin typeface="Calibri"/>
-              </a:rPr>
-              <a:t> Sección informe.</a:t>
+              <a:rPr sz="1600" b="0" i="0">
+                <a:solidFill>
+                  <a:srgbClr val="333333"/>
+                </a:solidFill>
+                <a:latin typeface="Calibri"/>
+              </a:rPr>
+              <a:t>–   Al final de la demo: dejar enlace/script compartible al grupo.</a:t>
             </a:r>
           </a:p>
         </p:txBody>

--- a/Bases de Datos II/Clases/Clase 8 - Tuning y transacciones/Presentacion.pptx
+++ b/Bases de Datos II/Clases/Clase 8 - Tuning y transacciones/Presentacion.pptx
@@ -4483,7 +4483,7 @@
               </a:spcAft>
             </a:pPr>
             <a:r>
-              <a:rPr sz="1600" b="0" i="0">
+              <a:rPr sz="2000" b="0" i="0">
                 <a:solidFill>
                   <a:srgbClr val="333333"/>
                 </a:solidFill>
@@ -4492,7 +4492,7 @@
               <a:t>–   </a:t>
             </a:r>
             <a:r>
-              <a:rPr sz="1600" b="1" i="0">
+              <a:rPr sz="2000" b="1" i="0">
                 <a:solidFill>
                   <a:srgbClr val="333333"/>
                 </a:solidFill>
@@ -4501,7 +4501,7 @@
               <a:t>Por qué importa al PI:</a:t>
             </a:r>
             <a:r>
-              <a:rPr sz="1600" b="0" i="0">
+              <a:rPr sz="2000" b="0" i="0">
                 <a:solidFill>
                   <a:srgbClr val="333333"/>
                 </a:solidFill>
@@ -4510,7 +4510,7 @@
               <a:t> facturar es la operación donde Huellitas </a:t>
             </a:r>
             <a:r>
-              <a:rPr sz="1600" b="1" i="0">
+              <a:rPr sz="2000" b="1" i="0">
                 <a:solidFill>
                   <a:srgbClr val="333333"/>
                 </a:solidFill>
@@ -4519,7 +4519,7 @@
               <a:t>pierde plata</a:t>
             </a:r>
             <a:r>
-              <a:rPr sz="1600" b="0" i="0">
+              <a:rPr sz="2000" b="0" i="0">
                 <a:solidFill>
                   <a:srgbClr val="333333"/>
                 </a:solidFill>
@@ -4535,7 +4535,7 @@
               </a:spcAft>
             </a:pPr>
             <a:r>
-              <a:rPr sz="1600" b="0" i="0">
+              <a:rPr sz="2000" b="0" i="0">
                 <a:solidFill>
                   <a:srgbClr val="333333"/>
                 </a:solidFill>
@@ -4544,7 +4544,7 @@
               <a:t>–   Hoy no se evalúa que el procedimiento </a:t>
             </a:r>
             <a:r>
-              <a:rPr sz="1600" b="1" i="0">
+              <a:rPr sz="2000" b="1" i="0">
                 <a:solidFill>
                   <a:srgbClr val="333333"/>
                 </a:solidFill>
@@ -4553,7 +4553,7 @@
               <a:t>funcione</a:t>
             </a:r>
             <a:r>
-              <a:rPr sz="1600" b="0" i="0">
+              <a:rPr sz="2000" b="0" i="0">
                 <a:solidFill>
                   <a:srgbClr val="333333"/>
                 </a:solidFill>
@@ -4562,7 +4562,7 @@
               <a:t>, sino que </a:t>
             </a:r>
             <a:r>
-              <a:rPr sz="1600" b="1" i="0">
+              <a:rPr sz="2000" b="1" i="0">
                 <a:solidFill>
                   <a:srgbClr val="333333"/>
                 </a:solidFill>
@@ -4571,7 +4571,7 @@
               <a:t>falle bien</a:t>
             </a:r>
             <a:r>
-              <a:rPr sz="1600" b="0" i="0">
+              <a:rPr sz="2000" b="0" i="0">
                 <a:solidFill>
                   <a:srgbClr val="333333"/>
                 </a:solidFill>
@@ -4587,7 +4587,7 @@
               </a:spcAft>
             </a:pPr>
             <a:r>
-              <a:rPr sz="1600" b="0" i="0">
+              <a:rPr sz="2000" b="0" i="0">
                 <a:solidFill>
                   <a:srgbClr val="333333"/>
                 </a:solidFill>
@@ -4596,7 +4596,7 @@
               <a:t>–   El patrón que aprendes hoy — comprobar y escribir en </a:t>
             </a:r>
             <a:r>
-              <a:rPr sz="1600" b="1" i="0">
+              <a:rPr sz="2000" b="1" i="0">
                 <a:solidFill>
                   <a:srgbClr val="333333"/>
                 </a:solidFill>
@@ -4605,7 +4605,7 @@
               <a:t>una sola sentencia</a:t>
             </a:r>
             <a:r>
-              <a:rPr sz="1600" b="0" i="0">
+              <a:rPr sz="2000" b="0" i="0">
                 <a:solidFill>
                   <a:srgbClr val="333333"/>
                 </a:solidFill>
@@ -4614,7 +4614,7 @@
               <a:t> — es el que evita el stock negativo cuando hay dos recepcionistas facturando. Que aquí no puedas montar las dos sesiones es la </a:t>
             </a:r>
             <a:r>
-              <a:rPr sz="1600" b="1" i="0">
+              <a:rPr sz="2000" b="1" i="0">
                 <a:solidFill>
                   <a:srgbClr val="333333"/>
                 </a:solidFill>
@@ -4623,7 +4623,7 @@
               <a:t>Clase 10</a:t>
             </a:r>
             <a:r>
-              <a:rPr sz="1600" b="0" i="0">
+              <a:rPr sz="2000" b="0" i="0">
                 <a:solidFill>
                   <a:srgbClr val="333333"/>
                 </a:solidFill>
@@ -4843,7 +4843,7 @@
               </a:spcAft>
             </a:pPr>
             <a:r>
-              <a:rPr sz="1500" b="0" i="0">
+              <a:rPr sz="2000" b="0" i="0">
                 <a:solidFill>
                   <a:srgbClr val="333333"/>
                 </a:solidFill>
@@ -4852,7 +4852,7 @@
               <a:t>–   </a:t>
             </a:r>
             <a:r>
-              <a:rPr sz="1500" b="1" i="0">
+              <a:rPr sz="2000" b="1" i="0">
                 <a:solidFill>
                   <a:srgbClr val="333333"/>
                 </a:solidFill>
@@ -4861,7 +4861,7 @@
               <a:t>Objetivo:</a:t>
             </a:r>
             <a:r>
-              <a:rPr sz="1500" b="0" i="0">
+              <a:rPr sz="2000" b="0" i="0">
                 <a:solidFill>
                   <a:srgbClr val="333333"/>
                 </a:solidFill>
@@ -4877,7 +4877,7 @@
               </a:spcAft>
             </a:pPr>
             <a:r>
-              <a:rPr sz="1500" b="0" i="0">
+              <a:rPr sz="2000" b="0" i="0">
                 <a:solidFill>
                   <a:srgbClr val="333333"/>
                 </a:solidFill>
@@ -4886,7 +4886,7 @@
               <a:t>–   </a:t>
             </a:r>
             <a:r>
-              <a:rPr sz="1500" b="1" i="0">
+              <a:rPr sz="2000" b="1" i="0">
                 <a:solidFill>
                   <a:srgbClr val="333333"/>
                 </a:solidFill>
@@ -4895,7 +4895,7 @@
               <a:t>Exito:</a:t>
             </a:r>
             <a:r>
-              <a:rPr sz="1500" b="0" i="0">
+              <a:rPr sz="2000" b="0" i="0">
                 <a:solidFill>
                   <a:srgbClr val="333333"/>
                 </a:solidFill>
@@ -4911,7 +4911,7 @@
               </a:spcAft>
             </a:pPr>
             <a:r>
-              <a:rPr sz="1500" b="0" i="0">
+              <a:rPr sz="2000" b="0" i="0">
                 <a:solidFill>
                   <a:srgbClr val="333333"/>
                 </a:solidFill>
@@ -4920,7 +4920,7 @@
               <a:t>–   </a:t>
             </a:r>
             <a:r>
-              <a:rPr sz="1500" b="1" i="0">
+              <a:rPr sz="2000" b="1" i="0">
                 <a:solidFill>
                   <a:srgbClr val="333333"/>
                 </a:solidFill>
@@ -4929,7 +4929,7 @@
               <a:t>Exito:</a:t>
             </a:r>
             <a:r>
-              <a:rPr sz="1500" b="0" i="0">
+              <a:rPr sz="2000" b="0" i="0">
                 <a:solidFill>
                   <a:srgbClr val="333333"/>
                 </a:solidFill>
@@ -4938,7 +4938,7 @@
               <a:t> El caso exitoso ejecutado y evidenciado: factura por </a:t>
             </a:r>
             <a:r>
-              <a:rPr sz="1500" b="1" i="0">
+              <a:rPr sz="2000" b="1" i="0">
                 <a:solidFill>
                   <a:srgbClr val="333333"/>
                 </a:solidFill>
@@ -4947,7 +4947,7 @@
               <a:t>27.400</a:t>
             </a:r>
             <a:r>
-              <a:rPr sz="1500" b="0" i="0">
+              <a:rPr sz="2000" b="0" i="0">
                 <a:solidFill>
                   <a:srgbClr val="333333"/>
                 </a:solidFill>
@@ -4956,7 +4956,7 @@
               <a:t> y los insumos 1, 6 y 5 en </a:t>
             </a:r>
             <a:r>
-              <a:rPr sz="1500" b="1" i="0">
+              <a:rPr sz="2000" b="1" i="0">
                 <a:solidFill>
                   <a:srgbClr val="333333"/>
                 </a:solidFill>
@@ -4965,7 +4965,7 @@
               <a:t>11, 58 y 5</a:t>
             </a:r>
             <a:r>
-              <a:rPr sz="1500" b="0" i="0">
+              <a:rPr sz="2000" b="0" i="0">
                 <a:solidFill>
                   <a:srgbClr val="333333"/>
                 </a:solidFill>
@@ -4981,7 +4981,7 @@
               </a:spcAft>
             </a:pPr>
             <a:r>
-              <a:rPr sz="1500" b="0" i="0">
+              <a:rPr sz="2000" b="0" i="0">
                 <a:solidFill>
                   <a:srgbClr val="333333"/>
                 </a:solidFill>
@@ -4990,7 +4990,7 @@
               <a:t>–   </a:t>
             </a:r>
             <a:r>
-              <a:rPr sz="1500" b="1" i="0">
+              <a:rPr sz="2000" b="1" i="0">
                 <a:solidFill>
                   <a:srgbClr val="333333"/>
                 </a:solidFill>
@@ -4999,7 +4999,7 @@
               <a:t>Exito:</a:t>
             </a:r>
             <a:r>
-              <a:rPr sz="1500" b="0" i="0">
+              <a:rPr sz="2000" b="0" i="0">
                 <a:solidFill>
                   <a:srgbClr val="333333"/>
                 </a:solidFill>
@@ -5008,7 +5008,7 @@
               <a:t> La atomicidad probada con </a:t>
             </a:r>
             <a:r>
-              <a:rPr sz="1500" b="1" i="0">
+              <a:rPr sz="2000" b="1" i="0">
                 <a:solidFill>
                   <a:srgbClr val="333333"/>
                 </a:solidFill>
@@ -5017,7 +5017,7 @@
               <a:t>la misma consulta</a:t>
             </a:r>
             <a:r>
-              <a:rPr sz="1500" b="0" i="0">
+              <a:rPr sz="2000" b="0" i="0">
                 <a:solidFill>
                   <a:srgbClr val="333333"/>
                 </a:solidFill>
@@ -5026,7 +5026,7 @@
               <a:t> de foto inicial y final, y dicho con datos que el stock del insumo 3 </a:t>
             </a:r>
             <a:r>
-              <a:rPr sz="1500" b="1" i="0">
+              <a:rPr sz="2000" b="1" i="0">
                 <a:solidFill>
                   <a:srgbClr val="333333"/>
                 </a:solidFill>
@@ -5035,7 +5035,7 @@
               <a:t>volvió a 40</a:t>
             </a:r>
             <a:r>
-              <a:rPr sz="1500" b="0" i="0">
+              <a:rPr sz="2000" b="0" i="0">
                 <a:solidFill>
                   <a:srgbClr val="333333"/>
                 </a:solidFill>
@@ -5051,7 +5051,7 @@
               </a:spcAft>
             </a:pPr>
             <a:r>
-              <a:rPr sz="1500" b="0" i="0">
+              <a:rPr sz="2000" b="0" i="0">
                 <a:solidFill>
                   <a:srgbClr val="333333"/>
                 </a:solidFill>
@@ -5060,7 +5060,7 @@
               <a:t>–   </a:t>
             </a:r>
             <a:r>
-              <a:rPr sz="1500" b="1" i="0">
+              <a:rPr sz="2000" b="1" i="0">
                 <a:solidFill>
                   <a:srgbClr val="333333"/>
                 </a:solidFill>
@@ -5069,7 +5069,7 @@
               <a:t>Exito:</a:t>
             </a:r>
             <a:r>
-              <a:rPr sz="1500" b="0" i="0">
+              <a:rPr sz="2000" b="0" i="0">
                 <a:solidFill>
                   <a:srgbClr val="333333"/>
                 </a:solidFill>
@@ -5078,7 +5078,7 @@
               <a:t> «fn_descontar_stock» devolviendo «BOOLEAN» — </a:t>
             </a:r>
             <a:r>
-              <a:rPr sz="1500" b="1" i="0">
+              <a:rPr sz="2000" b="1" i="0">
                 <a:solidFill>
                   <a:srgbClr val="333333"/>
                 </a:solidFill>
@@ -5087,7 +5087,7 @@
               <a:t>«FALSE», no excepción</a:t>
             </a:r>
             <a:r>
-              <a:rPr sz="1500" b="0" i="0">
+              <a:rPr sz="2000" b="0" i="0">
                 <a:solidFill>
                   <a:srgbClr val="333333"/>
                 </a:solidFill>
@@ -5103,7 +5103,7 @@
               </a:spcAft>
             </a:pPr>
             <a:r>
-              <a:rPr sz="1500" b="0" i="0">
+              <a:rPr sz="2000" b="0" i="0">
                 <a:solidFill>
                   <a:srgbClr val="333333"/>
                 </a:solidFill>
@@ -5112,7 +5112,7 @@
               <a:t>–   </a:t>
             </a:r>
             <a:r>
-              <a:rPr sz="1500" b="1" i="0">
+              <a:rPr sz="2000" b="1" i="0">
                 <a:solidFill>
                   <a:srgbClr val="333333"/>
                 </a:solidFill>
@@ -5121,7 +5121,7 @@
               <a:t>Exito:</a:t>
             </a:r>
             <a:r>
-              <a:rPr sz="1500" b="0" i="0">
+              <a:rPr sz="2000" b="0" i="0">
                 <a:solidFill>
                   <a:srgbClr val="333333"/>
                 </a:solidFill>
@@ -5130,7 +5130,7 @@
               <a:t> La sección del informe con sus 4 bloques: </a:t>
             </a:r>
             <a:r>
-              <a:rPr sz="1500" b="1" i="0">
+              <a:rPr sz="2000" b="1" i="0">
                 <a:solidFill>
                   <a:srgbClr val="333333"/>
                 </a:solidFill>
@@ -5139,7 +5139,7 @@
               <a:t>3 transacciones</a:t>
             </a:r>
             <a:r>
-              <a:rPr sz="1500" b="0" i="0">
+              <a:rPr sz="2000" b="0" i="0">
                 <a:solidFill>
                   <a:srgbClr val="333333"/>
                 </a:solidFill>
@@ -5148,7 +5148,7 @@
               <a:t> con su punto de fallo, el checklist de </a:t>
             </a:r>
             <a:r>
-              <a:rPr sz="1500" b="1" i="0">
+              <a:rPr sz="2000" b="1" i="0">
                 <a:solidFill>
                   <a:srgbClr val="333333"/>
                 </a:solidFill>
@@ -5157,7 +5157,7 @@
               <a:t>7 ítems</a:t>
             </a:r>
             <a:r>
-              <a:rPr sz="1500" b="0" i="0">
+              <a:rPr sz="2000" b="0" i="0">
                 <a:solidFill>
                   <a:srgbClr val="333333"/>
                 </a:solidFill>
@@ -5173,7 +5173,7 @@
               </a:spcAft>
             </a:pPr>
             <a:r>
-              <a:rPr sz="1500" b="0" i="0">
+              <a:rPr sz="2000" b="0" i="0">
                 <a:solidFill>
                   <a:srgbClr val="333333"/>
                 </a:solidFill>
@@ -5182,7 +5182,7 @@
               <a:t>–   </a:t>
             </a:r>
             <a:r>
-              <a:rPr sz="1500" b="1" i="0">
+              <a:rPr sz="2000" b="1" i="0">
                 <a:solidFill>
                   <a:srgbClr val="333333"/>
                 </a:solidFill>
@@ -5191,7 +5191,7 @@
               <a:t>Exito:</a:t>
             </a:r>
             <a:r>
-              <a:rPr sz="1500" b="0" i="0">
+              <a:rPr sz="2000" b="0" i="0">
                 <a:solidFill>
                   <a:srgbClr val="333333"/>
                 </a:solidFill>
@@ -5411,7 +5411,7 @@
               </a:spcAft>
             </a:pPr>
             <a:r>
-              <a:rPr sz="1600" b="0" i="0">
+              <a:rPr sz="2000" b="0" i="0">
                 <a:solidFill>
                   <a:srgbClr val="333333"/>
                 </a:solidFill>
@@ -5420,7 +5420,7 @@
               <a:t>–   El esquema de VetCare ya está creado y poblado: consultas </a:t>
             </a:r>
             <a:r>
-              <a:rPr sz="1600" b="1" i="0">
+              <a:rPr sz="2000" b="1" i="0">
                 <a:solidFill>
                   <a:srgbClr val="333333"/>
                 </a:solidFill>
@@ -5429,7 +5429,7 @@
               <a:t>1 a 4</a:t>
             </a:r>
             <a:r>
-              <a:rPr sz="1600" b="0" i="0">
+              <a:rPr sz="2000" b="0" i="0">
                 <a:solidFill>
                   <a:srgbClr val="333333"/>
                 </a:solidFill>
@@ -5438,7 +5438,7 @@
               <a:t>, facturas 1 a 3 con sus 8 líneas de detalle, y </a:t>
             </a:r>
             <a:r>
-              <a:rPr sz="1600" b="1" i="0">
+              <a:rPr sz="2000" b="1" i="0">
                 <a:solidFill>
                   <a:srgbClr val="333333"/>
                 </a:solidFill>
@@ -5447,7 +5447,7 @@
               <a:t>6 insumos</a:t>
             </a:r>
             <a:r>
-              <a:rPr sz="1600" b="0" i="0">
+              <a:rPr sz="2000" b="0" i="0">
                 <a:solidFill>
                   <a:srgbClr val="333333"/>
                 </a:solidFill>
@@ -5456,7 +5456,7 @@
               <a:t> con stock 12, </a:t>
             </a:r>
             <a:r>
-              <a:rPr sz="1600" b="1" i="0">
+              <a:rPr sz="2000" b="1" i="0">
                 <a:solidFill>
                   <a:srgbClr val="333333"/>
                 </a:solidFill>
@@ -5465,7 +5465,7 @@
               <a:t>3</a:t>
             </a:r>
             <a:r>
-              <a:rPr sz="1600" b="0" i="0">
+              <a:rPr sz="2000" b="0" i="0">
                 <a:solidFill>
                   <a:srgbClr val="333333"/>
                 </a:solidFill>
@@ -5474,7 +5474,7 @@
               <a:t>, 40, 25, </a:t>
             </a:r>
             <a:r>
-              <a:rPr sz="1600" b="1" i="0">
+              <a:rPr sz="2000" b="1" i="0">
                 <a:solidFill>
                   <a:srgbClr val="333333"/>
                 </a:solidFill>
@@ -5483,7 +5483,7 @@
               <a:t>8</a:t>
             </a:r>
             <a:r>
-              <a:rPr sz="1600" b="0" i="0">
+              <a:rPr sz="2000" b="0" i="0">
                 <a:solidFill>
                   <a:srgbClr val="333333"/>
                 </a:solidFill>
@@ -5499,7 +5499,7 @@
               </a:spcAft>
             </a:pPr>
             <a:r>
-              <a:rPr sz="1600" b="0" i="0">
+              <a:rPr sz="2000" b="0" i="0">
                 <a:solidFill>
                   <a:srgbClr val="333333"/>
                 </a:solidFill>
@@ -5508,7 +5508,7 @@
               <a:t>–   Los stocks bajos son </a:t>
             </a:r>
             <a:r>
-              <a:rPr sz="1600" b="1" i="0">
+              <a:rPr sz="2000" b="1" i="0">
                 <a:solidFill>
                   <a:srgbClr val="333333"/>
                 </a:solidFill>
@@ -5517,7 +5517,7 @@
               <a:t>deliberados</a:t>
             </a:r>
             <a:r>
-              <a:rPr sz="1600" b="0" i="0">
+              <a:rPr sz="2000" b="0" i="0">
                 <a:solidFill>
                   <a:srgbClr val="333333"/>
                 </a:solidFill>
@@ -5526,7 +5526,7 @@
               <a:t>: el insumo 2 con 3 unidades es el que va a hacer fallar la factura de la pregunta 2, y el insumo 3 con 40 es el que tiene que </a:t>
             </a:r>
             <a:r>
-              <a:rPr sz="1600" b="1" i="0">
+              <a:rPr sz="2000" b="1" i="0">
                 <a:solidFill>
                   <a:srgbClr val="333333"/>
                 </a:solidFill>
@@ -5535,7 +5535,7 @@
               <a:t>volver</a:t>
             </a:r>
             <a:r>
-              <a:rPr sz="1600" b="0" i="0">
+              <a:rPr sz="2000" b="0" i="0">
                 <a:solidFill>
                   <a:srgbClr val="333333"/>
                 </a:solidFill>
@@ -5551,7 +5551,7 @@
               </a:spcAft>
             </a:pPr>
             <a:r>
-              <a:rPr sz="1600" b="0" i="0">
+              <a:rPr sz="2000" b="0" i="0">
                 <a:solidFill>
                   <a:srgbClr val="333333"/>
                 </a:solidFill>
@@ -5560,7 +5560,7 @@
               <a:t>–   La consulta 4 es la única </a:t>
             </a:r>
             <a:r>
-              <a:rPr sz="1600" b="1" i="0">
+              <a:rPr sz="2000" b="1" i="0">
                 <a:solidFill>
                   <a:srgbClr val="333333"/>
                 </a:solidFill>
@@ -5569,7 +5569,7 @@
               <a:t>sin facturar</a:t>
             </a:r>
             <a:r>
-              <a:rPr sz="1600" b="0" i="0">
+              <a:rPr sz="2000" b="0" i="0">
                 <a:solidFill>
                   <a:srgbClr val="333333"/>
                 </a:solidFill>
@@ -5585,7 +5585,7 @@
               </a:spcAft>
             </a:pPr>
             <a:r>
-              <a:rPr sz="1600" b="0" i="0">
+              <a:rPr sz="2000" b="0" i="0">
                 <a:solidFill>
                   <a:srgbClr val="333333"/>
                 </a:solidFill>
@@ -5594,7 +5594,7 @@
               <a:t>–   En la pregunta 2 el «sp_facturar» </a:t>
             </a:r>
             <a:r>
-              <a:rPr sz="1600" b="1" i="0">
+              <a:rPr sz="2000" b="1" i="0">
                 <a:solidFill>
                   <a:srgbClr val="333333"/>
                 </a:solidFill>
@@ -5603,7 +5603,7 @@
               <a:t>ya viene creado</a:t>
             </a:r>
             <a:r>
-              <a:rPr sz="1600" b="0" i="0">
+              <a:rPr sz="2000" b="0" i="0">
                 <a:solidFill>
                   <a:srgbClr val="333333"/>
                 </a:solidFill>
@@ -5619,7 +5619,7 @@
               </a:spcAft>
             </a:pPr>
             <a:r>
-              <a:rPr sz="1600" b="0" i="0">
+              <a:rPr sz="2000" b="0" i="0">
                 <a:solidFill>
                   <a:srgbClr val="333333"/>
                 </a:solidFill>
@@ -5628,7 +5628,7 @@
               <a:t>–   </a:t>
             </a:r>
             <a:r>
-              <a:rPr sz="1600" b="1" i="0">
+              <a:rPr sz="2000" b="1" i="0">
                 <a:solidFill>
                   <a:srgbClr val="333333"/>
                 </a:solidFill>
@@ -5637,7 +5637,7 @@
               <a:t>Motor:</a:t>
             </a:r>
             <a:r>
-              <a:rPr sz="1600" b="0" i="0">
+              <a:rPr sz="2000" b="0" i="0">
                 <a:solidFill>
                   <a:srgbClr val="333333"/>
                 </a:solidFill>
@@ -5646,7 +5646,7 @@
               <a:t> PostgreSQL dentro de ExamLab, en el navegador. PL/pgSQL, «CALL», «GET DIAGNOSTICS» y los bloques «DO $$ … EXCEPTION» corren de verdad. Corre con </a:t>
             </a:r>
             <a:r>
-              <a:rPr sz="1600" b="1" i="0">
+              <a:rPr sz="2000" b="1" i="0">
                 <a:solidFill>
                   <a:srgbClr val="333333"/>
                 </a:solidFill>
@@ -5655,7 +5655,7 @@
               <a:t>una sola sesión</a:t>
             </a:r>
             <a:r>
-              <a:rPr sz="1600" b="0" i="0">
+              <a:rPr sz="2000" b="0" i="0">
                 <a:solidFill>
                   <a:srgbClr val="333333"/>
                 </a:solidFill>
@@ -8476,7 +8476,7 @@
               </a:spcAft>
             </a:pPr>
             <a:r>
-              <a:rPr sz="1600" b="0" i="0">
+              <a:rPr sz="2000" b="0" i="0">
                 <a:solidFill>
                   <a:srgbClr val="333333"/>
                 </a:solidFill>
@@ -8485,7 +8485,7 @@
               <a:t>–   </a:t>
             </a:r>
             <a:r>
-              <a:rPr sz="1600" b="1" i="0">
+              <a:rPr sz="2000" b="1" i="0">
                 <a:solidFill>
                   <a:srgbClr val="333333"/>
                 </a:solidFill>
@@ -8494,7 +8494,7 @@
               <a:t>Entregable:</a:t>
             </a:r>
             <a:r>
-              <a:rPr sz="1600" b="0" i="0">
+              <a:rPr sz="2000" b="0" i="0">
                 <a:solidFill>
                   <a:srgbClr val="333333"/>
                 </a:solidFill>
@@ -8510,7 +8510,7 @@
               </a:spcAft>
             </a:pPr>
             <a:r>
-              <a:rPr sz="1600" b="0" i="0">
+              <a:rPr sz="2000" b="0" i="0">
                 <a:solidFill>
                   <a:srgbClr val="333333"/>
                 </a:solidFill>
@@ -8526,7 +8526,7 @@
               </a:spcAft>
             </a:pPr>
             <a:r>
-              <a:rPr sz="1600" b="0" i="0">
+              <a:rPr sz="2000" b="0" i="0">
                 <a:solidFill>
                   <a:srgbClr val="333333"/>
                 </a:solidFill>
@@ -8542,7 +8542,7 @@
               </a:spcAft>
             </a:pPr>
             <a:r>
-              <a:rPr sz="1600" b="0" i="0">
+              <a:rPr sz="2000" b="0" i="0">
                 <a:solidFill>
                   <a:srgbClr val="333333"/>
                 </a:solidFill>
@@ -8558,7 +8558,7 @@
               </a:spcAft>
             </a:pPr>
             <a:r>
-              <a:rPr sz="1600" b="0" i="0">
+              <a:rPr sz="2000" b="0" i="0">
                 <a:solidFill>
                   <a:srgbClr val="333333"/>
                 </a:solidFill>
@@ -8567,7 +8567,7 @@
               <a:t>–   </a:t>
             </a:r>
             <a:r>
-              <a:rPr sz="1600" b="1" i="0">
+              <a:rPr sz="2000" b="1" i="0">
                 <a:solidFill>
                   <a:srgbClr val="333333"/>
                 </a:solidFill>
@@ -8576,7 +8576,7 @@
               <a:t>Entrega en ExamLab</a:t>
             </a:r>
             <a:r>
-              <a:rPr sz="1600" b="0" i="0">
+              <a:rPr sz="2000" b="0" i="0">
                 <a:solidFill>
                   <a:srgbClr val="333333"/>
                 </a:solidFill>
@@ -9623,7 +9623,7 @@
               </a:spcAft>
             </a:pPr>
             <a:r>
-              <a:rPr sz="1600" b="0" i="0">
+              <a:rPr sz="2000" b="0" i="0">
                 <a:solidFill>
                   <a:srgbClr val="333333"/>
                 </a:solidFill>
@@ -9632,7 +9632,7 @@
               <a:t>–   </a:t>
             </a:r>
             <a:r>
-              <a:rPr sz="1600" b="1" i="0">
+              <a:rPr sz="2000" b="1" i="0">
                 <a:solidFill>
                   <a:srgbClr val="333333"/>
                 </a:solidFill>
@@ -9641,7 +9641,7 @@
               <a:t>Hoy avanzamos el PI en:</a:t>
             </a:r>
             <a:r>
-              <a:rPr sz="1600" b="0" i="0">
+              <a:rPr sz="2000" b="0" i="0">
                 <a:solidFill>
                   <a:srgbClr val="333333"/>
                 </a:solidFill>
@@ -9657,7 +9657,7 @@
               </a:spcAft>
             </a:pPr>
             <a:r>
-              <a:rPr sz="1600" b="0" i="0">
+              <a:rPr sz="2000" b="0" i="0">
                 <a:solidFill>
                   <a:srgbClr val="333333"/>
                 </a:solidFill>
@@ -9666,7 +9666,7 @@
               <a:t>–   Herramienta: </a:t>
             </a:r>
             <a:r>
-              <a:rPr sz="1600" b="1" i="0">
+              <a:rPr sz="2000" b="1" i="0">
                 <a:solidFill>
                   <a:srgbClr val="333333"/>
                 </a:solidFill>
@@ -9675,7 +9675,7 @@
               <a:t>ExamLab (PostgreSQL/PGlite)</a:t>
             </a:r>
             <a:r>
-              <a:rPr sz="1600" b="0" i="0">
+              <a:rPr sz="2000" b="0" i="0">
                 <a:solidFill>
                   <a:srgbClr val="333333"/>
                 </a:solidFill>
@@ -9684,7 +9684,7 @@
               <a:t> · Bloque </a:t>
             </a:r>
             <a:r>
-              <a:rPr sz="1600" b="1" i="0">
+              <a:rPr sz="2000" b="1" i="0">
                 <a:solidFill>
                   <a:srgbClr val="333333"/>
                 </a:solidFill>
@@ -9693,7 +9693,7 @@
               <a:t>120 min</a:t>
             </a:r>
             <a:r>
-              <a:rPr sz="1600" b="0" i="0">
+              <a:rPr sz="2000" b="0" i="0">
                 <a:solidFill>
                   <a:srgbClr val="333333"/>
                 </a:solidFill>
@@ -9709,7 +9709,7 @@
               </a:spcAft>
             </a:pPr>
             <a:r>
-              <a:rPr sz="1600" b="0" i="0">
+              <a:rPr sz="2000" b="0" i="0">
                 <a:solidFill>
                   <a:srgbClr val="333333"/>
                 </a:solidFill>
@@ -9718,7 +9718,7 @@
               <a:t>–   </a:t>
             </a:r>
             <a:r>
-              <a:rPr sz="1600" b="1" i="0">
+              <a:rPr sz="2000" b="1" i="0">
                 <a:solidFill>
                   <a:srgbClr val="333333"/>
                 </a:solidFill>
@@ -9727,7 +9727,7 @@
               <a:t>Entregable de hoy:</a:t>
             </a:r>
             <a:r>
-              <a:rPr sz="1600" b="0" i="0">
+              <a:rPr sz="2000" b="0" i="0">
                 <a:solidFill>
                   <a:srgbClr val="333333"/>
                 </a:solidFill>
@@ -9743,7 +9743,7 @@
               </a:spcAft>
             </a:pPr>
             <a:r>
-              <a:rPr sz="1600" b="0" i="0">
+              <a:rPr sz="2000" b="0" i="0">
                 <a:solidFill>
                   <a:srgbClr val="333333"/>
                 </a:solidFill>
@@ -9759,7 +9759,7 @@
               </a:spcAft>
             </a:pPr>
             <a:r>
-              <a:rPr sz="1600" b="0" i="0">
+              <a:rPr sz="2000" b="0" i="0">
                 <a:solidFill>
                   <a:srgbClr val="333333"/>
                 </a:solidFill>
@@ -9775,7 +9775,7 @@
               </a:spcAft>
             </a:pPr>
             <a:r>
-              <a:rPr sz="1600" b="0" i="0">
+              <a:rPr sz="2000" b="0" i="0">
                 <a:solidFill>
                   <a:srgbClr val="333333"/>
                 </a:solidFill>
@@ -10099,7 +10099,7 @@
         <p:spPr>
           <a:xfrm>
             <a:off x="502920" y="2587752"/>
-            <a:ext cx="2164019" cy="2560320"/>
+            <a:ext cx="2164019" cy="3310128"/>
           </a:xfrm>
           <a:prstGeom prst="rect">
             <a:avLst/>
@@ -10214,7 +10214,7 @@
         <p:spPr>
           <a:xfrm>
             <a:off x="2758379" y="2587752"/>
-            <a:ext cx="2164019" cy="2560320"/>
+            <a:ext cx="2164019" cy="3310128"/>
           </a:xfrm>
           <a:prstGeom prst="rect">
             <a:avLst/>
@@ -10329,7 +10329,7 @@
         <p:spPr>
           <a:xfrm>
             <a:off x="5013838" y="2587752"/>
-            <a:ext cx="2164019" cy="2560320"/>
+            <a:ext cx="2164019" cy="3310128"/>
           </a:xfrm>
           <a:prstGeom prst="rect">
             <a:avLst/>
@@ -10444,7 +10444,7 @@
         <p:spPr>
           <a:xfrm>
             <a:off x="7269297" y="2587752"/>
-            <a:ext cx="2164019" cy="2560320"/>
+            <a:ext cx="2164019" cy="3310128"/>
           </a:xfrm>
           <a:prstGeom prst="rect">
             <a:avLst/>
@@ -10559,7 +10559,7 @@
         <p:spPr>
           <a:xfrm>
             <a:off x="9524756" y="2587752"/>
-            <a:ext cx="2164019" cy="2560320"/>
+            <a:ext cx="2164019" cy="3310128"/>
           </a:xfrm>
           <a:prstGeom prst="rect">
             <a:avLst/>
@@ -10593,8 +10593,8 @@
         </p:nvSpPr>
         <p:spPr>
           <a:xfrm>
-            <a:off x="457200" y="5943600"/>
-            <a:ext cx="11277295" cy="365760"/>
+            <a:off x="457200" y="5806440"/>
+            <a:ext cx="11277295" cy="640080"/>
           </a:xfrm>
           <a:prstGeom prst="rect">
             <a:avLst/>
@@ -10847,7 +10847,7 @@
               </a:spcAft>
             </a:pPr>
             <a:r>
-              <a:rPr sz="1500" b="0" i="0">
+              <a:rPr sz="2000" b="0" i="0">
                 <a:solidFill>
                   <a:srgbClr val="333333"/>
                 </a:solidFill>
@@ -10863,7 +10863,7 @@
               </a:spcAft>
             </a:pPr>
             <a:r>
-              <a:rPr sz="1500" b="0" i="0">
+              <a:rPr sz="2000" b="0" i="0">
                 <a:solidFill>
                   <a:srgbClr val="333333"/>
                 </a:solidFill>
@@ -10879,7 +10879,7 @@
               </a:spcAft>
             </a:pPr>
             <a:r>
-              <a:rPr sz="1500" b="0" i="0">
+              <a:rPr sz="2000" b="0" i="0">
                 <a:solidFill>
                   <a:srgbClr val="333333"/>
                 </a:solidFill>
@@ -10895,7 +10895,7 @@
               </a:spcAft>
             </a:pPr>
             <a:r>
-              <a:rPr sz="1500" b="0" i="0">
+              <a:rPr sz="2000" b="0" i="0">
                 <a:solidFill>
                   <a:srgbClr val="333333"/>
                 </a:solidFill>
@@ -10911,7 +10911,7 @@
               </a:spcAft>
             </a:pPr>
             <a:r>
-              <a:rPr sz="1500" b="0" i="0">
+              <a:rPr sz="2000" b="0" i="0">
                 <a:solidFill>
                   <a:srgbClr val="333333"/>
                 </a:solidFill>
@@ -11684,7 +11684,7 @@
               </a:spcAft>
             </a:pPr>
             <a:r>
-              <a:rPr sz="1300" b="0" i="0">
+              <a:rPr sz="1600" b="0" i="0">
                 <a:solidFill>
                   <a:srgbClr val="333333"/>
                 </a:solidFill>
@@ -11693,7 +11693,7 @@
               <a:t>–   </a:t>
             </a:r>
             <a:r>
-              <a:rPr sz="1300" b="1" i="0">
+              <a:rPr sz="1600" b="1" i="0">
                 <a:solidFill>
                   <a:srgbClr val="333333"/>
                 </a:solidFill>
@@ -11702,7 +11702,7 @@
               <a:t>La firma exacta, que se factura por lineas.</a:t>
             </a:r>
             <a:r>
-              <a:rPr sz="1300" b="0" i="0">
+              <a:rPr sz="1600" b="0" i="0">
                 <a:solidFill>
                   <a:srgbClr val="333333"/>
                 </a:solidFill>
@@ -11711,7 +11711,7 @@
               <a:t> «CREATE PROCEDURE sp_facturar(p_id_consulta INT, p_insumos INT[], p_cantidades INT[]) LANGUAGE plpgsql AS $proc$ ... $proc$;» — </a:t>
             </a:r>
             <a:r>
-              <a:rPr sz="1300" b="1" i="0">
+              <a:rPr sz="1600" b="1" i="0">
                 <a:solidFill>
                   <a:srgbClr val="333333"/>
                 </a:solidFill>
@@ -11720,7 +11720,7 @@
               <a:t>dos arreglos paralelos</a:t>
             </a:r>
             <a:r>
-              <a:rPr sz="1300" b="0" i="0">
+              <a:rPr sz="1600" b="0" i="0">
                 <a:solidFill>
                   <a:srgbClr val="333333"/>
                 </a:solidFill>
@@ -11729,7 +11729,7 @@
               <a:t>, no un insumo suelto: una factura tiene varias lineas. Se llama «CALL sp_facturar(4, ARRAY[1,6,5], ARRAY[1,2,3]);». Los tipos son «INT» y «NUMERIC», no «NUMBER». Primera linea del cuerpo: «IF array_length(p_insumos, 1) IS DISTINCT FROM array_length(p_cantidades, 1) THEN RAISE EXCEPTION ...» — dos arreglos de longitud distinta se rechazan </a:t>
             </a:r>
             <a:r>
-              <a:rPr sz="1300" b="1" i="0">
+              <a:rPr sz="1600" b="1" i="0">
                 <a:solidFill>
                   <a:srgbClr val="333333"/>
                 </a:solidFill>
@@ -11738,7 +11738,7 @@
               <a:t>antes de tocar la base</a:t>
             </a:r>
             <a:r>
-              <a:rPr sz="1300" b="0" i="0">
+              <a:rPr sz="1600" b="0" i="0">
                 <a:solidFill>
                   <a:srgbClr val="333333"/>
                 </a:solidFill>
@@ -11754,7 +11754,7 @@
               </a:spcAft>
             </a:pPr>
             <a:r>
-              <a:rPr sz="1300" b="0" i="0">
+              <a:rPr sz="1600" b="0" i="0">
                 <a:solidFill>
                   <a:srgbClr val="333333"/>
                 </a:solidFill>
@@ -11763,7 +11763,7 @@
               <a:t>–   </a:t>
             </a:r>
             <a:r>
-              <a:rPr sz="1300" b="1" i="0">
+              <a:rPr sz="1600" b="1" i="0">
                 <a:solidFill>
                   <a:srgbClr val="333333"/>
                 </a:solidFill>
@@ -11772,7 +11772,7 @@
               <a:t>La cabecera y el id que se acaba de generar.</a:t>
             </a:r>
             <a:r>
-              <a:rPr sz="1300" b="0" i="0">
+              <a:rPr sz="1600" b="0" i="0">
                 <a:solidFill>
                   <a:srgbClr val="333333"/>
                 </a:solidFill>
@@ -11781,7 +11781,7 @@
               <a:t> «INSERT INTO factura (id_consulta, total) VALUES (p_id_consulta, 0) RETURNING id_factura INTO v_id_factura;» — el total entra en </a:t>
             </a:r>
             <a:r>
-              <a:rPr sz="1300" b="1" i="0">
+              <a:rPr sz="1600" b="1" i="0">
                 <a:solidFill>
                   <a:srgbClr val="333333"/>
                 </a:solidFill>
@@ -11790,7 +11790,7 @@
               <a:t>0</a:t>
             </a:r>
             <a:r>
-              <a:rPr sz="1300" b="0" i="0">
+              <a:rPr sz="1600" b="0" i="0">
                 <a:solidFill>
                   <a:srgbClr val="333333"/>
                 </a:solidFill>
@@ -11806,7 +11806,7 @@
               </a:spcAft>
             </a:pPr>
             <a:r>
-              <a:rPr sz="1300" b="0" i="0">
+              <a:rPr sz="1600" b="0" i="0">
                 <a:solidFill>
                   <a:srgbClr val="333333"/>
                 </a:solidFill>
@@ -11815,7 +11815,7 @@
               <a:t>–   </a:t>
             </a:r>
             <a:r>
-              <a:rPr sz="1300" b="1" i="0">
+              <a:rPr sz="1600" b="1" i="0">
                 <a:solidFill>
                   <a:srgbClr val="333333"/>
                 </a:solidFill>
@@ -11824,7 +11824,7 @@
               <a:t>El bucle, y el guardia que es el corazon del dia.</a:t>
             </a:r>
             <a:r>
-              <a:rPr sz="1300" b="0" i="0">
+              <a:rPr sz="1600" b="0" i="0">
                 <a:solidFill>
                   <a:srgbClr val="333333"/>
                 </a:solidFill>
@@ -11833,7 +11833,7 @@
               <a:t> «FOR i IN 1 .. array_length(p_insumos, 1) LOOP» y dentro: «UPDATE insumo SET stock = stock - p_cantidades[i] WHERE id_insumo = p_insumos[i] AND </a:t>
             </a:r>
             <a:r>
-              <a:rPr sz="1300" b="1" i="0">
+              <a:rPr sz="1600" b="1" i="0">
                 <a:solidFill>
                   <a:srgbClr val="333333"/>
                 </a:solidFill>
@@ -11842,7 +11842,7 @@
               <a:t>stock &gt;= p_cantidades[i]</a:t>
             </a:r>
             <a:r>
-              <a:rPr sz="1300" b="0" i="0">
+              <a:rPr sz="1600" b="0" i="0">
                 <a:solidFill>
                   <a:srgbClr val="333333"/>
                 </a:solidFill>
@@ -11851,7 +11851,7 @@
               <a:t>;» — la comprobacion viaja </a:t>
             </a:r>
             <a:r>
-              <a:rPr sz="1300" b="1" i="0">
+              <a:rPr sz="1600" b="1" i="0">
                 <a:solidFill>
                   <a:srgbClr val="333333"/>
                 </a:solidFill>
@@ -11860,7 +11860,7 @@
               <a:t>dentro del «WHERE»</a:t>
             </a:r>
             <a:r>
-              <a:rPr sz="1300" b="0" i="0">
+              <a:rPr sz="1600" b="0" i="0">
                 <a:solidFill>
                   <a:srgbClr val="333333"/>
                 </a:solidFill>
@@ -11869,7 +11869,7 @@
               <a:t>: comprobar y escribir son </a:t>
             </a:r>
             <a:r>
-              <a:rPr sz="1300" b="1" i="0">
+              <a:rPr sz="1600" b="1" i="0">
                 <a:solidFill>
                   <a:srgbClr val="333333"/>
                 </a:solidFill>
@@ -11878,7 +11878,7 @@
               <a:t>una sola sentencia</a:t>
             </a:r>
             <a:r>
-              <a:rPr sz="1300" b="0" i="0">
+              <a:rPr sz="1600" b="0" i="0">
                 <a:solidFill>
                   <a:srgbClr val="333333"/>
                 </a:solidFill>
@@ -11894,7 +11894,7 @@
               </a:spcAft>
             </a:pPr>
             <a:r>
-              <a:rPr sz="1300" b="0" i="0">
+              <a:rPr sz="1600" b="0" i="0">
                 <a:solidFill>
                   <a:srgbClr val="333333"/>
                 </a:solidFill>
@@ -11903,7 +11903,7 @@
               <a:t>–   </a:t>
             </a:r>
             <a:r>
-              <a:rPr sz="1300" b="1" i="0">
+              <a:rPr sz="1600" b="1" i="0">
                 <a:solidFill>
                   <a:srgbClr val="333333"/>
                 </a:solidFill>
@@ -11912,7 +11912,7 @@
               <a:t>Como se sabe si alcanzo, y como se aborta.</a:t>
             </a:r>
             <a:r>
-              <a:rPr sz="1300" b="0" i="0">
+              <a:rPr sz="1600" b="0" i="0">
                 <a:solidFill>
                   <a:srgbClr val="333333"/>
                 </a:solidFill>
@@ -11921,7 +11921,7 @@
               <a:t> «GET DIAGNOSTICS v_filas = ROW_COUNT;» guarda cuantas filas toco el «UPDATE»: «1» alcanzo, «0» no habia stock. Entonces «IF v_filas = 0 THEN RAISE EXCEPTION 'ERROR: stock insuficiente del insumo %', p_insumos[i]; END IF;». </a:t>
             </a:r>
             <a:r>
-              <a:rPr sz="1300" b="1" i="0">
+              <a:rPr sz="1600" b="1" i="0">
                 <a:solidFill>
                   <a:srgbClr val="333333"/>
                 </a:solidFill>
@@ -11930,7 +11930,7 @@
               <a:t>No es «SQL%ROWCOUNT» ni «RAISE_APPLICATION_ERROR»</a:t>
             </a:r>
             <a:r>
-              <a:rPr sz="1300" b="0" i="0">
+              <a:rPr sz="1600" b="0" i="0">
                 <a:solidFill>
                   <a:srgbClr val="333333"/>
                 </a:solidFill>
@@ -11946,7 +11946,7 @@
               </a:spcAft>
             </a:pPr>
             <a:r>
-              <a:rPr sz="1300" b="0" i="0">
+              <a:rPr sz="1600" b="0" i="0">
                 <a:solidFill>
                   <a:srgbClr val="333333"/>
                 </a:solidFill>
@@ -11955,7 +11955,7 @@
               <a:t>–   </a:t>
             </a:r>
             <a:r>
-              <a:rPr sz="1300" b="1" i="0">
+              <a:rPr sz="1600" b="1" i="0">
                 <a:solidFill>
                   <a:srgbClr val="333333"/>
                 </a:solidFill>
@@ -11964,7 +11964,7 @@
               <a:t>Y el cierre.</a:t>
             </a:r>
             <a:r>
-              <a:rPr sz="1300" b="0" i="0">
+              <a:rPr sz="1600" b="0" i="0">
                 <a:solidFill>
                   <a:srgbClr val="333333"/>
                 </a:solidFill>
@@ -11973,7 +11973,7 @@
               <a:t> Cada iteracion inserta su linea en «detalle_factura» con el «precio_unit» </a:t>
             </a:r>
             <a:r>
-              <a:rPr sz="1300" b="1" i="0">
+              <a:rPr sz="1600" b="1" i="0">
                 <a:solidFill>
                   <a:srgbClr val="333333"/>
                 </a:solidFill>
@@ -11982,7 +11982,7 @@
               <a:t>vigente</a:t>
             </a:r>
             <a:r>
-              <a:rPr sz="1300" b="0" i="0">
+              <a:rPr sz="1600" b="0" i="0">
                 <a:solidFill>
                   <a:srgbClr val="333333"/>
                 </a:solidFill>
@@ -11991,7 +11991,7 @@
               <a:t> y acumula «v_total := v_total + v_precio * p_cantidades[i];». Al salir del bucle, «UPDATE factura SET total = v_total WHERE id_factura = v_id_factura;». El caso de prueba da </a:t>
             </a:r>
             <a:r>
-              <a:rPr sz="1300" b="1" i="0">
+              <a:rPr sz="1600" b="1" i="0">
                 <a:solidFill>
                   <a:srgbClr val="333333"/>
                 </a:solidFill>
@@ -12000,7 +12000,7 @@
               <a:t>27.400</a:t>
             </a:r>
             <a:r>
-              <a:rPr sz="1300" b="0" i="0">
+              <a:rPr sz="1600" b="0" i="0">
                 <a:solidFill>
                   <a:srgbClr val="333333"/>
                 </a:solidFill>
@@ -12254,7 +12254,7 @@
               </a:spcAft>
             </a:pPr>
             <a:r>
-              <a:rPr sz="1300" b="0" i="0">
+              <a:rPr sz="1800" b="0" i="0">
                 <a:solidFill>
                   <a:srgbClr val="333333"/>
                 </a:solidFill>
@@ -12263,7 +12263,7 @@
               <a:t>–   </a:t>
             </a:r>
             <a:r>
-              <a:rPr sz="1300" b="1" i="0">
+              <a:rPr sz="1800" b="1" i="0">
                 <a:solidFill>
                   <a:srgbClr val="333333"/>
                 </a:solidFill>
@@ -12272,7 +12272,7 @@
               <a:t>La regla de PostgreSQL.</a:t>
             </a:r>
             <a:r>
-              <a:rPr sz="1300" b="0" i="0">
+              <a:rPr sz="1800" b="0" i="0">
                 <a:solidFill>
                   <a:srgbClr val="333333"/>
                 </a:solidFill>
@@ -12281,7 +12281,7 @@
               <a:t> Un «CALL» escrito por fuera de cualquier «BEGIN» es </a:t>
             </a:r>
             <a:r>
-              <a:rPr sz="1300" b="1" i="0">
+              <a:rPr sz="1800" b="1" i="0">
                 <a:solidFill>
                   <a:srgbClr val="333333"/>
                 </a:solidFill>
@@ -12290,7 +12290,7 @@
               <a:t>su propia transaccion</a:t>
             </a:r>
             <a:r>
-              <a:rPr sz="1300" b="0" i="0">
+              <a:rPr sz="1800" b="0" i="0">
                 <a:solidFill>
                   <a:srgbClr val="333333"/>
                 </a:solidFill>
@@ -12299,7 +12299,7 @@
               <a:t>. Si la excepcion se propaga hasta afuera del procedimiento, el motor deshace </a:t>
             </a:r>
             <a:r>
-              <a:rPr sz="1300" b="1" i="0">
+              <a:rPr sz="1800" b="1" i="0">
                 <a:solidFill>
                   <a:srgbClr val="333333"/>
                 </a:solidFill>
@@ -12308,7 +12308,7 @@
               <a:t>todo</a:t>
             </a:r>
             <a:r>
-              <a:rPr sz="1300" b="0" i="0">
+              <a:rPr sz="1800" b="0" i="0">
                 <a:solidFill>
                   <a:srgbClr val="333333"/>
                 </a:solidFill>
@@ -12317,7 +12317,7 @@
               <a:t> lo que ese «CALL» habia hecho: la cabecera de la factura, el detalle y el descuento del primer insumo. </a:t>
             </a:r>
             <a:r>
-              <a:rPr sz="1300" b="1" i="0">
+              <a:rPr sz="1800" b="1" i="0">
                 <a:solidFill>
                   <a:srgbClr val="333333"/>
                 </a:solidFill>
@@ -12326,7 +12326,7 @@
               <a:t>Nadie escribio ROLLBACK</a:t>
             </a:r>
             <a:r>
-              <a:rPr sz="1300" b="0" i="0">
+              <a:rPr sz="1800" b="0" i="0">
                 <a:solidFill>
                   <a:srgbClr val="333333"/>
                 </a:solidFill>
@@ -12342,7 +12342,7 @@
               </a:spcAft>
             </a:pPr>
             <a:r>
-              <a:rPr sz="1300" b="0" i="0">
+              <a:rPr sz="1800" b="0" i="0">
                 <a:solidFill>
                   <a:srgbClr val="333333"/>
                 </a:solidFill>
@@ -12351,7 +12351,7 @@
               <a:t>–   </a:t>
             </a:r>
             <a:r>
-              <a:rPr sz="1300" b="1" i="0">
+              <a:rPr sz="1800" b="1" i="0">
                 <a:solidFill>
                   <a:srgbClr val="333333"/>
                 </a:solidFill>
@@ -12360,7 +12360,7 @@
               <a:t>Y el savepoint que nadie declara.</a:t>
             </a:r>
             <a:r>
-              <a:rPr sz="1300" b="0" i="0">
+              <a:rPr sz="1800" b="0" i="0">
                 <a:solidFill>
                   <a:srgbClr val="333333"/>
                 </a:solidFill>
@@ -12369,7 +12369,7 @@
               <a:t> Un bloque «BEGIN ... EXCEPTION WHEN ... END» en PL/pgSQL crea un </a:t>
             </a:r>
             <a:r>
-              <a:rPr sz="1300" b="1" i="0">
+              <a:rPr sz="1800" b="1" i="0">
                 <a:solidFill>
                   <a:srgbClr val="333333"/>
                 </a:solidFill>
@@ -12378,7 +12378,7 @@
               <a:t>savepoint implicito</a:t>
             </a:r>
             <a:r>
-              <a:rPr sz="1300" b="0" i="0">
+              <a:rPr sz="1800" b="0" i="0">
                 <a:solidFill>
                   <a:srgbClr val="333333"/>
                 </a:solidFill>
@@ -12387,7 +12387,7 @@
               <a:t> al entrar. Por eso, si tu capturas el error, se revierte solo lo hecho </a:t>
             </a:r>
             <a:r>
-              <a:rPr sz="1300" b="1" i="0">
+              <a:rPr sz="1800" b="1" i="0">
                 <a:solidFill>
                   <a:srgbClr val="333333"/>
                 </a:solidFill>
@@ -12396,7 +12396,7 @@
               <a:t>dentro de ese bloque</a:t>
             </a:r>
             <a:r>
-              <a:rPr sz="1300" b="0" i="0">
+              <a:rPr sz="1800" b="0" i="0">
                 <a:solidFill>
                   <a:srgbClr val="333333"/>
                 </a:solidFill>
@@ -12412,7 +12412,7 @@
               </a:spcAft>
             </a:pPr>
             <a:r>
-              <a:rPr sz="1300" b="0" i="0">
+              <a:rPr sz="1800" b="0" i="0">
                 <a:solidFill>
                   <a:srgbClr val="333333"/>
                 </a:solidFill>
@@ -12421,7 +12421,7 @@
               <a:t>–   </a:t>
             </a:r>
             <a:r>
-              <a:rPr sz="1300" b="1" i="0">
+              <a:rPr sz="1800" b="1" i="0">
                 <a:solidFill>
                   <a:srgbClr val="333333"/>
                 </a:solidFill>
@@ -12430,7 +12430,7 @@
               <a:t>El contraste con Oracle, que es lo que se pregunta.</a:t>
             </a:r>
             <a:r>
-              <a:rPr sz="1300" b="0" i="0">
+              <a:rPr sz="1800" b="0" i="0">
                 <a:solidFill>
                   <a:srgbClr val="333333"/>
                 </a:solidFill>
@@ -12439,7 +12439,7 @@
               <a:t> En Oracle el procedimiento es parte de la transaccion del llamador y ahi si se escribe «EXCEPTION WHEN OTHERS THEN ROLLBACK; RAISE;». En PostgreSQL ese «ROLLBACK» dentro de un procedimiento invocado por un «CALL» de nivel superior </a:t>
             </a:r>
             <a:r>
-              <a:rPr sz="1300" b="1" i="0">
+              <a:rPr sz="1800" b="1" i="0">
                 <a:solidFill>
                   <a:srgbClr val="333333"/>
                 </a:solidFill>
@@ -12448,7 +12448,7 @@
               <a:t>ni siquiera esta permitido</a:t>
             </a:r>
             <a:r>
-              <a:rPr sz="1300" b="0" i="0">
+              <a:rPr sz="1800" b="0" i="0">
                 <a:solidFill>
                   <a:srgbClr val="333333"/>
                 </a:solidFill>
@@ -12464,7 +12464,7 @@
               </a:spcAft>
             </a:pPr>
             <a:r>
-              <a:rPr sz="1300" b="0" i="0">
+              <a:rPr sz="1800" b="0" i="0">
                 <a:solidFill>
                   <a:srgbClr val="333333"/>
                 </a:solidFill>
@@ -12473,7 +12473,7 @@
               <a:t>–   </a:t>
             </a:r>
             <a:r>
-              <a:rPr sz="1300" b="1" i="0">
+              <a:rPr sz="1800" b="1" i="0">
                 <a:solidFill>
                   <a:srgbClr val="333333"/>
                 </a:solidFill>
@@ -12482,7 +12482,7 @@
               <a:t>La consecuencia practica.</a:t>
             </a:r>
             <a:r>
-              <a:rPr sz="1300" b="0" i="0">
+              <a:rPr sz="1800" b="0" i="0">
                 <a:solidFill>
                   <a:srgbClr val="333333"/>
                 </a:solidFill>
@@ -12491,7 +12491,7 @@
               <a:t> Quien decide el «COMMIT» es </a:t>
             </a:r>
             <a:r>
-              <a:rPr sz="1300" b="1" i="0">
+              <a:rPr sz="1800" b="1" i="0">
                 <a:solidFill>
                   <a:srgbClr val="333333"/>
                 </a:solidFill>
@@ -12500,7 +12500,7 @@
               <a:t>uno solo</a:t>
             </a:r>
             <a:r>
-              <a:rPr sz="1300" b="0" i="0">
+              <a:rPr sz="1800" b="0" i="0">
                 <a:solidFill>
                   <a:srgbClr val="333333"/>
                 </a:solidFill>
@@ -12516,7 +12516,7 @@
               </a:spcAft>
             </a:pPr>
             <a:r>
-              <a:rPr sz="1300" b="0" i="0">
+              <a:rPr sz="1800" b="0" i="0">
                 <a:solidFill>
                   <a:srgbClr val="333333"/>
                 </a:solidFill>
@@ -12525,7 +12525,7 @@
               <a:t>–   </a:t>
             </a:r>
             <a:r>
-              <a:rPr sz="1300" b="1" i="0">
+              <a:rPr sz="1800" b="1" i="0">
                 <a:solidFill>
                   <a:srgbClr val="333333"/>
                 </a:solidFill>
@@ -12534,7 +12534,7 @@
               <a:t>El error que no se perdona.</a:t>
             </a:r>
             <a:r>
-              <a:rPr sz="1300" b="0" i="0">
+              <a:rPr sz="1800" b="0" i="0">
                 <a:solidFill>
                   <a:srgbClr val="333333"/>
                 </a:solidFill>
@@ -12543,7 +12543,7 @@
               <a:t> Capturar la excepcion y no volver a lanzarla. «EXCEPTION WHEN OTHERS THEN NULL;» </a:t>
             </a:r>
             <a:r>
-              <a:rPr sz="1300" b="1" i="0">
+              <a:rPr sz="1800" b="1" i="0">
                 <a:solidFill>
                   <a:srgbClr val="333333"/>
                 </a:solidFill>
@@ -12552,7 +12552,7 @@
               <a:t>convierte el fallo en silencio</a:t>
             </a:r>
             <a:r>
-              <a:rPr sz="1300" b="0" i="0">
+              <a:rPr sz="1800" b="0" i="0">
                 <a:solidFill>
                   <a:srgbClr val="333333"/>
                 </a:solidFill>
@@ -12806,7 +12806,7 @@
               </a:spcAft>
             </a:pPr>
             <a:r>
-              <a:rPr sz="1300" b="0" i="0">
+              <a:rPr sz="1900" b="0" i="0">
                 <a:solidFill>
                   <a:srgbClr val="333333"/>
                 </a:solidFill>
@@ -12815,7 +12815,7 @@
               <a:t>–   </a:t>
             </a:r>
             <a:r>
-              <a:rPr sz="1300" b="1" i="0">
+              <a:rPr sz="1900" b="1" i="0">
                 <a:solidFill>
                   <a:srgbClr val="333333"/>
                 </a:solidFill>
@@ -12824,7 +12824,7 @@
               <a:t>La diferencia.</a:t>
             </a:r>
             <a:r>
-              <a:rPr sz="1300" b="0" i="0">
+              <a:rPr sz="1900" b="0" i="0">
                 <a:solidFill>
                   <a:srgbClr val="333333"/>
                 </a:solidFill>
@@ -12833,7 +12833,7 @@
               <a:t> El procedimiento </a:t>
             </a:r>
             <a:r>
-              <a:rPr sz="1300" b="1" i="0">
+              <a:rPr sz="1900" b="1" i="0">
                 <a:solidFill>
                   <a:srgbClr val="333333"/>
                 </a:solidFill>
@@ -12842,7 +12842,7 @@
               <a:t>aborta</a:t>
             </a:r>
             <a:r>
-              <a:rPr sz="1300" b="0" i="0">
+              <a:rPr sz="1900" b="0" i="0">
                 <a:solidFill>
                   <a:srgbClr val="333333"/>
                 </a:solidFill>
@@ -12851,7 +12851,7 @@
               <a:t> la factura completa; la funcion </a:t>
             </a:r>
             <a:r>
-              <a:rPr sz="1300" b="1" i="0">
+              <a:rPr sz="1900" b="1" i="0">
                 <a:solidFill>
                   <a:srgbClr val="333333"/>
                 </a:solidFill>
@@ -12860,7 +12860,7 @@
               <a:t>informa</a:t>
             </a:r>
             <a:r>
-              <a:rPr sz="1300" b="0" i="0">
+              <a:rPr sz="1900" b="0" i="0">
                 <a:solidFill>
                   <a:srgbClr val="333333"/>
                 </a:solidFill>
@@ -12876,7 +12876,7 @@
               </a:spcAft>
             </a:pPr>
             <a:r>
-              <a:rPr sz="1300" b="0" i="0">
+              <a:rPr sz="1900" b="0" i="0">
                 <a:solidFill>
                   <a:srgbClr val="333333"/>
                 </a:solidFill>
@@ -12885,7 +12885,7 @@
               <a:t>–   </a:t>
             </a:r>
             <a:r>
-              <a:rPr sz="1300" b="1" i="0">
+              <a:rPr sz="1900" b="1" i="0">
                 <a:solidFill>
                   <a:srgbClr val="333333"/>
                 </a:solidFill>
@@ -12894,7 +12894,7 @@
               <a:t>La firma, y su palabra clave.</a:t>
             </a:r>
             <a:r>
-              <a:rPr sz="1300" b="0" i="0">
+              <a:rPr sz="1900" b="0" i="0">
                 <a:solidFill>
                   <a:srgbClr val="333333"/>
                 </a:solidFill>
@@ -12903,7 +12903,7 @@
               <a:t> «CREATE OR REPLACE FUNCTION fn_descontar_stock(p_id_insumo INT, p_cantidad INT) RETURNS BOOLEAN LANGUAGE plpgsql AS $$ ...» — </a:t>
             </a:r>
             <a:r>
-              <a:rPr sz="1300" b="1" i="0">
+              <a:rPr sz="1900" b="1" i="0">
                 <a:solidFill>
                   <a:srgbClr val="333333"/>
                 </a:solidFill>
@@ -12912,7 +12912,7 @@
               <a:t>«RETURNS BOOLEAN»</a:t>
             </a:r>
             <a:r>
-              <a:rPr sz="1300" b="0" i="0">
+              <a:rPr sz="1900" b="0" i="0">
                 <a:solidFill>
                   <a:srgbClr val="333333"/>
                 </a:solidFill>
@@ -12921,7 +12921,7 @@
               <a:t>, no «PROCEDURE». Devuelve «TRUE» si desconto y «FALSE» si no habia suficiente, </a:t>
             </a:r>
             <a:r>
-              <a:rPr sz="1300" b="1" i="0">
+              <a:rPr sz="1900" b="1" i="0">
                 <a:solidFill>
                   <a:srgbClr val="333333"/>
                 </a:solidFill>
@@ -12930,7 +12930,7 @@
               <a:t>sin lanzar excepcion</a:t>
             </a:r>
             <a:r>
-              <a:rPr sz="1300" b="0" i="0">
+              <a:rPr sz="1900" b="0" i="0">
                 <a:solidFill>
                   <a:srgbClr val="333333"/>
                 </a:solidFill>
@@ -12946,7 +12946,7 @@
               </a:spcAft>
             </a:pPr>
             <a:r>
-              <a:rPr sz="1300" b="0" i="0">
+              <a:rPr sz="1900" b="0" i="0">
                 <a:solidFill>
                   <a:srgbClr val="333333"/>
                 </a:solidFill>
@@ -12955,7 +12955,7 @@
               <a:t>–   </a:t>
             </a:r>
             <a:r>
-              <a:rPr sz="1300" b="1" i="0">
+              <a:rPr sz="1900" b="1" i="0">
                 <a:solidFill>
                   <a:srgbClr val="333333"/>
                 </a:solidFill>
@@ -12964,7 +12964,7 @@
               <a:t>Lo que si es un error.</a:t>
             </a:r>
             <a:r>
-              <a:rPr sz="1300" b="0" i="0">
+              <a:rPr sz="1900" b="0" i="0">
                 <a:solidFill>
                   <a:srgbClr val="333333"/>
                 </a:solidFill>
@@ -12973,7 +12973,7 @@
               <a:t> Una cantidad negativa o cero no es «no hay stock», es una llamada mal hecha: eso </a:t>
             </a:r>
             <a:r>
-              <a:rPr sz="1300" b="1" i="0">
+              <a:rPr sz="1900" b="1" i="0">
                 <a:solidFill>
                   <a:srgbClr val="333333"/>
                 </a:solidFill>
@@ -12982,7 +12982,7 @@
               <a:t>si</a:t>
             </a:r>
             <a:r>
-              <a:rPr sz="1300" b="0" i="0">
+              <a:rPr sz="1900" b="0" i="0">
                 <a:solidFill>
                   <a:srgbClr val="333333"/>
                 </a:solidFill>
@@ -12998,7 +12998,7 @@
               </a:spcAft>
             </a:pPr>
             <a:r>
-              <a:rPr sz="1300" b="0" i="0">
+              <a:rPr sz="1900" b="0" i="0">
                 <a:solidFill>
                   <a:srgbClr val="333333"/>
                 </a:solidFill>
@@ -13007,7 +13007,7 @@
               <a:t>–   </a:t>
             </a:r>
             <a:r>
-              <a:rPr sz="1300" b="1" i="0">
+              <a:rPr sz="1900" b="1" i="0">
                 <a:solidFill>
                   <a:srgbClr val="333333"/>
                 </a:solidFill>
@@ -13016,7 +13016,7 @@
               <a:t>Se prueba en una sola consulta.</a:t>
             </a:r>
             <a:r>
-              <a:rPr sz="1300" b="0" i="0">
+              <a:rPr sz="1900" b="0" i="0">
                 <a:solidFill>
                   <a:srgbClr val="333333"/>
                 </a:solidFill>
@@ -13025,7 +13025,7 @@
               <a:t> «SELECT fn_descontar_stock(5,3) AS caso_ok, fn_descontar_stock(2,10) AS caso_sin_stock, fn_descontar_stock(2,3) AS caso_limite;» -&gt; </a:t>
             </a:r>
             <a:r>
-              <a:rPr sz="1300" b="1" i="0">
+              <a:rPr sz="1900" b="1" i="0">
                 <a:solidFill>
                   <a:srgbClr val="333333"/>
                 </a:solidFill>
@@ -13034,7 +13034,7 @@
               <a:t>«true», «false», «true»</a:t>
             </a:r>
             <a:r>
-              <a:rPr sz="1300" b="0" i="0">
+              <a:rPr sz="1900" b="0" i="0">
                 <a:solidFill>
                   <a:srgbClr val="333333"/>
                 </a:solidFill>
@@ -13043,7 +13043,7 @@
               <a:t>. El tercer caso es el interesante: pide </a:t>
             </a:r>
             <a:r>
-              <a:rPr sz="1300" b="1" i="0">
+              <a:rPr sz="1900" b="1" i="0">
                 <a:solidFill>
                   <a:srgbClr val="333333"/>
                 </a:solidFill>
@@ -13052,7 +13052,7 @@
               <a:t>exactamente</a:t>
             </a:r>
             <a:r>
-              <a:rPr sz="1300" b="0" i="0">
+              <a:rPr sz="1900" b="0" i="0">
                 <a:solidFill>
                   <a:srgbClr val="333333"/>
                 </a:solidFill>
@@ -13068,7 +13068,7 @@
               </a:spcAft>
             </a:pPr>
             <a:r>
-              <a:rPr sz="1300" b="0" i="0">
+              <a:rPr sz="1900" b="0" i="0">
                 <a:solidFill>
                   <a:srgbClr val="333333"/>
                 </a:solidFill>
@@ -13077,7 +13077,7 @@
               <a:t>–   </a:t>
             </a:r>
             <a:r>
-              <a:rPr sz="1300" b="1" i="0">
+              <a:rPr sz="1900" b="1" i="0">
                 <a:solidFill>
                   <a:srgbClr val="333333"/>
                 </a:solidFill>
@@ -13086,7 +13086,7 @@
               <a:t>Por que no leer primero.</a:t>
             </a:r>
             <a:r>
-              <a:rPr sz="1300" b="0" i="0">
+              <a:rPr sz="1900" b="0" i="0">
                 <a:solidFill>
                   <a:srgbClr val="333333"/>
                 </a:solidFill>
@@ -13095,7 +13095,7 @@
               <a:t> «SELECT stock ...; IF stock &gt;= cantidad THEN UPDATE ...» deja una </a:t>
             </a:r>
             <a:r>
-              <a:rPr sz="1300" b="1" i="0">
+              <a:rPr sz="1900" b="1" i="0">
                 <a:solidFill>
                   <a:srgbClr val="333333"/>
                 </a:solidFill>
@@ -13104,7 +13104,7 @@
               <a:t>ventana</a:t>
             </a:r>
             <a:r>
-              <a:rPr sz="1300" b="0" i="0">
+              <a:rPr sz="1900" b="0" i="0">
                 <a:solidFill>
                   <a:srgbClr val="333333"/>
                 </a:solidFill>
@@ -13113,7 +13113,7 @@
               <a:t> entre la lectura y la escritura, y con dos recepcionistas facturando el mismo insumo las dos leen 3, las dos deciden que alcanza y el stock termina en </a:t>
             </a:r>
             <a:r>
-              <a:rPr sz="1300" b="1" i="0">
+              <a:rPr sz="1900" b="1" i="0">
                 <a:solidFill>
                   <a:srgbClr val="333333"/>
                 </a:solidFill>
@@ -13122,7 +13122,7 @@
               <a:t>-2</a:t>
             </a:r>
             <a:r>
-              <a:rPr sz="1300" b="0" i="0">
+              <a:rPr sz="1900" b="0" i="0">
                 <a:solidFill>
                   <a:srgbClr val="333333"/>
                 </a:solidFill>
@@ -13131,7 +13131,7 @@
               <a:t>. El «UPDATE» con la condicion en el «WHERE» no tiene ventana. Aqui no se puede demostrar —PGlite corre </a:t>
             </a:r>
             <a:r>
-              <a:rPr sz="1300" b="1" i="0">
+              <a:rPr sz="1900" b="1" i="0">
                 <a:solidFill>
                   <a:srgbClr val="333333"/>
                 </a:solidFill>
@@ -13140,7 +13140,7 @@
               <a:t>una sola sesion</a:t>
             </a:r>
             <a:r>
-              <a:rPr sz="1300" b="0" i="0">
+              <a:rPr sz="1900" b="0" i="0">
                 <a:solidFill>
                   <a:srgbClr val="333333"/>
                 </a:solidFill>
@@ -13360,7 +13360,7 @@
               </a:spcAft>
             </a:pPr>
             <a:r>
-              <a:rPr sz="1600" b="0" i="0">
+              <a:rPr sz="2000" b="0" i="0">
                 <a:solidFill>
                   <a:srgbClr val="333333"/>
                 </a:solidFill>
@@ -13369,7 +13369,7 @@
               <a:t>–   </a:t>
             </a:r>
             <a:r>
-              <a:rPr sz="1600" b="1" i="0">
+              <a:rPr sz="2000" b="1" i="0">
                 <a:solidFill>
                   <a:srgbClr val="333333"/>
                 </a:solidFill>
@@ -13378,7 +13378,7 @@
               <a:t>Herramienta:</a:t>
             </a:r>
             <a:r>
-              <a:rPr sz="1600" b="0" i="0">
+              <a:rPr sz="2000" b="0" i="0">
                 <a:solidFill>
                   <a:srgbClr val="333333"/>
                 </a:solidFill>
@@ -13394,7 +13394,7 @@
               </a:spcAft>
             </a:pPr>
             <a:r>
-              <a:rPr sz="1600" b="0" i="0">
+              <a:rPr sz="2000" b="0" i="0">
                 <a:solidFill>
                   <a:srgbClr val="333333"/>
                 </a:solidFill>
@@ -13403,7 +13403,7 @@
               <a:t>–   </a:t>
             </a:r>
             <a:r>
-              <a:rPr sz="1600" b="1" i="0">
+              <a:rPr sz="2000" b="1" i="0">
                 <a:solidFill>
                   <a:srgbClr val="333333"/>
                 </a:solidFill>
@@ -13412,7 +13412,7 @@
               <a:t>Demo:</a:t>
             </a:r>
             <a:r>
-              <a:rPr sz="1600" b="0" i="0">
+              <a:rPr sz="2000" b="0" i="0">
                 <a:solidFill>
                   <a:srgbClr val="333333"/>
                 </a:solidFill>
@@ -13428,7 +13428,7 @@
               </a:spcAft>
             </a:pPr>
             <a:r>
-              <a:rPr sz="1600" b="0" i="0">
+              <a:rPr sz="2000" b="0" i="0">
                 <a:solidFill>
                   <a:srgbClr val="333333"/>
                 </a:solidFill>
@@ -13444,7 +13444,7 @@
               </a:spcAft>
             </a:pPr>
             <a:r>
-              <a:rPr sz="1600" b="0" i="0">
+              <a:rPr sz="2000" b="0" i="0">
                 <a:solidFill>
                   <a:srgbClr val="333333"/>
                 </a:solidFill>

--- a/Bases de Datos II/Clases/Clase 8 - Tuning y transacciones/Presentacion.pptx
+++ b/Bases de Datos II/Clases/Clase 8 - Tuning y transacciones/Presentacion.pptx
@@ -3845,7 +3845,7 @@
                 </a:solidFill>
                 <a:latin typeface="Calibri"/>
               </a:rPr>
-              <a:t>ExamLab</a:t>
+              <a:t>la plataforma del curso</a:t>
             </a:r>
           </a:p>
           <a:p>
@@ -5197,7 +5197,7 @@
                 </a:solidFill>
                 <a:latin typeface="Calibri"/>
               </a:rPr>
-              <a:t> Entrega domingo 23:59.</a:t>
+              <a:t> Entrega en la fecha que indique el docente.</a:t>
             </a:r>
           </a:p>
         </p:txBody>
@@ -5643,7 +5643,7 @@
                 </a:solidFill>
                 <a:latin typeface="Calibri"/>
               </a:rPr>
-              <a:t> PostgreSQL dentro de ExamLab, en el navegador. PL/pgSQL, «CALL», «GET DIAGNOSTICS» y los bloques «DO $$ … EXCEPTION» corren de verdad. Corre con </a:t>
+              <a:t> PostgreSQL dentro de la plataforma del curso, en el navegador. PL/pgSQL, «CALL», «GET DIAGNOSTICS» y los bloques «DO $$ … EXCEPTION» corren de verdad. Corre con </a:t>
             </a:r>
             <a:r>
               <a:rPr sz="2000" b="1" i="0">
@@ -8516,7 +8516,7 @@
                 </a:solidFill>
                 <a:latin typeface="Calibri"/>
               </a:rPr>
-              <a:t>–   Evidencia: el SQL y su salida quedan guardados en cada pregunta de ExamLab.</a:t>
+              <a:t>–   Evidencia: el SQL y su salida quedan guardados en cada pregunta de la plataforma del curso.</a:t>
             </a:r>
           </a:p>
           <a:p>
@@ -8573,7 +8573,7 @@
                 </a:solidFill>
                 <a:latin typeface="Calibri"/>
               </a:rPr>
-              <a:t>Entrega en ExamLab</a:t>
+              <a:t>Entrega en la plataforma del curso</a:t>
             </a:r>
             <a:r>
               <a:rPr sz="2000" b="0" i="0">
@@ -8582,7 +8582,7 @@
                 </a:solidFill>
                 <a:latin typeface="Calibri"/>
               </a:rPr>
-              <a:t> (https://uniaj.examlab.workers.dev/) — domingo 23:59 cuando aplique taller.</a:t>
+              <a:t> — en la fecha que indique el docente.</a:t>
             </a:r>
           </a:p>
         </p:txBody>
@@ -9177,7 +9177,7 @@
                 </a:solidFill>
                 <a:latin typeface="Calibri"/>
               </a:rPr>
-              <a:t>Taller de la semana en ExamLab (https://uniaj.examlab.workers.dev/): domingo 23:59 (regla del Acuerdo) cuando aplique.</a:t>
+              <a:t>Si el docente asigna taller esta semana, él indica el canal y la fecha.</a:t>
             </a:r>
           </a:p>
         </p:txBody>
@@ -9672,7 +9672,7 @@
                 </a:solidFill>
                 <a:latin typeface="Calibri"/>
               </a:rPr>
-              <a:t>ExamLab (PostgreSQL/PGlite)</a:t>
+              <a:t>PostgreSQL en el navegador</a:t>
             </a:r>
             <a:r>
               <a:rPr sz="2000" b="0" i="0">
@@ -13384,7 +13384,7 @@
                 </a:solidFill>
                 <a:latin typeface="Calibri"/>
               </a:rPr>
-              <a:t> ExamLab (PostgreSQL/PGlite)</a:t>
+              <a:t> PostgreSQL en el navegador</a:t>
             </a:r>
           </a:p>
           <a:p>
